--- a/Instruksi_Display_Blind_Box_Thermal.pptx
+++ b/Instruksi_Display_Blind_Box_Thermal.pptx
@@ -12,9 +12,10 @@
     <p:sldId id="260" r:id="rId6"/>
     <p:sldId id="261" r:id="rId7"/>
     <p:sldId id="262" r:id="rId8"/>
+    <p:sldId id="263" r:id="rId9"/>
   </p:sldIdLst>
   <p:notesMasterIdLst>
-    <p:notesMasterId r:id="rId9"/>
+    <p:notesMasterId r:id="rId10"/>
   </p:notesMasterIdLst>
   <p:sldSz cx="12192000" cy="6858000"/>
   <p:notesSz cx="6858000" cy="12192000"/>
@@ -1060,6 +1061,94 @@
             <a:fld id="{F7021451-1387-4CA6-816F-3879F97B5CBC}" type="slidenum">
               <a:rPr lang="en-US"/>
               <a:t>7</a:t>
+            </a:fld>
+            <a:endParaRPr lang="en-US"/>
+          </a:p>
+        </p:txBody>
+      </p:sp>
+    </p:spTree>
+    <p:extLst>
+      <p:ext uri="{BB962C8B-B14F-4D97-AF65-F5344CB8AC3E}">
+        <p14:creationId xmlns:p14="http://schemas.microsoft.com/office/powerpoint/2010/main" val="1024086991"/>
+      </p:ext>
+    </p:extLst>
+  </p:cSld>
+  <p:clrMapOvr>
+    <a:masterClrMapping/>
+  </p:clrMapOvr>
+</p:notes>
+</file>
+
+<file path=ppt/notesSlides/notesSlide8.xml><?xml version="1.0" encoding="utf-8"?>
+<p:notes xmlns:a="http://schemas.openxmlformats.org/drawingml/2006/main" xmlns:r="http://schemas.openxmlformats.org/officeDocument/2006/relationships" xmlns:p="http://schemas.openxmlformats.org/presentationml/2006/main">
+  <p:cSld>
+    <p:spTree>
+      <p:nvGrpSpPr>
+        <p:cNvPr id="1" name=""/>
+        <p:cNvGrpSpPr/>
+        <p:nvPr/>
+      </p:nvGrpSpPr>
+      <p:grpSpPr>
+        <a:xfrm>
+          <a:off x="0" y="0"/>
+          <a:ext cx="0" cy="0"/>
+          <a:chOff x="0" y="0"/>
+          <a:chExt cx="0" cy="0"/>
+        </a:xfrm>
+      </p:grpSpPr>
+      <p:sp>
+        <p:nvSpPr>
+          <p:cNvPr id="2" name="Slide Image Placeholder 1"/>
+          <p:cNvSpPr>
+            <a:spLocks noGrp="1" noRot="1" noChangeAspect="1"/>
+          </p:cNvSpPr>
+          <p:nvPr>
+            <p:ph type="sldImg"/>
+          </p:nvPr>
+        </p:nvSpPr>
+        <p:spPr/>
+      </p:sp>
+      <p:sp>
+        <p:nvSpPr>
+          <p:cNvPr id="3" name="Notes Placeholder 2"/>
+          <p:cNvSpPr>
+            <a:spLocks noGrp="1"/>
+          </p:cNvSpPr>
+          <p:nvPr>
+            <p:ph type="body" idx="1"/>
+          </p:nvPr>
+        </p:nvSpPr>
+        <p:spPr/>
+        <p:txBody>
+          <a:bodyPr/>
+          <a:lstStyle/>
+          <a:p>
+            <a:r>
+              <a:rPr lang="en-US" dirty="0"/>
+              <a:t/>
+            </a:r>
+            <a:endParaRPr lang="en-US" dirty="0"/>
+          </a:p>
+        </p:txBody>
+      </p:sp>
+      <p:sp>
+        <p:nvSpPr>
+          <p:cNvPr id="4" name="Slide Number Placeholder 3"/>
+          <p:cNvSpPr>
+            <a:spLocks noGrp="1"/>
+          </p:cNvSpPr>
+          <p:nvPr>
+            <p:ph type="sldNum" sz="quarter" idx="10"/>
+          </p:nvPr>
+        </p:nvSpPr>
+        <p:spPr/>
+        <p:txBody>
+          <a:bodyPr/>
+          <a:lstStyle/>
+          <a:p>
+            <a:fld id="{F7021451-1387-4CA6-816F-3879F97B5CBC}" type="slidenum">
+              <a:rPr lang="en-US"/>
+              <a:t>8</a:t>
             </a:fld>
             <a:endParaRPr lang="en-US"/>
           </a:p>
@@ -8747,6 +8836,598 @@
     <p:bg>
       <p:bgPr>
         <a:solidFill>
+          <a:srgbClr val="FFFFFF"/>
+        </a:solidFill>
+      </p:bgPr>
+    </p:bg>
+    <p:spTree>
+      <p:nvGrpSpPr>
+        <p:cNvPr id="1" name=""/>
+        <p:cNvGrpSpPr/>
+        <p:nvPr/>
+      </p:nvGrpSpPr>
+      <p:grpSpPr>
+        <a:xfrm>
+          <a:off x="0" y="0"/>
+          <a:ext cx="0" cy="0"/>
+          <a:chOff x="0" y="0"/>
+          <a:chExt cx="0" cy="0"/>
+        </a:xfrm>
+      </p:grpSpPr>
+      <p:sp>
+        <p:nvSpPr>
+          <p:cNvPr id="2" name="Text 0"/>
+          <p:cNvSpPr txBox="1"/>
+          <p:nvPr/>
+        </p:nvSpPr>
+        <p:spPr>
+          <a:xfrm>
+            <a:off x="548640" y="365760"/>
+            <a:ext cx="11064240" cy="731520"/>
+          </a:xfrm>
+          <a:prstGeom prst="rect">
+            <a:avLst/>
+          </a:prstGeom>
+          <a:noFill/>
+          <a:ln/>
+        </p:spPr>
+        <p:txBody>
+          <a:bodyPr wrap="square" lIns="0" tIns="0" rIns="0" bIns="0" rtlCol="0" anchor="ctr"/>
+          <a:lstStyle/>
+          <a:p>
+            <a:pPr indent="0" marL="0">
+              <a:buNone/>
+            </a:pPr>
+            <a:r>
+              <a:rPr lang="en-US" sz="3600" b="1" dirty="0">
+                <a:solidFill>
+                  <a:srgbClr val="3B2A5C"/>
+                </a:solidFill>
+                <a:latin typeface="Cambria" pitchFamily="34" charset="0"/>
+                <a:ea typeface="Cambria" pitchFamily="34" charset="-122"/>
+                <a:cs typeface="Cambria" pitchFamily="34" charset="-120"/>
+              </a:rPr>
+              <a:t>Do dan Don'ts display dan penjualan</a:t>
+            </a:r>
+            <a:endParaRPr lang="en-US" sz="3600" dirty="0"/>
+          </a:p>
+        </p:txBody>
+      </p:sp>
+      <p:sp>
+        <p:nvSpPr>
+          <p:cNvPr id="3" name="Text 1"/>
+          <p:cNvSpPr txBox="1"/>
+          <p:nvPr/>
+        </p:nvSpPr>
+        <p:spPr>
+          <a:xfrm>
+            <a:off x="548640" y="1051560"/>
+            <a:ext cx="11064240" cy="365760"/>
+          </a:xfrm>
+          <a:prstGeom prst="rect">
+            <a:avLst/>
+          </a:prstGeom>
+          <a:noFill/>
+          <a:ln/>
+        </p:spPr>
+        <p:txBody>
+          <a:bodyPr wrap="square" lIns="0" tIns="0" rIns="0" bIns="0" rtlCol="0" anchor="ctr"/>
+          <a:lstStyle/>
+          <a:p>
+            <a:pPr indent="0" marL="0">
+              <a:buNone/>
+            </a:pPr>
+            <a:r>
+              <a:rPr lang="en-US" sz="1600" dirty="0">
+                <a:solidFill>
+                  <a:srgbClr val="6B6580"/>
+                </a:solidFill>
+                <a:latin typeface="Calibri" pitchFamily="34" charset="0"/>
+                <a:ea typeface="Calibri" pitchFamily="34" charset="-122"/>
+                <a:cs typeface="Calibri" pitchFamily="34" charset="-120"/>
+              </a:rPr>
+              <a:t>Rekomendasi untuk tim store</a:t>
+            </a:r>
+            <a:endParaRPr lang="en-US" sz="1600" dirty="0"/>
+          </a:p>
+        </p:txBody>
+      </p:sp>
+      <p:sp>
+        <p:nvSpPr>
+          <p:cNvPr id="4" name="Shape 2"/>
+          <p:cNvSpPr/>
+          <p:nvPr/>
+        </p:nvSpPr>
+        <p:spPr>
+          <a:xfrm>
+            <a:off x="548640" y="1645920"/>
+            <a:ext cx="5349240" cy="4754880"/>
+          </a:xfrm>
+          <a:prstGeom prst="roundRect">
+            <a:avLst>
+              <a:gd name="adj" fmla="val 2885"/>
+            </a:avLst>
+          </a:prstGeom>
+          <a:solidFill>
+            <a:srgbClr val="E3F6FB"/>
+          </a:solidFill>
+          <a:ln w="12700">
+            <a:solidFill>
+              <a:srgbClr val="E3F6FB"/>
+            </a:solidFill>
+            <a:prstDash val="solid"/>
+          </a:ln>
+        </p:spPr>
+      </p:sp>
+      <p:sp>
+        <p:nvSpPr>
+          <p:cNvPr id="5" name="Shape 3"/>
+          <p:cNvSpPr/>
+          <p:nvPr/>
+        </p:nvSpPr>
+        <p:spPr>
+          <a:xfrm>
+            <a:off x="822960" y="1828800"/>
+            <a:ext cx="1371600" cy="457200"/>
+          </a:xfrm>
+          <a:prstGeom prst="roundRect">
+            <a:avLst>
+              <a:gd name="adj" fmla="val 50000"/>
+            </a:avLst>
+          </a:prstGeom>
+          <a:solidFill>
+            <a:srgbClr val="4DC3E0"/>
+          </a:solidFill>
+          <a:ln w="12700">
+            <a:solidFill>
+              <a:srgbClr val="4DC3E0"/>
+            </a:solidFill>
+            <a:prstDash val="solid"/>
+          </a:ln>
+        </p:spPr>
+      </p:sp>
+      <p:sp>
+        <p:nvSpPr>
+          <p:cNvPr id="6" name="Text 4"/>
+          <p:cNvSpPr txBox="1"/>
+          <p:nvPr/>
+        </p:nvSpPr>
+        <p:spPr>
+          <a:xfrm>
+            <a:off x="822960" y="1828800"/>
+            <a:ext cx="1371600" cy="457200"/>
+          </a:xfrm>
+          <a:prstGeom prst="rect">
+            <a:avLst/>
+          </a:prstGeom>
+          <a:noFill/>
+          <a:ln/>
+        </p:spPr>
+        <p:txBody>
+          <a:bodyPr wrap="square" lIns="0" tIns="0" rIns="0" bIns="0" rtlCol="0" anchor="ctr"/>
+          <a:lstStyle/>
+          <a:p>
+            <a:pPr algn="ctr" indent="0" marL="0">
+              <a:buNone/>
+            </a:pPr>
+            <a:r>
+              <a:rPr lang="en-US" sz="1800" b="1" dirty="0">
+                <a:solidFill>
+                  <a:srgbClr val="FFFFFF"/>
+                </a:solidFill>
+                <a:latin typeface="Calibri" pitchFamily="34" charset="0"/>
+                <a:ea typeface="Calibri" pitchFamily="34" charset="-122"/>
+                <a:cs typeface="Calibri" pitchFamily="34" charset="-120"/>
+              </a:rPr>
+              <a:t>DO</a:t>
+            </a:r>
+            <a:endParaRPr lang="en-US" sz="1800" dirty="0"/>
+          </a:p>
+        </p:txBody>
+      </p:sp>
+      <p:sp>
+        <p:nvSpPr>
+          <p:cNvPr id="7" name="Text 5"/>
+          <p:cNvSpPr txBox="1"/>
+          <p:nvPr/>
+        </p:nvSpPr>
+        <p:spPr>
+          <a:xfrm>
+            <a:off x="822960" y="2514600"/>
+            <a:ext cx="4800600" cy="3749040"/>
+          </a:xfrm>
+          <a:prstGeom prst="rect">
+            <a:avLst/>
+          </a:prstGeom>
+          <a:noFill/>
+          <a:ln/>
+        </p:spPr>
+        <p:txBody>
+          <a:bodyPr wrap="square" lIns="0" tIns="0" rIns="0" bIns="0" rtlCol="0" anchor="t"/>
+          <a:lstStyle/>
+          <a:p>
+            <a:pPr marL="342900" indent="-342900">
+              <a:spcAft>
+                <a:spcPts val="1200"/>
+              </a:spcAft>
+              <a:buSzPct val="100000"/>
+              <a:buChar char="•"/>
+            </a:pPr>
+            <a:r>
+              <a:rPr lang="en-US" sz="1800" dirty="0">
+                <a:solidFill>
+                  <a:srgbClr val="3B2A5C"/>
+                </a:solidFill>
+                <a:latin typeface="Calibri" pitchFamily="34" charset="0"/>
+                <a:ea typeface="Calibri" pitchFamily="34" charset="-122"/>
+                <a:cs typeface="Calibri" pitchFamily="34" charset="-120"/>
+              </a:rPr>
+              <a:t>Pasang di Endcap Area Thermal, full terisi sesuai planogram dan mock</a:t>
+            </a:r>
+            <a:endParaRPr lang="en-US" sz="1800" dirty="0"/>
+          </a:p>
+          <a:p>
+            <a:pPr marL="342900" indent="-342900">
+              <a:spcAft>
+                <a:spcPts val="1200"/>
+              </a:spcAft>
+              <a:buSzPct val="100000"/>
+              <a:buChar char="•"/>
+            </a:pPr>
+            <a:r>
+              <a:rPr lang="en-US" sz="1800" dirty="0">
+                <a:solidFill>
+                  <a:srgbClr val="3B2A5C"/>
+                </a:solidFill>
+                <a:latin typeface="Calibri" pitchFamily="34" charset="0"/>
+                <a:ea typeface="Calibri" pitchFamily="34" charset="-122"/>
+                <a:cs typeface="Calibri" pitchFamily="34" charset="-120"/>
+              </a:rPr>
+              <a:t>Buka hanya 6 warna sebagai sampel, sisanya tetap tersegel</a:t>
+            </a:r>
+            <a:endParaRPr lang="en-US" sz="1800" dirty="0"/>
+          </a:p>
+          <a:p>
+            <a:pPr marL="342900" indent="-342900">
+              <a:spcAft>
+                <a:spcPts val="1200"/>
+              </a:spcAft>
+              <a:buSzPct val="100000"/>
+              <a:buChar char="•"/>
+            </a:pPr>
+            <a:r>
+              <a:rPr lang="en-US" sz="1800" dirty="0">
+                <a:solidFill>
+                  <a:srgbClr val="3B2A5C"/>
+                </a:solidFill>
+                <a:latin typeface="Calibri" pitchFamily="34" charset="0"/>
+                <a:ea typeface="Calibri" pitchFamily="34" charset="-122"/>
+                <a:cs typeface="Calibri" pitchFamily="34" charset="-120"/>
+              </a:rPr>
+              <a:t>Jaga box Secret tetap tersegel</a:t>
+            </a:r>
+            <a:endParaRPr lang="en-US" sz="1800" dirty="0"/>
+          </a:p>
+          <a:p>
+            <a:pPr marL="342900" indent="-342900">
+              <a:spcAft>
+                <a:spcPts val="1200"/>
+              </a:spcAft>
+              <a:buSzPct val="100000"/>
+              <a:buChar char="•"/>
+            </a:pPr>
+            <a:r>
+              <a:rPr lang="en-US" sz="1800" dirty="0">
+                <a:solidFill>
+                  <a:srgbClr val="3B2A5C"/>
+                </a:solidFill>
+                <a:latin typeface="Calibri" pitchFamily="34" charset="0"/>
+                <a:ea typeface="Calibri" pitchFamily="34" charset="-122"/>
+                <a:cs typeface="Calibri" pitchFamily="34" charset="-120"/>
+              </a:rPr>
+              <a:t>Rapikan box, logo informa menghadap depan</a:t>
+            </a:r>
+            <a:endParaRPr lang="en-US" sz="1800" dirty="0"/>
+          </a:p>
+          <a:p>
+            <a:pPr marL="342900" indent="-342900">
+              <a:spcAft>
+                <a:spcPts val="1200"/>
+              </a:spcAft>
+              <a:buSzPct val="100000"/>
+              <a:buChar char="•"/>
+            </a:pPr>
+            <a:r>
+              <a:rPr lang="en-US" sz="1800" dirty="0">
+                <a:solidFill>
+                  <a:srgbClr val="3B2A5C"/>
+                </a:solidFill>
+                <a:latin typeface="Calibri" pitchFamily="34" charset="0"/>
+                <a:ea typeface="Calibri" pitchFamily="34" charset="-122"/>
+                <a:cs typeface="Calibri" pitchFamily="34" charset="-120"/>
+              </a:rPr>
+              <a:t>Isi ulang rak dari buffer stock sebelum kosong</a:t>
+            </a:r>
+            <a:endParaRPr lang="en-US" sz="1800" dirty="0"/>
+          </a:p>
+          <a:p>
+            <a:pPr marL="342900" indent="-342900">
+              <a:spcAft>
+                <a:spcPts val="1200"/>
+              </a:spcAft>
+              <a:buSzPct val="100000"/>
+              <a:buChar char="•"/>
+            </a:pPr>
+            <a:r>
+              <a:rPr lang="en-US" sz="1800" dirty="0">
+                <a:solidFill>
+                  <a:srgbClr val="3B2A5C"/>
+                </a:solidFill>
+                <a:latin typeface="Calibri" pitchFamily="34" charset="0"/>
+                <a:ea typeface="Calibri" pitchFamily="34" charset="-122"/>
+                <a:cs typeface="Calibri" pitchFamily="34" charset="-120"/>
+              </a:rPr>
+              <a:t>Jelaskan ke pelanggan: pilih warna favorit, Secret adalah kejutan</a:t>
+            </a:r>
+            <a:endParaRPr lang="en-US" sz="1800" dirty="0"/>
+          </a:p>
+        </p:txBody>
+      </p:sp>
+      <p:sp>
+        <p:nvSpPr>
+          <p:cNvPr id="8" name="Shape 6"/>
+          <p:cNvSpPr/>
+          <p:nvPr/>
+        </p:nvSpPr>
+        <p:spPr>
+          <a:xfrm>
+            <a:off x="6263640" y="1645920"/>
+            <a:ext cx="5349240" cy="4754880"/>
+          </a:xfrm>
+          <a:prstGeom prst="roundRect">
+            <a:avLst>
+              <a:gd name="adj" fmla="val 2885"/>
+            </a:avLst>
+          </a:prstGeom>
+          <a:solidFill>
+            <a:srgbClr val="FDEAF3"/>
+          </a:solidFill>
+          <a:ln w="12700">
+            <a:solidFill>
+              <a:srgbClr val="FDEAF3"/>
+            </a:solidFill>
+            <a:prstDash val="solid"/>
+          </a:ln>
+        </p:spPr>
+      </p:sp>
+      <p:sp>
+        <p:nvSpPr>
+          <p:cNvPr id="9" name="Shape 7"/>
+          <p:cNvSpPr/>
+          <p:nvPr/>
+        </p:nvSpPr>
+        <p:spPr>
+          <a:xfrm>
+            <a:off x="6537960" y="1828800"/>
+            <a:ext cx="1371600" cy="457200"/>
+          </a:xfrm>
+          <a:prstGeom prst="roundRect">
+            <a:avLst>
+              <a:gd name="adj" fmla="val 50000"/>
+            </a:avLst>
+          </a:prstGeom>
+          <a:solidFill>
+            <a:srgbClr val="F27BB0"/>
+          </a:solidFill>
+          <a:ln w="12700">
+            <a:solidFill>
+              <a:srgbClr val="F27BB0"/>
+            </a:solidFill>
+            <a:prstDash val="solid"/>
+          </a:ln>
+        </p:spPr>
+      </p:sp>
+      <p:sp>
+        <p:nvSpPr>
+          <p:cNvPr id="10" name="Text 8"/>
+          <p:cNvSpPr txBox="1"/>
+          <p:nvPr/>
+        </p:nvSpPr>
+        <p:spPr>
+          <a:xfrm>
+            <a:off x="6537960" y="1828800"/>
+            <a:ext cx="1371600" cy="457200"/>
+          </a:xfrm>
+          <a:prstGeom prst="rect">
+            <a:avLst/>
+          </a:prstGeom>
+          <a:noFill/>
+          <a:ln/>
+        </p:spPr>
+        <p:txBody>
+          <a:bodyPr wrap="square" lIns="0" tIns="0" rIns="0" bIns="0" rtlCol="0" anchor="ctr"/>
+          <a:lstStyle/>
+          <a:p>
+            <a:pPr algn="ctr" indent="0" marL="0">
+              <a:buNone/>
+            </a:pPr>
+            <a:r>
+              <a:rPr lang="en-US" sz="1800" b="1" dirty="0">
+                <a:solidFill>
+                  <a:srgbClr val="FFFFFF"/>
+                </a:solidFill>
+                <a:latin typeface="Calibri" pitchFamily="34" charset="0"/>
+                <a:ea typeface="Calibri" pitchFamily="34" charset="-122"/>
+                <a:cs typeface="Calibri" pitchFamily="34" charset="-120"/>
+              </a:rPr>
+              <a:t>DON'T</a:t>
+            </a:r>
+            <a:endParaRPr lang="en-US" sz="1800" dirty="0"/>
+          </a:p>
+        </p:txBody>
+      </p:sp>
+      <p:sp>
+        <p:nvSpPr>
+          <p:cNvPr id="11" name="Text 9"/>
+          <p:cNvSpPr txBox="1"/>
+          <p:nvPr/>
+        </p:nvSpPr>
+        <p:spPr>
+          <a:xfrm>
+            <a:off x="6537960" y="2514600"/>
+            <a:ext cx="4800600" cy="3749040"/>
+          </a:xfrm>
+          <a:prstGeom prst="rect">
+            <a:avLst/>
+          </a:prstGeom>
+          <a:noFill/>
+          <a:ln/>
+        </p:spPr>
+        <p:txBody>
+          <a:bodyPr wrap="square" lIns="0" tIns="0" rIns="0" bIns="0" rtlCol="0" anchor="t"/>
+          <a:lstStyle/>
+          <a:p>
+            <a:pPr marL="342900" indent="-342900">
+              <a:spcAft>
+                <a:spcPts val="1200"/>
+              </a:spcAft>
+              <a:buSzPct val="100000"/>
+              <a:buChar char="•"/>
+            </a:pPr>
+            <a:r>
+              <a:rPr lang="en-US" sz="1800" dirty="0">
+                <a:solidFill>
+                  <a:srgbClr val="3B2A5C"/>
+                </a:solidFill>
+                <a:latin typeface="Calibri" pitchFamily="34" charset="0"/>
+                <a:ea typeface="Calibri" pitchFamily="34" charset="-122"/>
+                <a:cs typeface="Calibri" pitchFamily="34" charset="-120"/>
+              </a:rPr>
+              <a:t>Jangan taruh di luar endcap Thermal atau campur dengan produk lain</a:t>
+            </a:r>
+            <a:endParaRPr lang="en-US" sz="1800" dirty="0"/>
+          </a:p>
+          <a:p>
+            <a:pPr marL="342900" indent="-342900">
+              <a:spcAft>
+                <a:spcPts val="1200"/>
+              </a:spcAft>
+              <a:buSzPct val="100000"/>
+              <a:buChar char="•"/>
+            </a:pPr>
+            <a:r>
+              <a:rPr lang="en-US" sz="1800" dirty="0">
+                <a:solidFill>
+                  <a:srgbClr val="3B2A5C"/>
+                </a:solidFill>
+                <a:latin typeface="Calibri" pitchFamily="34" charset="0"/>
+                <a:ea typeface="Calibri" pitchFamily="34" charset="-122"/>
+                <a:cs typeface="Calibri" pitchFamily="34" charset="-120"/>
+              </a:rPr>
+              <a:t>Jangan biarkan rak kosong atau terisi sebagian</a:t>
+            </a:r>
+            <a:endParaRPr lang="en-US" sz="1800" dirty="0"/>
+          </a:p>
+          <a:p>
+            <a:pPr marL="342900" indent="-342900">
+              <a:spcAft>
+                <a:spcPts val="1200"/>
+              </a:spcAft>
+              <a:buSzPct val="100000"/>
+              <a:buChar char="•"/>
+            </a:pPr>
+            <a:r>
+              <a:rPr lang="en-US" sz="1800" dirty="0">
+                <a:solidFill>
+                  <a:srgbClr val="3B2A5C"/>
+                </a:solidFill>
+                <a:latin typeface="Calibri" pitchFamily="34" charset="0"/>
+                <a:ea typeface="Calibri" pitchFamily="34" charset="-122"/>
+                <a:cs typeface="Calibri" pitchFamily="34" charset="-120"/>
+              </a:rPr>
+              <a:t>Jangan buka atau sobek box selain sampel 6 warna</a:t>
+            </a:r>
+            <a:endParaRPr lang="en-US" sz="1800" dirty="0"/>
+          </a:p>
+          <a:p>
+            <a:pPr marL="342900" indent="-342900">
+              <a:spcAft>
+                <a:spcPts val="1200"/>
+              </a:spcAft>
+              <a:buSzPct val="100000"/>
+              <a:buChar char="•"/>
+            </a:pPr>
+            <a:r>
+              <a:rPr lang="en-US" sz="1800" dirty="0">
+                <a:solidFill>
+                  <a:srgbClr val="3B2A5C"/>
+                </a:solidFill>
+                <a:latin typeface="Calibri" pitchFamily="34" charset="0"/>
+                <a:ea typeface="Calibri" pitchFamily="34" charset="-122"/>
+                <a:cs typeface="Calibri" pitchFamily="34" charset="-120"/>
+              </a:rPr>
+              <a:t>Jangan bocorkan isi box tersegel (ditimbang, diguncang, atau diberi petunjuk)</a:t>
+            </a:r>
+            <a:endParaRPr lang="en-US" sz="1800" dirty="0"/>
+          </a:p>
+          <a:p>
+            <a:pPr marL="342900" indent="-342900">
+              <a:spcAft>
+                <a:spcPts val="1200"/>
+              </a:spcAft>
+              <a:buSzPct val="100000"/>
+              <a:buChar char="•"/>
+            </a:pPr>
+            <a:r>
+              <a:rPr lang="en-US" sz="1800" dirty="0">
+                <a:solidFill>
+                  <a:srgbClr val="3B2A5C"/>
+                </a:solidFill>
+                <a:latin typeface="Calibri" pitchFamily="34" charset="0"/>
+                <a:ea typeface="Calibri" pitchFamily="34" charset="-122"/>
+                <a:cs typeface="Calibri" pitchFamily="34" charset="-120"/>
+              </a:rPr>
+              <a:t>Jangan ubah susunan, qty, atau tinggi rak</a:t>
+            </a:r>
+            <a:endParaRPr lang="en-US" sz="1800" dirty="0"/>
+          </a:p>
+          <a:p>
+            <a:pPr marL="342900" indent="-342900">
+              <a:spcAft>
+                <a:spcPts val="1200"/>
+              </a:spcAft>
+              <a:buSzPct val="100000"/>
+              <a:buChar char="•"/>
+            </a:pPr>
+            <a:r>
+              <a:rPr lang="en-US" sz="1800" dirty="0">
+                <a:solidFill>
+                  <a:srgbClr val="3B2A5C"/>
+                </a:solidFill>
+                <a:latin typeface="Calibri" pitchFamily="34" charset="0"/>
+                <a:ea typeface="Calibri" pitchFamily="34" charset="-122"/>
+                <a:cs typeface="Calibri" pitchFamily="34" charset="-120"/>
+              </a:rPr>
+              <a:t>Jangan jual unit sampel yang sudah dibuka sebagai produk baru</a:t>
+            </a:r>
+            <a:endParaRPr lang="en-US" sz="1800" dirty="0"/>
+          </a:p>
+        </p:txBody>
+      </p:sp>
+    </p:spTree>
+  </p:cSld>
+  <p:clrMapOvr>
+    <a:masterClrMapping/>
+  </p:clrMapOvr>
+</p:sld>
+</file>
+
+<file path=ppt/slides/slide8.xml><?xml version="1.0" encoding="utf-8"?>
+<p:sld xmlns:a="http://schemas.openxmlformats.org/drawingml/2006/main" xmlns:r="http://schemas.openxmlformats.org/officeDocument/2006/relationships" xmlns:p="http://schemas.openxmlformats.org/presentationml/2006/main">
+  <p:cSld name="Slide 8">
+    <p:bg>
+      <p:bgPr>
+        <a:solidFill>
           <a:srgbClr val="3B2A5C"/>
         </a:solidFill>
       </p:bgPr>

--- a/Instruksi_Display_Blind_Box_Thermal.pptx
+++ b/Instruksi_Display_Blind_Box_Thermal.pptx
@@ -1966,7 +1966,7 @@
         </p:nvSpPr>
         <p:spPr>
           <a:xfrm>
-            <a:off x="548640" y="457200"/>
+            <a:off x="548640" y="365760"/>
             <a:ext cx="10972800" cy="731520"/>
           </a:xfrm>
           <a:prstGeom prst="rect">
@@ -1991,7 +1991,7 @@
                 <a:ea typeface="Cambria" pitchFamily="34" charset="-122"/>
                 <a:cs typeface="Cambria" pitchFamily="34" charset="-120"/>
               </a:rPr>
-              <a:t>Checklist sebelum lapor selesai</a:t>
+              <a:t>Summary check list tim store</a:t>
             </a:r>
             <a:endParaRPr lang="en-US" sz="3600" dirty="0"/>
           </a:p>
@@ -2005,12 +2005,12 @@
         </p:nvSpPr>
         <p:spPr>
           <a:xfrm>
-            <a:off x="548640" y="1554480"/>
-            <a:ext cx="11064240" cy="621792"/>
+            <a:off x="548640" y="1325880"/>
+            <a:ext cx="11064240" cy="548640"/>
           </a:xfrm>
           <a:prstGeom prst="roundRect">
             <a:avLst>
-              <a:gd name="adj" fmla="val 17647"/>
+              <a:gd name="adj" fmla="val 20000"/>
             </a:avLst>
           </a:prstGeom>
           <a:solidFill>
@@ -2032,7 +2032,7 @@
         </p:nvSpPr>
         <p:spPr>
           <a:xfrm>
-            <a:off x="731520" y="1682496"/>
+            <a:off x="731520" y="1417320"/>
             <a:ext cx="365760" cy="365760"/>
           </a:xfrm>
           <a:prstGeom prst="ellipse">
@@ -2057,7 +2057,7 @@
         </p:nvSpPr>
         <p:spPr>
           <a:xfrm>
-            <a:off x="731520" y="1682496"/>
+            <a:off x="731520" y="1417320"/>
             <a:ext cx="365760" cy="365760"/>
           </a:xfrm>
           <a:prstGeom prst="rect">
@@ -2096,8 +2096,8 @@
         </p:nvSpPr>
         <p:spPr>
           <a:xfrm>
-            <a:off x="1325880" y="1554480"/>
-            <a:ext cx="10058400" cy="621792"/>
+            <a:off x="1325880" y="1325880"/>
+            <a:ext cx="10149840" cy="548640"/>
           </a:xfrm>
           <a:prstGeom prst="rect">
             <a:avLst/>
@@ -2113,7 +2113,7 @@
               <a:buNone/>
             </a:pPr>
             <a:r>
-              <a:rPr lang="en-US" sz="1800" dirty="0">
+              <a:rPr lang="en-US" sz="1600" dirty="0">
                 <a:solidFill>
                   <a:srgbClr val="FFFFFF"/>
                 </a:solidFill>
@@ -2121,9 +2121,9 @@
                 <a:ea typeface="Calibri" pitchFamily="34" charset="-122"/>
                 <a:cs typeface="Calibri" pitchFamily="34" charset="-120"/>
               </a:rPr>
-              <a:t>Display di Endcap Area Thermal</a:t>
+              <a:t>Display di Endcap Area Thermal, full terisi Blind Box</a:t>
             </a:r>
-            <a:endParaRPr lang="en-US" sz="1800" dirty="0"/>
+            <a:endParaRPr lang="en-US" sz="1600" dirty="0"/>
           </a:p>
         </p:txBody>
       </p:sp>
@@ -2135,12 +2135,12 @@
         </p:nvSpPr>
         <p:spPr>
           <a:xfrm>
-            <a:off x="548640" y="2304288"/>
-            <a:ext cx="11064240" cy="621792"/>
+            <a:off x="548640" y="1984248"/>
+            <a:ext cx="11064240" cy="548640"/>
           </a:xfrm>
           <a:prstGeom prst="roundRect">
             <a:avLst>
-              <a:gd name="adj" fmla="val 17647"/>
+              <a:gd name="adj" fmla="val 20000"/>
             </a:avLst>
           </a:prstGeom>
           <a:solidFill>
@@ -2162,7 +2162,7 @@
         </p:nvSpPr>
         <p:spPr>
           <a:xfrm>
-            <a:off x="731520" y="2432304"/>
+            <a:off x="731520" y="2075688"/>
             <a:ext cx="365760" cy="365760"/>
           </a:xfrm>
           <a:prstGeom prst="ellipse">
@@ -2187,7 +2187,7 @@
         </p:nvSpPr>
         <p:spPr>
           <a:xfrm>
-            <a:off x="731520" y="2432304"/>
+            <a:off x="731520" y="2075688"/>
             <a:ext cx="365760" cy="365760"/>
           </a:xfrm>
           <a:prstGeom prst="rect">
@@ -2226,8 +2226,8 @@
         </p:nvSpPr>
         <p:spPr>
           <a:xfrm>
-            <a:off x="1325880" y="2304288"/>
-            <a:ext cx="10058400" cy="621792"/>
+            <a:off x="1325880" y="1984248"/>
+            <a:ext cx="10149840" cy="548640"/>
           </a:xfrm>
           <a:prstGeom prst="rect">
             <a:avLst/>
@@ -2243,7 +2243,7 @@
               <a:buNone/>
             </a:pPr>
             <a:r>
-              <a:rPr lang="en-US" sz="1800" dirty="0">
+              <a:rPr lang="en-US" sz="1600" dirty="0">
                 <a:solidFill>
                   <a:srgbClr val="FFFFFF"/>
                 </a:solidFill>
@@ -2251,9 +2251,9 @@
                 <a:ea typeface="Calibri" pitchFamily="34" charset="-122"/>
                 <a:cs typeface="Calibri" pitchFamily="34" charset="-120"/>
               </a:rPr>
-              <a:t>Endcap full terisi Blind Box, tidak ada rak kosong</a:t>
+              <a:t>Qty sesuai alokasi: Dept + Kasir (120 SMALL, 96 LARGE), Dept only (96 SMALL, 72 LARGE)</a:t>
             </a:r>
-            <a:endParaRPr lang="en-US" sz="1800" dirty="0"/>
+            <a:endParaRPr lang="en-US" sz="1600" dirty="0"/>
           </a:p>
         </p:txBody>
       </p:sp>
@@ -2265,12 +2265,12 @@
         </p:nvSpPr>
         <p:spPr>
           <a:xfrm>
-            <a:off x="548640" y="3054096"/>
-            <a:ext cx="11064240" cy="621792"/>
+            <a:off x="548640" y="2642616"/>
+            <a:ext cx="11064240" cy="548640"/>
           </a:xfrm>
           <a:prstGeom prst="roundRect">
             <a:avLst>
-              <a:gd name="adj" fmla="val 17647"/>
+              <a:gd name="adj" fmla="val 20000"/>
             </a:avLst>
           </a:prstGeom>
           <a:solidFill>
@@ -2292,7 +2292,7 @@
         </p:nvSpPr>
         <p:spPr>
           <a:xfrm>
-            <a:off x="731520" y="3182112"/>
+            <a:off x="731520" y="2734056"/>
             <a:ext cx="365760" cy="365760"/>
           </a:xfrm>
           <a:prstGeom prst="ellipse">
@@ -2317,7 +2317,7 @@
         </p:nvSpPr>
         <p:spPr>
           <a:xfrm>
-            <a:off x="731520" y="3182112"/>
+            <a:off x="731520" y="2734056"/>
             <a:ext cx="365760" cy="365760"/>
           </a:xfrm>
           <a:prstGeom prst="rect">
@@ -2356,8 +2356,8 @@
         </p:nvSpPr>
         <p:spPr>
           <a:xfrm>
-            <a:off x="1325880" y="3054096"/>
-            <a:ext cx="10058400" cy="621792"/>
+            <a:off x="1325880" y="2642616"/>
+            <a:ext cx="10149840" cy="548640"/>
           </a:xfrm>
           <a:prstGeom prst="rect">
             <a:avLst/>
@@ -2373,7 +2373,7 @@
               <a:buNone/>
             </a:pPr>
             <a:r>
-              <a:rPr lang="en-US" sz="1800" dirty="0">
+              <a:rPr lang="en-US" sz="1600" dirty="0">
                 <a:solidFill>
                   <a:srgbClr val="FFFFFF"/>
                 </a:solidFill>
@@ -2381,9 +2381,9 @@
                 <a:ea typeface="Calibri" pitchFamily="34" charset="-122"/>
                 <a:cs typeface="Calibri" pitchFamily="34" charset="-120"/>
               </a:rPr>
-              <a:t>Qty tiap rak sesuai planogram (16 box SMALL, 12 box LARGE)</a:t>
+              <a:t>Susunan rak sesuai planogram dan mock (16 box SMALL, 12 box LARGE)</a:t>
             </a:r>
-            <a:endParaRPr lang="en-US" sz="1800" dirty="0"/>
+            <a:endParaRPr lang="en-US" sz="1600" dirty="0"/>
           </a:p>
         </p:txBody>
       </p:sp>
@@ -2395,12 +2395,12 @@
         </p:nvSpPr>
         <p:spPr>
           <a:xfrm>
-            <a:off x="548640" y="3803904"/>
-            <a:ext cx="11064240" cy="621792"/>
+            <a:off x="548640" y="3300984"/>
+            <a:ext cx="11064240" cy="548640"/>
           </a:xfrm>
           <a:prstGeom prst="roundRect">
             <a:avLst>
-              <a:gd name="adj" fmla="val 17647"/>
+              <a:gd name="adj" fmla="val 20000"/>
             </a:avLst>
           </a:prstGeom>
           <a:solidFill>
@@ -2422,7 +2422,7 @@
         </p:nvSpPr>
         <p:spPr>
           <a:xfrm>
-            <a:off x="731520" y="3931920"/>
+            <a:off x="731520" y="3392424"/>
             <a:ext cx="365760" cy="365760"/>
           </a:xfrm>
           <a:prstGeom prst="ellipse">
@@ -2447,7 +2447,7 @@
         </p:nvSpPr>
         <p:spPr>
           <a:xfrm>
-            <a:off x="731520" y="3931920"/>
+            <a:off x="731520" y="3392424"/>
             <a:ext cx="365760" cy="365760"/>
           </a:xfrm>
           <a:prstGeom prst="rect">
@@ -2486,8 +2486,8 @@
         </p:nvSpPr>
         <p:spPr>
           <a:xfrm>
-            <a:off x="1325880" y="3803904"/>
-            <a:ext cx="10058400" cy="621792"/>
+            <a:off x="1325880" y="3300984"/>
+            <a:ext cx="10149840" cy="548640"/>
           </a:xfrm>
           <a:prstGeom prst="rect">
             <a:avLst/>
@@ -2503,7 +2503,7 @@
               <a:buNone/>
             </a:pPr>
             <a:r>
-              <a:rPr lang="en-US" sz="1800" dirty="0">
+              <a:rPr lang="en-US" sz="1600" dirty="0">
                 <a:solidFill>
                   <a:srgbClr val="FFFFFF"/>
                 </a:solidFill>
@@ -2511,9 +2511,9 @@
                 <a:ea typeface="Calibri" pitchFamily="34" charset="-122"/>
                 <a:cs typeface="Calibri" pitchFamily="34" charset="-120"/>
               </a:rPr>
-              <a:t>Susunan sesuai mock display</a:t>
+              <a:t>6 warna dibuka sebagai sampel, Secret tetap tersegel</a:t>
             </a:r>
-            <a:endParaRPr lang="en-US" sz="1800" dirty="0"/>
+            <a:endParaRPr lang="en-US" sz="1600" dirty="0"/>
           </a:p>
         </p:txBody>
       </p:sp>
@@ -2525,12 +2525,12 @@
         </p:nvSpPr>
         <p:spPr>
           <a:xfrm>
-            <a:off x="548640" y="4553712"/>
-            <a:ext cx="11064240" cy="621792"/>
+            <a:off x="548640" y="3959352"/>
+            <a:ext cx="11064240" cy="548640"/>
           </a:xfrm>
           <a:prstGeom prst="roundRect">
             <a:avLst>
-              <a:gd name="adj" fmla="val 17647"/>
+              <a:gd name="adj" fmla="val 20000"/>
             </a:avLst>
           </a:prstGeom>
           <a:solidFill>
@@ -2552,7 +2552,7 @@
         </p:nvSpPr>
         <p:spPr>
           <a:xfrm>
-            <a:off x="731520" y="4681728"/>
+            <a:off x="731520" y="4050792"/>
             <a:ext cx="365760" cy="365760"/>
           </a:xfrm>
           <a:prstGeom prst="ellipse">
@@ -2577,7 +2577,7 @@
         </p:nvSpPr>
         <p:spPr>
           <a:xfrm>
-            <a:off x="731520" y="4681728"/>
+            <a:off x="731520" y="4050792"/>
             <a:ext cx="365760" cy="365760"/>
           </a:xfrm>
           <a:prstGeom prst="rect">
@@ -2616,8 +2616,8 @@
         </p:nvSpPr>
         <p:spPr>
           <a:xfrm>
-            <a:off x="1325880" y="4553712"/>
-            <a:ext cx="10058400" cy="621792"/>
+            <a:off x="1325880" y="3959352"/>
+            <a:ext cx="10149840" cy="548640"/>
           </a:xfrm>
           <a:prstGeom prst="rect">
             <a:avLst/>
@@ -2633,7 +2633,7 @@
               <a:buNone/>
             </a:pPr>
             <a:r>
-              <a:rPr lang="en-US" sz="1800" dirty="0">
+              <a:rPr lang="en-US" sz="1600" dirty="0">
                 <a:solidFill>
                   <a:srgbClr val="FFFFFF"/>
                 </a:solidFill>
@@ -2641,9 +2641,9 @@
                 <a:ea typeface="Calibri" pitchFamily="34" charset="-122"/>
                 <a:cs typeface="Calibri" pitchFamily="34" charset="-120"/>
               </a:rPr>
-              <a:t>6 warna terbuka di display, Secret tidak dibuka</a:t>
+              <a:t>Header dari tim VM Jakarta dipasang saat tiba</a:t>
             </a:r>
-            <a:endParaRPr lang="en-US" sz="1800" dirty="0"/>
+            <a:endParaRPr lang="en-US" sz="1600" dirty="0"/>
           </a:p>
         </p:txBody>
       </p:sp>
@@ -2655,12 +2655,12 @@
         </p:nvSpPr>
         <p:spPr>
           <a:xfrm>
-            <a:off x="548640" y="5303520"/>
-            <a:ext cx="11064240" cy="621792"/>
+            <a:off x="548640" y="4617720"/>
+            <a:ext cx="11064240" cy="548640"/>
           </a:xfrm>
           <a:prstGeom prst="roundRect">
             <a:avLst>
-              <a:gd name="adj" fmla="val 17647"/>
+              <a:gd name="adj" fmla="val 20000"/>
             </a:avLst>
           </a:prstGeom>
           <a:solidFill>
@@ -2682,7 +2682,7 @@
         </p:nvSpPr>
         <p:spPr>
           <a:xfrm>
-            <a:off x="731520" y="5431536"/>
+            <a:off x="731520" y="4709160"/>
             <a:ext cx="365760" cy="365760"/>
           </a:xfrm>
           <a:prstGeom prst="ellipse">
@@ -2707,7 +2707,7 @@
         </p:nvSpPr>
         <p:spPr>
           <a:xfrm>
-            <a:off x="731520" y="5431536"/>
+            <a:off x="731520" y="4709160"/>
             <a:ext cx="365760" cy="365760"/>
           </a:xfrm>
           <a:prstGeom prst="rect">
@@ -2746,8 +2746,8 @@
         </p:nvSpPr>
         <p:spPr>
           <a:xfrm>
-            <a:off x="1325880" y="5303520"/>
-            <a:ext cx="10058400" cy="621792"/>
+            <a:off x="1325880" y="4617720"/>
+            <a:ext cx="10149840" cy="548640"/>
           </a:xfrm>
           <a:prstGeom prst="rect">
             <a:avLst/>
@@ -2763,7 +2763,7 @@
               <a:buNone/>
             </a:pPr>
             <a:r>
-              <a:rPr lang="en-US" sz="1800" dirty="0">
+              <a:rPr lang="en-US" sz="1600" dirty="0">
                 <a:solidFill>
                   <a:srgbClr val="FFFFFF"/>
                 </a:solidFill>
@@ -2771,9 +2771,139 @@
                 <a:ea typeface="Calibri" pitchFamily="34" charset="-122"/>
                 <a:cs typeface="Calibri" pitchFamily="34" charset="-120"/>
               </a:rPr>
-              <a:t>POP A4 sudah dicetak dan terpasang</a:t>
+              <a:t>Materi komunikasi belum tiba: cetak POP A4 dari Head Office di percetakan</a:t>
             </a:r>
-            <a:endParaRPr lang="en-US" sz="1800" dirty="0"/>
+            <a:endParaRPr lang="en-US" sz="1600" dirty="0"/>
+          </a:p>
+        </p:txBody>
+      </p:sp>
+      <p:sp>
+        <p:nvSpPr>
+          <p:cNvPr id="27" name="Shape 25"/>
+          <p:cNvSpPr/>
+          <p:nvPr/>
+        </p:nvSpPr>
+        <p:spPr>
+          <a:xfrm>
+            <a:off x="548640" y="5276088"/>
+            <a:ext cx="11064240" cy="548640"/>
+          </a:xfrm>
+          <a:prstGeom prst="roundRect">
+            <a:avLst>
+              <a:gd name="adj" fmla="val 20000"/>
+            </a:avLst>
+          </a:prstGeom>
+          <a:solidFill>
+            <a:srgbClr val="4D3B73"/>
+          </a:solidFill>
+          <a:ln w="12700">
+            <a:solidFill>
+              <a:srgbClr val="4D3B73"/>
+            </a:solidFill>
+            <a:prstDash val="solid"/>
+          </a:ln>
+        </p:spPr>
+      </p:sp>
+      <p:sp>
+        <p:nvSpPr>
+          <p:cNvPr id="28" name="Shape 26"/>
+          <p:cNvSpPr/>
+          <p:nvPr/>
+        </p:nvSpPr>
+        <p:spPr>
+          <a:xfrm>
+            <a:off x="731520" y="5367528"/>
+            <a:ext cx="365760" cy="365760"/>
+          </a:xfrm>
+          <a:prstGeom prst="ellipse">
+            <a:avLst/>
+          </a:prstGeom>
+          <a:solidFill>
+            <a:srgbClr val="FDE68A"/>
+          </a:solidFill>
+          <a:ln w="12700">
+            <a:solidFill>
+              <a:srgbClr val="FDE68A"/>
+            </a:solidFill>
+            <a:prstDash val="solid"/>
+          </a:ln>
+        </p:spPr>
+      </p:sp>
+      <p:sp>
+        <p:nvSpPr>
+          <p:cNvPr id="29" name="Text 27"/>
+          <p:cNvSpPr txBox="1"/>
+          <p:nvPr/>
+        </p:nvSpPr>
+        <p:spPr>
+          <a:xfrm>
+            <a:off x="731520" y="5367528"/>
+            <a:ext cx="365760" cy="365760"/>
+          </a:xfrm>
+          <a:prstGeom prst="rect">
+            <a:avLst/>
+          </a:prstGeom>
+          <a:noFill/>
+          <a:ln/>
+        </p:spPr>
+        <p:txBody>
+          <a:bodyPr wrap="square" lIns="0" tIns="0" rIns="0" bIns="0" rtlCol="0" anchor="ctr"/>
+          <a:lstStyle/>
+          <a:p>
+            <a:pPr algn="ctr" indent="0" marL="0">
+              <a:buNone/>
+            </a:pPr>
+            <a:r>
+              <a:rPr lang="en-US" sz="1600" b="1" dirty="0">
+                <a:solidFill>
+                  <a:srgbClr val="3B2A5C"/>
+                </a:solidFill>
+                <a:latin typeface="Calibri" pitchFamily="34" charset="0"/>
+                <a:ea typeface="Calibri" pitchFamily="34" charset="-122"/>
+                <a:cs typeface="Calibri" pitchFamily="34" charset="-120"/>
+              </a:rPr>
+              <a:t>✓</a:t>
+            </a:r>
+            <a:endParaRPr lang="en-US" sz="1600" dirty="0"/>
+          </a:p>
+        </p:txBody>
+      </p:sp>
+      <p:sp>
+        <p:nvSpPr>
+          <p:cNvPr id="30" name="Text 28"/>
+          <p:cNvSpPr txBox="1"/>
+          <p:nvPr/>
+        </p:nvSpPr>
+        <p:spPr>
+          <a:xfrm>
+            <a:off x="1325880" y="5276088"/>
+            <a:ext cx="10149840" cy="548640"/>
+          </a:xfrm>
+          <a:prstGeom prst="rect">
+            <a:avLst/>
+          </a:prstGeom>
+          <a:noFill/>
+          <a:ln/>
+        </p:spPr>
+        <p:txBody>
+          <a:bodyPr wrap="square" lIns="0" tIns="0" rIns="0" bIns="0" rtlCol="0" anchor="ctr"/>
+          <a:lstStyle/>
+          <a:p>
+            <a:pPr indent="0" marL="0">
+              <a:buNone/>
+            </a:pPr>
+            <a:r>
+              <a:rPr lang="en-US" sz="1600" dirty="0">
+                <a:solidFill>
+                  <a:srgbClr val="FFFFFF"/>
+                </a:solidFill>
+                <a:latin typeface="Calibri" pitchFamily="34" charset="0"/>
+                <a:ea typeface="Calibri" pitchFamily="34" charset="-122"/>
+                <a:cs typeface="Calibri" pitchFamily="34" charset="-120"/>
+              </a:rPr>
+              <a:t>Buffer stock tersedia, rak tidak pernah kosong</a:t>
+            </a:r>
+            <a:endParaRPr lang="en-US" sz="1600" dirty="0"/>
           </a:p>
         </p:txBody>
       </p:sp>
@@ -3557,7 +3687,7 @@
                 <a:ea typeface="Calibri" pitchFamily="34" charset="-122"/>
                 <a:cs typeface="Calibri" pitchFamily="34" charset="-120"/>
               </a:rPr>
-              <a:t>Susunan rak, warna dan layout mengikuti mock display terlampir.</a:t>
+              <a:t>Susunan rak mengikuti mock terlampir. Header dikirim tim VM dari Jakarta.</a:t>
             </a:r>
             <a:endParaRPr lang="en-US" sz="1600" dirty="0"/>
           </a:p>
@@ -3856,7 +3986,7 @@
                 <a:ea typeface="Calibri" pitchFamily="34" charset="-122"/>
                 <a:cs typeface="Calibri" pitchFamily="34" charset="-120"/>
               </a:rPr>
-              <a:t>Cetak POP A4</a:t>
+              <a:t>POP sementara</a:t>
             </a:r>
             <a:endParaRPr lang="en-US" sz="2000" dirty="0"/>
           </a:p>
@@ -3895,7 +4025,7 @@
                 <a:ea typeface="Calibri" pitchFamily="34" charset="-122"/>
                 <a:cs typeface="Calibri" pitchFamily="34" charset="-120"/>
               </a:rPr>
-              <a:t>Selama menunggu Media Produk Info dari VM, store wajib cetak POP A4 terlampir.</a:t>
+              <a:t>Display datang lebih dulu dari materi komunikasi? Cetak POP A4 dari Head Office di percetakan.</a:t>
             </a:r>
             <a:endParaRPr lang="en-US" sz="1600" dirty="0"/>
           </a:p>
@@ -3988,8 +4118,8 @@
         </p:blipFill>
         <p:spPr>
           <a:xfrm>
-            <a:off x="548640" y="1097280"/>
-            <a:ext cx="5394960" cy="5724144"/>
+            <a:off x="731520" y="1097280"/>
+            <a:ext cx="4937760" cy="5556879"/>
           </a:xfrm>
           <a:prstGeom prst="rect">
             <a:avLst/>
@@ -4110,7 +4240,7 @@
                 <a:ea typeface="Calibri" pitchFamily="34" charset="-122"/>
                 <a:cs typeface="Calibri" pitchFamily="34" charset="-120"/>
               </a:rPr>
-              <a:t>“Pick Your Lucky Box” di bagian atas endcap.</a:t>
+              <a:t>“Pick Your Lucky Box”, dikirim tim VM dari Jakarta.</a:t>
             </a:r>
             <a:endParaRPr lang="en-US" sz="1800" dirty="0"/>
           </a:p>
@@ -20590,7 +20720,7 @@
                 <a:ea typeface="Cambria" pitchFamily="34" charset="-122"/>
                 <a:cs typeface="Cambria" pitchFamily="34" charset="-120"/>
               </a:rPr>
-              <a:t>Buka 6 warna dan cetak POP A4</a:t>
+              <a:t>Buka 6 warna, header, dan POP</a:t>
             </a:r>
             <a:endParaRPr lang="en-US" sz="3600" dirty="0"/>
           </a:p>
@@ -21130,7 +21260,7 @@
                 <a:ea typeface="Calibri" pitchFamily="34" charset="-122"/>
                 <a:cs typeface="Calibri" pitchFamily="34" charset="-120"/>
               </a:rPr>
-              <a:t>POP A4 wajib dicetak</a:t>
+              <a:t>Header dan POP sementara</a:t>
             </a:r>
             <a:endParaRPr lang="en-US" sz="2000" dirty="0"/>
           </a:p>
@@ -21145,11 +21275,11 @@
         <p:spPr>
           <a:xfrm>
             <a:off x="6583680" y="1920240"/>
-            <a:ext cx="2194560" cy="3017520"/>
+            <a:ext cx="1737360" cy="3017520"/>
           </a:xfrm>
           <a:prstGeom prst="roundRect">
             <a:avLst>
-              <a:gd name="adj" fmla="val 4167"/>
+              <a:gd name="adj" fmla="val 5263"/>
             </a:avLst>
           </a:prstGeom>
           <a:solidFill>
@@ -21172,7 +21302,7 @@
         <p:spPr>
           <a:xfrm>
             <a:off x="6583680" y="1920240"/>
-            <a:ext cx="2194560" cy="3017520"/>
+            <a:ext cx="1737360" cy="3017520"/>
           </a:xfrm>
           <a:prstGeom prst="rect">
             <a:avLst/>
@@ -21210,8 +21340,8 @@
         </p:nvSpPr>
         <p:spPr>
           <a:xfrm>
-            <a:off x="9052560" y="1920240"/>
-            <a:ext cx="2560320" cy="3017520"/>
+            <a:off x="8503920" y="1920240"/>
+            <a:ext cx="3108960" cy="3840480"/>
           </a:xfrm>
           <a:prstGeom prst="rect">
             <a:avLst/>
@@ -21231,7 +21361,7 @@
               <a:buChar char="•"/>
             </a:pPr>
             <a:r>
-              <a:rPr lang="en-US" sz="1500" dirty="0">
+              <a:rPr lang="en-US" sz="1400" dirty="0">
                 <a:solidFill>
                   <a:srgbClr val="3B2A5C"/>
                 </a:solidFill>
@@ -21239,9 +21369,9 @@
                 <a:ea typeface="Calibri" pitchFamily="34" charset="-122"/>
                 <a:cs typeface="Calibri" pitchFamily="34" charset="-120"/>
               </a:rPr>
-              <a:t>Cetak ukuran A4</a:t>
+              <a:t>Header dikirim tim VM dari Jakarta, pasang saat tiba</a:t>
             </a:r>
-            <a:endParaRPr lang="en-US" sz="1500" dirty="0"/>
+            <a:endParaRPr lang="en-US" sz="1400" dirty="0"/>
           </a:p>
           <a:p>
             <a:pPr marL="342900" indent="-342900">
@@ -21252,7 +21382,7 @@
               <a:buChar char="•"/>
             </a:pPr>
             <a:r>
-              <a:rPr lang="en-US" sz="1500" dirty="0">
+              <a:rPr lang="en-US" sz="1400" dirty="0">
                 <a:solidFill>
                   <a:srgbClr val="3B2A5C"/>
                 </a:solidFill>
@@ -21260,9 +21390,9 @@
                 <a:ea typeface="Calibri" pitchFamily="34" charset="-122"/>
                 <a:cs typeface="Calibri" pitchFamily="34" charset="-120"/>
               </a:rPr>
-              <a:t>Pasang di endcap Thermal</a:t>
+              <a:t>Display tiba lebih dulu dari materi komunikasi: cetak POP A4 sementara dari Head Office</a:t>
             </a:r>
-            <a:endParaRPr lang="en-US" sz="1500" dirty="0"/>
+            <a:endParaRPr lang="en-US" sz="1400" dirty="0"/>
           </a:p>
           <a:p>
             <a:pPr marL="342900" indent="-342900">
@@ -21273,7 +21403,7 @@
               <a:buChar char="•"/>
             </a:pPr>
             <a:r>
-              <a:rPr lang="en-US" sz="1500" dirty="0">
+              <a:rPr lang="en-US" sz="1400" dirty="0">
                 <a:solidFill>
                   <a:srgbClr val="3B2A5C"/>
                 </a:solidFill>
@@ -21281,9 +21411,30 @@
                 <a:ea typeface="Calibri" pitchFamily="34" charset="-122"/>
                 <a:cs typeface="Calibri" pitchFamily="34" charset="-120"/>
               </a:rPr>
-              <a:t>Berlaku sampai Media Produk Info dari VM terpasang</a:t>
+              <a:t>Cetak wajib di percetakan</a:t>
             </a:r>
-            <a:endParaRPr lang="en-US" sz="1500" dirty="0"/>
+            <a:endParaRPr lang="en-US" sz="1400" dirty="0"/>
+          </a:p>
+          <a:p>
+            <a:pPr marL="342900" indent="-342900">
+              <a:spcAft>
+                <a:spcPts val="800"/>
+              </a:spcAft>
+              <a:buSzPct val="100000"/>
+              <a:buChar char="•"/>
+            </a:pPr>
+            <a:r>
+              <a:rPr lang="en-US" sz="1400" dirty="0">
+                <a:solidFill>
+                  <a:srgbClr val="3B2A5C"/>
+                </a:solidFill>
+                <a:latin typeface="Calibri" pitchFamily="34" charset="0"/>
+                <a:ea typeface="Calibri" pitchFamily="34" charset="-122"/>
+                <a:cs typeface="Calibri" pitchFamily="34" charset="-120"/>
+              </a:rPr>
+              <a:t>Dipakai sampai Media Produk Info dari VM terpasang</a:t>
+            </a:r>
+            <a:endParaRPr lang="en-US" sz="1400" dirty="0"/>
           </a:p>
         </p:txBody>
       </p:sp>
@@ -21513,13 +21664,13 @@
           <a:p>
             <a:pPr marL="342900" indent="-342900">
               <a:spcAft>
-                <a:spcPts val="1200"/>
+                <a:spcPts val="800"/>
               </a:spcAft>
               <a:buSzPct val="100000"/>
               <a:buChar char="•"/>
             </a:pPr>
             <a:r>
-              <a:rPr lang="en-US" sz="1800" dirty="0">
+              <a:rPr lang="en-US" sz="1500" dirty="0">
                 <a:solidFill>
                   <a:srgbClr val="3B2A5C"/>
                 </a:solidFill>
@@ -21529,18 +21680,18 @@
               </a:rPr>
               <a:t>Pasang di Endcap Area Thermal, full terisi sesuai planogram dan mock</a:t>
             </a:r>
-            <a:endParaRPr lang="en-US" sz="1800" dirty="0"/>
+            <a:endParaRPr lang="en-US" sz="1500" dirty="0"/>
           </a:p>
           <a:p>
             <a:pPr marL="342900" indent="-342900">
               <a:spcAft>
-                <a:spcPts val="1200"/>
+                <a:spcPts val="800"/>
               </a:spcAft>
               <a:buSzPct val="100000"/>
               <a:buChar char="•"/>
             </a:pPr>
             <a:r>
-              <a:rPr lang="en-US" sz="1800" dirty="0">
+              <a:rPr lang="en-US" sz="1500" dirty="0">
                 <a:solidFill>
                   <a:srgbClr val="3B2A5C"/>
                 </a:solidFill>
@@ -21550,18 +21701,18 @@
               </a:rPr>
               <a:t>Buka hanya 6 warna sebagai sampel, sisanya tetap tersegel</a:t>
             </a:r>
-            <a:endParaRPr lang="en-US" sz="1800" dirty="0"/>
+            <a:endParaRPr lang="en-US" sz="1500" dirty="0"/>
           </a:p>
           <a:p>
             <a:pPr marL="342900" indent="-342900">
               <a:spcAft>
-                <a:spcPts val="1200"/>
+                <a:spcPts val="800"/>
               </a:spcAft>
               <a:buSzPct val="100000"/>
               <a:buChar char="•"/>
             </a:pPr>
             <a:r>
-              <a:rPr lang="en-US" sz="1800" dirty="0">
+              <a:rPr lang="en-US" sz="1500" dirty="0">
                 <a:solidFill>
                   <a:srgbClr val="3B2A5C"/>
                 </a:solidFill>
@@ -21571,18 +21722,18 @@
               </a:rPr>
               <a:t>Jaga box Secret tetap tersegel</a:t>
             </a:r>
-            <a:endParaRPr lang="en-US" sz="1800" dirty="0"/>
+            <a:endParaRPr lang="en-US" sz="1500" dirty="0"/>
           </a:p>
           <a:p>
             <a:pPr marL="342900" indent="-342900">
               <a:spcAft>
-                <a:spcPts val="1200"/>
+                <a:spcPts val="800"/>
               </a:spcAft>
               <a:buSzPct val="100000"/>
               <a:buChar char="•"/>
             </a:pPr>
             <a:r>
-              <a:rPr lang="en-US" sz="1800" dirty="0">
+              <a:rPr lang="en-US" sz="1500" dirty="0">
                 <a:solidFill>
                   <a:srgbClr val="3B2A5C"/>
                 </a:solidFill>
@@ -21592,18 +21743,18 @@
               </a:rPr>
               <a:t>Rapikan box, logo informa menghadap depan</a:t>
             </a:r>
-            <a:endParaRPr lang="en-US" sz="1800" dirty="0"/>
+            <a:endParaRPr lang="en-US" sz="1500" dirty="0"/>
           </a:p>
           <a:p>
             <a:pPr marL="342900" indent="-342900">
               <a:spcAft>
-                <a:spcPts val="1200"/>
+                <a:spcPts val="800"/>
               </a:spcAft>
               <a:buSzPct val="100000"/>
               <a:buChar char="•"/>
             </a:pPr>
             <a:r>
-              <a:rPr lang="en-US" sz="1800" dirty="0">
+              <a:rPr lang="en-US" sz="1500" dirty="0">
                 <a:solidFill>
                   <a:srgbClr val="3B2A5C"/>
                 </a:solidFill>
@@ -21613,18 +21764,18 @@
               </a:rPr>
               <a:t>Isi ulang rak dari buffer stock sebelum kosong</a:t>
             </a:r>
-            <a:endParaRPr lang="en-US" sz="1800" dirty="0"/>
+            <a:endParaRPr lang="en-US" sz="1500" dirty="0"/>
           </a:p>
           <a:p>
             <a:pPr marL="342900" indent="-342900">
               <a:spcAft>
-                <a:spcPts val="1200"/>
+                <a:spcPts val="800"/>
               </a:spcAft>
               <a:buSzPct val="100000"/>
               <a:buChar char="•"/>
             </a:pPr>
             <a:r>
-              <a:rPr lang="en-US" sz="1800" dirty="0">
+              <a:rPr lang="en-US" sz="1500" dirty="0">
                 <a:solidFill>
                   <a:srgbClr val="3B2A5C"/>
                 </a:solidFill>
@@ -21634,7 +21785,28 @@
               </a:rPr>
               <a:t>Jelaskan ke pelanggan: pilih warna favorit, Secret adalah kejutan</a:t>
             </a:r>
-            <a:endParaRPr lang="en-US" sz="1800" dirty="0"/>
+            <a:endParaRPr lang="en-US" sz="1500" dirty="0"/>
+          </a:p>
+          <a:p>
+            <a:pPr marL="342900" indent="-342900">
+              <a:spcAft>
+                <a:spcPts val="800"/>
+              </a:spcAft>
+              <a:buSzPct val="100000"/>
+              <a:buChar char="•"/>
+            </a:pPr>
+            <a:r>
+              <a:rPr lang="en-US" sz="1500" dirty="0">
+                <a:solidFill>
+                  <a:srgbClr val="3B2A5C"/>
+                </a:solidFill>
+                <a:latin typeface="Calibri" pitchFamily="34" charset="0"/>
+                <a:ea typeface="Calibri" pitchFamily="34" charset="-122"/>
+                <a:cs typeface="Calibri" pitchFamily="34" charset="-120"/>
+              </a:rPr>
+              <a:t>Cetak POP A4 sementara dari Head Office bila materi komunikasi belum tiba</a:t>
+            </a:r>
+            <a:endParaRPr lang="en-US" sz="1500" dirty="0"/>
           </a:p>
         </p:txBody>
       </p:sp>
@@ -21754,13 +21926,13 @@
           <a:p>
             <a:pPr marL="342900" indent="-342900">
               <a:spcAft>
-                <a:spcPts val="1200"/>
+                <a:spcPts val="800"/>
               </a:spcAft>
               <a:buSzPct val="100000"/>
               <a:buChar char="•"/>
             </a:pPr>
             <a:r>
-              <a:rPr lang="en-US" sz="1800" dirty="0">
+              <a:rPr lang="en-US" sz="1500" dirty="0">
                 <a:solidFill>
                   <a:srgbClr val="3B2A5C"/>
                 </a:solidFill>
@@ -21770,18 +21942,18 @@
               </a:rPr>
               <a:t>Jangan taruh di luar endcap Thermal atau campur dengan produk lain</a:t>
             </a:r>
-            <a:endParaRPr lang="en-US" sz="1800" dirty="0"/>
+            <a:endParaRPr lang="en-US" sz="1500" dirty="0"/>
           </a:p>
           <a:p>
             <a:pPr marL="342900" indent="-342900">
               <a:spcAft>
-                <a:spcPts val="1200"/>
+                <a:spcPts val="800"/>
               </a:spcAft>
               <a:buSzPct val="100000"/>
               <a:buChar char="•"/>
             </a:pPr>
             <a:r>
-              <a:rPr lang="en-US" sz="1800" dirty="0">
+              <a:rPr lang="en-US" sz="1500" dirty="0">
                 <a:solidFill>
                   <a:srgbClr val="3B2A5C"/>
                 </a:solidFill>
@@ -21791,18 +21963,18 @@
               </a:rPr>
               <a:t>Jangan biarkan rak kosong atau terisi sebagian</a:t>
             </a:r>
-            <a:endParaRPr lang="en-US" sz="1800" dirty="0"/>
+            <a:endParaRPr lang="en-US" sz="1500" dirty="0"/>
           </a:p>
           <a:p>
             <a:pPr marL="342900" indent="-342900">
               <a:spcAft>
-                <a:spcPts val="1200"/>
+                <a:spcPts val="800"/>
               </a:spcAft>
               <a:buSzPct val="100000"/>
               <a:buChar char="•"/>
             </a:pPr>
             <a:r>
-              <a:rPr lang="en-US" sz="1800" dirty="0">
+              <a:rPr lang="en-US" sz="1500" dirty="0">
                 <a:solidFill>
                   <a:srgbClr val="3B2A5C"/>
                 </a:solidFill>
@@ -21812,18 +21984,18 @@
               </a:rPr>
               <a:t>Jangan buka atau sobek box selain sampel 6 warna</a:t>
             </a:r>
-            <a:endParaRPr lang="en-US" sz="1800" dirty="0"/>
+            <a:endParaRPr lang="en-US" sz="1500" dirty="0"/>
           </a:p>
           <a:p>
             <a:pPr marL="342900" indent="-342900">
               <a:spcAft>
-                <a:spcPts val="1200"/>
+                <a:spcPts val="800"/>
               </a:spcAft>
               <a:buSzPct val="100000"/>
               <a:buChar char="•"/>
             </a:pPr>
             <a:r>
-              <a:rPr lang="en-US" sz="1800" dirty="0">
+              <a:rPr lang="en-US" sz="1500" dirty="0">
                 <a:solidFill>
                   <a:srgbClr val="3B2A5C"/>
                 </a:solidFill>
@@ -21833,18 +22005,18 @@
               </a:rPr>
               <a:t>Jangan bocorkan isi box tersegel (ditimbang, diguncang, atau diberi petunjuk)</a:t>
             </a:r>
-            <a:endParaRPr lang="en-US" sz="1800" dirty="0"/>
+            <a:endParaRPr lang="en-US" sz="1500" dirty="0"/>
           </a:p>
           <a:p>
             <a:pPr marL="342900" indent="-342900">
               <a:spcAft>
-                <a:spcPts val="1200"/>
+                <a:spcPts val="800"/>
               </a:spcAft>
               <a:buSzPct val="100000"/>
               <a:buChar char="•"/>
             </a:pPr>
             <a:r>
-              <a:rPr lang="en-US" sz="1800" dirty="0">
+              <a:rPr lang="en-US" sz="1500" dirty="0">
                 <a:solidFill>
                   <a:srgbClr val="3B2A5C"/>
                 </a:solidFill>
@@ -21854,18 +22026,18 @@
               </a:rPr>
               <a:t>Jangan ubah susunan, qty, atau tinggi rak</a:t>
             </a:r>
-            <a:endParaRPr lang="en-US" sz="1800" dirty="0"/>
+            <a:endParaRPr lang="en-US" sz="1500" dirty="0"/>
           </a:p>
           <a:p>
             <a:pPr marL="342900" indent="-342900">
               <a:spcAft>
-                <a:spcPts val="1200"/>
+                <a:spcPts val="800"/>
               </a:spcAft>
               <a:buSzPct val="100000"/>
               <a:buChar char="•"/>
             </a:pPr>
             <a:r>
-              <a:rPr lang="en-US" sz="1800" dirty="0">
+              <a:rPr lang="en-US" sz="1500" dirty="0">
                 <a:solidFill>
                   <a:srgbClr val="3B2A5C"/>
                 </a:solidFill>
@@ -21875,7 +22047,28 @@
               </a:rPr>
               <a:t>Jangan jual unit sampel yang sudah dibuka sebagai produk baru</a:t>
             </a:r>
-            <a:endParaRPr lang="en-US" sz="1800" dirty="0"/>
+            <a:endParaRPr lang="en-US" sz="1500" dirty="0"/>
+          </a:p>
+          <a:p>
+            <a:pPr marL="342900" indent="-342900">
+              <a:spcAft>
+                <a:spcPts val="800"/>
+              </a:spcAft>
+              <a:buSzPct val="100000"/>
+              <a:buChar char="•"/>
+            </a:pPr>
+            <a:r>
+              <a:rPr lang="en-US" sz="1500" dirty="0">
+                <a:solidFill>
+                  <a:srgbClr val="3B2A5C"/>
+                </a:solidFill>
+                <a:latin typeface="Calibri" pitchFamily="34" charset="0"/>
+                <a:ea typeface="Calibri" pitchFamily="34" charset="-122"/>
+                <a:cs typeface="Calibri" pitchFamily="34" charset="-120"/>
+              </a:rPr>
+              <a:t>Jangan cetak POP sementara selain di percetakan</a:t>
+            </a:r>
+            <a:endParaRPr lang="en-US" sz="1500" dirty="0"/>
           </a:p>
         </p:txBody>
       </p:sp>

--- a/Instruksi_Display_Blind_Box_Thermal.pptx
+++ b/Instruksi_Display_Blind_Box_Thermal.pptx
@@ -15,9 +15,10 @@
     <p:sldId id="263" r:id="rId9"/>
     <p:sldId id="264" r:id="rId10"/>
     <p:sldId id="265" r:id="rId11"/>
+    <p:sldId id="266" r:id="rId12"/>
   </p:sldIdLst>
   <p:notesMasterIdLst>
-    <p:notesMasterId r:id="rId12"/>
+    <p:notesMasterId r:id="rId13"/>
   </p:notesMasterIdLst>
   <p:sldSz cx="12192000" cy="6858000"/>
   <p:notesSz cx="6858000" cy="12192000"/>
@@ -623,6 +624,94 @@
             <a:fld id="{F7021451-1387-4CA6-816F-3879F97B5CBC}" type="slidenum">
               <a:rPr lang="en-US"/>
               <a:t>10</a:t>
+            </a:fld>
+            <a:endParaRPr lang="en-US"/>
+          </a:p>
+        </p:txBody>
+      </p:sp>
+    </p:spTree>
+    <p:extLst>
+      <p:ext uri="{BB962C8B-B14F-4D97-AF65-F5344CB8AC3E}">
+        <p14:creationId xmlns:p14="http://schemas.microsoft.com/office/powerpoint/2010/main" val="1024086991"/>
+      </p:ext>
+    </p:extLst>
+  </p:cSld>
+  <p:clrMapOvr>
+    <a:masterClrMapping/>
+  </p:clrMapOvr>
+</p:notes>
+</file>
+
+<file path=ppt/notesSlides/notesSlide11.xml><?xml version="1.0" encoding="utf-8"?>
+<p:notes xmlns:a="http://schemas.openxmlformats.org/drawingml/2006/main" xmlns:r="http://schemas.openxmlformats.org/officeDocument/2006/relationships" xmlns:p="http://schemas.openxmlformats.org/presentationml/2006/main">
+  <p:cSld>
+    <p:spTree>
+      <p:nvGrpSpPr>
+        <p:cNvPr id="1" name=""/>
+        <p:cNvGrpSpPr/>
+        <p:nvPr/>
+      </p:nvGrpSpPr>
+      <p:grpSpPr>
+        <a:xfrm>
+          <a:off x="0" y="0"/>
+          <a:ext cx="0" cy="0"/>
+          <a:chOff x="0" y="0"/>
+          <a:chExt cx="0" cy="0"/>
+        </a:xfrm>
+      </p:grpSpPr>
+      <p:sp>
+        <p:nvSpPr>
+          <p:cNvPr id="2" name="Slide Image Placeholder 1"/>
+          <p:cNvSpPr>
+            <a:spLocks noGrp="1" noRot="1" noChangeAspect="1"/>
+          </p:cNvSpPr>
+          <p:nvPr>
+            <p:ph type="sldImg"/>
+          </p:nvPr>
+        </p:nvSpPr>
+        <p:spPr/>
+      </p:sp>
+      <p:sp>
+        <p:nvSpPr>
+          <p:cNvPr id="3" name="Notes Placeholder 2"/>
+          <p:cNvSpPr>
+            <a:spLocks noGrp="1"/>
+          </p:cNvSpPr>
+          <p:nvPr>
+            <p:ph type="body" idx="1"/>
+          </p:nvPr>
+        </p:nvSpPr>
+        <p:spPr/>
+        <p:txBody>
+          <a:bodyPr/>
+          <a:lstStyle/>
+          <a:p>
+            <a:r>
+              <a:rPr lang="en-US" dirty="0"/>
+              <a:t/>
+            </a:r>
+            <a:endParaRPr lang="en-US" dirty="0"/>
+          </a:p>
+        </p:txBody>
+      </p:sp>
+      <p:sp>
+        <p:nvSpPr>
+          <p:cNvPr id="4" name="Slide Number Placeholder 3"/>
+          <p:cNvSpPr>
+            <a:spLocks noGrp="1"/>
+          </p:cNvSpPr>
+          <p:nvPr>
+            <p:ph type="sldNum" sz="quarter" idx="10"/>
+          </p:nvPr>
+        </p:nvSpPr>
+        <p:spPr/>
+        <p:txBody>
+          <a:bodyPr/>
+          <a:lstStyle/>
+          <a:p>
+            <a:fld id="{F7021451-1387-4CA6-816F-3879F97B5CBC}" type="slidenum">
+              <a:rPr lang="en-US"/>
+              <a:t>11</a:t>
             </a:fld>
             <a:endParaRPr lang="en-US"/>
           </a:p>
@@ -1940,6 +2029,640 @@
     <p:bg>
       <p:bgPr>
         <a:solidFill>
+          <a:srgbClr val="FFFFFF"/>
+        </a:solidFill>
+      </p:bgPr>
+    </p:bg>
+    <p:spTree>
+      <p:nvGrpSpPr>
+        <p:cNvPr id="1" name=""/>
+        <p:cNvGrpSpPr/>
+        <p:nvPr/>
+      </p:nvGrpSpPr>
+      <p:grpSpPr>
+        <a:xfrm>
+          <a:off x="0" y="0"/>
+          <a:ext cx="0" cy="0"/>
+          <a:chOff x="0" y="0"/>
+          <a:chExt cx="0" cy="0"/>
+        </a:xfrm>
+      </p:grpSpPr>
+      <p:sp>
+        <p:nvSpPr>
+          <p:cNvPr id="2" name="Text 0"/>
+          <p:cNvSpPr txBox="1"/>
+          <p:nvPr/>
+        </p:nvSpPr>
+        <p:spPr>
+          <a:xfrm>
+            <a:off x="548640" y="365760"/>
+            <a:ext cx="11064240" cy="731520"/>
+          </a:xfrm>
+          <a:prstGeom prst="rect">
+            <a:avLst/>
+          </a:prstGeom>
+          <a:noFill/>
+          <a:ln/>
+        </p:spPr>
+        <p:txBody>
+          <a:bodyPr wrap="square" lIns="0" tIns="0" rIns="0" bIns="0" rtlCol="0" anchor="ctr"/>
+          <a:lstStyle/>
+          <a:p>
+            <a:pPr indent="0" marL="0">
+              <a:buNone/>
+            </a:pPr>
+            <a:r>
+              <a:rPr lang="en-US" sz="3600" b="1" dirty="0">
+                <a:solidFill>
+                  <a:srgbClr val="3B2A5C"/>
+                </a:solidFill>
+                <a:latin typeface="Cambria" pitchFamily="34" charset="0"/>
+                <a:ea typeface="Cambria" pitchFamily="34" charset="-122"/>
+                <a:cs typeface="Cambria" pitchFamily="34" charset="-120"/>
+              </a:rPr>
+              <a:t>Do dan Don'ts display dan penjualan</a:t>
+            </a:r>
+            <a:endParaRPr lang="en-US" sz="3600" dirty="0"/>
+          </a:p>
+        </p:txBody>
+      </p:sp>
+      <p:sp>
+        <p:nvSpPr>
+          <p:cNvPr id="3" name="Text 1"/>
+          <p:cNvSpPr txBox="1"/>
+          <p:nvPr/>
+        </p:nvSpPr>
+        <p:spPr>
+          <a:xfrm>
+            <a:off x="548640" y="1051560"/>
+            <a:ext cx="11064240" cy="365760"/>
+          </a:xfrm>
+          <a:prstGeom prst="rect">
+            <a:avLst/>
+          </a:prstGeom>
+          <a:noFill/>
+          <a:ln/>
+        </p:spPr>
+        <p:txBody>
+          <a:bodyPr wrap="square" lIns="0" tIns="0" rIns="0" bIns="0" rtlCol="0" anchor="ctr"/>
+          <a:lstStyle/>
+          <a:p>
+            <a:pPr indent="0" marL="0">
+              <a:buNone/>
+            </a:pPr>
+            <a:r>
+              <a:rPr lang="en-US" sz="1600" dirty="0">
+                <a:solidFill>
+                  <a:srgbClr val="6B6580"/>
+                </a:solidFill>
+                <a:latin typeface="Calibri" pitchFamily="34" charset="0"/>
+                <a:ea typeface="Calibri" pitchFamily="34" charset="-122"/>
+                <a:cs typeface="Calibri" pitchFamily="34" charset="-120"/>
+              </a:rPr>
+              <a:t>Rekomendasi untuk tim store</a:t>
+            </a:r>
+            <a:endParaRPr lang="en-US" sz="1600" dirty="0"/>
+          </a:p>
+        </p:txBody>
+      </p:sp>
+      <p:sp>
+        <p:nvSpPr>
+          <p:cNvPr id="4" name="Shape 2"/>
+          <p:cNvSpPr/>
+          <p:nvPr/>
+        </p:nvSpPr>
+        <p:spPr>
+          <a:xfrm>
+            <a:off x="548640" y="1645920"/>
+            <a:ext cx="5349240" cy="4754880"/>
+          </a:xfrm>
+          <a:prstGeom prst="roundRect">
+            <a:avLst>
+              <a:gd name="adj" fmla="val 2885"/>
+            </a:avLst>
+          </a:prstGeom>
+          <a:solidFill>
+            <a:srgbClr val="E3F6FB"/>
+          </a:solidFill>
+          <a:ln w="12700">
+            <a:solidFill>
+              <a:srgbClr val="E3F6FB"/>
+            </a:solidFill>
+            <a:prstDash val="solid"/>
+          </a:ln>
+        </p:spPr>
+      </p:sp>
+      <p:sp>
+        <p:nvSpPr>
+          <p:cNvPr id="5" name="Shape 3"/>
+          <p:cNvSpPr/>
+          <p:nvPr/>
+        </p:nvSpPr>
+        <p:spPr>
+          <a:xfrm>
+            <a:off x="822960" y="1828800"/>
+            <a:ext cx="1371600" cy="457200"/>
+          </a:xfrm>
+          <a:prstGeom prst="roundRect">
+            <a:avLst>
+              <a:gd name="adj" fmla="val 50000"/>
+            </a:avLst>
+          </a:prstGeom>
+          <a:solidFill>
+            <a:srgbClr val="4DC3E0"/>
+          </a:solidFill>
+          <a:ln w="12700">
+            <a:solidFill>
+              <a:srgbClr val="4DC3E0"/>
+            </a:solidFill>
+            <a:prstDash val="solid"/>
+          </a:ln>
+        </p:spPr>
+      </p:sp>
+      <p:sp>
+        <p:nvSpPr>
+          <p:cNvPr id="6" name="Text 4"/>
+          <p:cNvSpPr txBox="1"/>
+          <p:nvPr/>
+        </p:nvSpPr>
+        <p:spPr>
+          <a:xfrm>
+            <a:off x="822960" y="1828800"/>
+            <a:ext cx="1371600" cy="457200"/>
+          </a:xfrm>
+          <a:prstGeom prst="rect">
+            <a:avLst/>
+          </a:prstGeom>
+          <a:noFill/>
+          <a:ln/>
+        </p:spPr>
+        <p:txBody>
+          <a:bodyPr wrap="square" lIns="0" tIns="0" rIns="0" bIns="0" rtlCol="0" anchor="ctr"/>
+          <a:lstStyle/>
+          <a:p>
+            <a:pPr algn="ctr" indent="0" marL="0">
+              <a:buNone/>
+            </a:pPr>
+            <a:r>
+              <a:rPr lang="en-US" sz="1800" b="1" dirty="0">
+                <a:solidFill>
+                  <a:srgbClr val="FFFFFF"/>
+                </a:solidFill>
+                <a:latin typeface="Calibri" pitchFamily="34" charset="0"/>
+                <a:ea typeface="Calibri" pitchFamily="34" charset="-122"/>
+                <a:cs typeface="Calibri" pitchFamily="34" charset="-120"/>
+              </a:rPr>
+              <a:t>DO</a:t>
+            </a:r>
+            <a:endParaRPr lang="en-US" sz="1800" dirty="0"/>
+          </a:p>
+        </p:txBody>
+      </p:sp>
+      <p:sp>
+        <p:nvSpPr>
+          <p:cNvPr id="7" name="Text 5"/>
+          <p:cNvSpPr txBox="1"/>
+          <p:nvPr/>
+        </p:nvSpPr>
+        <p:spPr>
+          <a:xfrm>
+            <a:off x="822960" y="2514600"/>
+            <a:ext cx="4800600" cy="3749040"/>
+          </a:xfrm>
+          <a:prstGeom prst="rect">
+            <a:avLst/>
+          </a:prstGeom>
+          <a:noFill/>
+          <a:ln/>
+        </p:spPr>
+        <p:txBody>
+          <a:bodyPr wrap="square" lIns="0" tIns="0" rIns="0" bIns="0" rtlCol="0" anchor="t"/>
+          <a:lstStyle/>
+          <a:p>
+            <a:pPr marL="342900" indent="-342900">
+              <a:spcAft>
+                <a:spcPts val="800"/>
+              </a:spcAft>
+              <a:buSzPct val="100000"/>
+              <a:buChar char="•"/>
+            </a:pPr>
+            <a:r>
+              <a:rPr lang="en-US" sz="1500" dirty="0">
+                <a:solidFill>
+                  <a:srgbClr val="3B2A5C"/>
+                </a:solidFill>
+                <a:latin typeface="Calibri" pitchFamily="34" charset="0"/>
+                <a:ea typeface="Calibri" pitchFamily="34" charset="-122"/>
+                <a:cs typeface="Calibri" pitchFamily="34" charset="-120"/>
+              </a:rPr>
+              <a:t>Pasang di Endcap Area Thermal, full terisi sesuai planogram dan mock</a:t>
+            </a:r>
+            <a:endParaRPr lang="en-US" sz="1500" dirty="0"/>
+          </a:p>
+          <a:p>
+            <a:pPr marL="342900" indent="-342900">
+              <a:spcAft>
+                <a:spcPts val="800"/>
+              </a:spcAft>
+              <a:buSzPct val="100000"/>
+              <a:buChar char="•"/>
+            </a:pPr>
+            <a:r>
+              <a:rPr lang="en-US" sz="1500" dirty="0">
+                <a:solidFill>
+                  <a:srgbClr val="3B2A5C"/>
+                </a:solidFill>
+                <a:latin typeface="Calibri" pitchFamily="34" charset="0"/>
+                <a:ea typeface="Calibri" pitchFamily="34" charset="-122"/>
+                <a:cs typeface="Calibri" pitchFamily="34" charset="-120"/>
+              </a:rPr>
+              <a:t>Buka 1 PDQ SMALL dan 1 PDQ LARGE sebagai sampel, sisanya tetap tersegel</a:t>
+            </a:r>
+            <a:endParaRPr lang="en-US" sz="1500" dirty="0"/>
+          </a:p>
+          <a:p>
+            <a:pPr marL="342900" indent="-342900">
+              <a:spcAft>
+                <a:spcPts val="800"/>
+              </a:spcAft>
+              <a:buSzPct val="100000"/>
+              <a:buChar char="•"/>
+            </a:pPr>
+            <a:r>
+              <a:rPr lang="en-US" sz="1500" dirty="0">
+                <a:solidFill>
+                  <a:srgbClr val="3B2A5C"/>
+                </a:solidFill>
+                <a:latin typeface="Calibri" pitchFamily="34" charset="0"/>
+                <a:ea typeface="Calibri" pitchFamily="34" charset="-122"/>
+                <a:cs typeface="Calibri" pitchFamily="34" charset="-120"/>
+              </a:rPr>
+              <a:t>Amankan Secret bila didapat, lalu display 5 warna</a:t>
+            </a:r>
+            <a:endParaRPr lang="en-US" sz="1500" dirty="0"/>
+          </a:p>
+          <a:p>
+            <a:pPr marL="342900" indent="-342900">
+              <a:spcAft>
+                <a:spcPts val="800"/>
+              </a:spcAft>
+              <a:buSzPct val="100000"/>
+              <a:buChar char="•"/>
+            </a:pPr>
+            <a:r>
+              <a:rPr lang="en-US" sz="1500" dirty="0">
+                <a:solidFill>
+                  <a:srgbClr val="3B2A5C"/>
+                </a:solidFill>
+                <a:latin typeface="Calibri" pitchFamily="34" charset="0"/>
+                <a:ea typeface="Calibri" pitchFamily="34" charset="-122"/>
+                <a:cs typeface="Calibri" pitchFamily="34" charset="-120"/>
+              </a:rPr>
+              <a:t>Buka kardus pelan-pelan dan ikuti video tutorial MD</a:t>
+            </a:r>
+            <a:endParaRPr lang="en-US" sz="1500" dirty="0"/>
+          </a:p>
+          <a:p>
+            <a:pPr marL="342900" indent="-342900">
+              <a:spcAft>
+                <a:spcPts val="800"/>
+              </a:spcAft>
+              <a:buSzPct val="100000"/>
+              <a:buChar char="•"/>
+            </a:pPr>
+            <a:r>
+              <a:rPr lang="en-US" sz="1500" dirty="0">
+                <a:solidFill>
+                  <a:srgbClr val="3B2A5C"/>
+                </a:solidFill>
+                <a:latin typeface="Calibri" pitchFamily="34" charset="0"/>
+                <a:ea typeface="Calibri" pitchFamily="34" charset="-122"/>
+                <a:cs typeface="Calibri" pitchFamily="34" charset="-120"/>
+              </a:rPr>
+              <a:t>Isi ulang rak dari buffer stock sebelum kosong</a:t>
+            </a:r>
+            <a:endParaRPr lang="en-US" sz="1500" dirty="0"/>
+          </a:p>
+          <a:p>
+            <a:pPr marL="342900" indent="-342900">
+              <a:spcAft>
+                <a:spcPts val="800"/>
+              </a:spcAft>
+              <a:buSzPct val="100000"/>
+              <a:buChar char="•"/>
+            </a:pPr>
+            <a:r>
+              <a:rPr lang="en-US" sz="1500" dirty="0">
+                <a:solidFill>
+                  <a:srgbClr val="3B2A5C"/>
+                </a:solidFill>
+                <a:latin typeface="Calibri" pitchFamily="34" charset="0"/>
+                <a:ea typeface="Calibri" pitchFamily="34" charset="-122"/>
+                <a:cs typeface="Calibri" pitchFamily="34" charset="-120"/>
+              </a:rPr>
+              <a:t>Jelaskan ke pelanggan: pilih warna favorit, Secret adalah kejutan</a:t>
+            </a:r>
+            <a:endParaRPr lang="en-US" sz="1500" dirty="0"/>
+          </a:p>
+          <a:p>
+            <a:pPr marL="342900" indent="-342900">
+              <a:spcAft>
+                <a:spcPts val="800"/>
+              </a:spcAft>
+              <a:buSzPct val="100000"/>
+              <a:buChar char="•"/>
+            </a:pPr>
+            <a:r>
+              <a:rPr lang="en-US" sz="1500" dirty="0">
+                <a:solidFill>
+                  <a:srgbClr val="3B2A5C"/>
+                </a:solidFill>
+                <a:latin typeface="Calibri" pitchFamily="34" charset="0"/>
+                <a:ea typeface="Calibri" pitchFamily="34" charset="-122"/>
+                <a:cs typeface="Calibri" pitchFamily="34" charset="-120"/>
+              </a:rPr>
+              <a:t>Cetak POP A4 sementara dari Head Office bila materi komunikasi belum tiba</a:t>
+            </a:r>
+            <a:endParaRPr lang="en-US" sz="1500" dirty="0"/>
+          </a:p>
+        </p:txBody>
+      </p:sp>
+      <p:sp>
+        <p:nvSpPr>
+          <p:cNvPr id="8" name="Shape 6"/>
+          <p:cNvSpPr/>
+          <p:nvPr/>
+        </p:nvSpPr>
+        <p:spPr>
+          <a:xfrm>
+            <a:off x="6263640" y="1645920"/>
+            <a:ext cx="5349240" cy="4754880"/>
+          </a:xfrm>
+          <a:prstGeom prst="roundRect">
+            <a:avLst>
+              <a:gd name="adj" fmla="val 2885"/>
+            </a:avLst>
+          </a:prstGeom>
+          <a:solidFill>
+            <a:srgbClr val="FDEAF3"/>
+          </a:solidFill>
+          <a:ln w="12700">
+            <a:solidFill>
+              <a:srgbClr val="FDEAF3"/>
+            </a:solidFill>
+            <a:prstDash val="solid"/>
+          </a:ln>
+        </p:spPr>
+      </p:sp>
+      <p:sp>
+        <p:nvSpPr>
+          <p:cNvPr id="9" name="Shape 7"/>
+          <p:cNvSpPr/>
+          <p:nvPr/>
+        </p:nvSpPr>
+        <p:spPr>
+          <a:xfrm>
+            <a:off x="6537960" y="1828800"/>
+            <a:ext cx="1371600" cy="457200"/>
+          </a:xfrm>
+          <a:prstGeom prst="roundRect">
+            <a:avLst>
+              <a:gd name="adj" fmla="val 50000"/>
+            </a:avLst>
+          </a:prstGeom>
+          <a:solidFill>
+            <a:srgbClr val="F27BB0"/>
+          </a:solidFill>
+          <a:ln w="12700">
+            <a:solidFill>
+              <a:srgbClr val="F27BB0"/>
+            </a:solidFill>
+            <a:prstDash val="solid"/>
+          </a:ln>
+        </p:spPr>
+      </p:sp>
+      <p:sp>
+        <p:nvSpPr>
+          <p:cNvPr id="10" name="Text 8"/>
+          <p:cNvSpPr txBox="1"/>
+          <p:nvPr/>
+        </p:nvSpPr>
+        <p:spPr>
+          <a:xfrm>
+            <a:off x="6537960" y="1828800"/>
+            <a:ext cx="1371600" cy="457200"/>
+          </a:xfrm>
+          <a:prstGeom prst="rect">
+            <a:avLst/>
+          </a:prstGeom>
+          <a:noFill/>
+          <a:ln/>
+        </p:spPr>
+        <p:txBody>
+          <a:bodyPr wrap="square" lIns="0" tIns="0" rIns="0" bIns="0" rtlCol="0" anchor="ctr"/>
+          <a:lstStyle/>
+          <a:p>
+            <a:pPr algn="ctr" indent="0" marL="0">
+              <a:buNone/>
+            </a:pPr>
+            <a:r>
+              <a:rPr lang="en-US" sz="1800" b="1" dirty="0">
+                <a:solidFill>
+                  <a:srgbClr val="FFFFFF"/>
+                </a:solidFill>
+                <a:latin typeface="Calibri" pitchFamily="34" charset="0"/>
+                <a:ea typeface="Calibri" pitchFamily="34" charset="-122"/>
+                <a:cs typeface="Calibri" pitchFamily="34" charset="-120"/>
+              </a:rPr>
+              <a:t>DON'T</a:t>
+            </a:r>
+            <a:endParaRPr lang="en-US" sz="1800" dirty="0"/>
+          </a:p>
+        </p:txBody>
+      </p:sp>
+      <p:sp>
+        <p:nvSpPr>
+          <p:cNvPr id="11" name="Text 9"/>
+          <p:cNvSpPr txBox="1"/>
+          <p:nvPr/>
+        </p:nvSpPr>
+        <p:spPr>
+          <a:xfrm>
+            <a:off x="6537960" y="2514600"/>
+            <a:ext cx="4800600" cy="3749040"/>
+          </a:xfrm>
+          <a:prstGeom prst="rect">
+            <a:avLst/>
+          </a:prstGeom>
+          <a:noFill/>
+          <a:ln/>
+        </p:spPr>
+        <p:txBody>
+          <a:bodyPr wrap="square" lIns="0" tIns="0" rIns="0" bIns="0" rtlCol="0" anchor="t"/>
+          <a:lstStyle/>
+          <a:p>
+            <a:pPr marL="342900" indent="-342900">
+              <a:spcAft>
+                <a:spcPts val="800"/>
+              </a:spcAft>
+              <a:buSzPct val="100000"/>
+              <a:buChar char="•"/>
+            </a:pPr>
+            <a:r>
+              <a:rPr lang="en-US" sz="1500" dirty="0">
+                <a:solidFill>
+                  <a:srgbClr val="3B2A5C"/>
+                </a:solidFill>
+                <a:latin typeface="Calibri" pitchFamily="34" charset="0"/>
+                <a:ea typeface="Calibri" pitchFamily="34" charset="-122"/>
+                <a:cs typeface="Calibri" pitchFamily="34" charset="-120"/>
+              </a:rPr>
+              <a:t>Jangan taruh di luar endcap Thermal atau campur dengan produk lain</a:t>
+            </a:r>
+            <a:endParaRPr lang="en-US" sz="1500" dirty="0"/>
+          </a:p>
+          <a:p>
+            <a:pPr marL="342900" indent="-342900">
+              <a:spcAft>
+                <a:spcPts val="800"/>
+              </a:spcAft>
+              <a:buSzPct val="100000"/>
+              <a:buChar char="•"/>
+            </a:pPr>
+            <a:r>
+              <a:rPr lang="en-US" sz="1500" dirty="0">
+                <a:solidFill>
+                  <a:srgbClr val="3B2A5C"/>
+                </a:solidFill>
+                <a:latin typeface="Calibri" pitchFamily="34" charset="0"/>
+                <a:ea typeface="Calibri" pitchFamily="34" charset="-122"/>
+                <a:cs typeface="Calibri" pitchFamily="34" charset="-120"/>
+              </a:rPr>
+              <a:t>Jangan biarkan rak kosong atau terisi sebagian</a:t>
+            </a:r>
+            <a:endParaRPr lang="en-US" sz="1500" dirty="0"/>
+          </a:p>
+          <a:p>
+            <a:pPr marL="342900" indent="-342900">
+              <a:spcAft>
+                <a:spcPts val="800"/>
+              </a:spcAft>
+              <a:buSzPct val="100000"/>
+              <a:buChar char="•"/>
+            </a:pPr>
+            <a:r>
+              <a:rPr lang="en-US" sz="1500" dirty="0">
+                <a:solidFill>
+                  <a:srgbClr val="3B2A5C"/>
+                </a:solidFill>
+                <a:latin typeface="Calibri" pitchFamily="34" charset="0"/>
+                <a:ea typeface="Calibri" pitchFamily="34" charset="-122"/>
+                <a:cs typeface="Calibri" pitchFamily="34" charset="-120"/>
+              </a:rPr>
+              <a:t>Jangan buka PDQ selain 1 SMALL dan 1 LARGE</a:t>
+            </a:r>
+            <a:endParaRPr lang="en-US" sz="1500" dirty="0"/>
+          </a:p>
+          <a:p>
+            <a:pPr marL="342900" indent="-342900">
+              <a:spcAft>
+                <a:spcPts val="800"/>
+              </a:spcAft>
+              <a:buSzPct val="100000"/>
+              <a:buChar char="•"/>
+            </a:pPr>
+            <a:r>
+              <a:rPr lang="en-US" sz="1500" dirty="0">
+                <a:solidFill>
+                  <a:srgbClr val="3B2A5C"/>
+                </a:solidFill>
+                <a:latin typeface="Calibri" pitchFamily="34" charset="0"/>
+                <a:ea typeface="Calibri" pitchFamily="34" charset="-122"/>
+                <a:cs typeface="Calibri" pitchFamily="34" charset="-120"/>
+              </a:rPr>
+              <a:t>Jangan bocorkan isi box tersegel (ditimbang, diguncang, atau diberi petunjuk)</a:t>
+            </a:r>
+            <a:endParaRPr lang="en-US" sz="1500" dirty="0"/>
+          </a:p>
+          <a:p>
+            <a:pPr marL="342900" indent="-342900">
+              <a:spcAft>
+                <a:spcPts val="800"/>
+              </a:spcAft>
+              <a:buSzPct val="100000"/>
+              <a:buChar char="•"/>
+            </a:pPr>
+            <a:r>
+              <a:rPr lang="en-US" sz="1500" dirty="0">
+                <a:solidFill>
+                  <a:srgbClr val="3B2A5C"/>
+                </a:solidFill>
+                <a:latin typeface="Calibri" pitchFamily="34" charset="0"/>
+                <a:ea typeface="Calibri" pitchFamily="34" charset="-122"/>
+                <a:cs typeface="Calibri" pitchFamily="34" charset="-120"/>
+              </a:rPr>
+              <a:t>Jangan ubah susunan, qty, atau tinggi rak</a:t>
+            </a:r>
+            <a:endParaRPr lang="en-US" sz="1500" dirty="0"/>
+          </a:p>
+          <a:p>
+            <a:pPr marL="342900" indent="-342900">
+              <a:spcAft>
+                <a:spcPts val="800"/>
+              </a:spcAft>
+              <a:buSzPct val="100000"/>
+              <a:buChar char="•"/>
+            </a:pPr>
+            <a:r>
+              <a:rPr lang="en-US" sz="1500" dirty="0">
+                <a:solidFill>
+                  <a:srgbClr val="3B2A5C"/>
+                </a:solidFill>
+                <a:latin typeface="Calibri" pitchFamily="34" charset="0"/>
+                <a:ea typeface="Calibri" pitchFamily="34" charset="-122"/>
+                <a:cs typeface="Calibri" pitchFamily="34" charset="-120"/>
+              </a:rPr>
+              <a:t>Jangan jual unit sampel yang sudah dibuka sebagai produk baru</a:t>
+            </a:r>
+            <a:endParaRPr lang="en-US" sz="1500" dirty="0"/>
+          </a:p>
+          <a:p>
+            <a:pPr marL="342900" indent="-342900">
+              <a:spcAft>
+                <a:spcPts val="800"/>
+              </a:spcAft>
+              <a:buSzPct val="100000"/>
+              <a:buChar char="•"/>
+            </a:pPr>
+            <a:r>
+              <a:rPr lang="en-US" sz="1500" dirty="0">
+                <a:solidFill>
+                  <a:srgbClr val="3B2A5C"/>
+                </a:solidFill>
+                <a:latin typeface="Calibri" pitchFamily="34" charset="0"/>
+                <a:ea typeface="Calibri" pitchFamily="34" charset="-122"/>
+                <a:cs typeface="Calibri" pitchFamily="34" charset="-120"/>
+              </a:rPr>
+              <a:t>Jangan cetak POP sementara selain di percetakan</a:t>
+            </a:r>
+            <a:endParaRPr lang="en-US" sz="1500" dirty="0"/>
+          </a:p>
+        </p:txBody>
+      </p:sp>
+    </p:spTree>
+  </p:cSld>
+  <p:clrMapOvr>
+    <a:masterClrMapping/>
+  </p:clrMapOvr>
+</p:sld>
+</file>
+
+<file path=ppt/slides/slide11.xml><?xml version="1.0" encoding="utf-8"?>
+<p:sld xmlns:a="http://schemas.openxmlformats.org/drawingml/2006/main" xmlns:r="http://schemas.openxmlformats.org/officeDocument/2006/relationships" xmlns:p="http://schemas.openxmlformats.org/presentationml/2006/main">
+  <p:cSld name="Slide 11">
+    <p:bg>
+      <p:bgPr>
+        <a:solidFill>
           <a:srgbClr val="3B2A5C"/>
         </a:solidFill>
       </p:bgPr>
@@ -2511,7 +3234,7 @@
                 <a:ea typeface="Calibri" pitchFamily="34" charset="-122"/>
                 <a:cs typeface="Calibri" pitchFamily="34" charset="-120"/>
               </a:rPr>
-              <a:t>6 warna dibuka sebagai sampel, Secret tetap tersegel</a:t>
+              <a:t>Buka 1 PDQ SMALL + 1 PDQ LARGE sesuai video MD, display 6 warna (5 bila Secret diamankan)</a:t>
             </a:r>
             <a:endParaRPr lang="en-US" sz="1600" dirty="0"/>
           </a:p>
@@ -2877,6 +3600,136 @@
         <p:spPr>
           <a:xfrm>
             <a:off x="1325880" y="5276088"/>
+            <a:ext cx="10149840" cy="548640"/>
+          </a:xfrm>
+          <a:prstGeom prst="rect">
+            <a:avLst/>
+          </a:prstGeom>
+          <a:noFill/>
+          <a:ln/>
+        </p:spPr>
+        <p:txBody>
+          <a:bodyPr wrap="square" lIns="0" tIns="0" rIns="0" bIns="0" rtlCol="0" anchor="ctr"/>
+          <a:lstStyle/>
+          <a:p>
+            <a:pPr indent="0" marL="0">
+              <a:buNone/>
+            </a:pPr>
+            <a:r>
+              <a:rPr lang="en-US" sz="1600" dirty="0">
+                <a:solidFill>
+                  <a:srgbClr val="FFFFFF"/>
+                </a:solidFill>
+                <a:latin typeface="Calibri" pitchFamily="34" charset="0"/>
+                <a:ea typeface="Calibri" pitchFamily="34" charset="-122"/>
+                <a:cs typeface="Calibri" pitchFamily="34" charset="-120"/>
+              </a:rPr>
+              <a:t>Kardus display dibuka pelan-pelan, struktur kardus tidak rusak</a:t>
+            </a:r>
+            <a:endParaRPr lang="en-US" sz="1600" dirty="0"/>
+          </a:p>
+        </p:txBody>
+      </p:sp>
+      <p:sp>
+        <p:nvSpPr>
+          <p:cNvPr id="31" name="Shape 29"/>
+          <p:cNvSpPr/>
+          <p:nvPr/>
+        </p:nvSpPr>
+        <p:spPr>
+          <a:xfrm>
+            <a:off x="548640" y="5934456"/>
+            <a:ext cx="11064240" cy="548640"/>
+          </a:xfrm>
+          <a:prstGeom prst="roundRect">
+            <a:avLst>
+              <a:gd name="adj" fmla="val 20000"/>
+            </a:avLst>
+          </a:prstGeom>
+          <a:solidFill>
+            <a:srgbClr val="4D3B73"/>
+          </a:solidFill>
+          <a:ln w="12700">
+            <a:solidFill>
+              <a:srgbClr val="4D3B73"/>
+            </a:solidFill>
+            <a:prstDash val="solid"/>
+          </a:ln>
+        </p:spPr>
+      </p:sp>
+      <p:sp>
+        <p:nvSpPr>
+          <p:cNvPr id="32" name="Shape 30"/>
+          <p:cNvSpPr/>
+          <p:nvPr/>
+        </p:nvSpPr>
+        <p:spPr>
+          <a:xfrm>
+            <a:off x="731520" y="6025896"/>
+            <a:ext cx="365760" cy="365760"/>
+          </a:xfrm>
+          <a:prstGeom prst="ellipse">
+            <a:avLst/>
+          </a:prstGeom>
+          <a:solidFill>
+            <a:srgbClr val="FDE68A"/>
+          </a:solidFill>
+          <a:ln w="12700">
+            <a:solidFill>
+              <a:srgbClr val="FDE68A"/>
+            </a:solidFill>
+            <a:prstDash val="solid"/>
+          </a:ln>
+        </p:spPr>
+      </p:sp>
+      <p:sp>
+        <p:nvSpPr>
+          <p:cNvPr id="33" name="Text 31"/>
+          <p:cNvSpPr txBox="1"/>
+          <p:nvPr/>
+        </p:nvSpPr>
+        <p:spPr>
+          <a:xfrm>
+            <a:off x="731520" y="6025896"/>
+            <a:ext cx="365760" cy="365760"/>
+          </a:xfrm>
+          <a:prstGeom prst="rect">
+            <a:avLst/>
+          </a:prstGeom>
+          <a:noFill/>
+          <a:ln/>
+        </p:spPr>
+        <p:txBody>
+          <a:bodyPr wrap="square" lIns="0" tIns="0" rIns="0" bIns="0" rtlCol="0" anchor="ctr"/>
+          <a:lstStyle/>
+          <a:p>
+            <a:pPr algn="ctr" indent="0" marL="0">
+              <a:buNone/>
+            </a:pPr>
+            <a:r>
+              <a:rPr lang="en-US" sz="1600" b="1" dirty="0">
+                <a:solidFill>
+                  <a:srgbClr val="3B2A5C"/>
+                </a:solidFill>
+                <a:latin typeface="Calibri" pitchFamily="34" charset="0"/>
+                <a:ea typeface="Calibri" pitchFamily="34" charset="-122"/>
+                <a:cs typeface="Calibri" pitchFamily="34" charset="-120"/>
+              </a:rPr>
+              <a:t>✓</a:t>
+            </a:r>
+            <a:endParaRPr lang="en-US" sz="1600" dirty="0"/>
+          </a:p>
+        </p:txBody>
+      </p:sp>
+      <p:sp>
+        <p:nvSpPr>
+          <p:cNvPr id="34" name="Text 32"/>
+          <p:cNvSpPr txBox="1"/>
+          <p:nvPr/>
+        </p:nvSpPr>
+        <p:spPr>
+          <a:xfrm>
+            <a:off x="1325880" y="5934456"/>
             <a:ext cx="10149840" cy="548640"/>
           </a:xfrm>
           <a:prstGeom prst="rect">
@@ -3856,7 +4709,7 @@
                 <a:ea typeface="Calibri" pitchFamily="34" charset="-122"/>
                 <a:cs typeface="Calibri" pitchFamily="34" charset="-120"/>
               </a:rPr>
-              <a:t>Blind Box dibuka dan didisplay dalam 6 warna, selain warna Secret.</a:t>
+              <a:t>Buka 1 PDQ SMALL dan 1 PDQ LARGE, display 6 warna (5 bila dapat Secret).</a:t>
             </a:r>
             <a:endParaRPr lang="en-US" sz="1600" dirty="0"/>
           </a:p>
@@ -4104,7 +4957,7 @@
       </p:sp>
       <p:pic>
         <p:nvPicPr>
-          <p:cNvPr id="3" name="Image 0" descr="/tmp/claude-0/-home-user-Testing-Erie/31a86cd2-3938-53d6-901f-33e16b329622/scratchpad/w/mock3d.png">    </p:cNvPr>
+          <p:cNvPr id="3" name="Image 0" descr="/tmp/claude-0/-home-user-Testing-Erie/31a86cd2-3938-53d6-901f-33e16b329622/scratchpad/w/mock3d_new.png">    </p:cNvPr>
           <p:cNvPicPr>
             <a:picLocks noChangeAspect="1"/>
           </p:cNvPicPr>
@@ -4118,8 +4971,8 @@
         </p:blipFill>
         <p:spPr>
           <a:xfrm>
-            <a:off x="731520" y="1097280"/>
-            <a:ext cx="4937760" cy="5556879"/>
+            <a:off x="1280160" y="1097280"/>
+            <a:ext cx="3154680" cy="5135912"/>
           </a:xfrm>
           <a:prstGeom prst="rect">
             <a:avLst/>
@@ -4360,7 +5213,7 @@
                 <a:ea typeface="Calibri" pitchFamily="34" charset="-122"/>
                 <a:cs typeface="Calibri" pitchFamily="34" charset="-120"/>
               </a:rPr>
-              <a:t>6 botol warna terbuka sebagai display produk, tanpa Secret.</a:t>
+              <a:t>6 warna terbuka sebagai display (5 warna bila dapat Secret).</a:t>
             </a:r>
             <a:endParaRPr lang="en-US" sz="1800" dirty="0"/>
           </a:p>
@@ -20720,6 +21573,925 @@
                 <a:ea typeface="Cambria" pitchFamily="34" charset="-122"/>
                 <a:cs typeface="Cambria" pitchFamily="34" charset="-120"/>
               </a:rPr>
+              <a:t>Cara membuka produk untuk display</a:t>
+            </a:r>
+            <a:endParaRPr lang="en-US" sz="3600" dirty="0"/>
+          </a:p>
+        </p:txBody>
+      </p:sp>
+      <p:sp>
+        <p:nvSpPr>
+          <p:cNvPr id="3" name="Text 1"/>
+          <p:cNvSpPr txBox="1"/>
+          <p:nvPr/>
+        </p:nvSpPr>
+        <p:spPr>
+          <a:xfrm>
+            <a:off x="548640" y="1051560"/>
+            <a:ext cx="11064240" cy="365760"/>
+          </a:xfrm>
+          <a:prstGeom prst="rect">
+            <a:avLst/>
+          </a:prstGeom>
+          <a:noFill/>
+          <a:ln/>
+        </p:spPr>
+        <p:txBody>
+          <a:bodyPr wrap="square" lIns="0" tIns="0" rIns="0" bIns="0" rtlCol="0" anchor="ctr"/>
+          <a:lstStyle/>
+          <a:p>
+            <a:pPr indent="0" marL="0">
+              <a:buNone/>
+            </a:pPr>
+            <a:r>
+              <a:rPr lang="en-US" sz="1600" dirty="0">
+                <a:solidFill>
+                  <a:srgbClr val="6B6580"/>
+                </a:solidFill>
+                <a:latin typeface="Calibri" pitchFamily="34" charset="0"/>
+                <a:ea typeface="Calibri" pitchFamily="34" charset="-122"/>
+                <a:cs typeface="Calibri" pitchFamily="34" charset="-120"/>
+              </a:rPr>
+              <a:t>Berlaku untuk sampel display di endcap Thermal</a:t>
+            </a:r>
+            <a:endParaRPr lang="en-US" sz="1600" dirty="0"/>
+          </a:p>
+        </p:txBody>
+      </p:sp>
+      <p:sp>
+        <p:nvSpPr>
+          <p:cNvPr id="4" name="Shape 2"/>
+          <p:cNvSpPr/>
+          <p:nvPr/>
+        </p:nvSpPr>
+        <p:spPr>
+          <a:xfrm>
+            <a:off x="548640" y="1737360"/>
+            <a:ext cx="2651760" cy="3017520"/>
+          </a:xfrm>
+          <a:prstGeom prst="roundRect">
+            <a:avLst>
+              <a:gd name="adj" fmla="val 5172"/>
+            </a:avLst>
+          </a:prstGeom>
+          <a:solidFill>
+            <a:srgbClr val="E3F6FB"/>
+          </a:solidFill>
+          <a:ln w="12700">
+            <a:solidFill>
+              <a:srgbClr val="E3F6FB"/>
+            </a:solidFill>
+            <a:prstDash val="solid"/>
+          </a:ln>
+        </p:spPr>
+      </p:sp>
+      <p:sp>
+        <p:nvSpPr>
+          <p:cNvPr id="5" name="Shape 3"/>
+          <p:cNvSpPr/>
+          <p:nvPr/>
+        </p:nvSpPr>
+        <p:spPr>
+          <a:xfrm>
+            <a:off x="777240" y="1965960"/>
+            <a:ext cx="640080" cy="640080"/>
+          </a:xfrm>
+          <a:prstGeom prst="ellipse">
+            <a:avLst/>
+          </a:prstGeom>
+          <a:solidFill>
+            <a:srgbClr val="4DC3E0"/>
+          </a:solidFill>
+          <a:ln w="12700">
+            <a:solidFill>
+              <a:srgbClr val="4DC3E0"/>
+            </a:solidFill>
+            <a:prstDash val="solid"/>
+          </a:ln>
+        </p:spPr>
+      </p:sp>
+      <p:sp>
+        <p:nvSpPr>
+          <p:cNvPr id="6" name="Text 4"/>
+          <p:cNvSpPr txBox="1"/>
+          <p:nvPr/>
+        </p:nvSpPr>
+        <p:spPr>
+          <a:xfrm>
+            <a:off x="777240" y="1965960"/>
+            <a:ext cx="640080" cy="640080"/>
+          </a:xfrm>
+          <a:prstGeom prst="rect">
+            <a:avLst/>
+          </a:prstGeom>
+          <a:noFill/>
+          <a:ln/>
+        </p:spPr>
+        <p:txBody>
+          <a:bodyPr wrap="square" lIns="0" tIns="0" rIns="0" bIns="0" rtlCol="0" anchor="ctr"/>
+          <a:lstStyle/>
+          <a:p>
+            <a:pPr algn="ctr" indent="0" marL="0">
+              <a:buNone/>
+            </a:pPr>
+            <a:r>
+              <a:rPr lang="en-US" sz="2400" b="1" dirty="0">
+                <a:solidFill>
+                  <a:srgbClr val="FFFFFF"/>
+                </a:solidFill>
+                <a:latin typeface="Calibri" pitchFamily="34" charset="0"/>
+                <a:ea typeface="Calibri" pitchFamily="34" charset="-122"/>
+                <a:cs typeface="Calibri" pitchFamily="34" charset="-120"/>
+              </a:rPr>
+              <a:t>1</a:t>
+            </a:r>
+            <a:endParaRPr lang="en-US" sz="2400" dirty="0"/>
+          </a:p>
+        </p:txBody>
+      </p:sp>
+      <p:sp>
+        <p:nvSpPr>
+          <p:cNvPr id="7" name="Text 5"/>
+          <p:cNvSpPr txBox="1"/>
+          <p:nvPr/>
+        </p:nvSpPr>
+        <p:spPr>
+          <a:xfrm>
+            <a:off x="777240" y="2788920"/>
+            <a:ext cx="2194560" cy="457200"/>
+          </a:xfrm>
+          <a:prstGeom prst="rect">
+            <a:avLst/>
+          </a:prstGeom>
+          <a:noFill/>
+          <a:ln/>
+        </p:spPr>
+        <p:txBody>
+          <a:bodyPr wrap="square" lIns="0" tIns="0" rIns="0" bIns="0" rtlCol="0" anchor="ctr"/>
+          <a:lstStyle/>
+          <a:p>
+            <a:pPr indent="0" marL="0">
+              <a:buNone/>
+            </a:pPr>
+            <a:r>
+              <a:rPr lang="en-US" sz="2000" b="1" dirty="0">
+                <a:solidFill>
+                  <a:srgbClr val="3B2A5C"/>
+                </a:solidFill>
+                <a:latin typeface="Calibri" pitchFamily="34" charset="0"/>
+                <a:ea typeface="Calibri" pitchFamily="34" charset="-122"/>
+                <a:cs typeface="Calibri" pitchFamily="34" charset="-120"/>
+              </a:rPr>
+              <a:t>Ambil PDQ</a:t>
+            </a:r>
+            <a:endParaRPr lang="en-US" sz="2000" dirty="0"/>
+          </a:p>
+        </p:txBody>
+      </p:sp>
+      <p:sp>
+        <p:nvSpPr>
+          <p:cNvPr id="8" name="Text 6"/>
+          <p:cNvSpPr txBox="1"/>
+          <p:nvPr/>
+        </p:nvSpPr>
+        <p:spPr>
+          <a:xfrm>
+            <a:off x="777240" y="3291840"/>
+            <a:ext cx="2240280" cy="1371600"/>
+          </a:xfrm>
+          <a:prstGeom prst="rect">
+            <a:avLst/>
+          </a:prstGeom>
+          <a:noFill/>
+          <a:ln/>
+        </p:spPr>
+        <p:txBody>
+          <a:bodyPr wrap="square" lIns="0" tIns="0" rIns="0" bIns="0" rtlCol="0" anchor="t"/>
+          <a:lstStyle/>
+          <a:p>
+            <a:pPr indent="0" marL="0">
+              <a:buNone/>
+            </a:pPr>
+            <a:r>
+              <a:rPr lang="en-US" sz="1500" dirty="0">
+                <a:solidFill>
+                  <a:srgbClr val="3B2A5C"/>
+                </a:solidFill>
+                <a:latin typeface="Calibri" pitchFamily="34" charset="0"/>
+                <a:ea typeface="Calibri" pitchFamily="34" charset="-122"/>
+                <a:cs typeface="Calibri" pitchFamily="34" charset="-120"/>
+              </a:rPr>
+              <a:t>Ambil 1 PDQ untuk SKU SMALL dan 1 PDQ untuk SKU LARGE.</a:t>
+            </a:r>
+            <a:endParaRPr lang="en-US" sz="1500" dirty="0"/>
+          </a:p>
+        </p:txBody>
+      </p:sp>
+      <p:sp>
+        <p:nvSpPr>
+          <p:cNvPr id="9" name="Shape 7"/>
+          <p:cNvSpPr/>
+          <p:nvPr/>
+        </p:nvSpPr>
+        <p:spPr>
+          <a:xfrm>
+            <a:off x="3383280" y="1737360"/>
+            <a:ext cx="2651760" cy="3017520"/>
+          </a:xfrm>
+          <a:prstGeom prst="roundRect">
+            <a:avLst>
+              <a:gd name="adj" fmla="val 5172"/>
+            </a:avLst>
+          </a:prstGeom>
+          <a:solidFill>
+            <a:srgbClr val="FDEAF3"/>
+          </a:solidFill>
+          <a:ln w="12700">
+            <a:solidFill>
+              <a:srgbClr val="FDEAF3"/>
+            </a:solidFill>
+            <a:prstDash val="solid"/>
+          </a:ln>
+        </p:spPr>
+      </p:sp>
+      <p:sp>
+        <p:nvSpPr>
+          <p:cNvPr id="10" name="Shape 8"/>
+          <p:cNvSpPr/>
+          <p:nvPr/>
+        </p:nvSpPr>
+        <p:spPr>
+          <a:xfrm>
+            <a:off x="3611880" y="1965960"/>
+            <a:ext cx="640080" cy="640080"/>
+          </a:xfrm>
+          <a:prstGeom prst="ellipse">
+            <a:avLst/>
+          </a:prstGeom>
+          <a:solidFill>
+            <a:srgbClr val="F27BB0"/>
+          </a:solidFill>
+          <a:ln w="12700">
+            <a:solidFill>
+              <a:srgbClr val="F27BB0"/>
+            </a:solidFill>
+            <a:prstDash val="solid"/>
+          </a:ln>
+        </p:spPr>
+      </p:sp>
+      <p:sp>
+        <p:nvSpPr>
+          <p:cNvPr id="11" name="Text 9"/>
+          <p:cNvSpPr txBox="1"/>
+          <p:nvPr/>
+        </p:nvSpPr>
+        <p:spPr>
+          <a:xfrm>
+            <a:off x="3611880" y="1965960"/>
+            <a:ext cx="640080" cy="640080"/>
+          </a:xfrm>
+          <a:prstGeom prst="rect">
+            <a:avLst/>
+          </a:prstGeom>
+          <a:noFill/>
+          <a:ln/>
+        </p:spPr>
+        <p:txBody>
+          <a:bodyPr wrap="square" lIns="0" tIns="0" rIns="0" bIns="0" rtlCol="0" anchor="ctr"/>
+          <a:lstStyle/>
+          <a:p>
+            <a:pPr algn="ctr" indent="0" marL="0">
+              <a:buNone/>
+            </a:pPr>
+            <a:r>
+              <a:rPr lang="en-US" sz="2400" b="1" dirty="0">
+                <a:solidFill>
+                  <a:srgbClr val="FFFFFF"/>
+                </a:solidFill>
+                <a:latin typeface="Calibri" pitchFamily="34" charset="0"/>
+                <a:ea typeface="Calibri" pitchFamily="34" charset="-122"/>
+                <a:cs typeface="Calibri" pitchFamily="34" charset="-120"/>
+              </a:rPr>
+              <a:t>2</a:t>
+            </a:r>
+            <a:endParaRPr lang="en-US" sz="2400" dirty="0"/>
+          </a:p>
+        </p:txBody>
+      </p:sp>
+      <p:sp>
+        <p:nvSpPr>
+          <p:cNvPr id="12" name="Text 10"/>
+          <p:cNvSpPr txBox="1"/>
+          <p:nvPr/>
+        </p:nvSpPr>
+        <p:spPr>
+          <a:xfrm>
+            <a:off x="3611880" y="2788920"/>
+            <a:ext cx="2194560" cy="457200"/>
+          </a:xfrm>
+          <a:prstGeom prst="rect">
+            <a:avLst/>
+          </a:prstGeom>
+          <a:noFill/>
+          <a:ln/>
+        </p:spPr>
+        <p:txBody>
+          <a:bodyPr wrap="square" lIns="0" tIns="0" rIns="0" bIns="0" rtlCol="0" anchor="ctr"/>
+          <a:lstStyle/>
+          <a:p>
+            <a:pPr indent="0" marL="0">
+              <a:buNone/>
+            </a:pPr>
+            <a:r>
+              <a:rPr lang="en-US" sz="2000" b="1" dirty="0">
+                <a:solidFill>
+                  <a:srgbClr val="3B2A5C"/>
+                </a:solidFill>
+                <a:latin typeface="Calibri" pitchFamily="34" charset="0"/>
+                <a:ea typeface="Calibri" pitchFamily="34" charset="-122"/>
+                <a:cs typeface="Calibri" pitchFamily="34" charset="-120"/>
+              </a:rPr>
+              <a:t>Buka pelan-pelan</a:t>
+            </a:r>
+            <a:endParaRPr lang="en-US" sz="2000" dirty="0"/>
+          </a:p>
+        </p:txBody>
+      </p:sp>
+      <p:sp>
+        <p:nvSpPr>
+          <p:cNvPr id="13" name="Text 11"/>
+          <p:cNvSpPr txBox="1"/>
+          <p:nvPr/>
+        </p:nvSpPr>
+        <p:spPr>
+          <a:xfrm>
+            <a:off x="3611880" y="3291840"/>
+            <a:ext cx="2240280" cy="1371600"/>
+          </a:xfrm>
+          <a:prstGeom prst="rect">
+            <a:avLst/>
+          </a:prstGeom>
+          <a:noFill/>
+          <a:ln/>
+        </p:spPr>
+        <p:txBody>
+          <a:bodyPr wrap="square" lIns="0" tIns="0" rIns="0" bIns="0" rtlCol="0" anchor="t"/>
+          <a:lstStyle/>
+          <a:p>
+            <a:pPr indent="0" marL="0">
+              <a:buNone/>
+            </a:pPr>
+            <a:r>
+              <a:rPr lang="en-US" sz="1500" dirty="0">
+                <a:solidFill>
+                  <a:srgbClr val="3B2A5C"/>
+                </a:solidFill>
+                <a:latin typeface="Calibri" pitchFamily="34" charset="0"/>
+                <a:ea typeface="Calibri" pitchFamily="34" charset="-122"/>
+                <a:cs typeface="Calibri" pitchFamily="34" charset="-120"/>
+              </a:rPr>
+              <a:t>Buka kardus display dengan hati-hati agar struktur kardus tidak rusak.</a:t>
+            </a:r>
+            <a:endParaRPr lang="en-US" sz="1500" dirty="0"/>
+          </a:p>
+        </p:txBody>
+      </p:sp>
+      <p:sp>
+        <p:nvSpPr>
+          <p:cNvPr id="14" name="Shape 12"/>
+          <p:cNvSpPr/>
+          <p:nvPr/>
+        </p:nvSpPr>
+        <p:spPr>
+          <a:xfrm>
+            <a:off x="6217920" y="1737360"/>
+            <a:ext cx="2651760" cy="3017520"/>
+          </a:xfrm>
+          <a:prstGeom prst="roundRect">
+            <a:avLst>
+              <a:gd name="adj" fmla="val 5172"/>
+            </a:avLst>
+          </a:prstGeom>
+          <a:solidFill>
+            <a:srgbClr val="E3F6FB"/>
+          </a:solidFill>
+          <a:ln w="12700">
+            <a:solidFill>
+              <a:srgbClr val="E3F6FB"/>
+            </a:solidFill>
+            <a:prstDash val="solid"/>
+          </a:ln>
+        </p:spPr>
+      </p:sp>
+      <p:sp>
+        <p:nvSpPr>
+          <p:cNvPr id="15" name="Shape 13"/>
+          <p:cNvSpPr/>
+          <p:nvPr/>
+        </p:nvSpPr>
+        <p:spPr>
+          <a:xfrm>
+            <a:off x="6446520" y="1965960"/>
+            <a:ext cx="640080" cy="640080"/>
+          </a:xfrm>
+          <a:prstGeom prst="ellipse">
+            <a:avLst/>
+          </a:prstGeom>
+          <a:solidFill>
+            <a:srgbClr val="4DC3E0"/>
+          </a:solidFill>
+          <a:ln w="12700">
+            <a:solidFill>
+              <a:srgbClr val="4DC3E0"/>
+            </a:solidFill>
+            <a:prstDash val="solid"/>
+          </a:ln>
+        </p:spPr>
+      </p:sp>
+      <p:sp>
+        <p:nvSpPr>
+          <p:cNvPr id="16" name="Text 14"/>
+          <p:cNvSpPr txBox="1"/>
+          <p:nvPr/>
+        </p:nvSpPr>
+        <p:spPr>
+          <a:xfrm>
+            <a:off x="6446520" y="1965960"/>
+            <a:ext cx="640080" cy="640080"/>
+          </a:xfrm>
+          <a:prstGeom prst="rect">
+            <a:avLst/>
+          </a:prstGeom>
+          <a:noFill/>
+          <a:ln/>
+        </p:spPr>
+        <p:txBody>
+          <a:bodyPr wrap="square" lIns="0" tIns="0" rIns="0" bIns="0" rtlCol="0" anchor="ctr"/>
+          <a:lstStyle/>
+          <a:p>
+            <a:pPr algn="ctr" indent="0" marL="0">
+              <a:buNone/>
+            </a:pPr>
+            <a:r>
+              <a:rPr lang="en-US" sz="2400" b="1" dirty="0">
+                <a:solidFill>
+                  <a:srgbClr val="FFFFFF"/>
+                </a:solidFill>
+                <a:latin typeface="Calibri" pitchFamily="34" charset="0"/>
+                <a:ea typeface="Calibri" pitchFamily="34" charset="-122"/>
+                <a:cs typeface="Calibri" pitchFamily="34" charset="-120"/>
+              </a:rPr>
+              <a:t>3</a:t>
+            </a:r>
+            <a:endParaRPr lang="en-US" sz="2400" dirty="0"/>
+          </a:p>
+        </p:txBody>
+      </p:sp>
+      <p:sp>
+        <p:nvSpPr>
+          <p:cNvPr id="17" name="Text 15"/>
+          <p:cNvSpPr txBox="1"/>
+          <p:nvPr/>
+        </p:nvSpPr>
+        <p:spPr>
+          <a:xfrm>
+            <a:off x="6446520" y="2788920"/>
+            <a:ext cx="2194560" cy="457200"/>
+          </a:xfrm>
+          <a:prstGeom prst="rect">
+            <a:avLst/>
+          </a:prstGeom>
+          <a:noFill/>
+          <a:ln/>
+        </p:spPr>
+        <p:txBody>
+          <a:bodyPr wrap="square" lIns="0" tIns="0" rIns="0" bIns="0" rtlCol="0" anchor="ctr"/>
+          <a:lstStyle/>
+          <a:p>
+            <a:pPr indent="0" marL="0">
+              <a:buNone/>
+            </a:pPr>
+            <a:r>
+              <a:rPr lang="en-US" sz="2000" b="1" dirty="0">
+                <a:solidFill>
+                  <a:srgbClr val="3B2A5C"/>
+                </a:solidFill>
+                <a:latin typeface="Calibri" pitchFamily="34" charset="0"/>
+                <a:ea typeface="Calibri" pitchFamily="34" charset="-122"/>
+                <a:cs typeface="Calibri" pitchFamily="34" charset="-120"/>
+              </a:rPr>
+              <a:t>Cek warna</a:t>
+            </a:r>
+            <a:endParaRPr lang="en-US" sz="2000" dirty="0"/>
+          </a:p>
+        </p:txBody>
+      </p:sp>
+      <p:sp>
+        <p:nvSpPr>
+          <p:cNvPr id="18" name="Text 16"/>
+          <p:cNvSpPr txBox="1"/>
+          <p:nvPr/>
+        </p:nvSpPr>
+        <p:spPr>
+          <a:xfrm>
+            <a:off x="6446520" y="3291840"/>
+            <a:ext cx="2240280" cy="1371600"/>
+          </a:xfrm>
+          <a:prstGeom prst="rect">
+            <a:avLst/>
+          </a:prstGeom>
+          <a:noFill/>
+          <a:ln/>
+        </p:spPr>
+        <p:txBody>
+          <a:bodyPr wrap="square" lIns="0" tIns="0" rIns="0" bIns="0" rtlCol="0" anchor="t"/>
+          <a:lstStyle/>
+          <a:p>
+            <a:pPr indent="0" marL="0">
+              <a:buNone/>
+            </a:pPr>
+            <a:r>
+              <a:rPr lang="en-US" sz="1500" dirty="0">
+                <a:solidFill>
+                  <a:srgbClr val="3B2A5C"/>
+                </a:solidFill>
+                <a:latin typeface="Calibri" pitchFamily="34" charset="0"/>
+                <a:ea typeface="Calibri" pitchFamily="34" charset="-122"/>
+                <a:cs typeface="Calibri" pitchFamily="34" charset="-120"/>
+              </a:rPr>
+              <a:t>Dalam 1 PDQ warna pasti berbeda, tetapi ada kemungkinan dapat Secret.</a:t>
+            </a:r>
+            <a:endParaRPr lang="en-US" sz="1500" dirty="0"/>
+          </a:p>
+        </p:txBody>
+      </p:sp>
+      <p:sp>
+        <p:nvSpPr>
+          <p:cNvPr id="19" name="Shape 17"/>
+          <p:cNvSpPr/>
+          <p:nvPr/>
+        </p:nvSpPr>
+        <p:spPr>
+          <a:xfrm>
+            <a:off x="9052560" y="1737360"/>
+            <a:ext cx="2651760" cy="3017520"/>
+          </a:xfrm>
+          <a:prstGeom prst="roundRect">
+            <a:avLst>
+              <a:gd name="adj" fmla="val 5172"/>
+            </a:avLst>
+          </a:prstGeom>
+          <a:solidFill>
+            <a:srgbClr val="FDEAF3"/>
+          </a:solidFill>
+          <a:ln w="12700">
+            <a:solidFill>
+              <a:srgbClr val="FDEAF3"/>
+            </a:solidFill>
+            <a:prstDash val="solid"/>
+          </a:ln>
+        </p:spPr>
+      </p:sp>
+      <p:sp>
+        <p:nvSpPr>
+          <p:cNvPr id="20" name="Shape 18"/>
+          <p:cNvSpPr/>
+          <p:nvPr/>
+        </p:nvSpPr>
+        <p:spPr>
+          <a:xfrm>
+            <a:off x="9281160" y="1965960"/>
+            <a:ext cx="640080" cy="640080"/>
+          </a:xfrm>
+          <a:prstGeom prst="ellipse">
+            <a:avLst/>
+          </a:prstGeom>
+          <a:solidFill>
+            <a:srgbClr val="F27BB0"/>
+          </a:solidFill>
+          <a:ln w="12700">
+            <a:solidFill>
+              <a:srgbClr val="F27BB0"/>
+            </a:solidFill>
+            <a:prstDash val="solid"/>
+          </a:ln>
+        </p:spPr>
+      </p:sp>
+      <p:sp>
+        <p:nvSpPr>
+          <p:cNvPr id="21" name="Text 19"/>
+          <p:cNvSpPr txBox="1"/>
+          <p:nvPr/>
+        </p:nvSpPr>
+        <p:spPr>
+          <a:xfrm>
+            <a:off x="9281160" y="1965960"/>
+            <a:ext cx="640080" cy="640080"/>
+          </a:xfrm>
+          <a:prstGeom prst="rect">
+            <a:avLst/>
+          </a:prstGeom>
+          <a:noFill/>
+          <a:ln/>
+        </p:spPr>
+        <p:txBody>
+          <a:bodyPr wrap="square" lIns="0" tIns="0" rIns="0" bIns="0" rtlCol="0" anchor="ctr"/>
+          <a:lstStyle/>
+          <a:p>
+            <a:pPr algn="ctr" indent="0" marL="0">
+              <a:buNone/>
+            </a:pPr>
+            <a:r>
+              <a:rPr lang="en-US" sz="2400" b="1" dirty="0">
+                <a:solidFill>
+                  <a:srgbClr val="FFFFFF"/>
+                </a:solidFill>
+                <a:latin typeface="Calibri" pitchFamily="34" charset="0"/>
+                <a:ea typeface="Calibri" pitchFamily="34" charset="-122"/>
+                <a:cs typeface="Calibri" pitchFamily="34" charset="-120"/>
+              </a:rPr>
+              <a:t>4</a:t>
+            </a:r>
+            <a:endParaRPr lang="en-US" sz="2400" dirty="0"/>
+          </a:p>
+        </p:txBody>
+      </p:sp>
+      <p:sp>
+        <p:nvSpPr>
+          <p:cNvPr id="22" name="Text 20"/>
+          <p:cNvSpPr txBox="1"/>
+          <p:nvPr/>
+        </p:nvSpPr>
+        <p:spPr>
+          <a:xfrm>
+            <a:off x="9281160" y="2788920"/>
+            <a:ext cx="2194560" cy="457200"/>
+          </a:xfrm>
+          <a:prstGeom prst="rect">
+            <a:avLst/>
+          </a:prstGeom>
+          <a:noFill/>
+          <a:ln/>
+        </p:spPr>
+        <p:txBody>
+          <a:bodyPr wrap="square" lIns="0" tIns="0" rIns="0" bIns="0" rtlCol="0" anchor="ctr"/>
+          <a:lstStyle/>
+          <a:p>
+            <a:pPr indent="0" marL="0">
+              <a:buNone/>
+            </a:pPr>
+            <a:r>
+              <a:rPr lang="en-US" sz="2000" b="1" dirty="0">
+                <a:solidFill>
+                  <a:srgbClr val="3B2A5C"/>
+                </a:solidFill>
+                <a:latin typeface="Calibri" pitchFamily="34" charset="0"/>
+                <a:ea typeface="Calibri" pitchFamily="34" charset="-122"/>
+                <a:cs typeface="Calibri" pitchFamily="34" charset="-120"/>
+              </a:rPr>
+              <a:t>Display</a:t>
+            </a:r>
+            <a:endParaRPr lang="en-US" sz="2000" dirty="0"/>
+          </a:p>
+        </p:txBody>
+      </p:sp>
+      <p:sp>
+        <p:nvSpPr>
+          <p:cNvPr id="23" name="Text 21"/>
+          <p:cNvSpPr txBox="1"/>
+          <p:nvPr/>
+        </p:nvSpPr>
+        <p:spPr>
+          <a:xfrm>
+            <a:off x="9281160" y="3291840"/>
+            <a:ext cx="2240280" cy="1371600"/>
+          </a:xfrm>
+          <a:prstGeom prst="rect">
+            <a:avLst/>
+          </a:prstGeom>
+          <a:noFill/>
+          <a:ln/>
+        </p:spPr>
+        <p:txBody>
+          <a:bodyPr wrap="square" lIns="0" tIns="0" rIns="0" bIns="0" rtlCol="0" anchor="t"/>
+          <a:lstStyle/>
+          <a:p>
+            <a:pPr indent="0" marL="0">
+              <a:buNone/>
+            </a:pPr>
+            <a:r>
+              <a:rPr lang="en-US" sz="1500" dirty="0">
+                <a:solidFill>
+                  <a:srgbClr val="3B2A5C"/>
+                </a:solidFill>
+                <a:latin typeface="Calibri" pitchFamily="34" charset="0"/>
+                <a:ea typeface="Calibri" pitchFamily="34" charset="-122"/>
+                <a:cs typeface="Calibri" pitchFamily="34" charset="-120"/>
+              </a:rPr>
+              <a:t>Display 6 warna. Jika dapat Secret, amankan dulu dan display 5 warna.</a:t>
+            </a:r>
+            <a:endParaRPr lang="en-US" sz="1500" dirty="0"/>
+          </a:p>
+        </p:txBody>
+      </p:sp>
+      <p:sp>
+        <p:nvSpPr>
+          <p:cNvPr id="24" name="Shape 22"/>
+          <p:cNvSpPr/>
+          <p:nvPr/>
+        </p:nvSpPr>
+        <p:spPr>
+          <a:xfrm>
+            <a:off x="548640" y="5074920"/>
+            <a:ext cx="11064240" cy="1005840"/>
+          </a:xfrm>
+          <a:prstGeom prst="roundRect">
+            <a:avLst>
+              <a:gd name="adj" fmla="val 13636"/>
+            </a:avLst>
+          </a:prstGeom>
+          <a:solidFill>
+            <a:srgbClr val="3B2A5C"/>
+          </a:solidFill>
+          <a:ln w="12700">
+            <a:solidFill>
+              <a:srgbClr val="3B2A5C"/>
+            </a:solidFill>
+            <a:prstDash val="solid"/>
+          </a:ln>
+        </p:spPr>
+      </p:sp>
+      <p:sp>
+        <p:nvSpPr>
+          <p:cNvPr id="25" name="Shape 23"/>
+          <p:cNvSpPr/>
+          <p:nvPr/>
+        </p:nvSpPr>
+        <p:spPr>
+          <a:xfrm>
+            <a:off x="868680" y="5303520"/>
+            <a:ext cx="548640" cy="548640"/>
+          </a:xfrm>
+          <a:prstGeom prst="ellipse">
+            <a:avLst/>
+          </a:prstGeom>
+          <a:solidFill>
+            <a:srgbClr val="FDE68A"/>
+          </a:solidFill>
+          <a:ln w="12700">
+            <a:solidFill>
+              <a:srgbClr val="FDE68A"/>
+            </a:solidFill>
+            <a:prstDash val="solid"/>
+          </a:ln>
+        </p:spPr>
+      </p:sp>
+      <p:sp>
+        <p:nvSpPr>
+          <p:cNvPr id="26" name="Shape 24"/>
+          <p:cNvSpPr/>
+          <p:nvPr/>
+        </p:nvSpPr>
+        <p:spPr>
+          <a:xfrm rot="5400000">
+            <a:off x="1051560" y="5458968"/>
+            <a:ext cx="228600" cy="237744"/>
+          </a:xfrm>
+          <a:prstGeom prst="triangle">
+            <a:avLst/>
+          </a:prstGeom>
+          <a:solidFill>
+            <a:srgbClr val="3B2A5C"/>
+          </a:solidFill>
+          <a:ln w="12700">
+            <a:solidFill>
+              <a:srgbClr val="3B2A5C"/>
+            </a:solidFill>
+            <a:prstDash val="solid"/>
+          </a:ln>
+        </p:spPr>
+      </p:sp>
+      <p:sp>
+        <p:nvSpPr>
+          <p:cNvPr id="27" name="Text 25"/>
+          <p:cNvSpPr txBox="1"/>
+          <p:nvPr/>
+        </p:nvSpPr>
+        <p:spPr>
+          <a:xfrm>
+            <a:off x="1645920" y="5074920"/>
+            <a:ext cx="9692640" cy="1005840"/>
+          </a:xfrm>
+          <a:prstGeom prst="rect">
+            <a:avLst/>
+          </a:prstGeom>
+          <a:noFill/>
+          <a:ln/>
+        </p:spPr>
+        <p:txBody>
+          <a:bodyPr wrap="square" lIns="0" tIns="0" rIns="0" bIns="0" rtlCol="0" anchor="ctr"/>
+          <a:lstStyle/>
+          <a:p>
+            <a:pPr indent="0" marL="0">
+              <a:buNone/>
+            </a:pPr>
+            <a:r>
+              <a:rPr lang="en-US" sz="2000" b="1" dirty="0">
+                <a:solidFill>
+                  <a:srgbClr val="FFFFFF"/>
+                </a:solidFill>
+                <a:latin typeface="Calibri" pitchFamily="34" charset="0"/>
+                <a:ea typeface="Calibri" pitchFamily="34" charset="-122"/>
+                <a:cs typeface="Calibri" pitchFamily="34" charset="-120"/>
+              </a:rPr>
+              <a:t>Ikuti video tutorial membuka produk dari MD</a:t>
+            </a:r>
+            <a:endParaRPr lang="en-US" sz="2000" dirty="0"/>
+          </a:p>
+          <a:p>
+            <a:pPr indent="0" marL="0">
+              <a:buNone/>
+            </a:pPr>
+            <a:r>
+              <a:rPr lang="en-US" sz="1400" dirty="0">
+                <a:solidFill>
+                  <a:srgbClr val="F8C6DE"/>
+                </a:solidFill>
+                <a:latin typeface="Calibri" pitchFamily="34" charset="0"/>
+                <a:ea typeface="Calibri" pitchFamily="34" charset="-122"/>
+                <a:cs typeface="Calibri" pitchFamily="34" charset="-120"/>
+              </a:rPr>
+              <a:t>Video tutorial dikirim oleh tim MD. Ikuti urutan dan cara bukanya.</a:t>
+            </a:r>
+            <a:endParaRPr lang="en-US" sz="2000" dirty="0"/>
+          </a:p>
+        </p:txBody>
+      </p:sp>
+    </p:spTree>
+  </p:cSld>
+  <p:clrMapOvr>
+    <a:masterClrMapping/>
+  </p:clrMapOvr>
+</p:sld>
+</file>
+
+<file path=ppt/slides/slide9.xml><?xml version="1.0" encoding="utf-8"?>
+<p:sld xmlns:a="http://schemas.openxmlformats.org/drawingml/2006/main" xmlns:r="http://schemas.openxmlformats.org/officeDocument/2006/relationships" xmlns:p="http://schemas.openxmlformats.org/presentationml/2006/main">
+  <p:cSld name="Slide 9">
+    <p:bg>
+      <p:bgPr>
+        <a:solidFill>
+          <a:srgbClr val="FFFFFF"/>
+        </a:solidFill>
+      </p:bgPr>
+    </p:bg>
+    <p:spTree>
+      <p:nvGrpSpPr>
+        <p:cNvPr id="1" name=""/>
+        <p:cNvGrpSpPr/>
+        <p:nvPr/>
+      </p:nvGrpSpPr>
+      <p:grpSpPr>
+        <a:xfrm>
+          <a:off x="0" y="0"/>
+          <a:ext cx="0" cy="0"/>
+          <a:chOff x="0" y="0"/>
+          <a:chExt cx="0" cy="0"/>
+        </a:xfrm>
+      </p:grpSpPr>
+      <p:sp>
+        <p:nvSpPr>
+          <p:cNvPr id="2" name="Text 0"/>
+          <p:cNvSpPr txBox="1"/>
+          <p:nvPr/>
+        </p:nvSpPr>
+        <p:spPr>
+          <a:xfrm>
+            <a:off x="548640" y="365760"/>
+            <a:ext cx="11064240" cy="731520"/>
+          </a:xfrm>
+          <a:prstGeom prst="rect">
+            <a:avLst/>
+          </a:prstGeom>
+          <a:noFill/>
+          <a:ln/>
+        </p:spPr>
+        <p:txBody>
+          <a:bodyPr wrap="square" lIns="0" tIns="0" rIns="0" bIns="0" rtlCol="0" anchor="ctr"/>
+          <a:lstStyle/>
+          <a:p>
+            <a:pPr indent="0" marL="0">
+              <a:buNone/>
+            </a:pPr>
+            <a:r>
+              <a:rPr lang="en-US" sz="3600" b="1" dirty="0">
+                <a:solidFill>
+                  <a:srgbClr val="3B2A5C"/>
+                </a:solidFill>
+                <a:latin typeface="Cambria" pitchFamily="34" charset="0"/>
+                <a:ea typeface="Cambria" pitchFamily="34" charset="-122"/>
+                <a:cs typeface="Cambria" pitchFamily="34" charset="-120"/>
+              </a:rPr>
               <a:t>Buka 6 warna, header, dan POP</a:t>
             </a:r>
             <a:endParaRPr lang="en-US" sz="3600" dirty="0"/>
@@ -21221,7 +22993,7 @@
                 <a:ea typeface="Calibri" pitchFamily="34" charset="-122"/>
                 <a:cs typeface="Calibri" pitchFamily="34" charset="-120"/>
               </a:rPr>
-              <a:t>Secret tidak dibuka. Hanya 6 warna lainnya yang didisplay terbuka.</a:t>
+              <a:t>Dapat Secret di dalam PDQ? Amankan dulu, lalu display 5 warna.</a:t>
             </a:r>
             <a:endParaRPr lang="en-US" sz="1500" dirty="0"/>
           </a:p>
@@ -21435,640 +23207,6 @@
               <a:t>Dipakai sampai Media Produk Info dari VM terpasang</a:t>
             </a:r>
             <a:endParaRPr lang="en-US" sz="1400" dirty="0"/>
-          </a:p>
-        </p:txBody>
-      </p:sp>
-    </p:spTree>
-  </p:cSld>
-  <p:clrMapOvr>
-    <a:masterClrMapping/>
-  </p:clrMapOvr>
-</p:sld>
-</file>
-
-<file path=ppt/slides/slide9.xml><?xml version="1.0" encoding="utf-8"?>
-<p:sld xmlns:a="http://schemas.openxmlformats.org/drawingml/2006/main" xmlns:r="http://schemas.openxmlformats.org/officeDocument/2006/relationships" xmlns:p="http://schemas.openxmlformats.org/presentationml/2006/main">
-  <p:cSld name="Slide 9">
-    <p:bg>
-      <p:bgPr>
-        <a:solidFill>
-          <a:srgbClr val="FFFFFF"/>
-        </a:solidFill>
-      </p:bgPr>
-    </p:bg>
-    <p:spTree>
-      <p:nvGrpSpPr>
-        <p:cNvPr id="1" name=""/>
-        <p:cNvGrpSpPr/>
-        <p:nvPr/>
-      </p:nvGrpSpPr>
-      <p:grpSpPr>
-        <a:xfrm>
-          <a:off x="0" y="0"/>
-          <a:ext cx="0" cy="0"/>
-          <a:chOff x="0" y="0"/>
-          <a:chExt cx="0" cy="0"/>
-        </a:xfrm>
-      </p:grpSpPr>
-      <p:sp>
-        <p:nvSpPr>
-          <p:cNvPr id="2" name="Text 0"/>
-          <p:cNvSpPr txBox="1"/>
-          <p:nvPr/>
-        </p:nvSpPr>
-        <p:spPr>
-          <a:xfrm>
-            <a:off x="548640" y="365760"/>
-            <a:ext cx="11064240" cy="731520"/>
-          </a:xfrm>
-          <a:prstGeom prst="rect">
-            <a:avLst/>
-          </a:prstGeom>
-          <a:noFill/>
-          <a:ln/>
-        </p:spPr>
-        <p:txBody>
-          <a:bodyPr wrap="square" lIns="0" tIns="0" rIns="0" bIns="0" rtlCol="0" anchor="ctr"/>
-          <a:lstStyle/>
-          <a:p>
-            <a:pPr indent="0" marL="0">
-              <a:buNone/>
-            </a:pPr>
-            <a:r>
-              <a:rPr lang="en-US" sz="3600" b="1" dirty="0">
-                <a:solidFill>
-                  <a:srgbClr val="3B2A5C"/>
-                </a:solidFill>
-                <a:latin typeface="Cambria" pitchFamily="34" charset="0"/>
-                <a:ea typeface="Cambria" pitchFamily="34" charset="-122"/>
-                <a:cs typeface="Cambria" pitchFamily="34" charset="-120"/>
-              </a:rPr>
-              <a:t>Do dan Don'ts display dan penjualan</a:t>
-            </a:r>
-            <a:endParaRPr lang="en-US" sz="3600" dirty="0"/>
-          </a:p>
-        </p:txBody>
-      </p:sp>
-      <p:sp>
-        <p:nvSpPr>
-          <p:cNvPr id="3" name="Text 1"/>
-          <p:cNvSpPr txBox="1"/>
-          <p:nvPr/>
-        </p:nvSpPr>
-        <p:spPr>
-          <a:xfrm>
-            <a:off x="548640" y="1051560"/>
-            <a:ext cx="11064240" cy="365760"/>
-          </a:xfrm>
-          <a:prstGeom prst="rect">
-            <a:avLst/>
-          </a:prstGeom>
-          <a:noFill/>
-          <a:ln/>
-        </p:spPr>
-        <p:txBody>
-          <a:bodyPr wrap="square" lIns="0" tIns="0" rIns="0" bIns="0" rtlCol="0" anchor="ctr"/>
-          <a:lstStyle/>
-          <a:p>
-            <a:pPr indent="0" marL="0">
-              <a:buNone/>
-            </a:pPr>
-            <a:r>
-              <a:rPr lang="en-US" sz="1600" dirty="0">
-                <a:solidFill>
-                  <a:srgbClr val="6B6580"/>
-                </a:solidFill>
-                <a:latin typeface="Calibri" pitchFamily="34" charset="0"/>
-                <a:ea typeface="Calibri" pitchFamily="34" charset="-122"/>
-                <a:cs typeface="Calibri" pitchFamily="34" charset="-120"/>
-              </a:rPr>
-              <a:t>Rekomendasi untuk tim store</a:t>
-            </a:r>
-            <a:endParaRPr lang="en-US" sz="1600" dirty="0"/>
-          </a:p>
-        </p:txBody>
-      </p:sp>
-      <p:sp>
-        <p:nvSpPr>
-          <p:cNvPr id="4" name="Shape 2"/>
-          <p:cNvSpPr/>
-          <p:nvPr/>
-        </p:nvSpPr>
-        <p:spPr>
-          <a:xfrm>
-            <a:off x="548640" y="1645920"/>
-            <a:ext cx="5349240" cy="4754880"/>
-          </a:xfrm>
-          <a:prstGeom prst="roundRect">
-            <a:avLst>
-              <a:gd name="adj" fmla="val 2885"/>
-            </a:avLst>
-          </a:prstGeom>
-          <a:solidFill>
-            <a:srgbClr val="E3F6FB"/>
-          </a:solidFill>
-          <a:ln w="12700">
-            <a:solidFill>
-              <a:srgbClr val="E3F6FB"/>
-            </a:solidFill>
-            <a:prstDash val="solid"/>
-          </a:ln>
-        </p:spPr>
-      </p:sp>
-      <p:sp>
-        <p:nvSpPr>
-          <p:cNvPr id="5" name="Shape 3"/>
-          <p:cNvSpPr/>
-          <p:nvPr/>
-        </p:nvSpPr>
-        <p:spPr>
-          <a:xfrm>
-            <a:off x="822960" y="1828800"/>
-            <a:ext cx="1371600" cy="457200"/>
-          </a:xfrm>
-          <a:prstGeom prst="roundRect">
-            <a:avLst>
-              <a:gd name="adj" fmla="val 50000"/>
-            </a:avLst>
-          </a:prstGeom>
-          <a:solidFill>
-            <a:srgbClr val="4DC3E0"/>
-          </a:solidFill>
-          <a:ln w="12700">
-            <a:solidFill>
-              <a:srgbClr val="4DC3E0"/>
-            </a:solidFill>
-            <a:prstDash val="solid"/>
-          </a:ln>
-        </p:spPr>
-      </p:sp>
-      <p:sp>
-        <p:nvSpPr>
-          <p:cNvPr id="6" name="Text 4"/>
-          <p:cNvSpPr txBox="1"/>
-          <p:nvPr/>
-        </p:nvSpPr>
-        <p:spPr>
-          <a:xfrm>
-            <a:off x="822960" y="1828800"/>
-            <a:ext cx="1371600" cy="457200"/>
-          </a:xfrm>
-          <a:prstGeom prst="rect">
-            <a:avLst/>
-          </a:prstGeom>
-          <a:noFill/>
-          <a:ln/>
-        </p:spPr>
-        <p:txBody>
-          <a:bodyPr wrap="square" lIns="0" tIns="0" rIns="0" bIns="0" rtlCol="0" anchor="ctr"/>
-          <a:lstStyle/>
-          <a:p>
-            <a:pPr algn="ctr" indent="0" marL="0">
-              <a:buNone/>
-            </a:pPr>
-            <a:r>
-              <a:rPr lang="en-US" sz="1800" b="1" dirty="0">
-                <a:solidFill>
-                  <a:srgbClr val="FFFFFF"/>
-                </a:solidFill>
-                <a:latin typeface="Calibri" pitchFamily="34" charset="0"/>
-                <a:ea typeface="Calibri" pitchFamily="34" charset="-122"/>
-                <a:cs typeface="Calibri" pitchFamily="34" charset="-120"/>
-              </a:rPr>
-              <a:t>DO</a:t>
-            </a:r>
-            <a:endParaRPr lang="en-US" sz="1800" dirty="0"/>
-          </a:p>
-        </p:txBody>
-      </p:sp>
-      <p:sp>
-        <p:nvSpPr>
-          <p:cNvPr id="7" name="Text 5"/>
-          <p:cNvSpPr txBox="1"/>
-          <p:nvPr/>
-        </p:nvSpPr>
-        <p:spPr>
-          <a:xfrm>
-            <a:off x="822960" y="2514600"/>
-            <a:ext cx="4800600" cy="3749040"/>
-          </a:xfrm>
-          <a:prstGeom prst="rect">
-            <a:avLst/>
-          </a:prstGeom>
-          <a:noFill/>
-          <a:ln/>
-        </p:spPr>
-        <p:txBody>
-          <a:bodyPr wrap="square" lIns="0" tIns="0" rIns="0" bIns="0" rtlCol="0" anchor="t"/>
-          <a:lstStyle/>
-          <a:p>
-            <a:pPr marL="342900" indent="-342900">
-              <a:spcAft>
-                <a:spcPts val="800"/>
-              </a:spcAft>
-              <a:buSzPct val="100000"/>
-              <a:buChar char="•"/>
-            </a:pPr>
-            <a:r>
-              <a:rPr lang="en-US" sz="1500" dirty="0">
-                <a:solidFill>
-                  <a:srgbClr val="3B2A5C"/>
-                </a:solidFill>
-                <a:latin typeface="Calibri" pitchFamily="34" charset="0"/>
-                <a:ea typeface="Calibri" pitchFamily="34" charset="-122"/>
-                <a:cs typeface="Calibri" pitchFamily="34" charset="-120"/>
-              </a:rPr>
-              <a:t>Pasang di Endcap Area Thermal, full terisi sesuai planogram dan mock</a:t>
-            </a:r>
-            <a:endParaRPr lang="en-US" sz="1500" dirty="0"/>
-          </a:p>
-          <a:p>
-            <a:pPr marL="342900" indent="-342900">
-              <a:spcAft>
-                <a:spcPts val="800"/>
-              </a:spcAft>
-              <a:buSzPct val="100000"/>
-              <a:buChar char="•"/>
-            </a:pPr>
-            <a:r>
-              <a:rPr lang="en-US" sz="1500" dirty="0">
-                <a:solidFill>
-                  <a:srgbClr val="3B2A5C"/>
-                </a:solidFill>
-                <a:latin typeface="Calibri" pitchFamily="34" charset="0"/>
-                <a:ea typeface="Calibri" pitchFamily="34" charset="-122"/>
-                <a:cs typeface="Calibri" pitchFamily="34" charset="-120"/>
-              </a:rPr>
-              <a:t>Buka hanya 6 warna sebagai sampel, sisanya tetap tersegel</a:t>
-            </a:r>
-            <a:endParaRPr lang="en-US" sz="1500" dirty="0"/>
-          </a:p>
-          <a:p>
-            <a:pPr marL="342900" indent="-342900">
-              <a:spcAft>
-                <a:spcPts val="800"/>
-              </a:spcAft>
-              <a:buSzPct val="100000"/>
-              <a:buChar char="•"/>
-            </a:pPr>
-            <a:r>
-              <a:rPr lang="en-US" sz="1500" dirty="0">
-                <a:solidFill>
-                  <a:srgbClr val="3B2A5C"/>
-                </a:solidFill>
-                <a:latin typeface="Calibri" pitchFamily="34" charset="0"/>
-                <a:ea typeface="Calibri" pitchFamily="34" charset="-122"/>
-                <a:cs typeface="Calibri" pitchFamily="34" charset="-120"/>
-              </a:rPr>
-              <a:t>Jaga box Secret tetap tersegel</a:t>
-            </a:r>
-            <a:endParaRPr lang="en-US" sz="1500" dirty="0"/>
-          </a:p>
-          <a:p>
-            <a:pPr marL="342900" indent="-342900">
-              <a:spcAft>
-                <a:spcPts val="800"/>
-              </a:spcAft>
-              <a:buSzPct val="100000"/>
-              <a:buChar char="•"/>
-            </a:pPr>
-            <a:r>
-              <a:rPr lang="en-US" sz="1500" dirty="0">
-                <a:solidFill>
-                  <a:srgbClr val="3B2A5C"/>
-                </a:solidFill>
-                <a:latin typeface="Calibri" pitchFamily="34" charset="0"/>
-                <a:ea typeface="Calibri" pitchFamily="34" charset="-122"/>
-                <a:cs typeface="Calibri" pitchFamily="34" charset="-120"/>
-              </a:rPr>
-              <a:t>Rapikan box, logo informa menghadap depan</a:t>
-            </a:r>
-            <a:endParaRPr lang="en-US" sz="1500" dirty="0"/>
-          </a:p>
-          <a:p>
-            <a:pPr marL="342900" indent="-342900">
-              <a:spcAft>
-                <a:spcPts val="800"/>
-              </a:spcAft>
-              <a:buSzPct val="100000"/>
-              <a:buChar char="•"/>
-            </a:pPr>
-            <a:r>
-              <a:rPr lang="en-US" sz="1500" dirty="0">
-                <a:solidFill>
-                  <a:srgbClr val="3B2A5C"/>
-                </a:solidFill>
-                <a:latin typeface="Calibri" pitchFamily="34" charset="0"/>
-                <a:ea typeface="Calibri" pitchFamily="34" charset="-122"/>
-                <a:cs typeface="Calibri" pitchFamily="34" charset="-120"/>
-              </a:rPr>
-              <a:t>Isi ulang rak dari buffer stock sebelum kosong</a:t>
-            </a:r>
-            <a:endParaRPr lang="en-US" sz="1500" dirty="0"/>
-          </a:p>
-          <a:p>
-            <a:pPr marL="342900" indent="-342900">
-              <a:spcAft>
-                <a:spcPts val="800"/>
-              </a:spcAft>
-              <a:buSzPct val="100000"/>
-              <a:buChar char="•"/>
-            </a:pPr>
-            <a:r>
-              <a:rPr lang="en-US" sz="1500" dirty="0">
-                <a:solidFill>
-                  <a:srgbClr val="3B2A5C"/>
-                </a:solidFill>
-                <a:latin typeface="Calibri" pitchFamily="34" charset="0"/>
-                <a:ea typeface="Calibri" pitchFamily="34" charset="-122"/>
-                <a:cs typeface="Calibri" pitchFamily="34" charset="-120"/>
-              </a:rPr>
-              <a:t>Jelaskan ke pelanggan: pilih warna favorit, Secret adalah kejutan</a:t>
-            </a:r>
-            <a:endParaRPr lang="en-US" sz="1500" dirty="0"/>
-          </a:p>
-          <a:p>
-            <a:pPr marL="342900" indent="-342900">
-              <a:spcAft>
-                <a:spcPts val="800"/>
-              </a:spcAft>
-              <a:buSzPct val="100000"/>
-              <a:buChar char="•"/>
-            </a:pPr>
-            <a:r>
-              <a:rPr lang="en-US" sz="1500" dirty="0">
-                <a:solidFill>
-                  <a:srgbClr val="3B2A5C"/>
-                </a:solidFill>
-                <a:latin typeface="Calibri" pitchFamily="34" charset="0"/>
-                <a:ea typeface="Calibri" pitchFamily="34" charset="-122"/>
-                <a:cs typeface="Calibri" pitchFamily="34" charset="-120"/>
-              </a:rPr>
-              <a:t>Cetak POP A4 sementara dari Head Office bila materi komunikasi belum tiba</a:t>
-            </a:r>
-            <a:endParaRPr lang="en-US" sz="1500" dirty="0"/>
-          </a:p>
-        </p:txBody>
-      </p:sp>
-      <p:sp>
-        <p:nvSpPr>
-          <p:cNvPr id="8" name="Shape 6"/>
-          <p:cNvSpPr/>
-          <p:nvPr/>
-        </p:nvSpPr>
-        <p:spPr>
-          <a:xfrm>
-            <a:off x="6263640" y="1645920"/>
-            <a:ext cx="5349240" cy="4754880"/>
-          </a:xfrm>
-          <a:prstGeom prst="roundRect">
-            <a:avLst>
-              <a:gd name="adj" fmla="val 2885"/>
-            </a:avLst>
-          </a:prstGeom>
-          <a:solidFill>
-            <a:srgbClr val="FDEAF3"/>
-          </a:solidFill>
-          <a:ln w="12700">
-            <a:solidFill>
-              <a:srgbClr val="FDEAF3"/>
-            </a:solidFill>
-            <a:prstDash val="solid"/>
-          </a:ln>
-        </p:spPr>
-      </p:sp>
-      <p:sp>
-        <p:nvSpPr>
-          <p:cNvPr id="9" name="Shape 7"/>
-          <p:cNvSpPr/>
-          <p:nvPr/>
-        </p:nvSpPr>
-        <p:spPr>
-          <a:xfrm>
-            <a:off x="6537960" y="1828800"/>
-            <a:ext cx="1371600" cy="457200"/>
-          </a:xfrm>
-          <a:prstGeom prst="roundRect">
-            <a:avLst>
-              <a:gd name="adj" fmla="val 50000"/>
-            </a:avLst>
-          </a:prstGeom>
-          <a:solidFill>
-            <a:srgbClr val="F27BB0"/>
-          </a:solidFill>
-          <a:ln w="12700">
-            <a:solidFill>
-              <a:srgbClr val="F27BB0"/>
-            </a:solidFill>
-            <a:prstDash val="solid"/>
-          </a:ln>
-        </p:spPr>
-      </p:sp>
-      <p:sp>
-        <p:nvSpPr>
-          <p:cNvPr id="10" name="Text 8"/>
-          <p:cNvSpPr txBox="1"/>
-          <p:nvPr/>
-        </p:nvSpPr>
-        <p:spPr>
-          <a:xfrm>
-            <a:off x="6537960" y="1828800"/>
-            <a:ext cx="1371600" cy="457200"/>
-          </a:xfrm>
-          <a:prstGeom prst="rect">
-            <a:avLst/>
-          </a:prstGeom>
-          <a:noFill/>
-          <a:ln/>
-        </p:spPr>
-        <p:txBody>
-          <a:bodyPr wrap="square" lIns="0" tIns="0" rIns="0" bIns="0" rtlCol="0" anchor="ctr"/>
-          <a:lstStyle/>
-          <a:p>
-            <a:pPr algn="ctr" indent="0" marL="0">
-              <a:buNone/>
-            </a:pPr>
-            <a:r>
-              <a:rPr lang="en-US" sz="1800" b="1" dirty="0">
-                <a:solidFill>
-                  <a:srgbClr val="FFFFFF"/>
-                </a:solidFill>
-                <a:latin typeface="Calibri" pitchFamily="34" charset="0"/>
-                <a:ea typeface="Calibri" pitchFamily="34" charset="-122"/>
-                <a:cs typeface="Calibri" pitchFamily="34" charset="-120"/>
-              </a:rPr>
-              <a:t>DON'T</a:t>
-            </a:r>
-            <a:endParaRPr lang="en-US" sz="1800" dirty="0"/>
-          </a:p>
-        </p:txBody>
-      </p:sp>
-      <p:sp>
-        <p:nvSpPr>
-          <p:cNvPr id="11" name="Text 9"/>
-          <p:cNvSpPr txBox="1"/>
-          <p:nvPr/>
-        </p:nvSpPr>
-        <p:spPr>
-          <a:xfrm>
-            <a:off x="6537960" y="2514600"/>
-            <a:ext cx="4800600" cy="3749040"/>
-          </a:xfrm>
-          <a:prstGeom prst="rect">
-            <a:avLst/>
-          </a:prstGeom>
-          <a:noFill/>
-          <a:ln/>
-        </p:spPr>
-        <p:txBody>
-          <a:bodyPr wrap="square" lIns="0" tIns="0" rIns="0" bIns="0" rtlCol="0" anchor="t"/>
-          <a:lstStyle/>
-          <a:p>
-            <a:pPr marL="342900" indent="-342900">
-              <a:spcAft>
-                <a:spcPts val="800"/>
-              </a:spcAft>
-              <a:buSzPct val="100000"/>
-              <a:buChar char="•"/>
-            </a:pPr>
-            <a:r>
-              <a:rPr lang="en-US" sz="1500" dirty="0">
-                <a:solidFill>
-                  <a:srgbClr val="3B2A5C"/>
-                </a:solidFill>
-                <a:latin typeface="Calibri" pitchFamily="34" charset="0"/>
-                <a:ea typeface="Calibri" pitchFamily="34" charset="-122"/>
-                <a:cs typeface="Calibri" pitchFamily="34" charset="-120"/>
-              </a:rPr>
-              <a:t>Jangan taruh di luar endcap Thermal atau campur dengan produk lain</a:t>
-            </a:r>
-            <a:endParaRPr lang="en-US" sz="1500" dirty="0"/>
-          </a:p>
-          <a:p>
-            <a:pPr marL="342900" indent="-342900">
-              <a:spcAft>
-                <a:spcPts val="800"/>
-              </a:spcAft>
-              <a:buSzPct val="100000"/>
-              <a:buChar char="•"/>
-            </a:pPr>
-            <a:r>
-              <a:rPr lang="en-US" sz="1500" dirty="0">
-                <a:solidFill>
-                  <a:srgbClr val="3B2A5C"/>
-                </a:solidFill>
-                <a:latin typeface="Calibri" pitchFamily="34" charset="0"/>
-                <a:ea typeface="Calibri" pitchFamily="34" charset="-122"/>
-                <a:cs typeface="Calibri" pitchFamily="34" charset="-120"/>
-              </a:rPr>
-              <a:t>Jangan biarkan rak kosong atau terisi sebagian</a:t>
-            </a:r>
-            <a:endParaRPr lang="en-US" sz="1500" dirty="0"/>
-          </a:p>
-          <a:p>
-            <a:pPr marL="342900" indent="-342900">
-              <a:spcAft>
-                <a:spcPts val="800"/>
-              </a:spcAft>
-              <a:buSzPct val="100000"/>
-              <a:buChar char="•"/>
-            </a:pPr>
-            <a:r>
-              <a:rPr lang="en-US" sz="1500" dirty="0">
-                <a:solidFill>
-                  <a:srgbClr val="3B2A5C"/>
-                </a:solidFill>
-                <a:latin typeface="Calibri" pitchFamily="34" charset="0"/>
-                <a:ea typeface="Calibri" pitchFamily="34" charset="-122"/>
-                <a:cs typeface="Calibri" pitchFamily="34" charset="-120"/>
-              </a:rPr>
-              <a:t>Jangan buka atau sobek box selain sampel 6 warna</a:t>
-            </a:r>
-            <a:endParaRPr lang="en-US" sz="1500" dirty="0"/>
-          </a:p>
-          <a:p>
-            <a:pPr marL="342900" indent="-342900">
-              <a:spcAft>
-                <a:spcPts val="800"/>
-              </a:spcAft>
-              <a:buSzPct val="100000"/>
-              <a:buChar char="•"/>
-            </a:pPr>
-            <a:r>
-              <a:rPr lang="en-US" sz="1500" dirty="0">
-                <a:solidFill>
-                  <a:srgbClr val="3B2A5C"/>
-                </a:solidFill>
-                <a:latin typeface="Calibri" pitchFamily="34" charset="0"/>
-                <a:ea typeface="Calibri" pitchFamily="34" charset="-122"/>
-                <a:cs typeface="Calibri" pitchFamily="34" charset="-120"/>
-              </a:rPr>
-              <a:t>Jangan bocorkan isi box tersegel (ditimbang, diguncang, atau diberi petunjuk)</a:t>
-            </a:r>
-            <a:endParaRPr lang="en-US" sz="1500" dirty="0"/>
-          </a:p>
-          <a:p>
-            <a:pPr marL="342900" indent="-342900">
-              <a:spcAft>
-                <a:spcPts val="800"/>
-              </a:spcAft>
-              <a:buSzPct val="100000"/>
-              <a:buChar char="•"/>
-            </a:pPr>
-            <a:r>
-              <a:rPr lang="en-US" sz="1500" dirty="0">
-                <a:solidFill>
-                  <a:srgbClr val="3B2A5C"/>
-                </a:solidFill>
-                <a:latin typeface="Calibri" pitchFamily="34" charset="0"/>
-                <a:ea typeface="Calibri" pitchFamily="34" charset="-122"/>
-                <a:cs typeface="Calibri" pitchFamily="34" charset="-120"/>
-              </a:rPr>
-              <a:t>Jangan ubah susunan, qty, atau tinggi rak</a:t>
-            </a:r>
-            <a:endParaRPr lang="en-US" sz="1500" dirty="0"/>
-          </a:p>
-          <a:p>
-            <a:pPr marL="342900" indent="-342900">
-              <a:spcAft>
-                <a:spcPts val="800"/>
-              </a:spcAft>
-              <a:buSzPct val="100000"/>
-              <a:buChar char="•"/>
-            </a:pPr>
-            <a:r>
-              <a:rPr lang="en-US" sz="1500" dirty="0">
-                <a:solidFill>
-                  <a:srgbClr val="3B2A5C"/>
-                </a:solidFill>
-                <a:latin typeface="Calibri" pitchFamily="34" charset="0"/>
-                <a:ea typeface="Calibri" pitchFamily="34" charset="-122"/>
-                <a:cs typeface="Calibri" pitchFamily="34" charset="-120"/>
-              </a:rPr>
-              <a:t>Jangan jual unit sampel yang sudah dibuka sebagai produk baru</a:t>
-            </a:r>
-            <a:endParaRPr lang="en-US" sz="1500" dirty="0"/>
-          </a:p>
-          <a:p>
-            <a:pPr marL="342900" indent="-342900">
-              <a:spcAft>
-                <a:spcPts val="800"/>
-              </a:spcAft>
-              <a:buSzPct val="100000"/>
-              <a:buChar char="•"/>
-            </a:pPr>
-            <a:r>
-              <a:rPr lang="en-US" sz="1500" dirty="0">
-                <a:solidFill>
-                  <a:srgbClr val="3B2A5C"/>
-                </a:solidFill>
-                <a:latin typeface="Calibri" pitchFamily="34" charset="0"/>
-                <a:ea typeface="Calibri" pitchFamily="34" charset="-122"/>
-                <a:cs typeface="Calibri" pitchFamily="34" charset="-120"/>
-              </a:rPr>
-              <a:t>Jangan cetak POP sementara selain di percetakan</a:t>
-            </a:r>
-            <a:endParaRPr lang="en-US" sz="1500" dirty="0"/>
           </a:p>
         </p:txBody>
       </p:sp>

--- a/Instruksi_Display_Blind_Box_Thermal.pptx
+++ b/Instruksi_Display_Blind_Box_Thermal.pptx
@@ -1,25 +1,26 @@
 
 <file path=ppt/presentation.xml><?xml version="1.0" encoding="utf-8"?>
-<p:presentation xmlns:a="http://schemas.openxmlformats.org/drawingml/2006/main" xmlns:r="http://schemas.openxmlformats.org/officeDocument/2006/relationships" xmlns:p="http://schemas.openxmlformats.org/presentationml/2006/main" saveSubsetFonts="1" autoCompressPictures="0">
+<p:presentation xmlns:a="http://schemas.openxmlformats.org/drawingml/2006/main" xmlns:r="http://schemas.openxmlformats.org/officeDocument/2006/relationships" xmlns:p="http://schemas.openxmlformats.org/presentationml/2006/main" autoCompressPictures="0">
   <p:sldMasterIdLst>
     <p:sldMasterId id="2147483648" r:id="rId1"/>
   </p:sldMasterIdLst>
+  <p:notesMasterIdLst>
+    <p:notesMasterId r:id="rId4"/>
+  </p:notesMasterIdLst>
   <p:sldIdLst>
-    <p:sldId id="256" r:id="rId2"/>
-    <p:sldId id="257" r:id="rId3"/>
-    <p:sldId id="258" r:id="rId4"/>
-    <p:sldId id="259" r:id="rId5"/>
-    <p:sldId id="260" r:id="rId6"/>
-    <p:sldId id="261" r:id="rId7"/>
-    <p:sldId id="262" r:id="rId8"/>
-    <p:sldId id="263" r:id="rId9"/>
-    <p:sldId id="264" r:id="rId10"/>
-    <p:sldId id="265" r:id="rId11"/>
-    <p:sldId id="266" r:id="rId12"/>
+    <p:sldId id="256" r:id="rId3"/>
+    <p:sldId id="257" r:id="rId5"/>
+    <p:sldId id="258" r:id="rId6"/>
+    <p:sldId id="259" r:id="rId7"/>
+    <p:sldId id="260" r:id="rId8"/>
+    <p:sldId id="261" r:id="rId9"/>
+    <p:sldId id="262" r:id="rId10"/>
+    <p:sldId id="263" r:id="rId11"/>
+    <p:sldId id="267" r:id="rId18"/>
+    <p:sldId id="264" r:id="rId12"/>
+    <p:sldId id="265" r:id="rId13"/>
+    <p:sldId id="266" r:id="rId14"/>
   </p:sldIdLst>
-  <p:notesMasterIdLst>
-    <p:notesMasterId r:id="rId13"/>
-  </p:notesMasterIdLst>
   <p:sldSz cx="12192000" cy="6858000"/>
   <p:notesSz cx="6858000" cy="12192000"/>
   <p:defaultTextStyle>
@@ -199,7 +200,6 @@
           <a:p>
             <a:fld id="{5282F153-3F37-0F45-9E97-73ACFA13230C}" type="datetimeFigureOut">
               <a:rPr lang="en-US"/>
-              <a:t>7/23/19</a:t>
             </a:fld>
             <a:endParaRPr lang="en-US"/>
           </a:p>
@@ -266,6 +266,7 @@
               <a:rPr lang="en-US"/>
               <a:t>Click to edit Master text styles</a:t>
             </a:r>
+            <a:endParaRPr lang="en-US"/>
           </a:p>
           <a:p>
             <a:pPr lvl="1"/>
@@ -273,6 +274,7 @@
               <a:rPr lang="en-US"/>
               <a:t>Second level</a:t>
             </a:r>
+            <a:endParaRPr lang="en-US"/>
           </a:p>
           <a:p>
             <a:pPr lvl="2"/>
@@ -280,6 +282,7 @@
               <a:rPr lang="en-US"/>
               <a:t>Third level</a:t>
             </a:r>
+            <a:endParaRPr lang="en-US"/>
           </a:p>
           <a:p>
             <a:pPr lvl="3"/>
@@ -287,6 +290,7 @@
               <a:rPr lang="en-US"/>
               <a:t>Fourth level</a:t>
             </a:r>
+            <a:endParaRPr lang="en-US"/>
           </a:p>
           <a:p>
             <a:pPr lvl="4"/>
@@ -294,6 +298,7 @@
               <a:rPr lang="en-US"/>
               <a:t>Fifth level</a:t>
             </a:r>
+            <a:endParaRPr lang="en-US"/>
           </a:p>
         </p:txBody>
       </p:sp>
@@ -357,18 +362,12 @@
           <a:p>
             <a:fld id="{CE5E9CC1-C706-0F49-92D6-E571CC5EEA8F}" type="slidenum">
               <a:rPr lang="en-US"/>
-              <a:t>‹#›</a:t>
             </a:fld>
             <a:endParaRPr lang="en-US"/>
           </a:p>
         </p:txBody>
       </p:sp>
     </p:spTree>
-    <p:extLst>
-      <p:ext uri="{BB962C8B-B14F-4D97-AF65-F5344CB8AC3E}">
-        <p14:creationId xmlns:p14="http://schemas.microsoft.com/office/powerpoint/2010/main" val="1024086991"/>
-      </p:ext>
-    </p:extLst>
   </p:cSld>
   <p:clrMap bg1="lt1" tx1="dk1" bg2="lt2" tx2="dk2" accent1="accent1" accent2="accent2" accent3="accent3" accent4="accent4" accent5="accent5" accent6="accent6" hlink="hlink" folHlink="folHlink"/>
   <p:notesStyle>
@@ -510,10 +509,6 @@
           <a:bodyPr/>
           <a:lstStyle/>
           <a:p>
-            <a:r>
-              <a:rPr lang="en-US" dirty="0"/>
-              <a:t/>
-            </a:r>
             <a:endParaRPr lang="en-US" dirty="0"/>
           </a:p>
         </p:txBody>
@@ -535,18 +530,12 @@
           <a:p>
             <a:fld id="{F7021451-1387-4CA6-816F-3879F97B5CBC}" type="slidenum">
               <a:rPr lang="en-US"/>
-              <a:t>1</a:t>
             </a:fld>
             <a:endParaRPr lang="en-US"/>
           </a:p>
         </p:txBody>
       </p:sp>
     </p:spTree>
-    <p:extLst>
-      <p:ext uri="{BB962C8B-B14F-4D97-AF65-F5344CB8AC3E}">
-        <p14:creationId xmlns:p14="http://schemas.microsoft.com/office/powerpoint/2010/main" val="1024086991"/>
-      </p:ext>
-    </p:extLst>
   </p:cSld>
   <p:clrMapOvr>
     <a:masterClrMapping/>
@@ -598,10 +587,6 @@
           <a:bodyPr/>
           <a:lstStyle/>
           <a:p>
-            <a:r>
-              <a:rPr lang="en-US" dirty="0"/>
-              <a:t/>
-            </a:r>
             <a:endParaRPr lang="en-US" dirty="0"/>
           </a:p>
         </p:txBody>
@@ -623,18 +608,12 @@
           <a:p>
             <a:fld id="{F7021451-1387-4CA6-816F-3879F97B5CBC}" type="slidenum">
               <a:rPr lang="en-US"/>
-              <a:t>10</a:t>
             </a:fld>
             <a:endParaRPr lang="en-US"/>
           </a:p>
         </p:txBody>
       </p:sp>
     </p:spTree>
-    <p:extLst>
-      <p:ext uri="{BB962C8B-B14F-4D97-AF65-F5344CB8AC3E}">
-        <p14:creationId xmlns:p14="http://schemas.microsoft.com/office/powerpoint/2010/main" val="1024086991"/>
-      </p:ext>
-    </p:extLst>
   </p:cSld>
   <p:clrMapOvr>
     <a:masterClrMapping/>
@@ -686,10 +665,6 @@
           <a:bodyPr/>
           <a:lstStyle/>
           <a:p>
-            <a:r>
-              <a:rPr lang="en-US" dirty="0"/>
-              <a:t/>
-            </a:r>
             <a:endParaRPr lang="en-US" dirty="0"/>
           </a:p>
         </p:txBody>
@@ -711,18 +686,12 @@
           <a:p>
             <a:fld id="{F7021451-1387-4CA6-816F-3879F97B5CBC}" type="slidenum">
               <a:rPr lang="en-US"/>
-              <a:t>11</a:t>
             </a:fld>
             <a:endParaRPr lang="en-US"/>
           </a:p>
         </p:txBody>
       </p:sp>
     </p:spTree>
-    <p:extLst>
-      <p:ext uri="{BB962C8B-B14F-4D97-AF65-F5344CB8AC3E}">
-        <p14:creationId xmlns:p14="http://schemas.microsoft.com/office/powerpoint/2010/main" val="1024086991"/>
-      </p:ext>
-    </p:extLst>
   </p:cSld>
   <p:clrMapOvr>
     <a:masterClrMapping/>
@@ -774,10 +743,6 @@
           <a:bodyPr/>
           <a:lstStyle/>
           <a:p>
-            <a:r>
-              <a:rPr lang="en-US" dirty="0"/>
-              <a:t/>
-            </a:r>
             <a:endParaRPr lang="en-US" dirty="0"/>
           </a:p>
         </p:txBody>
@@ -799,18 +764,12 @@
           <a:p>
             <a:fld id="{F7021451-1387-4CA6-816F-3879F97B5CBC}" type="slidenum">
               <a:rPr lang="en-US"/>
-              <a:t>2</a:t>
             </a:fld>
             <a:endParaRPr lang="en-US"/>
           </a:p>
         </p:txBody>
       </p:sp>
     </p:spTree>
-    <p:extLst>
-      <p:ext uri="{BB962C8B-B14F-4D97-AF65-F5344CB8AC3E}">
-        <p14:creationId xmlns:p14="http://schemas.microsoft.com/office/powerpoint/2010/main" val="1024086991"/>
-      </p:ext>
-    </p:extLst>
   </p:cSld>
   <p:clrMapOvr>
     <a:masterClrMapping/>
@@ -862,10 +821,6 @@
           <a:bodyPr/>
           <a:lstStyle/>
           <a:p>
-            <a:r>
-              <a:rPr lang="en-US" dirty="0"/>
-              <a:t/>
-            </a:r>
             <a:endParaRPr lang="en-US" dirty="0"/>
           </a:p>
         </p:txBody>
@@ -887,18 +842,12 @@
           <a:p>
             <a:fld id="{F7021451-1387-4CA6-816F-3879F97B5CBC}" type="slidenum">
               <a:rPr lang="en-US"/>
-              <a:t>3</a:t>
             </a:fld>
             <a:endParaRPr lang="en-US"/>
           </a:p>
         </p:txBody>
       </p:sp>
     </p:spTree>
-    <p:extLst>
-      <p:ext uri="{BB962C8B-B14F-4D97-AF65-F5344CB8AC3E}">
-        <p14:creationId xmlns:p14="http://schemas.microsoft.com/office/powerpoint/2010/main" val="1024086991"/>
-      </p:ext>
-    </p:extLst>
   </p:cSld>
   <p:clrMapOvr>
     <a:masterClrMapping/>
@@ -950,10 +899,6 @@
           <a:bodyPr/>
           <a:lstStyle/>
           <a:p>
-            <a:r>
-              <a:rPr lang="en-US" dirty="0"/>
-              <a:t/>
-            </a:r>
             <a:endParaRPr lang="en-US" dirty="0"/>
           </a:p>
         </p:txBody>
@@ -975,18 +920,12 @@
           <a:p>
             <a:fld id="{F7021451-1387-4CA6-816F-3879F97B5CBC}" type="slidenum">
               <a:rPr lang="en-US"/>
-              <a:t>4</a:t>
             </a:fld>
             <a:endParaRPr lang="en-US"/>
           </a:p>
         </p:txBody>
       </p:sp>
     </p:spTree>
-    <p:extLst>
-      <p:ext uri="{BB962C8B-B14F-4D97-AF65-F5344CB8AC3E}">
-        <p14:creationId xmlns:p14="http://schemas.microsoft.com/office/powerpoint/2010/main" val="1024086991"/>
-      </p:ext>
-    </p:extLst>
   </p:cSld>
   <p:clrMapOvr>
     <a:masterClrMapping/>
@@ -1038,10 +977,6 @@
           <a:bodyPr/>
           <a:lstStyle/>
           <a:p>
-            <a:r>
-              <a:rPr lang="en-US" dirty="0"/>
-              <a:t/>
-            </a:r>
             <a:endParaRPr lang="en-US" dirty="0"/>
           </a:p>
         </p:txBody>
@@ -1063,18 +998,12 @@
           <a:p>
             <a:fld id="{F7021451-1387-4CA6-816F-3879F97B5CBC}" type="slidenum">
               <a:rPr lang="en-US"/>
-              <a:t>5</a:t>
             </a:fld>
             <a:endParaRPr lang="en-US"/>
           </a:p>
         </p:txBody>
       </p:sp>
     </p:spTree>
-    <p:extLst>
-      <p:ext uri="{BB962C8B-B14F-4D97-AF65-F5344CB8AC3E}">
-        <p14:creationId xmlns:p14="http://schemas.microsoft.com/office/powerpoint/2010/main" val="1024086991"/>
-      </p:ext>
-    </p:extLst>
   </p:cSld>
   <p:clrMapOvr>
     <a:masterClrMapping/>
@@ -1126,10 +1055,6 @@
           <a:bodyPr/>
           <a:lstStyle/>
           <a:p>
-            <a:r>
-              <a:rPr lang="en-US" dirty="0"/>
-              <a:t/>
-            </a:r>
             <a:endParaRPr lang="en-US" dirty="0"/>
           </a:p>
         </p:txBody>
@@ -1151,18 +1076,12 @@
           <a:p>
             <a:fld id="{F7021451-1387-4CA6-816F-3879F97B5CBC}" type="slidenum">
               <a:rPr lang="en-US"/>
-              <a:t>6</a:t>
             </a:fld>
             <a:endParaRPr lang="en-US"/>
           </a:p>
         </p:txBody>
       </p:sp>
     </p:spTree>
-    <p:extLst>
-      <p:ext uri="{BB962C8B-B14F-4D97-AF65-F5344CB8AC3E}">
-        <p14:creationId xmlns:p14="http://schemas.microsoft.com/office/powerpoint/2010/main" val="1024086991"/>
-      </p:ext>
-    </p:extLst>
   </p:cSld>
   <p:clrMapOvr>
     <a:masterClrMapping/>
@@ -1214,10 +1133,6 @@
           <a:bodyPr/>
           <a:lstStyle/>
           <a:p>
-            <a:r>
-              <a:rPr lang="en-US" dirty="0"/>
-              <a:t/>
-            </a:r>
             <a:endParaRPr lang="en-US" dirty="0"/>
           </a:p>
         </p:txBody>
@@ -1239,18 +1154,12 @@
           <a:p>
             <a:fld id="{F7021451-1387-4CA6-816F-3879F97B5CBC}" type="slidenum">
               <a:rPr lang="en-US"/>
-              <a:t>7</a:t>
             </a:fld>
             <a:endParaRPr lang="en-US"/>
           </a:p>
         </p:txBody>
       </p:sp>
     </p:spTree>
-    <p:extLst>
-      <p:ext uri="{BB962C8B-B14F-4D97-AF65-F5344CB8AC3E}">
-        <p14:creationId xmlns:p14="http://schemas.microsoft.com/office/powerpoint/2010/main" val="1024086991"/>
-      </p:ext>
-    </p:extLst>
   </p:cSld>
   <p:clrMapOvr>
     <a:masterClrMapping/>
@@ -1302,10 +1211,6 @@
           <a:bodyPr/>
           <a:lstStyle/>
           <a:p>
-            <a:r>
-              <a:rPr lang="en-US" dirty="0"/>
-              <a:t/>
-            </a:r>
             <a:endParaRPr lang="en-US" dirty="0"/>
           </a:p>
         </p:txBody>
@@ -1327,18 +1232,12 @@
           <a:p>
             <a:fld id="{F7021451-1387-4CA6-816F-3879F97B5CBC}" type="slidenum">
               <a:rPr lang="en-US"/>
-              <a:t>8</a:t>
             </a:fld>
             <a:endParaRPr lang="en-US"/>
           </a:p>
         </p:txBody>
       </p:sp>
     </p:spTree>
-    <p:extLst>
-      <p:ext uri="{BB962C8B-B14F-4D97-AF65-F5344CB8AC3E}">
-        <p14:creationId xmlns:p14="http://schemas.microsoft.com/office/powerpoint/2010/main" val="1024086991"/>
-      </p:ext>
-    </p:extLst>
   </p:cSld>
   <p:clrMapOvr>
     <a:masterClrMapping/>
@@ -1390,10 +1289,6 @@
           <a:bodyPr/>
           <a:lstStyle/>
           <a:p>
-            <a:r>
-              <a:rPr lang="en-US" dirty="0"/>
-              <a:t/>
-            </a:r>
             <a:endParaRPr lang="en-US" dirty="0"/>
           </a:p>
         </p:txBody>
@@ -1415,18 +1310,12 @@
           <a:p>
             <a:fld id="{F7021451-1387-4CA6-816F-3879F97B5CBC}" type="slidenum">
               <a:rPr lang="en-US"/>
-              <a:t>9</a:t>
             </a:fld>
             <a:endParaRPr lang="en-US"/>
           </a:p>
         </p:txBody>
       </p:sp>
     </p:spTree>
-    <p:extLst>
-      <p:ext uri="{BB962C8B-B14F-4D97-AF65-F5344CB8AC3E}">
-        <p14:creationId xmlns:p14="http://schemas.microsoft.com/office/powerpoint/2010/main" val="1024086991"/>
-      </p:ext>
-    </p:extLst>
   </p:cSld>
   <p:clrMapOvr>
     <a:masterClrMapping/>
@@ -1467,6 +1356,11 @@
 <file path=ppt/slideMasters/slideMaster1.xml><?xml version="1.0" encoding="utf-8"?>
 <p:sldMaster xmlns:a="http://schemas.openxmlformats.org/drawingml/2006/main" xmlns:r="http://schemas.openxmlformats.org/officeDocument/2006/relationships" xmlns:p="http://schemas.openxmlformats.org/presentationml/2006/main">
   <p:cSld>
+    <p:bg>
+      <p:bgRef idx="1001">
+        <a:schemeClr val="bg1"/>
+      </p:bgRef>
+    </p:bg>
     <p:spTree>
       <p:nvGrpSpPr>
         <p:cNvPr id="1" name=""/>
@@ -1510,7 +1404,7 @@
         <a:spcBef>
           <a:spcPct val="20000"/>
         </a:spcBef>
-        <a:buFont typeface="Arial" pitchFamily="34" charset="0"/>
+        <a:buFont typeface="Arial" panose="020B0604020202020204" pitchFamily="34" charset="0"/>
         <a:buChar char="•"/>
         <a:defRPr sz="3200" kern="1200">
           <a:solidFill>
@@ -1525,7 +1419,7 @@
         <a:spcBef>
           <a:spcPct val="20000"/>
         </a:spcBef>
-        <a:buFont typeface="Arial" pitchFamily="34" charset="0"/>
+        <a:buFont typeface="Arial" panose="020B0604020202020204" pitchFamily="34" charset="0"/>
         <a:buChar char="–"/>
         <a:defRPr sz="2800" kern="1200">
           <a:solidFill>
@@ -1540,7 +1434,7 @@
         <a:spcBef>
           <a:spcPct val="20000"/>
         </a:spcBef>
-        <a:buFont typeface="Arial" pitchFamily="34" charset="0"/>
+        <a:buFont typeface="Arial" panose="020B0604020202020204" pitchFamily="34" charset="0"/>
         <a:buChar char="•"/>
         <a:defRPr sz="2400" kern="1200">
           <a:solidFill>
@@ -1555,7 +1449,7 @@
         <a:spcBef>
           <a:spcPct val="20000"/>
         </a:spcBef>
-        <a:buFont typeface="Arial" pitchFamily="34" charset="0"/>
+        <a:buFont typeface="Arial" panose="020B0604020202020204" pitchFamily="34" charset="0"/>
         <a:buChar char="–"/>
         <a:defRPr sz="2000" kern="1200">
           <a:solidFill>
@@ -1570,7 +1464,7 @@
         <a:spcBef>
           <a:spcPct val="20000"/>
         </a:spcBef>
-        <a:buFont typeface="Arial" pitchFamily="34" charset="0"/>
+        <a:buFont typeface="Arial" panose="020B0604020202020204" pitchFamily="34" charset="0"/>
         <a:buChar char="»"/>
         <a:defRPr sz="2000" kern="1200">
           <a:solidFill>
@@ -1585,7 +1479,7 @@
         <a:spcBef>
           <a:spcPct val="20000"/>
         </a:spcBef>
-        <a:buFont typeface="Arial" pitchFamily="34" charset="0"/>
+        <a:buFont typeface="Arial" panose="020B0604020202020204" pitchFamily="34" charset="0"/>
         <a:buChar char="•"/>
         <a:defRPr sz="2000" kern="1200">
           <a:solidFill>
@@ -1600,7 +1494,7 @@
         <a:spcBef>
           <a:spcPct val="20000"/>
         </a:spcBef>
-        <a:buFont typeface="Arial" pitchFamily="34" charset="0"/>
+        <a:buFont typeface="Arial" panose="020B0604020202020204" pitchFamily="34" charset="0"/>
         <a:buChar char="•"/>
         <a:defRPr sz="2000" kern="1200">
           <a:solidFill>
@@ -1615,7 +1509,7 @@
         <a:spcBef>
           <a:spcPct val="20000"/>
         </a:spcBef>
-        <a:buFont typeface="Arial" pitchFamily="34" charset="0"/>
+        <a:buFont typeface="Arial" panose="020B0604020202020204" pitchFamily="34" charset="0"/>
         <a:buChar char="•"/>
         <a:defRPr sz="2000" kern="1200">
           <a:solidFill>
@@ -1630,7 +1524,7 @@
         <a:spcBef>
           <a:spcPct val="20000"/>
         </a:spcBef>
-        <a:buFont typeface="Arial" pitchFamily="34" charset="0"/>
+        <a:buFont typeface="Arial" panose="020B0604020202020204" pitchFamily="34" charset="0"/>
         <a:buChar char="•"/>
         <a:defRPr sz="2000" kern="1200">
           <a:solidFill>
@@ -1743,12 +1637,13 @@
 
 <file path=ppt/slides/slide1.xml><?xml version="1.0" encoding="utf-8"?>
 <p:sld xmlns:a="http://schemas.openxmlformats.org/drawingml/2006/main" xmlns:r="http://schemas.openxmlformats.org/officeDocument/2006/relationships" xmlns:p="http://schemas.openxmlformats.org/presentationml/2006/main">
-  <p:cSld name="Slide 1">
+  <p:cSld>
     <p:bg>
       <p:bgPr>
         <a:solidFill>
           <a:srgbClr val="3B2A5C"/>
         </a:solidFill>
+        <a:effectLst/>
       </p:bgPr>
     </p:bg>
     <p:spTree>
@@ -1807,13 +1702,12 @@
             <a:avLst/>
           </a:prstGeom>
           <a:noFill/>
-          <a:ln/>
         </p:spPr>
         <p:txBody>
           <a:bodyPr wrap="square" lIns="0" tIns="0" rIns="0" bIns="0" rtlCol="0" anchor="ctr"/>
           <a:lstStyle/>
           <a:p>
-            <a:pPr algn="ctr" indent="0" marL="0">
+            <a:pPr marL="0" indent="0" algn="ctr">
               <a:buNone/>
             </a:pPr>
             <a:r>
@@ -1821,9 +1715,9 @@
                 <a:solidFill>
                   <a:srgbClr val="3B2A5C"/>
                 </a:solidFill>
-                <a:latin typeface="Calibri" pitchFamily="34" charset="0"/>
-                <a:ea typeface="Calibri" pitchFamily="34" charset="-122"/>
-                <a:cs typeface="Calibri" pitchFamily="34" charset="-120"/>
+                <a:latin typeface="Calibri" panose="020F0502020204030204" pitchFamily="34" charset="0"/>
+                <a:ea typeface="Calibri" panose="020F0502020204030204" pitchFamily="34" charset="-122"/>
+                <a:cs typeface="Calibri" panose="020F0502020204030204" pitchFamily="34" charset="-120"/>
               </a:rPr>
               <a:t>INSTRUKSI KE STORE</a:t>
             </a:r>
@@ -1846,13 +1740,12 @@
             <a:avLst/>
           </a:prstGeom>
           <a:noFill/>
-          <a:ln/>
         </p:spPr>
         <p:txBody>
           <a:bodyPr wrap="square" lIns="0" tIns="0" rIns="0" bIns="0" rtlCol="0" anchor="ctr"/>
           <a:lstStyle/>
           <a:p>
-            <a:pPr indent="0" marL="0">
+            <a:pPr marL="0" indent="0">
               <a:buNone/>
             </a:pPr>
             <a:r>
@@ -1860,11 +1753,35 @@
                 <a:solidFill>
                   <a:srgbClr val="FFFFFF"/>
                 </a:solidFill>
-                <a:latin typeface="Cambria" pitchFamily="34" charset="0"/>
-                <a:ea typeface="Cambria" pitchFamily="34" charset="-122"/>
-                <a:cs typeface="Cambria" pitchFamily="34" charset="-120"/>
+                <a:latin typeface="Cambria" panose="02040503050406030204" pitchFamily="34" charset="0"/>
+                <a:ea typeface="Cambria" panose="02040503050406030204" pitchFamily="34" charset="-122"/>
+                <a:cs typeface="Cambria" panose="02040503050406030204" pitchFamily="34" charset="-120"/>
               </a:rPr>
-              <a:t>Display Blind Box Thermal</a:t>
+              <a:t>Display</a:t>
+            </a:r>
+            <a:endParaRPr lang="en-US" sz="5000" b="1" dirty="0">
+              <a:solidFill>
+                <a:srgbClr val="FFFFFF"/>
+              </a:solidFill>
+              <a:latin typeface="Cambria" panose="02040503050406030204" pitchFamily="34" charset="0"/>
+              <a:ea typeface="Cambria" panose="02040503050406030204" pitchFamily="34" charset="-122"/>
+              <a:cs typeface="Cambria" panose="02040503050406030204" pitchFamily="34" charset="-120"/>
+            </a:endParaRPr>
+          </a:p>
+          <a:p>
+            <a:pPr marL="0" indent="0">
+              <a:buNone/>
+            </a:pPr>
+            <a:r>
+              <a:rPr lang="en-US" sz="5000" b="1" dirty="0">
+                <a:solidFill>
+                  <a:srgbClr val="FFFFFF"/>
+                </a:solidFill>
+                <a:latin typeface="Cambria" panose="02040503050406030204" pitchFamily="34" charset="0"/>
+                <a:ea typeface="Cambria" panose="02040503050406030204" pitchFamily="34" charset="-122"/>
+                <a:cs typeface="Cambria" panose="02040503050406030204" pitchFamily="34" charset="-120"/>
+              </a:rPr>
+              <a:t>Blind Box Thermal</a:t>
             </a:r>
             <a:endParaRPr lang="en-US" sz="5000" dirty="0"/>
           </a:p>
@@ -1879,19 +1796,18 @@
         <p:spPr>
           <a:xfrm>
             <a:off x="548640" y="3474720"/>
-            <a:ext cx="6400800" cy="914400"/>
+            <a:ext cx="6400800" cy="1645920"/>
           </a:xfrm>
           <a:prstGeom prst="rect">
             <a:avLst/>
           </a:prstGeom>
           <a:noFill/>
-          <a:ln/>
         </p:spPr>
         <p:txBody>
           <a:bodyPr wrap="square" lIns="0" tIns="0" rIns="0" bIns="0" rtlCol="0" anchor="ctr"/>
           <a:lstStyle/>
           <a:p>
-            <a:pPr indent="0" marL="0">
+            <a:pPr marL="0" indent="0">
               <a:buNone/>
             </a:pPr>
             <a:r>
@@ -1899,16 +1815,42 @@
                 <a:solidFill>
                   <a:srgbClr val="F8C6DE"/>
                 </a:solidFill>
-                <a:latin typeface="Calibri" pitchFamily="34" charset="0"/>
-                <a:ea typeface="Calibri" pitchFamily="34" charset="-122"/>
-                <a:cs typeface="Calibri" pitchFamily="34" charset="-120"/>
+                <a:latin typeface="Calibri" panose="020F0502020204030204" pitchFamily="34" charset="0"/>
+                <a:ea typeface="Calibri" panose="020F0502020204030204" pitchFamily="34" charset="-122"/>
+                <a:cs typeface="Calibri" panose="020F0502020204030204" pitchFamily="34" charset="-120"/>
               </a:rPr>
-              <a:t>Program “Pick Your Lucky Box”</a:t>
+              <a:t>“Pick Your Lucky Box”</a:t>
             </a:r>
+            <a:endParaRPr lang="en-US" sz="2200" dirty="0">
+              <a:solidFill>
+                <a:srgbClr val="F8C6DE"/>
+              </a:solidFill>
+              <a:latin typeface="Calibri" panose="020F0502020204030204" pitchFamily="34" charset="0"/>
+              <a:ea typeface="Calibri" panose="020F0502020204030204" pitchFamily="34" charset="-122"/>
+              <a:cs typeface="Calibri" panose="020F0502020204030204" pitchFamily="34" charset="-120"/>
+            </a:endParaRPr>
+          </a:p>
+          <a:p>
+            <a:pPr marL="0" indent="0">
+              <a:buNone/>
+            </a:pPr>
+            <a:endParaRPr lang="en-US" sz="2200" dirty="0">
+              <a:solidFill>
+                <a:srgbClr val="F8C6DE"/>
+              </a:solidFill>
+              <a:latin typeface="Calibri" panose="020F0502020204030204" pitchFamily="34" charset="0"/>
+              <a:ea typeface="Calibri" panose="020F0502020204030204" pitchFamily="34" charset="-122"/>
+              <a:cs typeface="Calibri" panose="020F0502020204030204" pitchFamily="34" charset="-120"/>
+            </a:endParaRPr>
+          </a:p>
+          <a:p>
+            <a:pPr marL="0" indent="0">
+              <a:buNone/>
+            </a:pPr>
             <a:endParaRPr lang="en-US" sz="2200" dirty="0"/>
           </a:p>
           <a:p>
-            <a:pPr indent="0" marL="0">
+            <a:pPr marL="0" indent="0">
               <a:buNone/>
             </a:pPr>
             <a:r>
@@ -1916,9 +1858,33 @@
                 <a:solidFill>
                   <a:srgbClr val="F8C6DE"/>
                 </a:solidFill>
-                <a:latin typeface="Calibri" pitchFamily="34" charset="0"/>
-                <a:ea typeface="Calibri" pitchFamily="34" charset="-122"/>
-                <a:cs typeface="Calibri" pitchFamily="34" charset="-120"/>
+                <a:latin typeface="Calibri" panose="020F0502020204030204" pitchFamily="34" charset="0"/>
+                <a:ea typeface="Calibri" panose="020F0502020204030204" pitchFamily="34" charset="-122"/>
+                <a:cs typeface="Calibri" panose="020F0502020204030204" pitchFamily="34" charset="-120"/>
+              </a:rPr>
+              <a:t>Posisi Display</a:t>
+            </a:r>
+            <a:endParaRPr lang="en-US" sz="2200" dirty="0">
+              <a:solidFill>
+                <a:srgbClr val="F8C6DE"/>
+              </a:solidFill>
+              <a:latin typeface="Calibri" panose="020F0502020204030204" pitchFamily="34" charset="0"/>
+              <a:ea typeface="Calibri" panose="020F0502020204030204" pitchFamily="34" charset="-122"/>
+              <a:cs typeface="Calibri" panose="020F0502020204030204" pitchFamily="34" charset="-120"/>
+            </a:endParaRPr>
+          </a:p>
+          <a:p>
+            <a:pPr marL="0" indent="0">
+              <a:buNone/>
+            </a:pPr>
+            <a:r>
+              <a:rPr lang="en-US" sz="2200" dirty="0">
+                <a:solidFill>
+                  <a:srgbClr val="F8C6DE"/>
+                </a:solidFill>
+                <a:latin typeface="Calibri" panose="020F0502020204030204" pitchFamily="34" charset="0"/>
+                <a:ea typeface="Calibri" panose="020F0502020204030204" pitchFamily="34" charset="-122"/>
+                <a:cs typeface="Calibri" panose="020F0502020204030204" pitchFamily="34" charset="-120"/>
               </a:rPr>
               <a:t>Endcap Area Thermal</a:t>
             </a:r>
@@ -1941,13 +1907,12 @@
             <a:avLst/>
           </a:prstGeom>
           <a:noFill/>
-          <a:ln/>
         </p:spPr>
         <p:txBody>
           <a:bodyPr wrap="square" lIns="0" tIns="0" rIns="0" bIns="0" rtlCol="0" anchor="ctr"/>
           <a:lstStyle/>
           <a:p>
-            <a:pPr indent="0" marL="0">
+            <a:pPr marL="0" indent="0">
               <a:buNone/>
             </a:pPr>
             <a:r>
@@ -1955,11 +1920,11 @@
                 <a:solidFill>
                   <a:srgbClr val="FDE68A"/>
                 </a:solidFill>
-                <a:latin typeface="Calibri" pitchFamily="34" charset="0"/>
-                <a:ea typeface="Calibri" pitchFamily="34" charset="-122"/>
-                <a:cs typeface="Calibri" pitchFamily="34" charset="-120"/>
+                <a:latin typeface="Calibri" panose="020F0502020204030204" pitchFamily="34" charset="0"/>
+                <a:ea typeface="Calibri" panose="020F0502020204030204" pitchFamily="34" charset="-122"/>
+                <a:cs typeface="Calibri" panose="020F0502020204030204" pitchFamily="34" charset="-120"/>
               </a:rPr>
-              <a:t>Wajib dijalankan seluruh store</a:t>
+              <a:t>Wajib dijalankan seluruh store yg mendapatkan pembagian Blind Box Thermal ini, jika tidak ada di list jangan melakukan STO</a:t>
             </a:r>
             <a:endParaRPr lang="en-US" sz="1600" dirty="0"/>
           </a:p>
@@ -1994,7 +1959,7 @@
       </p:sp>
       <p:pic>
         <p:nvPicPr>
-          <p:cNvPr id="8" name="Image 0" descr="/tmp/claude-0/-home-user-Testing-Erie/31a86cd2-3938-53d6-901f-33e16b329622/images/1.webp">    </p:cNvPr>
+          <p:cNvPr id="8" name="Image 0" descr="/tmp/claude-0/-home-user-Testing-Erie/31a86cd2-3938-53d6-901f-33e16b329622/images/1.webp"/>
           <p:cNvPicPr>
             <a:picLocks noChangeAspect="1"/>
           </p:cNvPicPr>
@@ -2002,8 +1967,10 @@
         </p:nvPicPr>
         <p:blipFill>
           <a:blip r:embed="rId1"/>
-          <a:srcRect l="0" r="0" t="0" b="0"/>
-          <a:stretch/>
+          <a:srcRect/>
+          <a:stretch>
+            <a:fillRect/>
+          </a:stretch>
         </p:blipFill>
         <p:spPr>
           <a:xfrm>
@@ -2025,12 +1992,13 @@
 
 <file path=ppt/slides/slide10.xml><?xml version="1.0" encoding="utf-8"?>
 <p:sld xmlns:a="http://schemas.openxmlformats.org/drawingml/2006/main" xmlns:r="http://schemas.openxmlformats.org/officeDocument/2006/relationships" xmlns:p="http://schemas.openxmlformats.org/presentationml/2006/main">
-  <p:cSld name="Slide 10">
+  <p:cSld>
     <p:bg>
       <p:bgPr>
         <a:solidFill>
           <a:srgbClr val="FFFFFF"/>
         </a:solidFill>
+        <a:effectLst/>
       </p:bgPr>
     </p:bg>
     <p:spTree>
@@ -2062,13 +2030,12 @@
             <a:avLst/>
           </a:prstGeom>
           <a:noFill/>
-          <a:ln/>
         </p:spPr>
         <p:txBody>
           <a:bodyPr wrap="square" lIns="0" tIns="0" rIns="0" bIns="0" rtlCol="0" anchor="ctr"/>
           <a:lstStyle/>
           <a:p>
-            <a:pPr indent="0" marL="0">
+            <a:pPr marL="0" indent="0">
               <a:buNone/>
             </a:pPr>
             <a:r>
@@ -2076,9 +2043,9 @@
                 <a:solidFill>
                   <a:srgbClr val="3B2A5C"/>
                 </a:solidFill>
-                <a:latin typeface="Cambria" pitchFamily="34" charset="0"/>
-                <a:ea typeface="Cambria" pitchFamily="34" charset="-122"/>
-                <a:cs typeface="Cambria" pitchFamily="34" charset="-120"/>
+                <a:latin typeface="Cambria" panose="02040503050406030204" pitchFamily="34" charset="0"/>
+                <a:ea typeface="Cambria" panose="02040503050406030204" pitchFamily="34" charset="-122"/>
+                <a:cs typeface="Cambria" panose="02040503050406030204" pitchFamily="34" charset="-120"/>
               </a:rPr>
               <a:t>Do dan Don'ts display dan penjualan</a:t>
             </a:r>
@@ -2101,13 +2068,12 @@
             <a:avLst/>
           </a:prstGeom>
           <a:noFill/>
-          <a:ln/>
         </p:spPr>
         <p:txBody>
           <a:bodyPr wrap="square" lIns="0" tIns="0" rIns="0" bIns="0" rtlCol="0" anchor="ctr"/>
           <a:lstStyle/>
           <a:p>
-            <a:pPr indent="0" marL="0">
+            <a:pPr marL="0" indent="0">
               <a:buNone/>
             </a:pPr>
             <a:r>
@@ -2115,9 +2081,9 @@
                 <a:solidFill>
                   <a:srgbClr val="6B6580"/>
                 </a:solidFill>
-                <a:latin typeface="Calibri" pitchFamily="34" charset="0"/>
-                <a:ea typeface="Calibri" pitchFamily="34" charset="-122"/>
-                <a:cs typeface="Calibri" pitchFamily="34" charset="-120"/>
+                <a:latin typeface="Calibri" panose="020F0502020204030204" pitchFamily="34" charset="0"/>
+                <a:ea typeface="Calibri" panose="020F0502020204030204" pitchFamily="34" charset="-122"/>
+                <a:cs typeface="Calibri" panose="020F0502020204030204" pitchFamily="34" charset="-120"/>
               </a:rPr>
               <a:t>Rekomendasi untuk tim store</a:t>
             </a:r>
@@ -2194,13 +2160,12 @@
             <a:avLst/>
           </a:prstGeom>
           <a:noFill/>
-          <a:ln/>
         </p:spPr>
         <p:txBody>
           <a:bodyPr wrap="square" lIns="0" tIns="0" rIns="0" bIns="0" rtlCol="0" anchor="ctr"/>
           <a:lstStyle/>
           <a:p>
-            <a:pPr algn="ctr" indent="0" marL="0">
+            <a:pPr marL="0" indent="0" algn="ctr">
               <a:buNone/>
             </a:pPr>
             <a:r>
@@ -2208,9 +2173,9 @@
                 <a:solidFill>
                   <a:srgbClr val="FFFFFF"/>
                 </a:solidFill>
-                <a:latin typeface="Calibri" pitchFamily="34" charset="0"/>
-                <a:ea typeface="Calibri" pitchFamily="34" charset="-122"/>
-                <a:cs typeface="Calibri" pitchFamily="34" charset="-120"/>
+                <a:latin typeface="Calibri" panose="020F0502020204030204" pitchFamily="34" charset="0"/>
+                <a:ea typeface="Calibri" panose="020F0502020204030204" pitchFamily="34" charset="-122"/>
+                <a:cs typeface="Calibri" panose="020F0502020204030204" pitchFamily="34" charset="-120"/>
               </a:rPr>
               <a:t>DO</a:t>
             </a:r>
@@ -2233,7 +2198,6 @@
             <a:avLst/>
           </a:prstGeom>
           <a:noFill/>
-          <a:ln/>
         </p:spPr>
         <p:txBody>
           <a:bodyPr wrap="square" lIns="0" tIns="0" rIns="0" bIns="0" rtlCol="0" anchor="t"/>
@@ -2247,17 +2211,17 @@
               <a:buChar char="•"/>
             </a:pPr>
             <a:r>
-              <a:rPr lang="en-US" sz="1500" dirty="0">
+              <a:rPr lang="en-US" sz="1500" b="1" dirty="0">
                 <a:solidFill>
                   <a:srgbClr val="3B2A5C"/>
                 </a:solidFill>
-                <a:latin typeface="Calibri" pitchFamily="34" charset="0"/>
-                <a:ea typeface="Calibri" pitchFamily="34" charset="-122"/>
-                <a:cs typeface="Calibri" pitchFamily="34" charset="-120"/>
+                <a:latin typeface="Calibri" panose="020F0502020204030204" pitchFamily="34" charset="0"/>
+                <a:ea typeface="Calibri" panose="020F0502020204030204" pitchFamily="34" charset="-122"/>
+                <a:cs typeface="Calibri" panose="020F0502020204030204" pitchFamily="34" charset="-120"/>
               </a:rPr>
               <a:t>Pasang di Endcap Area Thermal, full terisi sesuai planogram dan mock</a:t>
             </a:r>
-            <a:endParaRPr lang="en-US" sz="1500" dirty="0"/>
+            <a:endParaRPr lang="en-US" sz="1500" b="1" dirty="0"/>
           </a:p>
           <a:p>
             <a:pPr marL="342900" indent="-342900">
@@ -2268,17 +2232,17 @@
               <a:buChar char="•"/>
             </a:pPr>
             <a:r>
-              <a:rPr lang="en-US" sz="1500" dirty="0">
+              <a:rPr lang="en-US" sz="1500" b="1" dirty="0">
                 <a:solidFill>
                   <a:srgbClr val="3B2A5C"/>
                 </a:solidFill>
-                <a:latin typeface="Calibri" pitchFamily="34" charset="0"/>
-                <a:ea typeface="Calibri" pitchFamily="34" charset="-122"/>
-                <a:cs typeface="Calibri" pitchFamily="34" charset="-120"/>
+                <a:latin typeface="Calibri" panose="020F0502020204030204" pitchFamily="34" charset="0"/>
+                <a:ea typeface="Calibri" panose="020F0502020204030204" pitchFamily="34" charset="-122"/>
+                <a:cs typeface="Calibri" panose="020F0502020204030204" pitchFamily="34" charset="-120"/>
               </a:rPr>
               <a:t>Buka 1 PDQ SMALL dan 1 PDQ LARGE sebagai sampel, sisanya tetap tersegel</a:t>
             </a:r>
-            <a:endParaRPr lang="en-US" sz="1500" dirty="0"/>
+            <a:endParaRPr lang="en-US" sz="1500" b="1" dirty="0"/>
           </a:p>
           <a:p>
             <a:pPr marL="342900" indent="-342900">
@@ -2289,17 +2253,17 @@
               <a:buChar char="•"/>
             </a:pPr>
             <a:r>
-              <a:rPr lang="en-US" sz="1500" dirty="0">
+              <a:rPr lang="en-US" sz="1500" b="1" dirty="0">
                 <a:solidFill>
                   <a:srgbClr val="3B2A5C"/>
                 </a:solidFill>
-                <a:latin typeface="Calibri" pitchFamily="34" charset="0"/>
-                <a:ea typeface="Calibri" pitchFamily="34" charset="-122"/>
-                <a:cs typeface="Calibri" pitchFamily="34" charset="-120"/>
+                <a:latin typeface="Calibri" panose="020F0502020204030204" pitchFamily="34" charset="0"/>
+                <a:ea typeface="Calibri" panose="020F0502020204030204" pitchFamily="34" charset="-122"/>
+                <a:cs typeface="Calibri" panose="020F0502020204030204" pitchFamily="34" charset="-120"/>
               </a:rPr>
               <a:t>Amankan Secret bila didapat, lalu display 5 warna</a:t>
             </a:r>
-            <a:endParaRPr lang="en-US" sz="1500" dirty="0"/>
+            <a:endParaRPr lang="en-US" sz="1500" b="1" dirty="0"/>
           </a:p>
           <a:p>
             <a:pPr marL="342900" indent="-342900">
@@ -2310,17 +2274,17 @@
               <a:buChar char="•"/>
             </a:pPr>
             <a:r>
-              <a:rPr lang="en-US" sz="1500" dirty="0">
+              <a:rPr lang="en-US" sz="1500" b="1" dirty="0">
                 <a:solidFill>
                   <a:srgbClr val="3B2A5C"/>
                 </a:solidFill>
-                <a:latin typeface="Calibri" pitchFamily="34" charset="0"/>
-                <a:ea typeface="Calibri" pitchFamily="34" charset="-122"/>
-                <a:cs typeface="Calibri" pitchFamily="34" charset="-120"/>
+                <a:latin typeface="Calibri" panose="020F0502020204030204" pitchFamily="34" charset="0"/>
+                <a:ea typeface="Calibri" panose="020F0502020204030204" pitchFamily="34" charset="-122"/>
+                <a:cs typeface="Calibri" panose="020F0502020204030204" pitchFamily="34" charset="-120"/>
               </a:rPr>
               <a:t>Buka kardus pelan-pelan dan ikuti video tutorial MD</a:t>
             </a:r>
-            <a:endParaRPr lang="en-US" sz="1500" dirty="0"/>
+            <a:endParaRPr lang="en-US" sz="1500" b="1" dirty="0"/>
           </a:p>
           <a:p>
             <a:pPr marL="342900" indent="-342900">
@@ -2331,17 +2295,17 @@
               <a:buChar char="•"/>
             </a:pPr>
             <a:r>
-              <a:rPr lang="en-US" sz="1500" dirty="0">
+              <a:rPr lang="en-US" sz="1500" b="1" dirty="0">
                 <a:solidFill>
                   <a:srgbClr val="3B2A5C"/>
                 </a:solidFill>
-                <a:latin typeface="Calibri" pitchFamily="34" charset="0"/>
-                <a:ea typeface="Calibri" pitchFamily="34" charset="-122"/>
-                <a:cs typeface="Calibri" pitchFamily="34" charset="-120"/>
+                <a:latin typeface="Calibri" panose="020F0502020204030204" pitchFamily="34" charset="0"/>
+                <a:ea typeface="Calibri" panose="020F0502020204030204" pitchFamily="34" charset="-122"/>
+                <a:cs typeface="Calibri" panose="020F0502020204030204" pitchFamily="34" charset="-120"/>
               </a:rPr>
               <a:t>Isi ulang rak dari buffer stock sebelum kosong</a:t>
             </a:r>
-            <a:endParaRPr lang="en-US" sz="1500" dirty="0"/>
+            <a:endParaRPr lang="en-US" sz="1500" b="1" dirty="0"/>
           </a:p>
           <a:p>
             <a:pPr marL="342900" indent="-342900">
@@ -2352,17 +2316,17 @@
               <a:buChar char="•"/>
             </a:pPr>
             <a:r>
-              <a:rPr lang="en-US" sz="1500" dirty="0">
+              <a:rPr lang="en-US" sz="1500" b="1" dirty="0">
                 <a:solidFill>
                   <a:srgbClr val="3B2A5C"/>
                 </a:solidFill>
-                <a:latin typeface="Calibri" pitchFamily="34" charset="0"/>
-                <a:ea typeface="Calibri" pitchFamily="34" charset="-122"/>
-                <a:cs typeface="Calibri" pitchFamily="34" charset="-120"/>
+                <a:latin typeface="Calibri" panose="020F0502020204030204" pitchFamily="34" charset="0"/>
+                <a:ea typeface="Calibri" panose="020F0502020204030204" pitchFamily="34" charset="-122"/>
+                <a:cs typeface="Calibri" panose="020F0502020204030204" pitchFamily="34" charset="-120"/>
               </a:rPr>
               <a:t>Jelaskan ke pelanggan: pilih warna favorit, Secret adalah kejutan</a:t>
             </a:r>
-            <a:endParaRPr lang="en-US" sz="1500" dirty="0"/>
+            <a:endParaRPr lang="en-US" sz="1500" b="1" dirty="0"/>
           </a:p>
           <a:p>
             <a:pPr marL="342900" indent="-342900">
@@ -2373,17 +2337,17 @@
               <a:buChar char="•"/>
             </a:pPr>
             <a:r>
-              <a:rPr lang="en-US" sz="1500" dirty="0">
+              <a:rPr lang="en-US" sz="1500" b="1" dirty="0">
                 <a:solidFill>
                   <a:srgbClr val="3B2A5C"/>
                 </a:solidFill>
-                <a:latin typeface="Calibri" pitchFamily="34" charset="0"/>
-                <a:ea typeface="Calibri" pitchFamily="34" charset="-122"/>
-                <a:cs typeface="Calibri" pitchFamily="34" charset="-120"/>
+                <a:latin typeface="Calibri" panose="020F0502020204030204" pitchFamily="34" charset="0"/>
+                <a:ea typeface="Calibri" panose="020F0502020204030204" pitchFamily="34" charset="-122"/>
+                <a:cs typeface="Calibri" panose="020F0502020204030204" pitchFamily="34" charset="-120"/>
               </a:rPr>
               <a:t>Cetak POP A4 sementara dari Head Office bila materi komunikasi belum tiba</a:t>
             </a:r>
-            <a:endParaRPr lang="en-US" sz="1500" dirty="0"/>
+            <a:endParaRPr lang="en-US" sz="1500" b="1" dirty="0"/>
           </a:p>
         </p:txBody>
       </p:sp>
@@ -2456,13 +2420,12 @@
             <a:avLst/>
           </a:prstGeom>
           <a:noFill/>
-          <a:ln/>
         </p:spPr>
         <p:txBody>
           <a:bodyPr wrap="square" lIns="0" tIns="0" rIns="0" bIns="0" rtlCol="0" anchor="ctr"/>
           <a:lstStyle/>
           <a:p>
-            <a:pPr algn="ctr" indent="0" marL="0">
+            <a:pPr marL="0" indent="0" algn="ctr">
               <a:buNone/>
             </a:pPr>
             <a:r>
@@ -2470,9 +2433,9 @@
                 <a:solidFill>
                   <a:srgbClr val="FFFFFF"/>
                 </a:solidFill>
-                <a:latin typeface="Calibri" pitchFamily="34" charset="0"/>
-                <a:ea typeface="Calibri" pitchFamily="34" charset="-122"/>
-                <a:cs typeface="Calibri" pitchFamily="34" charset="-120"/>
+                <a:latin typeface="Calibri" panose="020F0502020204030204" pitchFamily="34" charset="0"/>
+                <a:ea typeface="Calibri" panose="020F0502020204030204" pitchFamily="34" charset="-122"/>
+                <a:cs typeface="Calibri" panose="020F0502020204030204" pitchFamily="34" charset="-120"/>
               </a:rPr>
               <a:t>DON'T</a:t>
             </a:r>
@@ -2495,7 +2458,6 @@
             <a:avLst/>
           </a:prstGeom>
           <a:noFill/>
-          <a:ln/>
         </p:spPr>
         <p:txBody>
           <a:bodyPr wrap="square" lIns="0" tIns="0" rIns="0" bIns="0" rtlCol="0" anchor="t"/>
@@ -2509,17 +2471,21 @@
               <a:buChar char="•"/>
             </a:pPr>
             <a:r>
-              <a:rPr lang="en-US" sz="1500" dirty="0">
+              <a:rPr lang="en-US" sz="1500" b="1" dirty="0">
                 <a:solidFill>
-                  <a:srgbClr val="3B2A5C"/>
+                  <a:srgbClr val="FF0000"/>
                 </a:solidFill>
-                <a:latin typeface="Calibri" pitchFamily="34" charset="0"/>
-                <a:ea typeface="Calibri" pitchFamily="34" charset="-122"/>
-                <a:cs typeface="Calibri" pitchFamily="34" charset="-120"/>
+                <a:latin typeface="Calibri" panose="020F0502020204030204" pitchFamily="34" charset="0"/>
+                <a:ea typeface="Calibri" panose="020F0502020204030204" pitchFamily="34" charset="-122"/>
+                <a:cs typeface="Calibri" panose="020F0502020204030204" pitchFamily="34" charset="-120"/>
               </a:rPr>
               <a:t>Jangan taruh di luar endcap Thermal atau campur dengan produk lain</a:t>
             </a:r>
-            <a:endParaRPr lang="en-US" sz="1500" dirty="0"/>
+            <a:endParaRPr lang="en-US" sz="1500" b="1" dirty="0">
+              <a:solidFill>
+                <a:srgbClr val="FF0000"/>
+              </a:solidFill>
+            </a:endParaRPr>
           </a:p>
           <a:p>
             <a:pPr marL="342900" indent="-342900">
@@ -2530,17 +2496,21 @@
               <a:buChar char="•"/>
             </a:pPr>
             <a:r>
-              <a:rPr lang="en-US" sz="1500" dirty="0">
+              <a:rPr lang="en-US" sz="1500" b="1" dirty="0">
                 <a:solidFill>
-                  <a:srgbClr val="3B2A5C"/>
+                  <a:srgbClr val="FF0000"/>
                 </a:solidFill>
-                <a:latin typeface="Calibri" pitchFamily="34" charset="0"/>
-                <a:ea typeface="Calibri" pitchFamily="34" charset="-122"/>
-                <a:cs typeface="Calibri" pitchFamily="34" charset="-120"/>
+                <a:latin typeface="Calibri" panose="020F0502020204030204" pitchFamily="34" charset="0"/>
+                <a:ea typeface="Calibri" panose="020F0502020204030204" pitchFamily="34" charset="-122"/>
+                <a:cs typeface="Calibri" panose="020F0502020204030204" pitchFamily="34" charset="-120"/>
               </a:rPr>
               <a:t>Jangan biarkan rak kosong atau terisi sebagian</a:t>
             </a:r>
-            <a:endParaRPr lang="en-US" sz="1500" dirty="0"/>
+            <a:endParaRPr lang="en-US" sz="1500" b="1" dirty="0">
+              <a:solidFill>
+                <a:srgbClr val="FF0000"/>
+              </a:solidFill>
+            </a:endParaRPr>
           </a:p>
           <a:p>
             <a:pPr marL="342900" indent="-342900">
@@ -2551,17 +2521,21 @@
               <a:buChar char="•"/>
             </a:pPr>
             <a:r>
-              <a:rPr lang="en-US" sz="1500" dirty="0">
+              <a:rPr lang="en-US" sz="1500" b="1" dirty="0">
                 <a:solidFill>
-                  <a:srgbClr val="3B2A5C"/>
+                  <a:srgbClr val="FF0000"/>
                 </a:solidFill>
-                <a:latin typeface="Calibri" pitchFamily="34" charset="0"/>
-                <a:ea typeface="Calibri" pitchFamily="34" charset="-122"/>
-                <a:cs typeface="Calibri" pitchFamily="34" charset="-120"/>
+                <a:latin typeface="Calibri" panose="020F0502020204030204" pitchFamily="34" charset="0"/>
+                <a:ea typeface="Calibri" panose="020F0502020204030204" pitchFamily="34" charset="-122"/>
+                <a:cs typeface="Calibri" panose="020F0502020204030204" pitchFamily="34" charset="-120"/>
               </a:rPr>
               <a:t>Jangan buka PDQ selain 1 SMALL dan 1 LARGE</a:t>
             </a:r>
-            <a:endParaRPr lang="en-US" sz="1500" dirty="0"/>
+            <a:endParaRPr lang="en-US" sz="1500" b="1" dirty="0">
+              <a:solidFill>
+                <a:srgbClr val="FF0000"/>
+              </a:solidFill>
+            </a:endParaRPr>
           </a:p>
           <a:p>
             <a:pPr marL="342900" indent="-342900">
@@ -2572,17 +2546,21 @@
               <a:buChar char="•"/>
             </a:pPr>
             <a:r>
-              <a:rPr lang="en-US" sz="1500" dirty="0">
+              <a:rPr lang="en-US" sz="1500" b="1" dirty="0">
                 <a:solidFill>
-                  <a:srgbClr val="3B2A5C"/>
+                  <a:srgbClr val="FF0000"/>
                 </a:solidFill>
-                <a:latin typeface="Calibri" pitchFamily="34" charset="0"/>
-                <a:ea typeface="Calibri" pitchFamily="34" charset="-122"/>
-                <a:cs typeface="Calibri" pitchFamily="34" charset="-120"/>
+                <a:latin typeface="Calibri" panose="020F0502020204030204" pitchFamily="34" charset="0"/>
+                <a:ea typeface="Calibri" panose="020F0502020204030204" pitchFamily="34" charset="-122"/>
+                <a:cs typeface="Calibri" panose="020F0502020204030204" pitchFamily="34" charset="-120"/>
               </a:rPr>
               <a:t>Jangan bocorkan isi box tersegel (ditimbang, diguncang, atau diberi petunjuk)</a:t>
             </a:r>
-            <a:endParaRPr lang="en-US" sz="1500" dirty="0"/>
+            <a:endParaRPr lang="en-US" sz="1500" b="1" dirty="0">
+              <a:solidFill>
+                <a:srgbClr val="FF0000"/>
+              </a:solidFill>
+            </a:endParaRPr>
           </a:p>
           <a:p>
             <a:pPr marL="342900" indent="-342900">
@@ -2593,17 +2571,21 @@
               <a:buChar char="•"/>
             </a:pPr>
             <a:r>
-              <a:rPr lang="en-US" sz="1500" dirty="0">
+              <a:rPr lang="en-US" sz="1500" b="1" dirty="0">
                 <a:solidFill>
-                  <a:srgbClr val="3B2A5C"/>
+                  <a:srgbClr val="FF0000"/>
                 </a:solidFill>
-                <a:latin typeface="Calibri" pitchFamily="34" charset="0"/>
-                <a:ea typeface="Calibri" pitchFamily="34" charset="-122"/>
-                <a:cs typeface="Calibri" pitchFamily="34" charset="-120"/>
+                <a:latin typeface="Calibri" panose="020F0502020204030204" pitchFamily="34" charset="0"/>
+                <a:ea typeface="Calibri" panose="020F0502020204030204" pitchFamily="34" charset="-122"/>
+                <a:cs typeface="Calibri" panose="020F0502020204030204" pitchFamily="34" charset="-120"/>
               </a:rPr>
               <a:t>Jangan ubah susunan, qty, atau tinggi rak</a:t>
             </a:r>
-            <a:endParaRPr lang="en-US" sz="1500" dirty="0"/>
+            <a:endParaRPr lang="en-US" sz="1500" b="1" dirty="0">
+              <a:solidFill>
+                <a:srgbClr val="FF0000"/>
+              </a:solidFill>
+            </a:endParaRPr>
           </a:p>
           <a:p>
             <a:pPr marL="342900" indent="-342900">
@@ -2614,17 +2596,21 @@
               <a:buChar char="•"/>
             </a:pPr>
             <a:r>
-              <a:rPr lang="en-US" sz="1500" dirty="0">
+              <a:rPr lang="en-US" sz="1500" b="1" dirty="0">
                 <a:solidFill>
-                  <a:srgbClr val="3B2A5C"/>
+                  <a:srgbClr val="FF0000"/>
                 </a:solidFill>
-                <a:latin typeface="Calibri" pitchFamily="34" charset="0"/>
-                <a:ea typeface="Calibri" pitchFamily="34" charset="-122"/>
-                <a:cs typeface="Calibri" pitchFamily="34" charset="-120"/>
+                <a:latin typeface="Calibri" panose="020F0502020204030204" pitchFamily="34" charset="0"/>
+                <a:ea typeface="Calibri" panose="020F0502020204030204" pitchFamily="34" charset="-122"/>
+                <a:cs typeface="Calibri" panose="020F0502020204030204" pitchFamily="34" charset="-120"/>
               </a:rPr>
               <a:t>Jangan jual unit sampel yang sudah dibuka sebagai produk baru</a:t>
             </a:r>
-            <a:endParaRPr lang="en-US" sz="1500" dirty="0"/>
+            <a:endParaRPr lang="en-US" sz="1500" b="1" dirty="0">
+              <a:solidFill>
+                <a:srgbClr val="FF0000"/>
+              </a:solidFill>
+            </a:endParaRPr>
           </a:p>
           <a:p>
             <a:pPr marL="342900" indent="-342900">
@@ -2635,17 +2621,24 @@
               <a:buChar char="•"/>
             </a:pPr>
             <a:r>
-              <a:rPr lang="en-US" sz="1500" dirty="0">
+              <a:rPr lang="en-US" sz="1500" b="1" dirty="0">
                 <a:solidFill>
-                  <a:srgbClr val="3B2A5C"/>
+                  <a:srgbClr val="FF0000"/>
                 </a:solidFill>
-                <a:latin typeface="Calibri" pitchFamily="34" charset="0"/>
-                <a:ea typeface="Calibri" pitchFamily="34" charset="-122"/>
-                <a:cs typeface="Calibri" pitchFamily="34" charset="-120"/>
+                <a:latin typeface="Calibri" panose="020F0502020204030204" pitchFamily="34" charset="0"/>
+                <a:ea typeface="Calibri" panose="020F0502020204030204" pitchFamily="34" charset="-122"/>
+                <a:cs typeface="Calibri" panose="020F0502020204030204" pitchFamily="34" charset="-120"/>
               </a:rPr>
               <a:t>Jangan cetak POP sementara selain di percetakan</a:t>
             </a:r>
-            <a:endParaRPr lang="en-US" sz="1500" dirty="0"/>
+            <a:endParaRPr lang="en-US" sz="1500" b="1" dirty="0">
+              <a:solidFill>
+                <a:srgbClr val="FF0000"/>
+              </a:solidFill>
+              <a:latin typeface="Calibri" panose="020F0502020204030204" pitchFamily="34" charset="0"/>
+              <a:ea typeface="Calibri" panose="020F0502020204030204" pitchFamily="34" charset="-122"/>
+              <a:cs typeface="Calibri" panose="020F0502020204030204" pitchFamily="34" charset="-120"/>
+            </a:endParaRPr>
           </a:p>
         </p:txBody>
       </p:sp>
@@ -2659,12 +2652,13 @@
 
 <file path=ppt/slides/slide11.xml><?xml version="1.0" encoding="utf-8"?>
 <p:sld xmlns:a="http://schemas.openxmlformats.org/drawingml/2006/main" xmlns:r="http://schemas.openxmlformats.org/officeDocument/2006/relationships" xmlns:p="http://schemas.openxmlformats.org/presentationml/2006/main">
-  <p:cSld name="Slide 11">
+  <p:cSld>
     <p:bg>
       <p:bgPr>
         <a:solidFill>
           <a:srgbClr val="3B2A5C"/>
         </a:solidFill>
+        <a:effectLst/>
       </p:bgPr>
     </p:bg>
     <p:spTree>
@@ -2696,13 +2690,12 @@
             <a:avLst/>
           </a:prstGeom>
           <a:noFill/>
-          <a:ln/>
         </p:spPr>
         <p:txBody>
           <a:bodyPr wrap="square" lIns="0" tIns="0" rIns="0" bIns="0" rtlCol="0" anchor="ctr"/>
           <a:lstStyle/>
           <a:p>
-            <a:pPr indent="0" marL="0">
+            <a:pPr marL="0" indent="0">
               <a:buNone/>
             </a:pPr>
             <a:r>
@@ -2710,9 +2703,9 @@
                 <a:solidFill>
                   <a:srgbClr val="FFFFFF"/>
                 </a:solidFill>
-                <a:latin typeface="Cambria" pitchFamily="34" charset="0"/>
-                <a:ea typeface="Cambria" pitchFamily="34" charset="-122"/>
-                <a:cs typeface="Cambria" pitchFamily="34" charset="-120"/>
+                <a:latin typeface="Cambria" panose="02040503050406030204" pitchFamily="34" charset="0"/>
+                <a:ea typeface="Cambria" panose="02040503050406030204" pitchFamily="34" charset="-122"/>
+                <a:cs typeface="Cambria" panose="02040503050406030204" pitchFamily="34" charset="-120"/>
               </a:rPr>
               <a:t>Summary check list tim store</a:t>
             </a:r>
@@ -2728,8 +2721,8 @@
         </p:nvSpPr>
         <p:spPr>
           <a:xfrm>
-            <a:off x="548640" y="1325880"/>
-            <a:ext cx="11064240" cy="548640"/>
+            <a:off x="548640" y="1280160"/>
+            <a:ext cx="11064240" cy="512064"/>
           </a:xfrm>
           <a:prstGeom prst="roundRect">
             <a:avLst>
@@ -2755,7 +2748,7 @@
         </p:nvSpPr>
         <p:spPr>
           <a:xfrm>
-            <a:off x="731520" y="1417320"/>
+            <a:off x="731520" y="1353312"/>
             <a:ext cx="365760" cy="365760"/>
           </a:xfrm>
           <a:prstGeom prst="ellipse">
@@ -2780,20 +2773,19 @@
         </p:nvSpPr>
         <p:spPr>
           <a:xfrm>
-            <a:off x="731520" y="1417320"/>
+            <a:off x="731520" y="1353312"/>
             <a:ext cx="365760" cy="365760"/>
           </a:xfrm>
           <a:prstGeom prst="rect">
             <a:avLst/>
           </a:prstGeom>
           <a:noFill/>
-          <a:ln/>
         </p:spPr>
         <p:txBody>
           <a:bodyPr wrap="square" lIns="0" tIns="0" rIns="0" bIns="0" rtlCol="0" anchor="ctr"/>
           <a:lstStyle/>
           <a:p>
-            <a:pPr algn="ctr" indent="0" marL="0">
+            <a:pPr marL="0" indent="0" algn="ctr">
               <a:buNone/>
             </a:pPr>
             <a:r>
@@ -2801,9 +2793,9 @@
                 <a:solidFill>
                   <a:srgbClr val="3B2A5C"/>
                 </a:solidFill>
-                <a:latin typeface="Calibri" pitchFamily="34" charset="0"/>
-                <a:ea typeface="Calibri" pitchFamily="34" charset="-122"/>
-                <a:cs typeface="Calibri" pitchFamily="34" charset="-120"/>
+                <a:latin typeface="Calibri" panose="020F0502020204030204" pitchFamily="34" charset="0"/>
+                <a:ea typeface="Calibri" panose="020F0502020204030204" pitchFamily="34" charset="-122"/>
+                <a:cs typeface="Calibri" panose="020F0502020204030204" pitchFamily="34" charset="-120"/>
               </a:rPr>
               <a:t>✓</a:t>
             </a:r>
@@ -2819,20 +2811,19 @@
         </p:nvSpPr>
         <p:spPr>
           <a:xfrm>
-            <a:off x="1325880" y="1325880"/>
-            <a:ext cx="10149840" cy="548640"/>
+            <a:off x="1325880" y="1280160"/>
+            <a:ext cx="10149840" cy="512064"/>
           </a:xfrm>
           <a:prstGeom prst="rect">
             <a:avLst/>
           </a:prstGeom>
           <a:noFill/>
-          <a:ln/>
         </p:spPr>
         <p:txBody>
           <a:bodyPr wrap="square" lIns="0" tIns="0" rIns="0" bIns="0" rtlCol="0" anchor="ctr"/>
           <a:lstStyle/>
           <a:p>
-            <a:pPr indent="0" marL="0">
+            <a:pPr marL="0" indent="0">
               <a:buNone/>
             </a:pPr>
             <a:r>
@@ -2840,9 +2831,9 @@
                 <a:solidFill>
                   <a:srgbClr val="FFFFFF"/>
                 </a:solidFill>
-                <a:latin typeface="Calibri" pitchFamily="34" charset="0"/>
-                <a:ea typeface="Calibri" pitchFamily="34" charset="-122"/>
-                <a:cs typeface="Calibri" pitchFamily="34" charset="-120"/>
+                <a:latin typeface="Calibri" panose="020F0502020204030204" pitchFamily="34" charset="0"/>
+                <a:ea typeface="Calibri" panose="020F0502020204030204" pitchFamily="34" charset="-122"/>
+                <a:cs typeface="Calibri" panose="020F0502020204030204" pitchFamily="34" charset="-120"/>
               </a:rPr>
               <a:t>Display di Endcap Area Thermal, full terisi Blind Box</a:t>
             </a:r>
@@ -2858,8 +2849,8 @@
         </p:nvSpPr>
         <p:spPr>
           <a:xfrm>
-            <a:off x="548640" y="1984248"/>
-            <a:ext cx="11064240" cy="548640"/>
+            <a:off x="548640" y="1865376"/>
+            <a:ext cx="11064240" cy="512064"/>
           </a:xfrm>
           <a:prstGeom prst="roundRect">
             <a:avLst>
@@ -2885,7 +2876,7 @@
         </p:nvSpPr>
         <p:spPr>
           <a:xfrm>
-            <a:off x="731520" y="2075688"/>
+            <a:off x="731520" y="1938528"/>
             <a:ext cx="365760" cy="365760"/>
           </a:xfrm>
           <a:prstGeom prst="ellipse">
@@ -2910,20 +2901,19 @@
         </p:nvSpPr>
         <p:spPr>
           <a:xfrm>
-            <a:off x="731520" y="2075688"/>
+            <a:off x="731520" y="1938528"/>
             <a:ext cx="365760" cy="365760"/>
           </a:xfrm>
           <a:prstGeom prst="rect">
             <a:avLst/>
           </a:prstGeom>
           <a:noFill/>
-          <a:ln/>
         </p:spPr>
         <p:txBody>
           <a:bodyPr wrap="square" lIns="0" tIns="0" rIns="0" bIns="0" rtlCol="0" anchor="ctr"/>
           <a:lstStyle/>
           <a:p>
-            <a:pPr algn="ctr" indent="0" marL="0">
+            <a:pPr marL="0" indent="0" algn="ctr">
               <a:buNone/>
             </a:pPr>
             <a:r>
@@ -2931,9 +2921,9 @@
                 <a:solidFill>
                   <a:srgbClr val="3B2A5C"/>
                 </a:solidFill>
-                <a:latin typeface="Calibri" pitchFamily="34" charset="0"/>
-                <a:ea typeface="Calibri" pitchFamily="34" charset="-122"/>
-                <a:cs typeface="Calibri" pitchFamily="34" charset="-120"/>
+                <a:latin typeface="Calibri" panose="020F0502020204030204" pitchFamily="34" charset="0"/>
+                <a:ea typeface="Calibri" panose="020F0502020204030204" pitchFamily="34" charset="-122"/>
+                <a:cs typeface="Calibri" panose="020F0502020204030204" pitchFamily="34" charset="-120"/>
               </a:rPr>
               <a:t>✓</a:t>
             </a:r>
@@ -2949,20 +2939,19 @@
         </p:nvSpPr>
         <p:spPr>
           <a:xfrm>
-            <a:off x="1325880" y="1984248"/>
-            <a:ext cx="10149840" cy="548640"/>
+            <a:off x="1325880" y="1865376"/>
+            <a:ext cx="10149840" cy="512064"/>
           </a:xfrm>
           <a:prstGeom prst="rect">
             <a:avLst/>
           </a:prstGeom>
           <a:noFill/>
-          <a:ln/>
         </p:spPr>
         <p:txBody>
           <a:bodyPr wrap="square" lIns="0" tIns="0" rIns="0" bIns="0" rtlCol="0" anchor="ctr"/>
           <a:lstStyle/>
           <a:p>
-            <a:pPr indent="0" marL="0">
+            <a:pPr marL="0" indent="0">
               <a:buNone/>
             </a:pPr>
             <a:r>
@@ -2970,9 +2959,9 @@
                 <a:solidFill>
                   <a:srgbClr val="FFFFFF"/>
                 </a:solidFill>
-                <a:latin typeface="Calibri" pitchFamily="34" charset="0"/>
-                <a:ea typeface="Calibri" pitchFamily="34" charset="-122"/>
-                <a:cs typeface="Calibri" pitchFamily="34" charset="-120"/>
+                <a:latin typeface="Calibri" panose="020F0502020204030204" pitchFamily="34" charset="0"/>
+                <a:ea typeface="Calibri" panose="020F0502020204030204" pitchFamily="34" charset="-122"/>
+                <a:cs typeface="Calibri" panose="020F0502020204030204" pitchFamily="34" charset="-120"/>
               </a:rPr>
               <a:t>Qty sesuai alokasi: Dept + Kasir (120 SMALL, 96 LARGE), Dept only (96 SMALL, 72 LARGE)</a:t>
             </a:r>
@@ -2988,8 +2977,8 @@
         </p:nvSpPr>
         <p:spPr>
           <a:xfrm>
-            <a:off x="548640" y="2642616"/>
-            <a:ext cx="11064240" cy="548640"/>
+            <a:off x="548640" y="2450591"/>
+            <a:ext cx="11064240" cy="512064"/>
           </a:xfrm>
           <a:prstGeom prst="roundRect">
             <a:avLst>
@@ -3015,7 +3004,7 @@
         </p:nvSpPr>
         <p:spPr>
           <a:xfrm>
-            <a:off x="731520" y="2734056"/>
+            <a:off x="731520" y="2523743"/>
             <a:ext cx="365760" cy="365760"/>
           </a:xfrm>
           <a:prstGeom prst="ellipse">
@@ -3040,20 +3029,19 @@
         </p:nvSpPr>
         <p:spPr>
           <a:xfrm>
-            <a:off x="731520" y="2734056"/>
+            <a:off x="731520" y="2523743"/>
             <a:ext cx="365760" cy="365760"/>
           </a:xfrm>
           <a:prstGeom prst="rect">
             <a:avLst/>
           </a:prstGeom>
           <a:noFill/>
-          <a:ln/>
         </p:spPr>
         <p:txBody>
           <a:bodyPr wrap="square" lIns="0" tIns="0" rIns="0" bIns="0" rtlCol="0" anchor="ctr"/>
           <a:lstStyle/>
           <a:p>
-            <a:pPr algn="ctr" indent="0" marL="0">
+            <a:pPr marL="0" indent="0" algn="ctr">
               <a:buNone/>
             </a:pPr>
             <a:r>
@@ -3061,9 +3049,9 @@
                 <a:solidFill>
                   <a:srgbClr val="3B2A5C"/>
                 </a:solidFill>
-                <a:latin typeface="Calibri" pitchFamily="34" charset="0"/>
-                <a:ea typeface="Calibri" pitchFamily="34" charset="-122"/>
-                <a:cs typeface="Calibri" pitchFamily="34" charset="-120"/>
+                <a:latin typeface="Calibri" panose="020F0502020204030204" pitchFamily="34" charset="0"/>
+                <a:ea typeface="Calibri" panose="020F0502020204030204" pitchFamily="34" charset="-122"/>
+                <a:cs typeface="Calibri" panose="020F0502020204030204" pitchFamily="34" charset="-120"/>
               </a:rPr>
               <a:t>✓</a:t>
             </a:r>
@@ -3079,20 +3067,19 @@
         </p:nvSpPr>
         <p:spPr>
           <a:xfrm>
-            <a:off x="1325880" y="2642616"/>
-            <a:ext cx="10149840" cy="548640"/>
+            <a:off x="1325880" y="2450591"/>
+            <a:ext cx="10149840" cy="512064"/>
           </a:xfrm>
           <a:prstGeom prst="rect">
             <a:avLst/>
           </a:prstGeom>
           <a:noFill/>
-          <a:ln/>
         </p:spPr>
         <p:txBody>
           <a:bodyPr wrap="square" lIns="0" tIns="0" rIns="0" bIns="0" rtlCol="0" anchor="ctr"/>
           <a:lstStyle/>
           <a:p>
-            <a:pPr indent="0" marL="0">
+            <a:pPr marL="0" indent="0">
               <a:buNone/>
             </a:pPr>
             <a:r>
@@ -3100,9 +3087,9 @@
                 <a:solidFill>
                   <a:srgbClr val="FFFFFF"/>
                 </a:solidFill>
-                <a:latin typeface="Calibri" pitchFamily="34" charset="0"/>
-                <a:ea typeface="Calibri" pitchFamily="34" charset="-122"/>
-                <a:cs typeface="Calibri" pitchFamily="34" charset="-120"/>
+                <a:latin typeface="Calibri" panose="020F0502020204030204" pitchFamily="34" charset="0"/>
+                <a:ea typeface="Calibri" panose="020F0502020204030204" pitchFamily="34" charset="-122"/>
+                <a:cs typeface="Calibri" panose="020F0502020204030204" pitchFamily="34" charset="-120"/>
               </a:rPr>
               <a:t>Susunan rak sesuai planogram dan mock (16 box SMALL, 12 box LARGE)</a:t>
             </a:r>
@@ -3118,8 +3105,8 @@
         </p:nvSpPr>
         <p:spPr>
           <a:xfrm>
-            <a:off x="548640" y="3300984"/>
-            <a:ext cx="11064240" cy="548640"/>
+            <a:off x="548640" y="3035808"/>
+            <a:ext cx="11064240" cy="512064"/>
           </a:xfrm>
           <a:prstGeom prst="roundRect">
             <a:avLst>
@@ -3145,7 +3132,7 @@
         </p:nvSpPr>
         <p:spPr>
           <a:xfrm>
-            <a:off x="731520" y="3392424"/>
+            <a:off x="731520" y="3108960"/>
             <a:ext cx="365760" cy="365760"/>
           </a:xfrm>
           <a:prstGeom prst="ellipse">
@@ -3170,20 +3157,19 @@
         </p:nvSpPr>
         <p:spPr>
           <a:xfrm>
-            <a:off x="731520" y="3392424"/>
+            <a:off x="731520" y="3108960"/>
             <a:ext cx="365760" cy="365760"/>
           </a:xfrm>
           <a:prstGeom prst="rect">
             <a:avLst/>
           </a:prstGeom>
           <a:noFill/>
-          <a:ln/>
         </p:spPr>
         <p:txBody>
           <a:bodyPr wrap="square" lIns="0" tIns="0" rIns="0" bIns="0" rtlCol="0" anchor="ctr"/>
           <a:lstStyle/>
           <a:p>
-            <a:pPr algn="ctr" indent="0" marL="0">
+            <a:pPr marL="0" indent="0" algn="ctr">
               <a:buNone/>
             </a:pPr>
             <a:r>
@@ -3191,9 +3177,9 @@
                 <a:solidFill>
                   <a:srgbClr val="3B2A5C"/>
                 </a:solidFill>
-                <a:latin typeface="Calibri" pitchFamily="34" charset="0"/>
-                <a:ea typeface="Calibri" pitchFamily="34" charset="-122"/>
-                <a:cs typeface="Calibri" pitchFamily="34" charset="-120"/>
+                <a:latin typeface="Calibri" panose="020F0502020204030204" pitchFamily="34" charset="0"/>
+                <a:ea typeface="Calibri" panose="020F0502020204030204" pitchFamily="34" charset="-122"/>
+                <a:cs typeface="Calibri" panose="020F0502020204030204" pitchFamily="34" charset="-120"/>
               </a:rPr>
               <a:t>✓</a:t>
             </a:r>
@@ -3209,20 +3195,19 @@
         </p:nvSpPr>
         <p:spPr>
           <a:xfrm>
-            <a:off x="1325880" y="3300984"/>
-            <a:ext cx="10149840" cy="548640"/>
+            <a:off x="1325880" y="3035808"/>
+            <a:ext cx="10149840" cy="512064"/>
           </a:xfrm>
           <a:prstGeom prst="rect">
             <a:avLst/>
           </a:prstGeom>
           <a:noFill/>
-          <a:ln/>
         </p:spPr>
         <p:txBody>
           <a:bodyPr wrap="square" lIns="0" tIns="0" rIns="0" bIns="0" rtlCol="0" anchor="ctr"/>
           <a:lstStyle/>
           <a:p>
-            <a:pPr indent="0" marL="0">
+            <a:pPr marL="0" indent="0">
               <a:buNone/>
             </a:pPr>
             <a:r>
@@ -3230,9 +3215,9 @@
                 <a:solidFill>
                   <a:srgbClr val="FFFFFF"/>
                 </a:solidFill>
-                <a:latin typeface="Calibri" pitchFamily="34" charset="0"/>
-                <a:ea typeface="Calibri" pitchFamily="34" charset="-122"/>
-                <a:cs typeface="Calibri" pitchFamily="34" charset="-120"/>
+                <a:latin typeface="Calibri" panose="020F0502020204030204" pitchFamily="34" charset="0"/>
+                <a:ea typeface="Calibri" panose="020F0502020204030204" pitchFamily="34" charset="-122"/>
+                <a:cs typeface="Calibri" panose="020F0502020204030204" pitchFamily="34" charset="-120"/>
               </a:rPr>
               <a:t>Buka 1 PDQ SMALL + 1 PDQ LARGE sesuai video MD, display 6 warna (5 bila Secret diamankan)</a:t>
             </a:r>
@@ -3248,8 +3233,8 @@
         </p:nvSpPr>
         <p:spPr>
           <a:xfrm>
-            <a:off x="548640" y="3959352"/>
-            <a:ext cx="11064240" cy="548640"/>
+            <a:off x="548640" y="3621024"/>
+            <a:ext cx="11064240" cy="512064"/>
           </a:xfrm>
           <a:prstGeom prst="roundRect">
             <a:avLst>
@@ -3275,7 +3260,7 @@
         </p:nvSpPr>
         <p:spPr>
           <a:xfrm>
-            <a:off x="731520" y="4050792"/>
+            <a:off x="731520" y="3694176"/>
             <a:ext cx="365760" cy="365760"/>
           </a:xfrm>
           <a:prstGeom prst="ellipse">
@@ -3300,20 +3285,19 @@
         </p:nvSpPr>
         <p:spPr>
           <a:xfrm>
-            <a:off x="731520" y="4050792"/>
+            <a:off x="731520" y="3694176"/>
             <a:ext cx="365760" cy="365760"/>
           </a:xfrm>
           <a:prstGeom prst="rect">
             <a:avLst/>
           </a:prstGeom>
           <a:noFill/>
-          <a:ln/>
         </p:spPr>
         <p:txBody>
           <a:bodyPr wrap="square" lIns="0" tIns="0" rIns="0" bIns="0" rtlCol="0" anchor="ctr"/>
           <a:lstStyle/>
           <a:p>
-            <a:pPr algn="ctr" indent="0" marL="0">
+            <a:pPr marL="0" indent="0" algn="ctr">
               <a:buNone/>
             </a:pPr>
             <a:r>
@@ -3321,9 +3305,9 @@
                 <a:solidFill>
                   <a:srgbClr val="3B2A5C"/>
                 </a:solidFill>
-                <a:latin typeface="Calibri" pitchFamily="34" charset="0"/>
-                <a:ea typeface="Calibri" pitchFamily="34" charset="-122"/>
-                <a:cs typeface="Calibri" pitchFamily="34" charset="-120"/>
+                <a:latin typeface="Calibri" panose="020F0502020204030204" pitchFamily="34" charset="0"/>
+                <a:ea typeface="Calibri" panose="020F0502020204030204" pitchFamily="34" charset="-122"/>
+                <a:cs typeface="Calibri" panose="020F0502020204030204" pitchFamily="34" charset="-120"/>
               </a:rPr>
               <a:t>✓</a:t>
             </a:r>
@@ -3339,20 +3323,19 @@
         </p:nvSpPr>
         <p:spPr>
           <a:xfrm>
-            <a:off x="1325880" y="3959352"/>
-            <a:ext cx="10149840" cy="548640"/>
+            <a:off x="1325880" y="3621024"/>
+            <a:ext cx="10149840" cy="512064"/>
           </a:xfrm>
           <a:prstGeom prst="rect">
             <a:avLst/>
           </a:prstGeom>
           <a:noFill/>
-          <a:ln/>
         </p:spPr>
         <p:txBody>
           <a:bodyPr wrap="square" lIns="0" tIns="0" rIns="0" bIns="0" rtlCol="0" anchor="ctr"/>
           <a:lstStyle/>
           <a:p>
-            <a:pPr indent="0" marL="0">
+            <a:pPr marL="0" indent="0">
               <a:buNone/>
             </a:pPr>
             <a:r>
@@ -3360,9 +3343,9 @@
                 <a:solidFill>
                   <a:srgbClr val="FFFFFF"/>
                 </a:solidFill>
-                <a:latin typeface="Calibri" pitchFamily="34" charset="0"/>
-                <a:ea typeface="Calibri" pitchFamily="34" charset="-122"/>
-                <a:cs typeface="Calibri" pitchFamily="34" charset="-120"/>
+                <a:latin typeface="Calibri" panose="020F0502020204030204" pitchFamily="34" charset="0"/>
+                <a:ea typeface="Calibri" panose="020F0502020204030204" pitchFamily="34" charset="-122"/>
+                <a:cs typeface="Calibri" panose="020F0502020204030204" pitchFamily="34" charset="-120"/>
               </a:rPr>
               <a:t>Header dari tim VM Jakarta dipasang saat tiba</a:t>
             </a:r>
@@ -3378,8 +3361,8 @@
         </p:nvSpPr>
         <p:spPr>
           <a:xfrm>
-            <a:off x="548640" y="4617720"/>
-            <a:ext cx="11064240" cy="548640"/>
+            <a:off x="548640" y="4206240"/>
+            <a:ext cx="11064240" cy="512064"/>
           </a:xfrm>
           <a:prstGeom prst="roundRect">
             <a:avLst>
@@ -3405,7 +3388,7 @@
         </p:nvSpPr>
         <p:spPr>
           <a:xfrm>
-            <a:off x="731520" y="4709160"/>
+            <a:off x="731520" y="4279392"/>
             <a:ext cx="365760" cy="365760"/>
           </a:xfrm>
           <a:prstGeom prst="ellipse">
@@ -3430,20 +3413,19 @@
         </p:nvSpPr>
         <p:spPr>
           <a:xfrm>
-            <a:off x="731520" y="4709160"/>
+            <a:off x="731520" y="4279392"/>
             <a:ext cx="365760" cy="365760"/>
           </a:xfrm>
           <a:prstGeom prst="rect">
             <a:avLst/>
           </a:prstGeom>
           <a:noFill/>
-          <a:ln/>
         </p:spPr>
         <p:txBody>
           <a:bodyPr wrap="square" lIns="0" tIns="0" rIns="0" bIns="0" rtlCol="0" anchor="ctr"/>
           <a:lstStyle/>
           <a:p>
-            <a:pPr algn="ctr" indent="0" marL="0">
+            <a:pPr marL="0" indent="0" algn="ctr">
               <a:buNone/>
             </a:pPr>
             <a:r>
@@ -3451,9 +3433,9 @@
                 <a:solidFill>
                   <a:srgbClr val="3B2A5C"/>
                 </a:solidFill>
-                <a:latin typeface="Calibri" pitchFamily="34" charset="0"/>
-                <a:ea typeface="Calibri" pitchFamily="34" charset="-122"/>
-                <a:cs typeface="Calibri" pitchFamily="34" charset="-120"/>
+                <a:latin typeface="Calibri" panose="020F0502020204030204" pitchFamily="34" charset="0"/>
+                <a:ea typeface="Calibri" panose="020F0502020204030204" pitchFamily="34" charset="-122"/>
+                <a:cs typeface="Calibri" panose="020F0502020204030204" pitchFamily="34" charset="-120"/>
               </a:rPr>
               <a:t>✓</a:t>
             </a:r>
@@ -3469,20 +3451,19 @@
         </p:nvSpPr>
         <p:spPr>
           <a:xfrm>
-            <a:off x="1325880" y="4617720"/>
-            <a:ext cx="10149840" cy="548640"/>
+            <a:off x="1325880" y="4206240"/>
+            <a:ext cx="10149840" cy="512064"/>
           </a:xfrm>
           <a:prstGeom prst="rect">
             <a:avLst/>
           </a:prstGeom>
           <a:noFill/>
-          <a:ln/>
         </p:spPr>
         <p:txBody>
           <a:bodyPr wrap="square" lIns="0" tIns="0" rIns="0" bIns="0" rtlCol="0" anchor="ctr"/>
           <a:lstStyle/>
           <a:p>
-            <a:pPr indent="0" marL="0">
+            <a:pPr marL="0" indent="0">
               <a:buNone/>
             </a:pPr>
             <a:r>
@@ -3490,9 +3471,9 @@
                 <a:solidFill>
                   <a:srgbClr val="FFFFFF"/>
                 </a:solidFill>
-                <a:latin typeface="Calibri" pitchFamily="34" charset="0"/>
-                <a:ea typeface="Calibri" pitchFamily="34" charset="-122"/>
-                <a:cs typeface="Calibri" pitchFamily="34" charset="-120"/>
+                <a:latin typeface="Calibri" panose="020F0502020204030204" pitchFamily="34" charset="0"/>
+                <a:ea typeface="Calibri" panose="020F0502020204030204" pitchFamily="34" charset="-122"/>
+                <a:cs typeface="Calibri" panose="020F0502020204030204" pitchFamily="34" charset="-120"/>
               </a:rPr>
               <a:t>Materi komunikasi belum tiba: cetak POP A4 dari Head Office di percetakan</a:t>
             </a:r>
@@ -3508,8 +3489,8 @@
         </p:nvSpPr>
         <p:spPr>
           <a:xfrm>
-            <a:off x="548640" y="5276088"/>
-            <a:ext cx="11064240" cy="548640"/>
+            <a:off x="548640" y="4791456"/>
+            <a:ext cx="11064240" cy="512064"/>
           </a:xfrm>
           <a:prstGeom prst="roundRect">
             <a:avLst>
@@ -3535,7 +3516,7 @@
         </p:nvSpPr>
         <p:spPr>
           <a:xfrm>
-            <a:off x="731520" y="5367528"/>
+            <a:off x="731520" y="4864608"/>
             <a:ext cx="365760" cy="365760"/>
           </a:xfrm>
           <a:prstGeom prst="ellipse">
@@ -3560,20 +3541,19 @@
         </p:nvSpPr>
         <p:spPr>
           <a:xfrm>
-            <a:off x="731520" y="5367528"/>
+            <a:off x="731520" y="4864608"/>
             <a:ext cx="365760" cy="365760"/>
           </a:xfrm>
           <a:prstGeom prst="rect">
             <a:avLst/>
           </a:prstGeom>
           <a:noFill/>
-          <a:ln/>
         </p:spPr>
         <p:txBody>
           <a:bodyPr wrap="square" lIns="0" tIns="0" rIns="0" bIns="0" rtlCol="0" anchor="ctr"/>
           <a:lstStyle/>
           <a:p>
-            <a:pPr algn="ctr" indent="0" marL="0">
+            <a:pPr marL="0" indent="0" algn="ctr">
               <a:buNone/>
             </a:pPr>
             <a:r>
@@ -3581,9 +3561,9 @@
                 <a:solidFill>
                   <a:srgbClr val="3B2A5C"/>
                 </a:solidFill>
-                <a:latin typeface="Calibri" pitchFamily="34" charset="0"/>
-                <a:ea typeface="Calibri" pitchFamily="34" charset="-122"/>
-                <a:cs typeface="Calibri" pitchFamily="34" charset="-120"/>
+                <a:latin typeface="Calibri" panose="020F0502020204030204" pitchFamily="34" charset="0"/>
+                <a:ea typeface="Calibri" panose="020F0502020204030204" pitchFamily="34" charset="-122"/>
+                <a:cs typeface="Calibri" panose="020F0502020204030204" pitchFamily="34" charset="-120"/>
               </a:rPr>
               <a:t>✓</a:t>
             </a:r>
@@ -3599,20 +3579,19 @@
         </p:nvSpPr>
         <p:spPr>
           <a:xfrm>
-            <a:off x="1325880" y="5276088"/>
-            <a:ext cx="10149840" cy="548640"/>
+            <a:off x="1325880" y="4791456"/>
+            <a:ext cx="10149840" cy="512064"/>
           </a:xfrm>
           <a:prstGeom prst="rect">
             <a:avLst/>
           </a:prstGeom>
           <a:noFill/>
-          <a:ln/>
         </p:spPr>
         <p:txBody>
           <a:bodyPr wrap="square" lIns="0" tIns="0" rIns="0" bIns="0" rtlCol="0" anchor="ctr"/>
           <a:lstStyle/>
           <a:p>
-            <a:pPr indent="0" marL="0">
+            <a:pPr marL="0" indent="0">
               <a:buNone/>
             </a:pPr>
             <a:r>
@@ -3620,9 +3599,9 @@
                 <a:solidFill>
                   <a:srgbClr val="FFFFFF"/>
                 </a:solidFill>
-                <a:latin typeface="Calibri" pitchFamily="34" charset="0"/>
-                <a:ea typeface="Calibri" pitchFamily="34" charset="-122"/>
-                <a:cs typeface="Calibri" pitchFamily="34" charset="-120"/>
+                <a:latin typeface="Calibri" panose="020F0502020204030204" pitchFamily="34" charset="0"/>
+                <a:ea typeface="Calibri" panose="020F0502020204030204" pitchFamily="34" charset="-122"/>
+                <a:cs typeface="Calibri" panose="020F0502020204030204" pitchFamily="34" charset="-120"/>
               </a:rPr>
               <a:t>Kardus display dibuka pelan-pelan, struktur kardus tidak rusak</a:t>
             </a:r>
@@ -3638,8 +3617,8 @@
         </p:nvSpPr>
         <p:spPr>
           <a:xfrm>
-            <a:off x="548640" y="5934456"/>
-            <a:ext cx="11064240" cy="548640"/>
+            <a:off x="548640" y="5376672"/>
+            <a:ext cx="11064240" cy="512064"/>
           </a:xfrm>
           <a:prstGeom prst="roundRect">
             <a:avLst>
@@ -3665,7 +3644,7 @@
         </p:nvSpPr>
         <p:spPr>
           <a:xfrm>
-            <a:off x="731520" y="6025896"/>
+            <a:off x="731520" y="5449824"/>
             <a:ext cx="365760" cy="365760"/>
           </a:xfrm>
           <a:prstGeom prst="ellipse">
@@ -3690,20 +3669,19 @@
         </p:nvSpPr>
         <p:spPr>
           <a:xfrm>
-            <a:off x="731520" y="6025896"/>
+            <a:off x="731520" y="5449824"/>
             <a:ext cx="365760" cy="365760"/>
           </a:xfrm>
           <a:prstGeom prst="rect">
             <a:avLst/>
           </a:prstGeom>
           <a:noFill/>
-          <a:ln/>
         </p:spPr>
         <p:txBody>
           <a:bodyPr wrap="square" lIns="0" tIns="0" rIns="0" bIns="0" rtlCol="0" anchor="ctr"/>
           <a:lstStyle/>
           <a:p>
-            <a:pPr algn="ctr" indent="0" marL="0">
+            <a:pPr marL="0" indent="0" algn="ctr">
               <a:buNone/>
             </a:pPr>
             <a:r>
@@ -3711,9 +3689,9 @@
                 <a:solidFill>
                   <a:srgbClr val="3B2A5C"/>
                 </a:solidFill>
-                <a:latin typeface="Calibri" pitchFamily="34" charset="0"/>
-                <a:ea typeface="Calibri" pitchFamily="34" charset="-122"/>
-                <a:cs typeface="Calibri" pitchFamily="34" charset="-120"/>
+                <a:latin typeface="Calibri" panose="020F0502020204030204" pitchFamily="34" charset="0"/>
+                <a:ea typeface="Calibri" panose="020F0502020204030204" pitchFamily="34" charset="-122"/>
+                <a:cs typeface="Calibri" panose="020F0502020204030204" pitchFamily="34" charset="-120"/>
               </a:rPr>
               <a:t>✓</a:t>
             </a:r>
@@ -3729,20 +3707,19 @@
         </p:nvSpPr>
         <p:spPr>
           <a:xfrm>
-            <a:off x="1325880" y="5934456"/>
-            <a:ext cx="10149840" cy="548640"/>
+            <a:off x="1325880" y="5376672"/>
+            <a:ext cx="10149840" cy="512064"/>
           </a:xfrm>
           <a:prstGeom prst="rect">
             <a:avLst/>
           </a:prstGeom>
           <a:noFill/>
-          <a:ln/>
         </p:spPr>
         <p:txBody>
           <a:bodyPr wrap="square" lIns="0" tIns="0" rIns="0" bIns="0" rtlCol="0" anchor="ctr"/>
           <a:lstStyle/>
           <a:p>
-            <a:pPr indent="0" marL="0">
+            <a:pPr marL="0" indent="0">
               <a:buNone/>
             </a:pPr>
             <a:r>
@@ -3750,13 +3727,941 @@
                 <a:solidFill>
                   <a:srgbClr val="FFFFFF"/>
                 </a:solidFill>
-                <a:latin typeface="Calibri" pitchFamily="34" charset="0"/>
-                <a:ea typeface="Calibri" pitchFamily="34" charset="-122"/>
-                <a:cs typeface="Calibri" pitchFamily="34" charset="-120"/>
+                <a:latin typeface="Calibri" panose="020F0502020204030204" pitchFamily="34" charset="0"/>
+                <a:ea typeface="Calibri" panose="020F0502020204030204" pitchFamily="34" charset="-122"/>
+                <a:cs typeface="Calibri" panose="020F0502020204030204" pitchFamily="34" charset="-120"/>
               </a:rPr>
               <a:t>Buffer stock tersedia, rak tidak pernah kosong</a:t>
             </a:r>
             <a:endParaRPr lang="en-US" sz="1600" dirty="0"/>
+          </a:p>
+        </p:txBody>
+      </p:sp>
+      <p:sp>
+        <p:nvSpPr>
+          <p:cNvPr id="31" name="Shape 29"/>
+          <p:cNvSpPr/>
+          <p:nvPr/>
+        </p:nvSpPr>
+        <p:spPr>
+          <a:xfrm>
+            <a:off x="548640" y="5961888"/>
+            <a:ext cx="11064240" cy="512064"/>
+          </a:xfrm>
+          <a:prstGeom prst="roundRect">
+            <a:avLst>
+              <a:gd name="adj" fmla="val 20000"/>
+            </a:avLst>
+          </a:prstGeom>
+          <a:solidFill>
+            <a:srgbClr val="4D3B73"/>
+          </a:solidFill>
+          <a:ln w="12700">
+            <a:solidFill>
+              <a:srgbClr val="4D3B73"/>
+            </a:solidFill>
+            <a:prstDash val="solid"/>
+          </a:ln>
+        </p:spPr>
+      </p:sp>
+      <p:sp>
+        <p:nvSpPr>
+          <p:cNvPr id="32" name="Shape 30"/>
+          <p:cNvSpPr/>
+          <p:nvPr/>
+        </p:nvSpPr>
+        <p:spPr>
+          <a:xfrm>
+            <a:off x="731520" y="6035040"/>
+            <a:ext cx="365760" cy="365760"/>
+          </a:xfrm>
+          <a:prstGeom prst="ellipse">
+            <a:avLst/>
+          </a:prstGeom>
+          <a:solidFill>
+            <a:srgbClr val="FDE68A"/>
+          </a:solidFill>
+          <a:ln w="12700">
+            <a:solidFill>
+              <a:srgbClr val="FDE68A"/>
+            </a:solidFill>
+            <a:prstDash val="solid"/>
+          </a:ln>
+        </p:spPr>
+      </p:sp>
+      <p:sp>
+        <p:nvSpPr>
+          <p:cNvPr id="33" name="Text 31"/>
+          <p:cNvSpPr txBox="1"/>
+          <p:nvPr/>
+        </p:nvSpPr>
+        <p:spPr>
+          <a:xfrm>
+            <a:off x="731520" y="6035040"/>
+            <a:ext cx="365760" cy="365760"/>
+          </a:xfrm>
+          <a:prstGeom prst="rect">
+            <a:avLst/>
+          </a:prstGeom>
+          <a:noFill/>
+        </p:spPr>
+        <p:txBody>
+          <a:bodyPr wrap="square" lIns="0" tIns="0" rIns="0" bIns="0" rtlCol="0" anchor="ctr"/>
+          <a:lstStyle/>
+          <a:p>
+            <a:pPr marL="0" indent="0" algn="ctr">
+              <a:buNone/>
+            </a:pPr>
+            <a:r>
+              <a:rPr lang="en-US" sz="1600" b="1" dirty="0">
+                <a:solidFill>
+                  <a:srgbClr val="3B2A5C"/>
+                </a:solidFill>
+                <a:latin typeface="Calibri" panose="020F0502020204030204" pitchFamily="34" charset="0"/>
+                <a:ea typeface="Calibri" panose="020F0502020204030204" pitchFamily="34" charset="-122"/>
+                <a:cs typeface="Calibri" panose="020F0502020204030204" pitchFamily="34" charset="-120"/>
+              </a:rPr>
+              <a:t>✓</a:t>
+            </a:r>
+            <a:endParaRPr lang="en-US" sz="1600" dirty="0"/>
+          </a:p>
+        </p:txBody>
+      </p:sp>
+      <p:sp>
+        <p:nvSpPr>
+          <p:cNvPr id="34" name="Text 32"/>
+          <p:cNvSpPr txBox="1"/>
+          <p:nvPr/>
+        </p:nvSpPr>
+        <p:spPr>
+          <a:xfrm>
+            <a:off x="1325880" y="5961888"/>
+            <a:ext cx="10149840" cy="512064"/>
+          </a:xfrm>
+          <a:prstGeom prst="rect">
+            <a:avLst/>
+          </a:prstGeom>
+          <a:noFill/>
+        </p:spPr>
+        <p:txBody>
+          <a:bodyPr wrap="square" lIns="0" tIns="0" rIns="0" bIns="0" rtlCol="0" anchor="ctr"/>
+          <a:lstStyle/>
+          <a:p>
+            <a:pPr marL="0" indent="0">
+              <a:buNone/>
+            </a:pPr>
+            <a:r>
+              <a:rPr lang="en-US" sz="1600" dirty="0">
+                <a:solidFill>
+                  <a:srgbClr val="FFFFFF"/>
+                </a:solidFill>
+                <a:latin typeface="Calibri" panose="020F0502020204030204" pitchFamily="34" charset="0"/>
+                <a:ea typeface="Calibri" panose="020F0502020204030204" pitchFamily="34" charset="-122"/>
+                <a:cs typeface="Calibri" panose="020F0502020204030204" pitchFamily="34" charset="-120"/>
+              </a:rPr>
+              <a:t>Toko Dept + Kasir: display kasir terpasang lengkap dengan media komunikasi atau POP A4 dari MD</a:t>
+            </a:r>
+            <a:endParaRPr lang="en-US" sz="1600" dirty="0"/>
+          </a:p>
+        </p:txBody>
+      </p:sp>
+    </p:spTree>
+  </p:cSld>
+  <p:clrMapOvr>
+    <a:masterClrMapping/>
+  </p:clrMapOvr>
+</p:sld>
+</file>
+
+<file path=ppt/slides/slide12.xml><?xml version="1.0" encoding="utf-8"?>
+<p:sld xmlns:a="http://schemas.openxmlformats.org/drawingml/2006/main" xmlns:p="http://schemas.openxmlformats.org/presentationml/2006/main" xmlns:r="http://schemas.openxmlformats.org/officeDocument/2006/relationships">
+  <p:cSld>
+    <p:spTree>
+      <p:nvGrpSpPr>
+        <p:cNvPr id="1" name=""/>
+        <p:cNvGrpSpPr/>
+        <p:nvPr/>
+      </p:nvGrpSpPr>
+      <p:grpSpPr/>
+      <p:sp>
+        <p:nvSpPr>
+          <p:cNvPr id="2" name="TextBox 1"/>
+          <p:cNvSpPr txBox="1"/>
+          <p:nvPr/>
+        </p:nvSpPr>
+        <p:spPr>
+          <a:xfrm>
+            <a:off x="548640" y="365760"/>
+            <a:ext cx="11064240" cy="731520"/>
+          </a:xfrm>
+          <a:prstGeom prst="rect">
+            <a:avLst/>
+          </a:prstGeom>
+          <a:noFill/>
+        </p:spPr>
+        <p:txBody>
+          <a:bodyPr wrap="square" lIns="0" rIns="0" tIns="0" bIns="0" anchor="t">
+            <a:spAutoFit/>
+          </a:bodyPr>
+          <a:lstStyle/>
+          <a:p>
+            <a:r>
+              <a:rPr sz="3600" b="1" i="0">
+                <a:solidFill>
+                  <a:srgbClr val="3B2A5C"/>
+                </a:solidFill>
+                <a:latin typeface="Cambria"/>
+              </a:rPr>
+              <a:t>Display di area kasir</a:t>
+            </a:r>
+          </a:p>
+        </p:txBody>
+      </p:sp>
+      <p:sp>
+        <p:nvSpPr>
+          <p:cNvPr id="3" name="TextBox 2"/>
+          <p:cNvSpPr txBox="1"/>
+          <p:nvPr/>
+        </p:nvSpPr>
+        <p:spPr>
+          <a:xfrm>
+            <a:off x="548640" y="1051560"/>
+            <a:ext cx="11064240" cy="365760"/>
+          </a:xfrm>
+          <a:prstGeom prst="rect">
+            <a:avLst/>
+          </a:prstGeom>
+          <a:noFill/>
+        </p:spPr>
+        <p:txBody>
+          <a:bodyPr wrap="square" lIns="0" rIns="0" tIns="0" bIns="0" anchor="t">
+            <a:spAutoFit/>
+          </a:bodyPr>
+          <a:lstStyle/>
+          <a:p>
+            <a:r>
+              <a:rPr sz="1600" b="0" i="0">
+                <a:solidFill>
+                  <a:srgbClr val="6B6580"/>
+                </a:solidFill>
+                <a:latin typeface="Calibri"/>
+              </a:rPr>
+              <a:t>Hanya untuk toko yang diharuskan display di area kasir</a:t>
+            </a:r>
+          </a:p>
+        </p:txBody>
+      </p:sp>
+      <p:pic>
+        <p:nvPicPr>
+          <p:cNvPr id="4" name="Picture 3" descr="kasir.png"/>
+          <p:cNvPicPr>
+            <a:picLocks noChangeAspect="1"/>
+          </p:cNvPicPr>
+          <p:nvPr/>
+        </p:nvPicPr>
+        <p:blipFill>
+          <a:blip r:embed="rId2"/>
+          <a:stretch>
+            <a:fillRect/>
+          </a:stretch>
+        </p:blipFill>
+        <p:spPr>
+          <a:xfrm>
+            <a:off x="548640" y="1691640"/>
+            <a:ext cx="5120640" cy="4327227"/>
+          </a:xfrm>
+          <a:prstGeom prst="rect">
+            <a:avLst/>
+          </a:prstGeom>
+        </p:spPr>
+      </p:pic>
+      <p:sp>
+        <p:nvSpPr>
+          <p:cNvPr id="5" name="TextBox 4"/>
+          <p:cNvSpPr txBox="1"/>
+          <p:nvPr/>
+        </p:nvSpPr>
+        <p:spPr>
+          <a:xfrm>
+            <a:off x="548640" y="6110307"/>
+            <a:ext cx="5120640" cy="274320"/>
+          </a:xfrm>
+          <a:prstGeom prst="rect">
+            <a:avLst/>
+          </a:prstGeom>
+          <a:noFill/>
+        </p:spPr>
+        <p:txBody>
+          <a:bodyPr wrap="square" lIns="0" rIns="0" tIns="0" bIns="0" anchor="t">
+            <a:spAutoFit/>
+          </a:bodyPr>
+          <a:lstStyle/>
+          <a:p>
+            <a:r>
+              <a:rPr sz="1200" b="0" i="1">
+                <a:solidFill>
+                  <a:srgbClr val="6B6580"/>
+                </a:solidFill>
+                <a:latin typeface="Calibri"/>
+              </a:rPr>
+              <a:t>Mock display area kasir (ilustrasi)</a:t>
+            </a:r>
+          </a:p>
+        </p:txBody>
+      </p:sp>
+      <p:sp>
+        <p:nvSpPr>
+          <p:cNvPr id="6" name="Rounded Rectangle 5"/>
+          <p:cNvSpPr/>
+          <p:nvPr/>
+        </p:nvSpPr>
+        <p:spPr>
+          <a:xfrm>
+            <a:off x="6035040" y="1691640"/>
+            <a:ext cx="5577840" cy="960120"/>
+          </a:xfrm>
+          <a:prstGeom prst="roundRect">
+            <a:avLst>
+              <a:gd name="adj" fmla="val 12000"/>
+            </a:avLst>
+          </a:prstGeom>
+          <a:solidFill>
+            <a:srgbClr val="FDEAF3"/>
+          </a:solidFill>
+          <a:ln>
+            <a:noFill/>
+          </a:ln>
+          <a:effectLst/>
+        </p:spPr>
+        <p:style>
+          <a:lnRef idx="1">
+            <a:schemeClr val="accent1"/>
+          </a:lnRef>
+          <a:fillRef idx="3">
+            <a:schemeClr val="accent1"/>
+          </a:fillRef>
+          <a:effectRef idx="2">
+            <a:schemeClr val="accent1"/>
+          </a:effectRef>
+          <a:fontRef idx="minor">
+            <a:schemeClr val="lt1"/>
+          </a:fontRef>
+        </p:style>
+        <p:txBody>
+          <a:bodyPr rtlCol="0" anchor="ctr"/>
+          <a:lstStyle/>
+          <a:p>
+            <a:pPr algn="ctr"/>
+          </a:p>
+        </p:txBody>
+      </p:sp>
+      <p:sp>
+        <p:nvSpPr>
+          <p:cNvPr id="7" name="Oval 6"/>
+          <p:cNvSpPr/>
+          <p:nvPr/>
+        </p:nvSpPr>
+        <p:spPr>
+          <a:xfrm>
+            <a:off x="6217920" y="1892808"/>
+            <a:ext cx="548640" cy="548640"/>
+          </a:xfrm>
+          <a:prstGeom prst="ellipse">
+            <a:avLst/>
+          </a:prstGeom>
+          <a:solidFill>
+            <a:srgbClr val="F27BB0"/>
+          </a:solidFill>
+          <a:ln>
+            <a:noFill/>
+          </a:ln>
+          <a:effectLst/>
+        </p:spPr>
+        <p:style>
+          <a:lnRef idx="1">
+            <a:schemeClr val="accent1"/>
+          </a:lnRef>
+          <a:fillRef idx="3">
+            <a:schemeClr val="accent1"/>
+          </a:fillRef>
+          <a:effectRef idx="2">
+            <a:schemeClr val="accent1"/>
+          </a:effectRef>
+          <a:fontRef idx="minor">
+            <a:schemeClr val="lt1"/>
+          </a:fontRef>
+        </p:style>
+        <p:txBody>
+          <a:bodyPr rtlCol="0" anchor="ctr" lIns="0" rIns="0" tIns="0" bIns="0"/>
+          <a:lstStyle/>
+          <a:p>
+            <a:pPr algn="ctr"/>
+            <a:r>
+              <a:rPr sz="2000" b="1">
+                <a:solidFill>
+                  <a:srgbClr val="FFFFFF"/>
+                </a:solidFill>
+                <a:latin typeface="Calibri"/>
+              </a:rPr>
+              <a:t>1</a:t>
+            </a:r>
+          </a:p>
+        </p:txBody>
+      </p:sp>
+      <p:sp>
+        <p:nvSpPr>
+          <p:cNvPr id="8" name="TextBox 7"/>
+          <p:cNvSpPr txBox="1"/>
+          <p:nvPr/>
+        </p:nvSpPr>
+        <p:spPr>
+          <a:xfrm>
+            <a:off x="6949440" y="1783080"/>
+            <a:ext cx="4480560" cy="777240"/>
+          </a:xfrm>
+          <a:prstGeom prst="rect">
+            <a:avLst/>
+          </a:prstGeom>
+          <a:noFill/>
+        </p:spPr>
+        <p:txBody>
+          <a:bodyPr wrap="square" lIns="0" rIns="0" tIns="0" bIns="0" anchor="ctr">
+            <a:spAutoFit/>
+          </a:bodyPr>
+          <a:lstStyle/>
+          <a:p>
+            <a:r>
+              <a:rPr sz="1800" b="1" i="0">
+                <a:solidFill>
+                  <a:srgbClr val="3B2A5C"/>
+                </a:solidFill>
+                <a:latin typeface="Calibri"/>
+              </a:rPr>
+              <a:t>Hanya toko tertentu</a:t>
+            </a:r>
+          </a:p>
+          <a:p>
+            <a:r>
+              <a:rPr sz="1400" b="0" i="0">
+                <a:solidFill>
+                  <a:srgbClr val="3B2A5C"/>
+                </a:solidFill>
+                <a:latin typeface="Calibri"/>
+              </a:rPr>
+              <a:t>Berlaku hanya untuk toko yang diharuskan display di area kasir. Cek list store Dept + Kasir (slide 6).</a:t>
+            </a:r>
+          </a:p>
+        </p:txBody>
+      </p:sp>
+      <p:sp>
+        <p:nvSpPr>
+          <p:cNvPr id="9" name="Rounded Rectangle 8"/>
+          <p:cNvSpPr/>
+          <p:nvPr/>
+        </p:nvSpPr>
+        <p:spPr>
+          <a:xfrm>
+            <a:off x="6035040" y="2770632"/>
+            <a:ext cx="5577840" cy="960120"/>
+          </a:xfrm>
+          <a:prstGeom prst="roundRect">
+            <a:avLst>
+              <a:gd name="adj" fmla="val 12000"/>
+            </a:avLst>
+          </a:prstGeom>
+          <a:solidFill>
+            <a:srgbClr val="E3F6FB"/>
+          </a:solidFill>
+          <a:ln>
+            <a:noFill/>
+          </a:ln>
+          <a:effectLst/>
+        </p:spPr>
+        <p:style>
+          <a:lnRef idx="1">
+            <a:schemeClr val="accent1"/>
+          </a:lnRef>
+          <a:fillRef idx="3">
+            <a:schemeClr val="accent1"/>
+          </a:fillRef>
+          <a:effectRef idx="2">
+            <a:schemeClr val="accent1"/>
+          </a:effectRef>
+          <a:fontRef idx="minor">
+            <a:schemeClr val="lt1"/>
+          </a:fontRef>
+        </p:style>
+        <p:txBody>
+          <a:bodyPr rtlCol="0" anchor="ctr"/>
+          <a:lstStyle/>
+          <a:p>
+            <a:pPr algn="ctr"/>
+          </a:p>
+        </p:txBody>
+      </p:sp>
+      <p:sp>
+        <p:nvSpPr>
+          <p:cNvPr id="10" name="Oval 9"/>
+          <p:cNvSpPr/>
+          <p:nvPr/>
+        </p:nvSpPr>
+        <p:spPr>
+          <a:xfrm>
+            <a:off x="6217920" y="2971800"/>
+            <a:ext cx="548640" cy="548640"/>
+          </a:xfrm>
+          <a:prstGeom prst="ellipse">
+            <a:avLst/>
+          </a:prstGeom>
+          <a:solidFill>
+            <a:srgbClr val="4DC3E0"/>
+          </a:solidFill>
+          <a:ln>
+            <a:noFill/>
+          </a:ln>
+          <a:effectLst/>
+        </p:spPr>
+        <p:style>
+          <a:lnRef idx="1">
+            <a:schemeClr val="accent1"/>
+          </a:lnRef>
+          <a:fillRef idx="3">
+            <a:schemeClr val="accent1"/>
+          </a:fillRef>
+          <a:effectRef idx="2">
+            <a:schemeClr val="accent1"/>
+          </a:effectRef>
+          <a:fontRef idx="minor">
+            <a:schemeClr val="lt1"/>
+          </a:fontRef>
+        </p:style>
+        <p:txBody>
+          <a:bodyPr rtlCol="0" anchor="ctr" lIns="0" rIns="0" tIns="0" bIns="0"/>
+          <a:lstStyle/>
+          <a:p>
+            <a:pPr algn="ctr"/>
+            <a:r>
+              <a:rPr sz="2000" b="1">
+                <a:solidFill>
+                  <a:srgbClr val="FFFFFF"/>
+                </a:solidFill>
+                <a:latin typeface="Calibri"/>
+              </a:rPr>
+              <a:t>2</a:t>
+            </a:r>
+          </a:p>
+        </p:txBody>
+      </p:sp>
+      <p:sp>
+        <p:nvSpPr>
+          <p:cNvPr id="11" name="TextBox 10"/>
+          <p:cNvSpPr txBox="1"/>
+          <p:nvPr/>
+        </p:nvSpPr>
+        <p:spPr>
+          <a:xfrm>
+            <a:off x="6949440" y="2862072"/>
+            <a:ext cx="4480560" cy="777240"/>
+          </a:xfrm>
+          <a:prstGeom prst="rect">
+            <a:avLst/>
+          </a:prstGeom>
+          <a:noFill/>
+        </p:spPr>
+        <p:txBody>
+          <a:bodyPr wrap="square" lIns="0" rIns="0" tIns="0" bIns="0" anchor="ctr">
+            <a:spAutoFit/>
+          </a:bodyPr>
+          <a:lstStyle/>
+          <a:p>
+            <a:r>
+              <a:rPr sz="1800" b="1" i="0">
+                <a:solidFill>
+                  <a:srgbClr val="3B2A5C"/>
+                </a:solidFill>
+                <a:latin typeface="Calibri"/>
+              </a:rPr>
+              <a:t>Cara display sama</a:t>
+            </a:r>
+          </a:p>
+          <a:p>
+            <a:r>
+              <a:rPr sz="1400" b="0" i="0">
+                <a:solidFill>
+                  <a:srgbClr val="3B2A5C"/>
+                </a:solidFill>
+                <a:latin typeface="Calibri"/>
+              </a:rPr>
+              <a:t>Overall sama dengan endcap: produk yang dibuka di atas, stock tersegel di bawahnya.</a:t>
+            </a:r>
+          </a:p>
+        </p:txBody>
+      </p:sp>
+      <p:sp>
+        <p:nvSpPr>
+          <p:cNvPr id="12" name="Rounded Rectangle 11"/>
+          <p:cNvSpPr/>
+          <p:nvPr/>
+        </p:nvSpPr>
+        <p:spPr>
+          <a:xfrm>
+            <a:off x="6035040" y="3849624"/>
+            <a:ext cx="5577840" cy="960120"/>
+          </a:xfrm>
+          <a:prstGeom prst="roundRect">
+            <a:avLst>
+              <a:gd name="adj" fmla="val 12000"/>
+            </a:avLst>
+          </a:prstGeom>
+          <a:solidFill>
+            <a:srgbClr val="FDEAF3"/>
+          </a:solidFill>
+          <a:ln>
+            <a:noFill/>
+          </a:ln>
+          <a:effectLst/>
+        </p:spPr>
+        <p:style>
+          <a:lnRef idx="1">
+            <a:schemeClr val="accent1"/>
+          </a:lnRef>
+          <a:fillRef idx="3">
+            <a:schemeClr val="accent1"/>
+          </a:fillRef>
+          <a:effectRef idx="2">
+            <a:schemeClr val="accent1"/>
+          </a:effectRef>
+          <a:fontRef idx="minor">
+            <a:schemeClr val="lt1"/>
+          </a:fontRef>
+        </p:style>
+        <p:txBody>
+          <a:bodyPr rtlCol="0" anchor="ctr"/>
+          <a:lstStyle/>
+          <a:p>
+            <a:pPr algn="ctr"/>
+          </a:p>
+        </p:txBody>
+      </p:sp>
+      <p:sp>
+        <p:nvSpPr>
+          <p:cNvPr id="13" name="Oval 12"/>
+          <p:cNvSpPr/>
+          <p:nvPr/>
+        </p:nvSpPr>
+        <p:spPr>
+          <a:xfrm>
+            <a:off x="6217920" y="4050791"/>
+            <a:ext cx="548640" cy="548640"/>
+          </a:xfrm>
+          <a:prstGeom prst="ellipse">
+            <a:avLst/>
+          </a:prstGeom>
+          <a:solidFill>
+            <a:srgbClr val="F27BB0"/>
+          </a:solidFill>
+          <a:ln>
+            <a:noFill/>
+          </a:ln>
+          <a:effectLst/>
+        </p:spPr>
+        <p:style>
+          <a:lnRef idx="1">
+            <a:schemeClr val="accent1"/>
+          </a:lnRef>
+          <a:fillRef idx="3">
+            <a:schemeClr val="accent1"/>
+          </a:fillRef>
+          <a:effectRef idx="2">
+            <a:schemeClr val="accent1"/>
+          </a:effectRef>
+          <a:fontRef idx="minor">
+            <a:schemeClr val="lt1"/>
+          </a:fontRef>
+        </p:style>
+        <p:txBody>
+          <a:bodyPr rtlCol="0" anchor="ctr" lIns="0" rIns="0" tIns="0" bIns="0"/>
+          <a:lstStyle/>
+          <a:p>
+            <a:pPr algn="ctr"/>
+            <a:r>
+              <a:rPr sz="2000" b="1">
+                <a:solidFill>
+                  <a:srgbClr val="FFFFFF"/>
+                </a:solidFill>
+                <a:latin typeface="Calibri"/>
+              </a:rPr>
+              <a:t>3</a:t>
+            </a:r>
+          </a:p>
+        </p:txBody>
+      </p:sp>
+      <p:sp>
+        <p:nvSpPr>
+          <p:cNvPr id="14" name="TextBox 13"/>
+          <p:cNvSpPr txBox="1"/>
+          <p:nvPr/>
+        </p:nvSpPr>
+        <p:spPr>
+          <a:xfrm>
+            <a:off x="6949440" y="3941063"/>
+            <a:ext cx="4480560" cy="777240"/>
+          </a:xfrm>
+          <a:prstGeom prst="rect">
+            <a:avLst/>
+          </a:prstGeom>
+          <a:noFill/>
+        </p:spPr>
+        <p:txBody>
+          <a:bodyPr wrap="square" lIns="0" rIns="0" tIns="0" bIns="0" anchor="ctr">
+            <a:spAutoFit/>
+          </a:bodyPr>
+          <a:lstStyle/>
+          <a:p>
+            <a:r>
+              <a:rPr sz="1800" b="1" i="0">
+                <a:solidFill>
+                  <a:srgbClr val="3B2A5C"/>
+                </a:solidFill>
+                <a:latin typeface="Calibri"/>
+              </a:rPr>
+              <a:t>Cara buka produk sama</a:t>
+            </a:r>
+          </a:p>
+          <a:p>
+            <a:r>
+              <a:rPr sz="1400" b="0" i="0">
+                <a:solidFill>
+                  <a:srgbClr val="3B2A5C"/>
+                </a:solidFill>
+                <a:latin typeface="Calibri"/>
+              </a:rPr>
+              <a:t>Sama dengan di endcap (slide 8): ambil 1 PDQ SMALL dan 1 PDQ LARGE, Secret diamankan, ikuti video MD.</a:t>
+            </a:r>
+          </a:p>
+        </p:txBody>
+      </p:sp>
+      <p:sp>
+        <p:nvSpPr>
+          <p:cNvPr id="15" name="Rounded Rectangle 14"/>
+          <p:cNvSpPr/>
+          <p:nvPr/>
+        </p:nvSpPr>
+        <p:spPr>
+          <a:xfrm>
+            <a:off x="6035040" y="4928616"/>
+            <a:ext cx="5577840" cy="960120"/>
+          </a:xfrm>
+          <a:prstGeom prst="roundRect">
+            <a:avLst>
+              <a:gd name="adj" fmla="val 12000"/>
+            </a:avLst>
+          </a:prstGeom>
+          <a:solidFill>
+            <a:srgbClr val="E3F6FB"/>
+          </a:solidFill>
+          <a:ln>
+            <a:noFill/>
+          </a:ln>
+          <a:effectLst/>
+        </p:spPr>
+        <p:style>
+          <a:lnRef idx="1">
+            <a:schemeClr val="accent1"/>
+          </a:lnRef>
+          <a:fillRef idx="3">
+            <a:schemeClr val="accent1"/>
+          </a:fillRef>
+          <a:effectRef idx="2">
+            <a:schemeClr val="accent1"/>
+          </a:effectRef>
+          <a:fontRef idx="minor">
+            <a:schemeClr val="lt1"/>
+          </a:fontRef>
+        </p:style>
+        <p:txBody>
+          <a:bodyPr rtlCol="0" anchor="ctr"/>
+          <a:lstStyle/>
+          <a:p>
+            <a:pPr algn="ctr"/>
+          </a:p>
+        </p:txBody>
+      </p:sp>
+      <p:sp>
+        <p:nvSpPr>
+          <p:cNvPr id="16" name="Oval 15"/>
+          <p:cNvSpPr/>
+          <p:nvPr/>
+        </p:nvSpPr>
+        <p:spPr>
+          <a:xfrm>
+            <a:off x="6217920" y="5129784"/>
+            <a:ext cx="548640" cy="548640"/>
+          </a:xfrm>
+          <a:prstGeom prst="ellipse">
+            <a:avLst/>
+          </a:prstGeom>
+          <a:solidFill>
+            <a:srgbClr val="4DC3E0"/>
+          </a:solidFill>
+          <a:ln>
+            <a:noFill/>
+          </a:ln>
+          <a:effectLst/>
+        </p:spPr>
+        <p:style>
+          <a:lnRef idx="1">
+            <a:schemeClr val="accent1"/>
+          </a:lnRef>
+          <a:fillRef idx="3">
+            <a:schemeClr val="accent1"/>
+          </a:fillRef>
+          <a:effectRef idx="2">
+            <a:schemeClr val="accent1"/>
+          </a:effectRef>
+          <a:fontRef idx="minor">
+            <a:schemeClr val="lt1"/>
+          </a:fontRef>
+        </p:style>
+        <p:txBody>
+          <a:bodyPr rtlCol="0" anchor="ctr" lIns="0" rIns="0" tIns="0" bIns="0"/>
+          <a:lstStyle/>
+          <a:p>
+            <a:pPr algn="ctr"/>
+            <a:r>
+              <a:rPr sz="2000" b="1">
+                <a:solidFill>
+                  <a:srgbClr val="FFFFFF"/>
+                </a:solidFill>
+                <a:latin typeface="Calibri"/>
+              </a:rPr>
+              <a:t>4</a:t>
+            </a:r>
+          </a:p>
+        </p:txBody>
+      </p:sp>
+      <p:sp>
+        <p:nvSpPr>
+          <p:cNvPr id="17" name="TextBox 16"/>
+          <p:cNvSpPr txBox="1"/>
+          <p:nvPr/>
+        </p:nvSpPr>
+        <p:spPr>
+          <a:xfrm>
+            <a:off x="6949440" y="5020056"/>
+            <a:ext cx="4480560" cy="777240"/>
+          </a:xfrm>
+          <a:prstGeom prst="rect">
+            <a:avLst/>
+          </a:prstGeom>
+          <a:noFill/>
+        </p:spPr>
+        <p:txBody>
+          <a:bodyPr wrap="square" lIns="0" rIns="0" tIns="0" bIns="0" anchor="ctr">
+            <a:spAutoFit/>
+          </a:bodyPr>
+          <a:lstStyle/>
+          <a:p>
+            <a:r>
+              <a:rPr sz="1800" b="1" i="0">
+                <a:solidFill>
+                  <a:srgbClr val="3B2A5C"/>
+                </a:solidFill>
+                <a:latin typeface="Calibri"/>
+              </a:rPr>
+              <a:t>Wajib media komunikasi</a:t>
+            </a:r>
+          </a:p>
+          <a:p>
+            <a:r>
+              <a:rPr sz="1400" b="0" i="0">
+                <a:solidFill>
+                  <a:srgbClr val="3B2A5C"/>
+                </a:solidFill>
+                <a:latin typeface="Calibri"/>
+              </a:rPr>
+              <a:t>Pasang media komunikasi. Jika belum ada, pasang POP A4 dari MD.</a:t>
+            </a:r>
+          </a:p>
+        </p:txBody>
+      </p:sp>
+      <p:sp>
+        <p:nvSpPr>
+          <p:cNvPr id="18" name="Rounded Rectangle 17"/>
+          <p:cNvSpPr/>
+          <p:nvPr/>
+        </p:nvSpPr>
+        <p:spPr>
+          <a:xfrm>
+            <a:off x="6035040" y="6035040"/>
+            <a:ext cx="5577840" cy="502920"/>
+          </a:xfrm>
+          <a:prstGeom prst="roundRect">
+            <a:avLst>
+              <a:gd name="adj" fmla="val 20000"/>
+            </a:avLst>
+          </a:prstGeom>
+          <a:solidFill>
+            <a:srgbClr val="FDE68A"/>
+          </a:solidFill>
+          <a:ln>
+            <a:noFill/>
+          </a:ln>
+          <a:effectLst/>
+        </p:spPr>
+        <p:style>
+          <a:lnRef idx="1">
+            <a:schemeClr val="accent1"/>
+          </a:lnRef>
+          <a:fillRef idx="3">
+            <a:schemeClr val="accent1"/>
+          </a:fillRef>
+          <a:effectRef idx="2">
+            <a:schemeClr val="accent1"/>
+          </a:effectRef>
+          <a:fontRef idx="minor">
+            <a:schemeClr val="lt1"/>
+          </a:fontRef>
+        </p:style>
+        <p:txBody>
+          <a:bodyPr rtlCol="0" anchor="ctr"/>
+          <a:lstStyle/>
+          <a:p>
+            <a:pPr algn="ctr"/>
+          </a:p>
+        </p:txBody>
+      </p:sp>
+      <p:sp>
+        <p:nvSpPr>
+          <p:cNvPr id="19" name="TextBox 18"/>
+          <p:cNvSpPr txBox="1"/>
+          <p:nvPr/>
+        </p:nvSpPr>
+        <p:spPr>
+          <a:xfrm>
+            <a:off x="6217920" y="6035040"/>
+            <a:ext cx="5212080" cy="502920"/>
+          </a:xfrm>
+          <a:prstGeom prst="rect">
+            <a:avLst/>
+          </a:prstGeom>
+          <a:noFill/>
+        </p:spPr>
+        <p:txBody>
+          <a:bodyPr wrap="square" lIns="0" rIns="0" tIns="0" bIns="0" anchor="ctr">
+            <a:spAutoFit/>
+          </a:bodyPr>
+          <a:lstStyle/>
+          <a:p>
+            <a:r>
+              <a:rPr sz="1400" b="1" i="0">
+                <a:solidFill>
+                  <a:srgbClr val="3B2A5C"/>
+                </a:solidFill>
+                <a:latin typeface="Calibri"/>
+              </a:rPr>
+              <a:t>Alokasi area kasir: 24 pcs SMALL + 24 pcs LARGE (4 box tiap SKU)</a:t>
+            </a:r>
           </a:p>
         </p:txBody>
       </p:sp>
@@ -3770,12 +4675,13 @@
 
 <file path=ppt/slides/slide2.xml><?xml version="1.0" encoding="utf-8"?>
 <p:sld xmlns:a="http://schemas.openxmlformats.org/drawingml/2006/main" xmlns:r="http://schemas.openxmlformats.org/officeDocument/2006/relationships" xmlns:p="http://schemas.openxmlformats.org/presentationml/2006/main">
-  <p:cSld name="Slide 2">
+  <p:cSld>
     <p:bg>
       <p:bgPr>
         <a:solidFill>
           <a:srgbClr val="FFFFFF"/>
         </a:solidFill>
+        <a:effectLst/>
       </p:bgPr>
     </p:bg>
     <p:spTree>
@@ -3807,13 +4713,12 @@
             <a:avLst/>
           </a:prstGeom>
           <a:noFill/>
-          <a:ln/>
         </p:spPr>
         <p:txBody>
           <a:bodyPr wrap="square" lIns="0" tIns="0" rIns="0" bIns="0" rtlCol="0" anchor="ctr"/>
           <a:lstStyle/>
           <a:p>
-            <a:pPr indent="0" marL="0">
+            <a:pPr marL="0" indent="0">
               <a:buNone/>
             </a:pPr>
             <a:r>
@@ -3821,9 +4726,9 @@
                 <a:solidFill>
                   <a:srgbClr val="3B2A5C"/>
                 </a:solidFill>
-                <a:latin typeface="Cambria" pitchFamily="34" charset="0"/>
-                <a:ea typeface="Cambria" pitchFamily="34" charset="-122"/>
-                <a:cs typeface="Cambria" pitchFamily="34" charset="-120"/>
+                <a:latin typeface="Cambria" panose="02040503050406030204" pitchFamily="34" charset="0"/>
+                <a:ea typeface="Cambria" panose="02040503050406030204" pitchFamily="34" charset="-122"/>
+                <a:cs typeface="Cambria" panose="02040503050406030204" pitchFamily="34" charset="-120"/>
               </a:rPr>
               <a:t>6 aturan display Blind Box Thermal</a:t>
             </a:r>
@@ -3846,13 +4751,12 @@
             <a:avLst/>
           </a:prstGeom>
           <a:noFill/>
-          <a:ln/>
         </p:spPr>
         <p:txBody>
           <a:bodyPr wrap="square" lIns="0" tIns="0" rIns="0" bIns="0" rtlCol="0" anchor="ctr"/>
           <a:lstStyle/>
           <a:p>
-            <a:pPr indent="0" marL="0">
+            <a:pPr marL="0" indent="0">
               <a:buNone/>
             </a:pPr>
             <a:r>
@@ -3860,9 +4764,9 @@
                 <a:solidFill>
                   <a:srgbClr val="6B6580"/>
                 </a:solidFill>
-                <a:latin typeface="Calibri" pitchFamily="34" charset="0"/>
-                <a:ea typeface="Calibri" pitchFamily="34" charset="-122"/>
-                <a:cs typeface="Calibri" pitchFamily="34" charset="-120"/>
+                <a:latin typeface="Calibri" panose="020F0502020204030204" pitchFamily="34" charset="0"/>
+                <a:ea typeface="Calibri" panose="020F0502020204030204" pitchFamily="34" charset="-122"/>
+                <a:cs typeface="Calibri" panose="020F0502020204030204" pitchFamily="34" charset="-120"/>
               </a:rPr>
               <a:t>Semua poin wajib dipenuhi sebelum display dinyatakan selesai</a:t>
             </a:r>
@@ -3937,13 +4841,12 @@
             <a:avLst/>
           </a:prstGeom>
           <a:noFill/>
-          <a:ln/>
         </p:spPr>
         <p:txBody>
           <a:bodyPr wrap="square" lIns="0" tIns="0" rIns="0" bIns="0" rtlCol="0" anchor="ctr"/>
           <a:lstStyle/>
           <a:p>
-            <a:pPr algn="ctr" indent="0" marL="0">
+            <a:pPr marL="0" indent="0" algn="ctr">
               <a:buNone/>
             </a:pPr>
             <a:r>
@@ -3951,9 +4854,9 @@
                 <a:solidFill>
                   <a:srgbClr val="FFFFFF"/>
                 </a:solidFill>
-                <a:latin typeface="Calibri" pitchFamily="34" charset="0"/>
-                <a:ea typeface="Calibri" pitchFamily="34" charset="-122"/>
-                <a:cs typeface="Calibri" pitchFamily="34" charset="-120"/>
+                <a:latin typeface="Calibri" panose="020F0502020204030204" pitchFamily="34" charset="0"/>
+                <a:ea typeface="Calibri" panose="020F0502020204030204" pitchFamily="34" charset="-122"/>
+                <a:cs typeface="Calibri" panose="020F0502020204030204" pitchFamily="34" charset="-120"/>
               </a:rPr>
               <a:t>1</a:t>
             </a:r>
@@ -3976,13 +4879,12 @@
             <a:avLst/>
           </a:prstGeom>
           <a:noFill/>
-          <a:ln/>
         </p:spPr>
         <p:txBody>
           <a:bodyPr wrap="square" lIns="0" tIns="0" rIns="0" bIns="0" rtlCol="0" anchor="ctr"/>
           <a:lstStyle/>
           <a:p>
-            <a:pPr indent="0" marL="0">
+            <a:pPr marL="0" indent="0">
               <a:buNone/>
             </a:pPr>
             <a:r>
@@ -3990,9 +4892,9 @@
                 <a:solidFill>
                   <a:srgbClr val="3B2A5C"/>
                 </a:solidFill>
-                <a:latin typeface="Calibri" pitchFamily="34" charset="0"/>
-                <a:ea typeface="Calibri" pitchFamily="34" charset="-122"/>
-                <a:cs typeface="Calibri" pitchFamily="34" charset="-120"/>
+                <a:latin typeface="Calibri" panose="020F0502020204030204" pitchFamily="34" charset="0"/>
+                <a:ea typeface="Calibri" panose="020F0502020204030204" pitchFamily="34" charset="-122"/>
+                <a:cs typeface="Calibri" panose="020F0502020204030204" pitchFamily="34" charset="-120"/>
               </a:rPr>
               <a:t>Lokasi</a:t>
             </a:r>
@@ -4015,13 +4917,12 @@
             <a:avLst/>
           </a:prstGeom>
           <a:noFill/>
-          <a:ln/>
         </p:spPr>
         <p:txBody>
           <a:bodyPr wrap="square" lIns="0" tIns="0" rIns="0" bIns="0" rtlCol="0" anchor="t"/>
           <a:lstStyle/>
           <a:p>
-            <a:pPr indent="0" marL="0">
+            <a:pPr marL="0" indent="0">
               <a:buNone/>
             </a:pPr>
             <a:r>
@@ -4029,9 +4930,9 @@
                 <a:solidFill>
                   <a:srgbClr val="3B2A5C"/>
                 </a:solidFill>
-                <a:latin typeface="Calibri" pitchFamily="34" charset="0"/>
-                <a:ea typeface="Calibri" pitchFamily="34" charset="-122"/>
-                <a:cs typeface="Calibri" pitchFamily="34" charset="-120"/>
+                <a:latin typeface="Calibri" panose="020F0502020204030204" pitchFamily="34" charset="0"/>
+                <a:ea typeface="Calibri" panose="020F0502020204030204" pitchFamily="34" charset="-122"/>
+                <a:cs typeface="Calibri" panose="020F0502020204030204" pitchFamily="34" charset="-120"/>
               </a:rPr>
               <a:t>Display wajib di Endcap Area Thermal.</a:t>
             </a:r>
@@ -4106,13 +5007,12 @@
             <a:avLst/>
           </a:prstGeom>
           <a:noFill/>
-          <a:ln/>
         </p:spPr>
         <p:txBody>
           <a:bodyPr wrap="square" lIns="0" tIns="0" rIns="0" bIns="0" rtlCol="0" anchor="ctr"/>
           <a:lstStyle/>
           <a:p>
-            <a:pPr algn="ctr" indent="0" marL="0">
+            <a:pPr marL="0" indent="0" algn="ctr">
               <a:buNone/>
             </a:pPr>
             <a:r>
@@ -4120,9 +5020,9 @@
                 <a:solidFill>
                   <a:srgbClr val="FFFFFF"/>
                 </a:solidFill>
-                <a:latin typeface="Calibri" pitchFamily="34" charset="0"/>
-                <a:ea typeface="Calibri" pitchFamily="34" charset="-122"/>
-                <a:cs typeface="Calibri" pitchFamily="34" charset="-120"/>
+                <a:latin typeface="Calibri" panose="020F0502020204030204" pitchFamily="34" charset="0"/>
+                <a:ea typeface="Calibri" panose="020F0502020204030204" pitchFamily="34" charset="-122"/>
+                <a:cs typeface="Calibri" panose="020F0502020204030204" pitchFamily="34" charset="-120"/>
               </a:rPr>
               <a:t>2</a:t>
             </a:r>
@@ -4145,13 +5045,12 @@
             <a:avLst/>
           </a:prstGeom>
           <a:noFill/>
-          <a:ln/>
         </p:spPr>
         <p:txBody>
           <a:bodyPr wrap="square" lIns="0" tIns="0" rIns="0" bIns="0" rtlCol="0" anchor="ctr"/>
           <a:lstStyle/>
           <a:p>
-            <a:pPr indent="0" marL="0">
+            <a:pPr marL="0" indent="0">
               <a:buNone/>
             </a:pPr>
             <a:r>
@@ -4159,9 +5058,9 @@
                 <a:solidFill>
                   <a:srgbClr val="3B2A5C"/>
                 </a:solidFill>
-                <a:latin typeface="Calibri" pitchFamily="34" charset="0"/>
-                <a:ea typeface="Calibri" pitchFamily="34" charset="-122"/>
-                <a:cs typeface="Calibri" pitchFamily="34" charset="-120"/>
+                <a:latin typeface="Calibri" panose="020F0502020204030204" pitchFamily="34" charset="0"/>
+                <a:ea typeface="Calibri" panose="020F0502020204030204" pitchFamily="34" charset="-122"/>
+                <a:cs typeface="Calibri" panose="020F0502020204030204" pitchFamily="34" charset="-120"/>
               </a:rPr>
               <a:t>Full terisi</a:t>
             </a:r>
@@ -4184,13 +5083,12 @@
             <a:avLst/>
           </a:prstGeom>
           <a:noFill/>
-          <a:ln/>
         </p:spPr>
         <p:txBody>
           <a:bodyPr wrap="square" lIns="0" tIns="0" rIns="0" bIns="0" rtlCol="0" anchor="t"/>
           <a:lstStyle/>
           <a:p>
-            <a:pPr indent="0" marL="0">
+            <a:pPr marL="0" indent="0">
               <a:buNone/>
             </a:pPr>
             <a:r>
@@ -4198,9 +5096,9 @@
                 <a:solidFill>
                   <a:srgbClr val="3B2A5C"/>
                 </a:solidFill>
-                <a:latin typeface="Calibri" pitchFamily="34" charset="0"/>
-                <a:ea typeface="Calibri" pitchFamily="34" charset="-122"/>
-                <a:cs typeface="Calibri" pitchFamily="34" charset="-120"/>
+                <a:latin typeface="Calibri" panose="020F0502020204030204" pitchFamily="34" charset="0"/>
+                <a:ea typeface="Calibri" panose="020F0502020204030204" pitchFamily="34" charset="-122"/>
+                <a:cs typeface="Calibri" panose="020F0502020204030204" pitchFamily="34" charset="-120"/>
               </a:rPr>
               <a:t>Dalam 1 endcap, seluruh bagian terisi display produk Blind Box.</a:t>
             </a:r>
@@ -4275,13 +5173,12 @@
             <a:avLst/>
           </a:prstGeom>
           <a:noFill/>
-          <a:ln/>
         </p:spPr>
         <p:txBody>
           <a:bodyPr wrap="square" lIns="0" tIns="0" rIns="0" bIns="0" rtlCol="0" anchor="ctr"/>
           <a:lstStyle/>
           <a:p>
-            <a:pPr algn="ctr" indent="0" marL="0">
+            <a:pPr marL="0" indent="0" algn="ctr">
               <a:buNone/>
             </a:pPr>
             <a:r>
@@ -4289,9 +5186,9 @@
                 <a:solidFill>
                   <a:srgbClr val="FFFFFF"/>
                 </a:solidFill>
-                <a:latin typeface="Calibri" pitchFamily="34" charset="0"/>
-                <a:ea typeface="Calibri" pitchFamily="34" charset="-122"/>
-                <a:cs typeface="Calibri" pitchFamily="34" charset="-120"/>
+                <a:latin typeface="Calibri" panose="020F0502020204030204" pitchFamily="34" charset="0"/>
+                <a:ea typeface="Calibri" panose="020F0502020204030204" pitchFamily="34" charset="-122"/>
+                <a:cs typeface="Calibri" panose="020F0502020204030204" pitchFamily="34" charset="-120"/>
               </a:rPr>
               <a:t>3</a:t>
             </a:r>
@@ -4314,13 +5211,12 @@
             <a:avLst/>
           </a:prstGeom>
           <a:noFill/>
-          <a:ln/>
         </p:spPr>
         <p:txBody>
           <a:bodyPr wrap="square" lIns="0" tIns="0" rIns="0" bIns="0" rtlCol="0" anchor="ctr"/>
           <a:lstStyle/>
           <a:p>
-            <a:pPr indent="0" marL="0">
+            <a:pPr marL="0" indent="0">
               <a:buNone/>
             </a:pPr>
             <a:r>
@@ -4328,9 +5224,9 @@
                 <a:solidFill>
                   <a:srgbClr val="3B2A5C"/>
                 </a:solidFill>
-                <a:latin typeface="Calibri" pitchFamily="34" charset="0"/>
-                <a:ea typeface="Calibri" pitchFamily="34" charset="-122"/>
-                <a:cs typeface="Calibri" pitchFamily="34" charset="-120"/>
+                <a:latin typeface="Calibri" panose="020F0502020204030204" pitchFamily="34" charset="0"/>
+                <a:ea typeface="Calibri" panose="020F0502020204030204" pitchFamily="34" charset="-122"/>
+                <a:cs typeface="Calibri" panose="020F0502020204030204" pitchFamily="34" charset="-120"/>
               </a:rPr>
               <a:t>Qty sesuai planogram</a:t>
             </a:r>
@@ -4353,13 +5249,12 @@
             <a:avLst/>
           </a:prstGeom>
           <a:noFill/>
-          <a:ln/>
         </p:spPr>
         <p:txBody>
           <a:bodyPr wrap="square" lIns="0" tIns="0" rIns="0" bIns="0" rtlCol="0" anchor="t"/>
           <a:lstStyle/>
           <a:p>
-            <a:pPr indent="0" marL="0">
+            <a:pPr marL="0" indent="0">
               <a:buNone/>
             </a:pPr>
             <a:r>
@@ -4367,9 +5262,9 @@
                 <a:solidFill>
                   <a:srgbClr val="3B2A5C"/>
                 </a:solidFill>
-                <a:latin typeface="Calibri" pitchFamily="34" charset="0"/>
-                <a:ea typeface="Calibri" pitchFamily="34" charset="-122"/>
-                <a:cs typeface="Calibri" pitchFamily="34" charset="-120"/>
+                <a:latin typeface="Calibri" panose="020F0502020204030204" pitchFamily="34" charset="0"/>
+                <a:ea typeface="Calibri" panose="020F0502020204030204" pitchFamily="34" charset="-122"/>
+                <a:cs typeface="Calibri" panose="020F0502020204030204" pitchFamily="34" charset="-120"/>
               </a:rPr>
               <a:t>Qty tiap rak mengikuti planogram dan alokasi per store (lihat slide 4–5).</a:t>
             </a:r>
@@ -4444,13 +5339,12 @@
             <a:avLst/>
           </a:prstGeom>
           <a:noFill/>
-          <a:ln/>
         </p:spPr>
         <p:txBody>
           <a:bodyPr wrap="square" lIns="0" tIns="0" rIns="0" bIns="0" rtlCol="0" anchor="ctr"/>
           <a:lstStyle/>
           <a:p>
-            <a:pPr algn="ctr" indent="0" marL="0">
+            <a:pPr marL="0" indent="0" algn="ctr">
               <a:buNone/>
             </a:pPr>
             <a:r>
@@ -4458,9 +5352,9 @@
                 <a:solidFill>
                   <a:srgbClr val="FFFFFF"/>
                 </a:solidFill>
-                <a:latin typeface="Calibri" pitchFamily="34" charset="0"/>
-                <a:ea typeface="Calibri" pitchFamily="34" charset="-122"/>
-                <a:cs typeface="Calibri" pitchFamily="34" charset="-120"/>
+                <a:latin typeface="Calibri" panose="020F0502020204030204" pitchFamily="34" charset="0"/>
+                <a:ea typeface="Calibri" panose="020F0502020204030204" pitchFamily="34" charset="-122"/>
+                <a:cs typeface="Calibri" panose="020F0502020204030204" pitchFamily="34" charset="-120"/>
               </a:rPr>
               <a:t>4</a:t>
             </a:r>
@@ -4483,13 +5377,12 @@
             <a:avLst/>
           </a:prstGeom>
           <a:noFill/>
-          <a:ln/>
         </p:spPr>
         <p:txBody>
           <a:bodyPr wrap="square" lIns="0" tIns="0" rIns="0" bIns="0" rtlCol="0" anchor="ctr"/>
           <a:lstStyle/>
           <a:p>
-            <a:pPr indent="0" marL="0">
+            <a:pPr marL="0" indent="0">
               <a:buNone/>
             </a:pPr>
             <a:r>
@@ -4497,9 +5390,9 @@
                 <a:solidFill>
                   <a:srgbClr val="3B2A5C"/>
                 </a:solidFill>
-                <a:latin typeface="Calibri" pitchFamily="34" charset="0"/>
-                <a:ea typeface="Calibri" pitchFamily="34" charset="-122"/>
-                <a:cs typeface="Calibri" pitchFamily="34" charset="-120"/>
+                <a:latin typeface="Calibri" panose="020F0502020204030204" pitchFamily="34" charset="0"/>
+                <a:ea typeface="Calibri" panose="020F0502020204030204" pitchFamily="34" charset="-122"/>
+                <a:cs typeface="Calibri" panose="020F0502020204030204" pitchFamily="34" charset="-120"/>
               </a:rPr>
               <a:t>Ikuti mock display</a:t>
             </a:r>
@@ -4522,13 +5415,12 @@
             <a:avLst/>
           </a:prstGeom>
           <a:noFill/>
-          <a:ln/>
         </p:spPr>
         <p:txBody>
           <a:bodyPr wrap="square" lIns="0" tIns="0" rIns="0" bIns="0" rtlCol="0" anchor="t"/>
           <a:lstStyle/>
           <a:p>
-            <a:pPr indent="0" marL="0">
+            <a:pPr marL="0" indent="0">
               <a:buNone/>
             </a:pPr>
             <a:r>
@@ -4536,9 +5428,9 @@
                 <a:solidFill>
                   <a:srgbClr val="3B2A5C"/>
                 </a:solidFill>
-                <a:latin typeface="Calibri" pitchFamily="34" charset="0"/>
-                <a:ea typeface="Calibri" pitchFamily="34" charset="-122"/>
-                <a:cs typeface="Calibri" pitchFamily="34" charset="-120"/>
+                <a:latin typeface="Calibri" panose="020F0502020204030204" pitchFamily="34" charset="0"/>
+                <a:ea typeface="Calibri" panose="020F0502020204030204" pitchFamily="34" charset="-122"/>
+                <a:cs typeface="Calibri" panose="020F0502020204030204" pitchFamily="34" charset="-120"/>
               </a:rPr>
               <a:t>Susunan rak mengikuti mock terlampir. Header dikirim tim VM dari Jakarta.</a:t>
             </a:r>
@@ -4613,13 +5505,12 @@
             <a:avLst/>
           </a:prstGeom>
           <a:noFill/>
-          <a:ln/>
         </p:spPr>
         <p:txBody>
           <a:bodyPr wrap="square" lIns="0" tIns="0" rIns="0" bIns="0" rtlCol="0" anchor="ctr"/>
           <a:lstStyle/>
           <a:p>
-            <a:pPr algn="ctr" indent="0" marL="0">
+            <a:pPr marL="0" indent="0" algn="ctr">
               <a:buNone/>
             </a:pPr>
             <a:r>
@@ -4627,9 +5518,9 @@
                 <a:solidFill>
                   <a:srgbClr val="FFFFFF"/>
                 </a:solidFill>
-                <a:latin typeface="Calibri" pitchFamily="34" charset="0"/>
-                <a:ea typeface="Calibri" pitchFamily="34" charset="-122"/>
-                <a:cs typeface="Calibri" pitchFamily="34" charset="-120"/>
+                <a:latin typeface="Calibri" panose="020F0502020204030204" pitchFamily="34" charset="0"/>
+                <a:ea typeface="Calibri" panose="020F0502020204030204" pitchFamily="34" charset="-122"/>
+                <a:cs typeface="Calibri" panose="020F0502020204030204" pitchFamily="34" charset="-120"/>
               </a:rPr>
               <a:t>5</a:t>
             </a:r>
@@ -4652,13 +5543,12 @@
             <a:avLst/>
           </a:prstGeom>
           <a:noFill/>
-          <a:ln/>
         </p:spPr>
         <p:txBody>
           <a:bodyPr wrap="square" lIns="0" tIns="0" rIns="0" bIns="0" rtlCol="0" anchor="ctr"/>
           <a:lstStyle/>
           <a:p>
-            <a:pPr indent="0" marL="0">
+            <a:pPr marL="0" indent="0">
               <a:buNone/>
             </a:pPr>
             <a:r>
@@ -4666,9 +5556,9 @@
                 <a:solidFill>
                   <a:srgbClr val="3B2A5C"/>
                 </a:solidFill>
-                <a:latin typeface="Calibri" pitchFamily="34" charset="0"/>
-                <a:ea typeface="Calibri" pitchFamily="34" charset="-122"/>
-                <a:cs typeface="Calibri" pitchFamily="34" charset="-120"/>
+                <a:latin typeface="Calibri" panose="020F0502020204030204" pitchFamily="34" charset="0"/>
+                <a:ea typeface="Calibri" panose="020F0502020204030204" pitchFamily="34" charset="-122"/>
+                <a:cs typeface="Calibri" panose="020F0502020204030204" pitchFamily="34" charset="-120"/>
               </a:rPr>
               <a:t>Buka 6 warna</a:t>
             </a:r>
@@ -4691,13 +5581,12 @@
             <a:avLst/>
           </a:prstGeom>
           <a:noFill/>
-          <a:ln/>
         </p:spPr>
         <p:txBody>
           <a:bodyPr wrap="square" lIns="0" tIns="0" rIns="0" bIns="0" rtlCol="0" anchor="t"/>
           <a:lstStyle/>
           <a:p>
-            <a:pPr indent="0" marL="0">
+            <a:pPr marL="0" indent="0">
               <a:buNone/>
             </a:pPr>
             <a:r>
@@ -4705,9 +5594,9 @@
                 <a:solidFill>
                   <a:srgbClr val="3B2A5C"/>
                 </a:solidFill>
-                <a:latin typeface="Calibri" pitchFamily="34" charset="0"/>
-                <a:ea typeface="Calibri" pitchFamily="34" charset="-122"/>
-                <a:cs typeface="Calibri" pitchFamily="34" charset="-120"/>
+                <a:latin typeface="Calibri" panose="020F0502020204030204" pitchFamily="34" charset="0"/>
+                <a:ea typeface="Calibri" panose="020F0502020204030204" pitchFamily="34" charset="-122"/>
+                <a:cs typeface="Calibri" panose="020F0502020204030204" pitchFamily="34" charset="-120"/>
               </a:rPr>
               <a:t>Buka 1 PDQ SMALL dan 1 PDQ LARGE, display 6 warna (5 bila dapat Secret).</a:t>
             </a:r>
@@ -4782,13 +5671,12 @@
             <a:avLst/>
           </a:prstGeom>
           <a:noFill/>
-          <a:ln/>
         </p:spPr>
         <p:txBody>
           <a:bodyPr wrap="square" lIns="0" tIns="0" rIns="0" bIns="0" rtlCol="0" anchor="ctr"/>
           <a:lstStyle/>
           <a:p>
-            <a:pPr algn="ctr" indent="0" marL="0">
+            <a:pPr marL="0" indent="0" algn="ctr">
               <a:buNone/>
             </a:pPr>
             <a:r>
@@ -4796,9 +5684,9 @@
                 <a:solidFill>
                   <a:srgbClr val="FFFFFF"/>
                 </a:solidFill>
-                <a:latin typeface="Calibri" pitchFamily="34" charset="0"/>
-                <a:ea typeface="Calibri" pitchFamily="34" charset="-122"/>
-                <a:cs typeface="Calibri" pitchFamily="34" charset="-120"/>
+                <a:latin typeface="Calibri" panose="020F0502020204030204" pitchFamily="34" charset="0"/>
+                <a:ea typeface="Calibri" panose="020F0502020204030204" pitchFamily="34" charset="-122"/>
+                <a:cs typeface="Calibri" panose="020F0502020204030204" pitchFamily="34" charset="-120"/>
               </a:rPr>
               <a:t>6</a:t>
             </a:r>
@@ -4821,13 +5709,12 @@
             <a:avLst/>
           </a:prstGeom>
           <a:noFill/>
-          <a:ln/>
         </p:spPr>
         <p:txBody>
           <a:bodyPr wrap="square" lIns="0" tIns="0" rIns="0" bIns="0" rtlCol="0" anchor="ctr"/>
           <a:lstStyle/>
           <a:p>
-            <a:pPr indent="0" marL="0">
+            <a:pPr marL="0" indent="0">
               <a:buNone/>
             </a:pPr>
             <a:r>
@@ -4835,9 +5722,9 @@
                 <a:solidFill>
                   <a:srgbClr val="3B2A5C"/>
                 </a:solidFill>
-                <a:latin typeface="Calibri" pitchFamily="34" charset="0"/>
-                <a:ea typeface="Calibri" pitchFamily="34" charset="-122"/>
-                <a:cs typeface="Calibri" pitchFamily="34" charset="-120"/>
+                <a:latin typeface="Calibri" panose="020F0502020204030204" pitchFamily="34" charset="0"/>
+                <a:ea typeface="Calibri" panose="020F0502020204030204" pitchFamily="34" charset="-122"/>
+                <a:cs typeface="Calibri" panose="020F0502020204030204" pitchFamily="34" charset="-120"/>
               </a:rPr>
               <a:t>POP sementara</a:t>
             </a:r>
@@ -4860,13 +5747,12 @@
             <a:avLst/>
           </a:prstGeom>
           <a:noFill/>
-          <a:ln/>
         </p:spPr>
         <p:txBody>
           <a:bodyPr wrap="square" lIns="0" tIns="0" rIns="0" bIns="0" rtlCol="0" anchor="t"/>
           <a:lstStyle/>
           <a:p>
-            <a:pPr indent="0" marL="0">
+            <a:pPr marL="0" indent="0">
               <a:buNone/>
             </a:pPr>
             <a:r>
@@ -4874,9 +5760,9 @@
                 <a:solidFill>
                   <a:srgbClr val="3B2A5C"/>
                 </a:solidFill>
-                <a:latin typeface="Calibri" pitchFamily="34" charset="0"/>
-                <a:ea typeface="Calibri" pitchFamily="34" charset="-122"/>
-                <a:cs typeface="Calibri" pitchFamily="34" charset="-120"/>
+                <a:latin typeface="Calibri" panose="020F0502020204030204" pitchFamily="34" charset="0"/>
+                <a:ea typeface="Calibri" panose="020F0502020204030204" pitchFamily="34" charset="-122"/>
+                <a:cs typeface="Calibri" panose="020F0502020204030204" pitchFamily="34" charset="-120"/>
               </a:rPr>
               <a:t>Display datang lebih dulu dari materi komunikasi? Cetak POP A4 dari Head Office di percetakan.</a:t>
             </a:r>
@@ -4894,12 +5780,13 @@
 
 <file path=ppt/slides/slide3.xml><?xml version="1.0" encoding="utf-8"?>
 <p:sld xmlns:a="http://schemas.openxmlformats.org/drawingml/2006/main" xmlns:r="http://schemas.openxmlformats.org/officeDocument/2006/relationships" xmlns:p="http://schemas.openxmlformats.org/presentationml/2006/main">
-  <p:cSld name="Slide 3">
+  <p:cSld>
     <p:bg>
       <p:bgPr>
         <a:solidFill>
           <a:srgbClr val="FFFFFF"/>
         </a:solidFill>
+        <a:effectLst/>
       </p:bgPr>
     </p:bg>
     <p:spTree>
@@ -4931,13 +5818,12 @@
             <a:avLst/>
           </a:prstGeom>
           <a:noFill/>
-          <a:ln/>
         </p:spPr>
         <p:txBody>
           <a:bodyPr wrap="square" lIns="0" tIns="0" rIns="0" bIns="0" rtlCol="0" anchor="ctr"/>
           <a:lstStyle/>
           <a:p>
-            <a:pPr indent="0" marL="0">
+            <a:pPr marL="0" indent="0">
               <a:buNone/>
             </a:pPr>
             <a:r>
@@ -4945,9 +5831,9 @@
                 <a:solidFill>
                   <a:srgbClr val="3B2A5C"/>
                 </a:solidFill>
-                <a:latin typeface="Cambria" pitchFamily="34" charset="0"/>
-                <a:ea typeface="Cambria" pitchFamily="34" charset="-122"/>
-                <a:cs typeface="Cambria" pitchFamily="34" charset="-120"/>
+                <a:latin typeface="Cambria" panose="02040503050406030204" pitchFamily="34" charset="0"/>
+                <a:ea typeface="Cambria" panose="02040503050406030204" pitchFamily="34" charset="-122"/>
+                <a:cs typeface="Cambria" panose="02040503050406030204" pitchFamily="34" charset="-120"/>
               </a:rPr>
               <a:t>Mock display sesuai planogram</a:t>
             </a:r>
@@ -4957,7 +5843,7 @@
       </p:sp>
       <p:pic>
         <p:nvPicPr>
-          <p:cNvPr id="3" name="Image 0" descr="/tmp/claude-0/-home-user-Testing-Erie/31a86cd2-3938-53d6-901f-33e16b329622/scratchpad/w/mock3d_new.png">    </p:cNvPr>
+          <p:cNvPr id="3" name="Image 0" descr="/tmp/claude-0/-home-user-Testing-Erie/31a86cd2-3938-53d6-901f-33e16b329622/scratchpad/w/mock3d_new.png"/>
           <p:cNvPicPr>
             <a:picLocks noChangeAspect="1"/>
           </p:cNvPicPr>
@@ -5019,13 +5905,12 @@
             <a:avLst/>
           </a:prstGeom>
           <a:noFill/>
-          <a:ln/>
         </p:spPr>
         <p:txBody>
           <a:bodyPr wrap="square" lIns="0" tIns="0" rIns="0" bIns="0" rtlCol="0" anchor="ctr"/>
           <a:lstStyle/>
           <a:p>
-            <a:pPr algn="ctr" indent="0" marL="0">
+            <a:pPr marL="0" indent="0" algn="ctr">
               <a:buNone/>
             </a:pPr>
             <a:r>
@@ -5033,9 +5918,9 @@
                 <a:solidFill>
                   <a:srgbClr val="FFFFFF"/>
                 </a:solidFill>
-                <a:latin typeface="Calibri" pitchFamily="34" charset="0"/>
-                <a:ea typeface="Calibri" pitchFamily="34" charset="-122"/>
-                <a:cs typeface="Calibri" pitchFamily="34" charset="-120"/>
+                <a:latin typeface="Calibri" panose="020F0502020204030204" pitchFamily="34" charset="0"/>
+                <a:ea typeface="Calibri" panose="020F0502020204030204" pitchFamily="34" charset="-122"/>
+                <a:cs typeface="Calibri" panose="020F0502020204030204" pitchFamily="34" charset="-120"/>
               </a:rPr>
               <a:t>1</a:t>
             </a:r>
@@ -5058,13 +5943,12 @@
             <a:avLst/>
           </a:prstGeom>
           <a:noFill/>
-          <a:ln/>
         </p:spPr>
         <p:txBody>
           <a:bodyPr wrap="square" lIns="0" tIns="0" rIns="0" bIns="0" rtlCol="0" anchor="t"/>
           <a:lstStyle/>
           <a:p>
-            <a:pPr indent="0" marL="0">
+            <a:pPr marL="0" indent="0">
               <a:buNone/>
             </a:pPr>
             <a:r>
@@ -5072,16 +5956,16 @@
                 <a:solidFill>
                   <a:srgbClr val="3B2A5C"/>
                 </a:solidFill>
-                <a:latin typeface="Calibri" pitchFamily="34" charset="0"/>
-                <a:ea typeface="Calibri" pitchFamily="34" charset="-122"/>
-                <a:cs typeface="Calibri" pitchFamily="34" charset="-120"/>
+                <a:latin typeface="Calibri" panose="020F0502020204030204" pitchFamily="34" charset="0"/>
+                <a:ea typeface="Calibri" panose="020F0502020204030204" pitchFamily="34" charset="-122"/>
+                <a:cs typeface="Calibri" panose="020F0502020204030204" pitchFamily="34" charset="-120"/>
               </a:rPr>
               <a:t>Header</a:t>
             </a:r>
             <a:endParaRPr lang="en-US" sz="1800" dirty="0"/>
           </a:p>
           <a:p>
-            <a:pPr indent="0" marL="0">
+            <a:pPr marL="0" indent="0">
               <a:buNone/>
             </a:pPr>
             <a:r>
@@ -5089,9 +5973,9 @@
                 <a:solidFill>
                   <a:srgbClr val="6B6580"/>
                 </a:solidFill>
-                <a:latin typeface="Calibri" pitchFamily="34" charset="0"/>
-                <a:ea typeface="Calibri" pitchFamily="34" charset="-122"/>
-                <a:cs typeface="Calibri" pitchFamily="34" charset="-120"/>
+                <a:latin typeface="Calibri" panose="020F0502020204030204" pitchFamily="34" charset="0"/>
+                <a:ea typeface="Calibri" panose="020F0502020204030204" pitchFamily="34" charset="-122"/>
+                <a:cs typeface="Calibri" panose="020F0502020204030204" pitchFamily="34" charset="-120"/>
               </a:rPr>
               <a:t>“Pick Your Lucky Box”, dikirim tim VM dari Jakarta.</a:t>
             </a:r>
@@ -5139,13 +6023,12 @@
             <a:avLst/>
           </a:prstGeom>
           <a:noFill/>
-          <a:ln/>
         </p:spPr>
         <p:txBody>
           <a:bodyPr wrap="square" lIns="0" tIns="0" rIns="0" bIns="0" rtlCol="0" anchor="ctr"/>
           <a:lstStyle/>
           <a:p>
-            <a:pPr algn="ctr" indent="0" marL="0">
+            <a:pPr marL="0" indent="0" algn="ctr">
               <a:buNone/>
             </a:pPr>
             <a:r>
@@ -5153,9 +6036,9 @@
                 <a:solidFill>
                   <a:srgbClr val="FFFFFF"/>
                 </a:solidFill>
-                <a:latin typeface="Calibri" pitchFamily="34" charset="0"/>
-                <a:ea typeface="Calibri" pitchFamily="34" charset="-122"/>
-                <a:cs typeface="Calibri" pitchFamily="34" charset="-120"/>
+                <a:latin typeface="Calibri" panose="020F0502020204030204" pitchFamily="34" charset="0"/>
+                <a:ea typeface="Calibri" panose="020F0502020204030204" pitchFamily="34" charset="-122"/>
+                <a:cs typeface="Calibri" panose="020F0502020204030204" pitchFamily="34" charset="-120"/>
               </a:rPr>
               <a:t>2</a:t>
             </a:r>
@@ -5178,13 +6061,12 @@
             <a:avLst/>
           </a:prstGeom>
           <a:noFill/>
-          <a:ln/>
         </p:spPr>
         <p:txBody>
           <a:bodyPr wrap="square" lIns="0" tIns="0" rIns="0" bIns="0" rtlCol="0" anchor="t"/>
           <a:lstStyle/>
           <a:p>
-            <a:pPr indent="0" marL="0">
+            <a:pPr marL="0" indent="0">
               <a:buNone/>
             </a:pPr>
             <a:r>
@@ -5192,16 +6074,16 @@
                 <a:solidFill>
                   <a:srgbClr val="3B2A5C"/>
                 </a:solidFill>
-                <a:latin typeface="Calibri" pitchFamily="34" charset="0"/>
-                <a:ea typeface="Calibri" pitchFamily="34" charset="-122"/>
-                <a:cs typeface="Calibri" pitchFamily="34" charset="-120"/>
+                <a:latin typeface="Calibri" panose="020F0502020204030204" pitchFamily="34" charset="0"/>
+                <a:ea typeface="Calibri" panose="020F0502020204030204" pitchFamily="34" charset="-122"/>
+                <a:cs typeface="Calibri" panose="020F0502020204030204" pitchFamily="34" charset="-120"/>
               </a:rPr>
               <a:t>Riser (50 cm)</a:t>
             </a:r>
             <a:endParaRPr lang="en-US" sz="1800" dirty="0"/>
           </a:p>
           <a:p>
-            <a:pPr indent="0" marL="0">
+            <a:pPr marL="0" indent="0">
               <a:buNone/>
             </a:pPr>
             <a:r>
@@ -5209,9 +6091,9 @@
                 <a:solidFill>
                   <a:srgbClr val="6B6580"/>
                 </a:solidFill>
-                <a:latin typeface="Calibri" pitchFamily="34" charset="0"/>
-                <a:ea typeface="Calibri" pitchFamily="34" charset="-122"/>
-                <a:cs typeface="Calibri" pitchFamily="34" charset="-120"/>
+                <a:latin typeface="Calibri" panose="020F0502020204030204" pitchFamily="34" charset="0"/>
+                <a:ea typeface="Calibri" panose="020F0502020204030204" pitchFamily="34" charset="-122"/>
+                <a:cs typeface="Calibri" panose="020F0502020204030204" pitchFamily="34" charset="-120"/>
               </a:rPr>
               <a:t>6 warna terbuka sebagai display (5 warna bila dapat Secret).</a:t>
             </a:r>
@@ -5259,13 +6141,12 @@
             <a:avLst/>
           </a:prstGeom>
           <a:noFill/>
-          <a:ln/>
         </p:spPr>
         <p:txBody>
           <a:bodyPr wrap="square" lIns="0" tIns="0" rIns="0" bIns="0" rtlCol="0" anchor="ctr"/>
           <a:lstStyle/>
           <a:p>
-            <a:pPr algn="ctr" indent="0" marL="0">
+            <a:pPr marL="0" indent="0" algn="ctr">
               <a:buNone/>
             </a:pPr>
             <a:r>
@@ -5273,9 +6154,9 @@
                 <a:solidFill>
                   <a:srgbClr val="FFFFFF"/>
                 </a:solidFill>
-                <a:latin typeface="Calibri" pitchFamily="34" charset="0"/>
-                <a:ea typeface="Calibri" pitchFamily="34" charset="-122"/>
-                <a:cs typeface="Calibri" pitchFamily="34" charset="-120"/>
+                <a:latin typeface="Calibri" panose="020F0502020204030204" pitchFamily="34" charset="0"/>
+                <a:ea typeface="Calibri" panose="020F0502020204030204" pitchFamily="34" charset="-122"/>
+                <a:cs typeface="Calibri" panose="020F0502020204030204" pitchFamily="34" charset="-120"/>
               </a:rPr>
               <a:t>3</a:t>
             </a:r>
@@ -5298,13 +6179,12 @@
             <a:avLst/>
           </a:prstGeom>
           <a:noFill/>
-          <a:ln/>
         </p:spPr>
         <p:txBody>
           <a:bodyPr wrap="square" lIns="0" tIns="0" rIns="0" bIns="0" rtlCol="0" anchor="t"/>
           <a:lstStyle/>
           <a:p>
-            <a:pPr indent="0" marL="0">
+            <a:pPr marL="0" indent="0">
               <a:buNone/>
             </a:pPr>
             <a:r>
@@ -5312,16 +6192,16 @@
                 <a:solidFill>
                   <a:srgbClr val="3B2A5C"/>
                 </a:solidFill>
-                <a:latin typeface="Calibri" pitchFamily="34" charset="0"/>
-                <a:ea typeface="Calibri" pitchFamily="34" charset="-122"/>
-                <a:cs typeface="Calibri" pitchFamily="34" charset="-120"/>
+                <a:latin typeface="Calibri" panose="020F0502020204030204" pitchFamily="34" charset="0"/>
+                <a:ea typeface="Calibri" panose="020F0502020204030204" pitchFamily="34" charset="-122"/>
+                <a:cs typeface="Calibri" panose="020F0502020204030204" pitchFamily="34" charset="-120"/>
               </a:rPr>
               <a:t>Rak 1 (30 cm)</a:t>
             </a:r>
             <a:endParaRPr lang="en-US" sz="1800" dirty="0"/>
           </a:p>
           <a:p>
-            <a:pPr indent="0" marL="0">
+            <a:pPr marL="0" indent="0">
               <a:buNone/>
             </a:pPr>
             <a:r>
@@ -5329,9 +6209,9 @@
                 <a:solidFill>
                   <a:srgbClr val="6B6580"/>
                 </a:solidFill>
-                <a:latin typeface="Calibri" pitchFamily="34" charset="0"/>
-                <a:ea typeface="Calibri" pitchFamily="34" charset="-122"/>
-                <a:cs typeface="Calibri" pitchFamily="34" charset="-120"/>
+                <a:latin typeface="Calibri" panose="020F0502020204030204" pitchFamily="34" charset="0"/>
+                <a:ea typeface="Calibri" panose="020F0502020204030204" pitchFamily="34" charset="-122"/>
+                <a:cs typeface="Calibri" panose="020F0502020204030204" pitchFamily="34" charset="-120"/>
               </a:rPr>
               <a:t>SMALL, 4 box lebar × 3 deret = 12 box.</a:t>
             </a:r>
@@ -5379,13 +6259,12 @@
             <a:avLst/>
           </a:prstGeom>
           <a:noFill/>
-          <a:ln/>
         </p:spPr>
         <p:txBody>
           <a:bodyPr wrap="square" lIns="0" tIns="0" rIns="0" bIns="0" rtlCol="0" anchor="ctr"/>
           <a:lstStyle/>
           <a:p>
-            <a:pPr algn="ctr" indent="0" marL="0">
+            <a:pPr marL="0" indent="0" algn="ctr">
               <a:buNone/>
             </a:pPr>
             <a:r>
@@ -5393,9 +6272,9 @@
                 <a:solidFill>
                   <a:srgbClr val="FFFFFF"/>
                 </a:solidFill>
-                <a:latin typeface="Calibri" pitchFamily="34" charset="0"/>
-                <a:ea typeface="Calibri" pitchFamily="34" charset="-122"/>
-                <a:cs typeface="Calibri" pitchFamily="34" charset="-120"/>
+                <a:latin typeface="Calibri" panose="020F0502020204030204" pitchFamily="34" charset="0"/>
+                <a:ea typeface="Calibri" panose="020F0502020204030204" pitchFamily="34" charset="-122"/>
+                <a:cs typeface="Calibri" panose="020F0502020204030204" pitchFamily="34" charset="-120"/>
               </a:rPr>
               <a:t>4</a:t>
             </a:r>
@@ -5418,13 +6297,12 @@
             <a:avLst/>
           </a:prstGeom>
           <a:noFill/>
-          <a:ln/>
         </p:spPr>
         <p:txBody>
           <a:bodyPr wrap="square" lIns="0" tIns="0" rIns="0" bIns="0" rtlCol="0" anchor="t"/>
           <a:lstStyle/>
           <a:p>
-            <a:pPr indent="0" marL="0">
+            <a:pPr marL="0" indent="0">
               <a:buNone/>
             </a:pPr>
             <a:r>
@@ -5432,16 +6310,16 @@
                 <a:solidFill>
                   <a:srgbClr val="3B2A5C"/>
                 </a:solidFill>
-                <a:latin typeface="Calibri" pitchFamily="34" charset="0"/>
-                <a:ea typeface="Calibri" pitchFamily="34" charset="-122"/>
-                <a:cs typeface="Calibri" pitchFamily="34" charset="-120"/>
+                <a:latin typeface="Calibri" panose="020F0502020204030204" pitchFamily="34" charset="0"/>
+                <a:ea typeface="Calibri" panose="020F0502020204030204" pitchFamily="34" charset="-122"/>
+                <a:cs typeface="Calibri" panose="020F0502020204030204" pitchFamily="34" charset="-120"/>
               </a:rPr>
               <a:t>Rak 2 (30 cm)</a:t>
             </a:r>
             <a:endParaRPr lang="en-US" sz="1800" dirty="0"/>
           </a:p>
           <a:p>
-            <a:pPr indent="0" marL="0">
+            <a:pPr marL="0" indent="0">
               <a:buNone/>
             </a:pPr>
             <a:r>
@@ -5449,9 +6327,9 @@
                 <a:solidFill>
                   <a:srgbClr val="6B6580"/>
                 </a:solidFill>
-                <a:latin typeface="Calibri" pitchFamily="34" charset="0"/>
-                <a:ea typeface="Calibri" pitchFamily="34" charset="-122"/>
-                <a:cs typeface="Calibri" pitchFamily="34" charset="-120"/>
+                <a:latin typeface="Calibri" panose="020F0502020204030204" pitchFamily="34" charset="0"/>
+                <a:ea typeface="Calibri" panose="020F0502020204030204" pitchFamily="34" charset="-122"/>
+                <a:cs typeface="Calibri" panose="020F0502020204030204" pitchFamily="34" charset="-120"/>
               </a:rPr>
               <a:t>LARGE, 4 box lebar × 2 deret = 8 box.</a:t>
             </a:r>
@@ -5499,13 +6377,12 @@
             <a:avLst/>
           </a:prstGeom>
           <a:noFill/>
-          <a:ln/>
         </p:spPr>
         <p:txBody>
           <a:bodyPr wrap="square" lIns="0" tIns="0" rIns="0" bIns="0" rtlCol="0" anchor="ctr"/>
           <a:lstStyle/>
           <a:p>
-            <a:pPr algn="ctr" indent="0" marL="0">
+            <a:pPr marL="0" indent="0" algn="ctr">
               <a:buNone/>
             </a:pPr>
             <a:r>
@@ -5513,9 +6390,9 @@
                 <a:solidFill>
                   <a:srgbClr val="FFFFFF"/>
                 </a:solidFill>
-                <a:latin typeface="Calibri" pitchFamily="34" charset="0"/>
-                <a:ea typeface="Calibri" pitchFamily="34" charset="-122"/>
-                <a:cs typeface="Calibri" pitchFamily="34" charset="-120"/>
+                <a:latin typeface="Calibri" panose="020F0502020204030204" pitchFamily="34" charset="0"/>
+                <a:ea typeface="Calibri" panose="020F0502020204030204" pitchFamily="34" charset="-122"/>
+                <a:cs typeface="Calibri" panose="020F0502020204030204" pitchFamily="34" charset="-120"/>
               </a:rPr>
               <a:t>5</a:t>
             </a:r>
@@ -5538,13 +6415,12 @@
             <a:avLst/>
           </a:prstGeom>
           <a:noFill/>
-          <a:ln/>
         </p:spPr>
         <p:txBody>
           <a:bodyPr wrap="square" lIns="0" tIns="0" rIns="0" bIns="0" rtlCol="0" anchor="t"/>
           <a:lstStyle/>
           <a:p>
-            <a:pPr indent="0" marL="0">
+            <a:pPr marL="0" indent="0">
               <a:buNone/>
             </a:pPr>
             <a:r>
@@ -5552,16 +6428,16 @@
                 <a:solidFill>
                   <a:srgbClr val="3B2A5C"/>
                 </a:solidFill>
-                <a:latin typeface="Calibri" pitchFamily="34" charset="0"/>
-                <a:ea typeface="Calibri" pitchFamily="34" charset="-122"/>
-                <a:cs typeface="Calibri" pitchFamily="34" charset="-120"/>
+                <a:latin typeface="Calibri" panose="020F0502020204030204" pitchFamily="34" charset="0"/>
+                <a:ea typeface="Calibri" panose="020F0502020204030204" pitchFamily="34" charset="-122"/>
+                <a:cs typeface="Calibri" panose="020F0502020204030204" pitchFamily="34" charset="-120"/>
               </a:rPr>
               <a:t>Rak 3 (40 cm)</a:t>
             </a:r>
             <a:endParaRPr lang="en-US" sz="1800" dirty="0"/>
           </a:p>
           <a:p>
-            <a:pPr indent="0" marL="0">
+            <a:pPr marL="0" indent="0">
               <a:buNone/>
             </a:pPr>
             <a:r>
@@ -5569,9 +6445,9 @@
                 <a:solidFill>
                   <a:srgbClr val="6B6580"/>
                 </a:solidFill>
-                <a:latin typeface="Calibri" pitchFamily="34" charset="0"/>
-                <a:ea typeface="Calibri" pitchFamily="34" charset="-122"/>
-                <a:cs typeface="Calibri" pitchFamily="34" charset="-120"/>
+                <a:latin typeface="Calibri" panose="020F0502020204030204" pitchFamily="34" charset="0"/>
+                <a:ea typeface="Calibri" panose="020F0502020204030204" pitchFamily="34" charset="-122"/>
+                <a:cs typeface="Calibri" panose="020F0502020204030204" pitchFamily="34" charset="-120"/>
               </a:rPr>
               <a:t>2 SMALL + 2 LARGE lebar × 2 deret = 4 SMALL + 4 LARGE.</a:t>
             </a:r>
@@ -5594,13 +6470,12 @@
             <a:avLst/>
           </a:prstGeom>
           <a:noFill/>
-          <a:ln/>
         </p:spPr>
         <p:txBody>
           <a:bodyPr wrap="square" lIns="0" tIns="0" rIns="0" bIns="0" rtlCol="0" anchor="ctr"/>
           <a:lstStyle/>
           <a:p>
-            <a:pPr indent="0" marL="0">
+            <a:pPr marL="0" indent="0">
               <a:buNone/>
             </a:pPr>
             <a:r>
@@ -5608,9 +6483,9 @@
                 <a:solidFill>
                   <a:srgbClr val="6B6580"/>
                 </a:solidFill>
-                <a:latin typeface="Calibri" pitchFamily="34" charset="0"/>
-                <a:ea typeface="Calibri" pitchFamily="34" charset="-122"/>
-                <a:cs typeface="Calibri" pitchFamily="34" charset="-120"/>
+                <a:latin typeface="Calibri" panose="020F0502020204030204" pitchFamily="34" charset="0"/>
+                <a:ea typeface="Calibri" panose="020F0502020204030204" pitchFamily="34" charset="-122"/>
+                <a:cs typeface="Calibri" panose="020F0502020204030204" pitchFamily="34" charset="-120"/>
               </a:rPr>
               <a:t>Gambar ilustrasi, tidak skala. Total di endcap: 16 box SMALL + 12 box LARGE.</a:t>
             </a:r>
@@ -5628,12 +6503,13 @@
 
 <file path=ppt/slides/slide4.xml><?xml version="1.0" encoding="utf-8"?>
 <p:sld xmlns:a="http://schemas.openxmlformats.org/drawingml/2006/main" xmlns:r="http://schemas.openxmlformats.org/officeDocument/2006/relationships" xmlns:p="http://schemas.openxmlformats.org/presentationml/2006/main">
-  <p:cSld name="Slide 4">
+  <p:cSld>
     <p:bg>
       <p:bgPr>
         <a:solidFill>
           <a:srgbClr val="FFFFFF"/>
         </a:solidFill>
+        <a:effectLst/>
       </p:bgPr>
     </p:bg>
     <p:spTree>
@@ -5665,13 +6541,12 @@
             <a:avLst/>
           </a:prstGeom>
           <a:noFill/>
-          <a:ln/>
         </p:spPr>
         <p:txBody>
           <a:bodyPr wrap="square" lIns="0" tIns="0" rIns="0" bIns="0" rtlCol="0" anchor="ctr"/>
           <a:lstStyle/>
           <a:p>
-            <a:pPr indent="0" marL="0">
+            <a:pPr marL="0" indent="0">
               <a:buNone/>
             </a:pPr>
             <a:r>
@@ -5679,9 +6554,9 @@
                 <a:solidFill>
                   <a:srgbClr val="3B2A5C"/>
                 </a:solidFill>
-                <a:latin typeface="Cambria" pitchFamily="34" charset="0"/>
-                <a:ea typeface="Cambria" pitchFamily="34" charset="-122"/>
-                <a:cs typeface="Cambria" pitchFamily="34" charset="-120"/>
+                <a:latin typeface="Cambria" panose="02040503050406030204" pitchFamily="34" charset="0"/>
+                <a:ea typeface="Cambria" panose="02040503050406030204" pitchFamily="34" charset="-122"/>
+                <a:cs typeface="Cambria" panose="02040503050406030204" pitchFamily="34" charset="-120"/>
               </a:rPr>
               <a:t>Planogram: tampak depan dan tampak atas</a:t>
             </a:r>
@@ -5704,13 +6579,12 @@
             <a:avLst/>
           </a:prstGeom>
           <a:noFill/>
-          <a:ln/>
         </p:spPr>
         <p:txBody>
           <a:bodyPr wrap="square" lIns="0" tIns="0" rIns="0" bIns="0" rtlCol="0" anchor="ctr"/>
           <a:lstStyle/>
           <a:p>
-            <a:pPr indent="0" marL="0">
+            <a:pPr marL="0" indent="0">
               <a:buNone/>
             </a:pPr>
             <a:r>
@@ -5718,9 +6592,9 @@
                 <a:solidFill>
                   <a:srgbClr val="3B2A5C"/>
                 </a:solidFill>
-                <a:latin typeface="Calibri" pitchFamily="34" charset="0"/>
-                <a:ea typeface="Calibri" pitchFamily="34" charset="-122"/>
-                <a:cs typeface="Calibri" pitchFamily="34" charset="-120"/>
+                <a:latin typeface="Calibri" panose="020F0502020204030204" pitchFamily="34" charset="0"/>
+                <a:ea typeface="Calibri" panose="020F0502020204030204" pitchFamily="34" charset="-122"/>
+                <a:cs typeface="Calibri" panose="020F0502020204030204" pitchFamily="34" charset="-120"/>
               </a:rPr>
               <a:t>TAMPAK DEPAN</a:t>
             </a:r>
@@ -5743,13 +6617,12 @@
             <a:avLst/>
           </a:prstGeom>
           <a:noFill/>
-          <a:ln/>
         </p:spPr>
         <p:txBody>
           <a:bodyPr wrap="square" lIns="0" tIns="0" rIns="0" bIns="0" rtlCol="0" anchor="ctr"/>
           <a:lstStyle/>
           <a:p>
-            <a:pPr indent="0" marL="0">
+            <a:pPr marL="0" indent="0">
               <a:buNone/>
             </a:pPr>
             <a:r>
@@ -5757,9 +6630,9 @@
                 <a:solidFill>
                   <a:srgbClr val="3B2A5C"/>
                 </a:solidFill>
-                <a:latin typeface="Calibri" pitchFamily="34" charset="0"/>
-                <a:ea typeface="Calibri" pitchFamily="34" charset="-122"/>
-                <a:cs typeface="Calibri" pitchFamily="34" charset="-120"/>
+                <a:latin typeface="Calibri" panose="020F0502020204030204" pitchFamily="34" charset="0"/>
+                <a:ea typeface="Calibri" panose="020F0502020204030204" pitchFamily="34" charset="-122"/>
+                <a:cs typeface="Calibri" panose="020F0502020204030204" pitchFamily="34" charset="-120"/>
               </a:rPr>
               <a:t>TAMPAK ATAS</a:t>
             </a:r>
@@ -5807,13 +6680,12 @@
             <a:avLst/>
           </a:prstGeom>
           <a:noFill/>
-          <a:ln/>
         </p:spPr>
         <p:txBody>
           <a:bodyPr wrap="square" lIns="0" tIns="0" rIns="0" bIns="0" rtlCol="0" anchor="ctr"/>
           <a:lstStyle/>
           <a:p>
-            <a:pPr algn="ctr" indent="0" marL="0">
+            <a:pPr marL="0" indent="0" algn="ctr">
               <a:buNone/>
             </a:pPr>
             <a:r>
@@ -5821,9 +6693,9 @@
                 <a:solidFill>
                   <a:srgbClr val="3B2A5C"/>
                 </a:solidFill>
-                <a:latin typeface="Calibri" pitchFamily="34" charset="0"/>
-                <a:ea typeface="Calibri" pitchFamily="34" charset="-122"/>
-                <a:cs typeface="Calibri" pitchFamily="34" charset="-120"/>
+                <a:latin typeface="Calibri" panose="020F0502020204030204" pitchFamily="34" charset="0"/>
+                <a:ea typeface="Calibri" panose="020F0502020204030204" pitchFamily="34" charset="-122"/>
+                <a:cs typeface="Calibri" panose="020F0502020204030204" pitchFamily="34" charset="-120"/>
               </a:rPr>
               <a:t>Header + riser 6 botol</a:t>
             </a:r>
@@ -5846,13 +6718,12 @@
             <a:avLst/>
           </a:prstGeom>
           <a:noFill/>
-          <a:ln/>
         </p:spPr>
         <p:txBody>
           <a:bodyPr wrap="square" lIns="0" tIns="0" rIns="0" bIns="0" rtlCol="0" anchor="ctr"/>
           <a:lstStyle/>
           <a:p>
-            <a:pPr indent="0" marL="0">
+            <a:pPr marL="0" indent="0">
               <a:buNone/>
             </a:pPr>
             <a:r>
@@ -5860,9 +6731,9 @@
                 <a:solidFill>
                   <a:srgbClr val="6B6580"/>
                 </a:solidFill>
-                <a:latin typeface="Calibri" pitchFamily="34" charset="0"/>
-                <a:ea typeface="Calibri" pitchFamily="34" charset="-122"/>
-                <a:cs typeface="Calibri" pitchFamily="34" charset="-120"/>
+                <a:latin typeface="Calibri" panose="020F0502020204030204" pitchFamily="34" charset="0"/>
+                <a:ea typeface="Calibri" panose="020F0502020204030204" pitchFamily="34" charset="-122"/>
+                <a:cs typeface="Calibri" panose="020F0502020204030204" pitchFamily="34" charset="-120"/>
               </a:rPr>
               <a:t>50 cm</a:t>
             </a:r>
@@ -5935,13 +6806,12 @@
             <a:avLst/>
           </a:prstGeom>
           <a:noFill/>
-          <a:ln/>
         </p:spPr>
         <p:txBody>
           <a:bodyPr wrap="square" lIns="0" tIns="0" rIns="0" bIns="0" rtlCol="0" anchor="ctr"/>
           <a:lstStyle/>
           <a:p>
-            <a:pPr algn="ctr" indent="0" marL="0">
+            <a:pPr marL="0" indent="0" algn="ctr">
               <a:buNone/>
             </a:pPr>
             <a:r>
@@ -5949,9 +6819,9 @@
                 <a:solidFill>
                   <a:srgbClr val="3B2A5C"/>
                 </a:solidFill>
-                <a:latin typeface="Calibri" pitchFamily="34" charset="0"/>
-                <a:ea typeface="Calibri" pitchFamily="34" charset="-122"/>
-                <a:cs typeface="Calibri" pitchFamily="34" charset="-120"/>
+                <a:latin typeface="Calibri" panose="020F0502020204030204" pitchFamily="34" charset="0"/>
+                <a:ea typeface="Calibri" panose="020F0502020204030204" pitchFamily="34" charset="-122"/>
+                <a:cs typeface="Calibri" panose="020F0502020204030204" pitchFamily="34" charset="-120"/>
               </a:rPr>
               <a:t>SMALL</a:t>
             </a:r>
@@ -5999,13 +6869,12 @@
             <a:avLst/>
           </a:prstGeom>
           <a:noFill/>
-          <a:ln/>
         </p:spPr>
         <p:txBody>
           <a:bodyPr wrap="square" lIns="0" tIns="0" rIns="0" bIns="0" rtlCol="0" anchor="ctr"/>
           <a:lstStyle/>
           <a:p>
-            <a:pPr algn="ctr" indent="0" marL="0">
+            <a:pPr marL="0" indent="0" algn="ctr">
               <a:buNone/>
             </a:pPr>
             <a:r>
@@ -6013,9 +6882,9 @@
                 <a:solidFill>
                   <a:srgbClr val="3B2A5C"/>
                 </a:solidFill>
-                <a:latin typeface="Calibri" pitchFamily="34" charset="0"/>
-                <a:ea typeface="Calibri" pitchFamily="34" charset="-122"/>
-                <a:cs typeface="Calibri" pitchFamily="34" charset="-120"/>
+                <a:latin typeface="Calibri" panose="020F0502020204030204" pitchFamily="34" charset="0"/>
+                <a:ea typeface="Calibri" panose="020F0502020204030204" pitchFamily="34" charset="-122"/>
+                <a:cs typeface="Calibri" panose="020F0502020204030204" pitchFamily="34" charset="-120"/>
               </a:rPr>
               <a:t>SMALL</a:t>
             </a:r>
@@ -6063,13 +6932,12 @@
             <a:avLst/>
           </a:prstGeom>
           <a:noFill/>
-          <a:ln/>
         </p:spPr>
         <p:txBody>
           <a:bodyPr wrap="square" lIns="0" tIns="0" rIns="0" bIns="0" rtlCol="0" anchor="ctr"/>
           <a:lstStyle/>
           <a:p>
-            <a:pPr algn="ctr" indent="0" marL="0">
+            <a:pPr marL="0" indent="0" algn="ctr">
               <a:buNone/>
             </a:pPr>
             <a:r>
@@ -6077,9 +6945,9 @@
                 <a:solidFill>
                   <a:srgbClr val="3B2A5C"/>
                 </a:solidFill>
-                <a:latin typeface="Calibri" pitchFamily="34" charset="0"/>
-                <a:ea typeface="Calibri" pitchFamily="34" charset="-122"/>
-                <a:cs typeface="Calibri" pitchFamily="34" charset="-120"/>
+                <a:latin typeface="Calibri" panose="020F0502020204030204" pitchFamily="34" charset="0"/>
+                <a:ea typeface="Calibri" panose="020F0502020204030204" pitchFamily="34" charset="-122"/>
+                <a:cs typeface="Calibri" panose="020F0502020204030204" pitchFamily="34" charset="-120"/>
               </a:rPr>
               <a:t>SMALL</a:t>
             </a:r>
@@ -6127,13 +6995,12 @@
             <a:avLst/>
           </a:prstGeom>
           <a:noFill/>
-          <a:ln/>
         </p:spPr>
         <p:txBody>
           <a:bodyPr wrap="square" lIns="0" tIns="0" rIns="0" bIns="0" rtlCol="0" anchor="ctr"/>
           <a:lstStyle/>
           <a:p>
-            <a:pPr algn="ctr" indent="0" marL="0">
+            <a:pPr marL="0" indent="0" algn="ctr">
               <a:buNone/>
             </a:pPr>
             <a:r>
@@ -6141,9 +7008,9 @@
                 <a:solidFill>
                   <a:srgbClr val="3B2A5C"/>
                 </a:solidFill>
-                <a:latin typeface="Calibri" pitchFamily="34" charset="0"/>
-                <a:ea typeface="Calibri" pitchFamily="34" charset="-122"/>
-                <a:cs typeface="Calibri" pitchFamily="34" charset="-120"/>
+                <a:latin typeface="Calibri" panose="020F0502020204030204" pitchFamily="34" charset="0"/>
+                <a:ea typeface="Calibri" panose="020F0502020204030204" pitchFamily="34" charset="-122"/>
+                <a:cs typeface="Calibri" panose="020F0502020204030204" pitchFamily="34" charset="-120"/>
               </a:rPr>
               <a:t>SMALL</a:t>
             </a:r>
@@ -6166,13 +7033,12 @@
             <a:avLst/>
           </a:prstGeom>
           <a:noFill/>
-          <a:ln/>
         </p:spPr>
         <p:txBody>
           <a:bodyPr wrap="square" lIns="0" tIns="0" rIns="0" bIns="0" rtlCol="0" anchor="ctr"/>
           <a:lstStyle/>
           <a:p>
-            <a:pPr indent="0" marL="0">
+            <a:pPr marL="0" indent="0">
               <a:buNone/>
             </a:pPr>
             <a:r>
@@ -6180,9 +7046,9 @@
                 <a:solidFill>
                   <a:srgbClr val="6B6580"/>
                 </a:solidFill>
-                <a:latin typeface="Calibri" pitchFamily="34" charset="0"/>
-                <a:ea typeface="Calibri" pitchFamily="34" charset="-122"/>
-                <a:cs typeface="Calibri" pitchFamily="34" charset="-120"/>
+                <a:latin typeface="Calibri" panose="020F0502020204030204" pitchFamily="34" charset="0"/>
+                <a:ea typeface="Calibri" panose="020F0502020204030204" pitchFamily="34" charset="-122"/>
+                <a:cs typeface="Calibri" panose="020F0502020204030204" pitchFamily="34" charset="-120"/>
               </a:rPr>
               <a:t>30 cm</a:t>
             </a:r>
@@ -6255,13 +7121,12 @@
             <a:avLst/>
           </a:prstGeom>
           <a:noFill/>
-          <a:ln/>
         </p:spPr>
         <p:txBody>
           <a:bodyPr wrap="square" lIns="0" tIns="0" rIns="0" bIns="0" rtlCol="0" anchor="ctr"/>
           <a:lstStyle/>
           <a:p>
-            <a:pPr algn="ctr" indent="0" marL="0">
+            <a:pPr marL="0" indent="0" algn="ctr">
               <a:buNone/>
             </a:pPr>
             <a:r>
@@ -6269,9 +7134,9 @@
                 <a:solidFill>
                   <a:srgbClr val="3B2A5C"/>
                 </a:solidFill>
-                <a:latin typeface="Calibri" pitchFamily="34" charset="0"/>
-                <a:ea typeface="Calibri" pitchFamily="34" charset="-122"/>
-                <a:cs typeface="Calibri" pitchFamily="34" charset="-120"/>
+                <a:latin typeface="Calibri" panose="020F0502020204030204" pitchFamily="34" charset="0"/>
+                <a:ea typeface="Calibri" panose="020F0502020204030204" pitchFamily="34" charset="-122"/>
+                <a:cs typeface="Calibri" panose="020F0502020204030204" pitchFamily="34" charset="-120"/>
               </a:rPr>
               <a:t>LARGE</a:t>
             </a:r>
@@ -6319,13 +7184,12 @@
             <a:avLst/>
           </a:prstGeom>
           <a:noFill/>
-          <a:ln/>
         </p:spPr>
         <p:txBody>
           <a:bodyPr wrap="square" lIns="0" tIns="0" rIns="0" bIns="0" rtlCol="0" anchor="ctr"/>
           <a:lstStyle/>
           <a:p>
-            <a:pPr algn="ctr" indent="0" marL="0">
+            <a:pPr marL="0" indent="0" algn="ctr">
               <a:buNone/>
             </a:pPr>
             <a:r>
@@ -6333,9 +7197,9 @@
                 <a:solidFill>
                   <a:srgbClr val="3B2A5C"/>
                 </a:solidFill>
-                <a:latin typeface="Calibri" pitchFamily="34" charset="0"/>
-                <a:ea typeface="Calibri" pitchFamily="34" charset="-122"/>
-                <a:cs typeface="Calibri" pitchFamily="34" charset="-120"/>
+                <a:latin typeface="Calibri" panose="020F0502020204030204" pitchFamily="34" charset="0"/>
+                <a:ea typeface="Calibri" panose="020F0502020204030204" pitchFamily="34" charset="-122"/>
+                <a:cs typeface="Calibri" panose="020F0502020204030204" pitchFamily="34" charset="-120"/>
               </a:rPr>
               <a:t>LARGE</a:t>
             </a:r>
@@ -6383,13 +7247,12 @@
             <a:avLst/>
           </a:prstGeom>
           <a:noFill/>
-          <a:ln/>
         </p:spPr>
         <p:txBody>
           <a:bodyPr wrap="square" lIns="0" tIns="0" rIns="0" bIns="0" rtlCol="0" anchor="ctr"/>
           <a:lstStyle/>
           <a:p>
-            <a:pPr algn="ctr" indent="0" marL="0">
+            <a:pPr marL="0" indent="0" algn="ctr">
               <a:buNone/>
             </a:pPr>
             <a:r>
@@ -6397,9 +7260,9 @@
                 <a:solidFill>
                   <a:srgbClr val="3B2A5C"/>
                 </a:solidFill>
-                <a:latin typeface="Calibri" pitchFamily="34" charset="0"/>
-                <a:ea typeface="Calibri" pitchFamily="34" charset="-122"/>
-                <a:cs typeface="Calibri" pitchFamily="34" charset="-120"/>
+                <a:latin typeface="Calibri" panose="020F0502020204030204" pitchFamily="34" charset="0"/>
+                <a:ea typeface="Calibri" panose="020F0502020204030204" pitchFamily="34" charset="-122"/>
+                <a:cs typeface="Calibri" panose="020F0502020204030204" pitchFamily="34" charset="-120"/>
               </a:rPr>
               <a:t>LARGE</a:t>
             </a:r>
@@ -6447,13 +7310,12 @@
             <a:avLst/>
           </a:prstGeom>
           <a:noFill/>
-          <a:ln/>
         </p:spPr>
         <p:txBody>
           <a:bodyPr wrap="square" lIns="0" tIns="0" rIns="0" bIns="0" rtlCol="0" anchor="ctr"/>
           <a:lstStyle/>
           <a:p>
-            <a:pPr algn="ctr" indent="0" marL="0">
+            <a:pPr marL="0" indent="0" algn="ctr">
               <a:buNone/>
             </a:pPr>
             <a:r>
@@ -6461,9 +7323,9 @@
                 <a:solidFill>
                   <a:srgbClr val="3B2A5C"/>
                 </a:solidFill>
-                <a:latin typeface="Calibri" pitchFamily="34" charset="0"/>
-                <a:ea typeface="Calibri" pitchFamily="34" charset="-122"/>
-                <a:cs typeface="Calibri" pitchFamily="34" charset="-120"/>
+                <a:latin typeface="Calibri" panose="020F0502020204030204" pitchFamily="34" charset="0"/>
+                <a:ea typeface="Calibri" panose="020F0502020204030204" pitchFamily="34" charset="-122"/>
+                <a:cs typeface="Calibri" panose="020F0502020204030204" pitchFamily="34" charset="-120"/>
               </a:rPr>
               <a:t>LARGE</a:t>
             </a:r>
@@ -6486,13 +7348,12 @@
             <a:avLst/>
           </a:prstGeom>
           <a:noFill/>
-          <a:ln/>
         </p:spPr>
         <p:txBody>
           <a:bodyPr wrap="square" lIns="0" tIns="0" rIns="0" bIns="0" rtlCol="0" anchor="ctr"/>
           <a:lstStyle/>
           <a:p>
-            <a:pPr indent="0" marL="0">
+            <a:pPr marL="0" indent="0">
               <a:buNone/>
             </a:pPr>
             <a:r>
@@ -6500,9 +7361,9 @@
                 <a:solidFill>
                   <a:srgbClr val="6B6580"/>
                 </a:solidFill>
-                <a:latin typeface="Calibri" pitchFamily="34" charset="0"/>
-                <a:ea typeface="Calibri" pitchFamily="34" charset="-122"/>
-                <a:cs typeface="Calibri" pitchFamily="34" charset="-120"/>
+                <a:latin typeface="Calibri" panose="020F0502020204030204" pitchFamily="34" charset="0"/>
+                <a:ea typeface="Calibri" panose="020F0502020204030204" pitchFamily="34" charset="-122"/>
+                <a:cs typeface="Calibri" panose="020F0502020204030204" pitchFamily="34" charset="-120"/>
               </a:rPr>
               <a:t>30 cm</a:t>
             </a:r>
@@ -6575,13 +7436,12 @@
             <a:avLst/>
           </a:prstGeom>
           <a:noFill/>
-          <a:ln/>
         </p:spPr>
         <p:txBody>
           <a:bodyPr wrap="square" lIns="0" tIns="0" rIns="0" bIns="0" rtlCol="0" anchor="ctr"/>
           <a:lstStyle/>
           <a:p>
-            <a:pPr algn="ctr" indent="0" marL="0">
+            <a:pPr marL="0" indent="0" algn="ctr">
               <a:buNone/>
             </a:pPr>
             <a:r>
@@ -6589,9 +7449,9 @@
                 <a:solidFill>
                   <a:srgbClr val="3B2A5C"/>
                 </a:solidFill>
-                <a:latin typeface="Calibri" pitchFamily="34" charset="0"/>
-                <a:ea typeface="Calibri" pitchFamily="34" charset="-122"/>
-                <a:cs typeface="Calibri" pitchFamily="34" charset="-120"/>
+                <a:latin typeface="Calibri" panose="020F0502020204030204" pitchFamily="34" charset="0"/>
+                <a:ea typeface="Calibri" panose="020F0502020204030204" pitchFamily="34" charset="-122"/>
+                <a:cs typeface="Calibri" panose="020F0502020204030204" pitchFamily="34" charset="-120"/>
               </a:rPr>
               <a:t>SMALL</a:t>
             </a:r>
@@ -6639,13 +7499,12 @@
             <a:avLst/>
           </a:prstGeom>
           <a:noFill/>
-          <a:ln/>
         </p:spPr>
         <p:txBody>
           <a:bodyPr wrap="square" lIns="0" tIns="0" rIns="0" bIns="0" rtlCol="0" anchor="ctr"/>
           <a:lstStyle/>
           <a:p>
-            <a:pPr algn="ctr" indent="0" marL="0">
+            <a:pPr marL="0" indent="0" algn="ctr">
               <a:buNone/>
             </a:pPr>
             <a:r>
@@ -6653,9 +7512,9 @@
                 <a:solidFill>
                   <a:srgbClr val="3B2A5C"/>
                 </a:solidFill>
-                <a:latin typeface="Calibri" pitchFamily="34" charset="0"/>
-                <a:ea typeface="Calibri" pitchFamily="34" charset="-122"/>
-                <a:cs typeface="Calibri" pitchFamily="34" charset="-120"/>
+                <a:latin typeface="Calibri" panose="020F0502020204030204" pitchFamily="34" charset="0"/>
+                <a:ea typeface="Calibri" panose="020F0502020204030204" pitchFamily="34" charset="-122"/>
+                <a:cs typeface="Calibri" panose="020F0502020204030204" pitchFamily="34" charset="-120"/>
               </a:rPr>
               <a:t>SMALL</a:t>
             </a:r>
@@ -6703,13 +7562,12 @@
             <a:avLst/>
           </a:prstGeom>
           <a:noFill/>
-          <a:ln/>
         </p:spPr>
         <p:txBody>
           <a:bodyPr wrap="square" lIns="0" tIns="0" rIns="0" bIns="0" rtlCol="0" anchor="ctr"/>
           <a:lstStyle/>
           <a:p>
-            <a:pPr algn="ctr" indent="0" marL="0">
+            <a:pPr marL="0" indent="0" algn="ctr">
               <a:buNone/>
             </a:pPr>
             <a:r>
@@ -6717,9 +7575,9 @@
                 <a:solidFill>
                   <a:srgbClr val="3B2A5C"/>
                 </a:solidFill>
-                <a:latin typeface="Calibri" pitchFamily="34" charset="0"/>
-                <a:ea typeface="Calibri" pitchFamily="34" charset="-122"/>
-                <a:cs typeface="Calibri" pitchFamily="34" charset="-120"/>
+                <a:latin typeface="Calibri" panose="020F0502020204030204" pitchFamily="34" charset="0"/>
+                <a:ea typeface="Calibri" panose="020F0502020204030204" pitchFamily="34" charset="-122"/>
+                <a:cs typeface="Calibri" panose="020F0502020204030204" pitchFamily="34" charset="-120"/>
               </a:rPr>
               <a:t>LARGE</a:t>
             </a:r>
@@ -6767,13 +7625,12 @@
             <a:avLst/>
           </a:prstGeom>
           <a:noFill/>
-          <a:ln/>
         </p:spPr>
         <p:txBody>
           <a:bodyPr wrap="square" lIns="0" tIns="0" rIns="0" bIns="0" rtlCol="0" anchor="ctr"/>
           <a:lstStyle/>
           <a:p>
-            <a:pPr algn="ctr" indent="0" marL="0">
+            <a:pPr marL="0" indent="0" algn="ctr">
               <a:buNone/>
             </a:pPr>
             <a:r>
@@ -6781,9 +7638,9 @@
                 <a:solidFill>
                   <a:srgbClr val="3B2A5C"/>
                 </a:solidFill>
-                <a:latin typeface="Calibri" pitchFamily="34" charset="0"/>
-                <a:ea typeface="Calibri" pitchFamily="34" charset="-122"/>
-                <a:cs typeface="Calibri" pitchFamily="34" charset="-120"/>
+                <a:latin typeface="Calibri" panose="020F0502020204030204" pitchFamily="34" charset="0"/>
+                <a:ea typeface="Calibri" panose="020F0502020204030204" pitchFamily="34" charset="-122"/>
+                <a:cs typeface="Calibri" panose="020F0502020204030204" pitchFamily="34" charset="-120"/>
               </a:rPr>
               <a:t>LARGE</a:t>
             </a:r>
@@ -6806,13 +7663,12 @@
             <a:avLst/>
           </a:prstGeom>
           <a:noFill/>
-          <a:ln/>
         </p:spPr>
         <p:txBody>
           <a:bodyPr wrap="square" lIns="0" tIns="0" rIns="0" bIns="0" rtlCol="0" anchor="ctr"/>
           <a:lstStyle/>
           <a:p>
-            <a:pPr indent="0" marL="0">
+            <a:pPr marL="0" indent="0">
               <a:buNone/>
             </a:pPr>
             <a:r>
@@ -6820,9 +7676,9 @@
                 <a:solidFill>
                   <a:srgbClr val="6B6580"/>
                 </a:solidFill>
-                <a:latin typeface="Calibri" pitchFamily="34" charset="0"/>
-                <a:ea typeface="Calibri" pitchFamily="34" charset="-122"/>
-                <a:cs typeface="Calibri" pitchFamily="34" charset="-120"/>
+                <a:latin typeface="Calibri" panose="020F0502020204030204" pitchFamily="34" charset="0"/>
+                <a:ea typeface="Calibri" panose="020F0502020204030204" pitchFamily="34" charset="-122"/>
+                <a:cs typeface="Calibri" panose="020F0502020204030204" pitchFamily="34" charset="-120"/>
               </a:rPr>
               <a:t>40 cm</a:t>
             </a:r>
@@ -6845,13 +7701,12 @@
             <a:avLst/>
           </a:prstGeom>
           <a:noFill/>
-          <a:ln/>
         </p:spPr>
         <p:txBody>
           <a:bodyPr wrap="square" lIns="0" tIns="0" rIns="0" bIns="0" rtlCol="0" anchor="ctr"/>
           <a:lstStyle/>
           <a:p>
-            <a:pPr indent="0" marL="0">
+            <a:pPr marL="0" indent="0">
               <a:buNone/>
             </a:pPr>
             <a:r>
@@ -6859,9 +7714,9 @@
                 <a:solidFill>
                   <a:srgbClr val="6B6580"/>
                 </a:solidFill>
-                <a:latin typeface="Calibri" pitchFamily="34" charset="0"/>
-                <a:ea typeface="Calibri" pitchFamily="34" charset="-122"/>
-                <a:cs typeface="Calibri" pitchFamily="34" charset="-120"/>
+                <a:latin typeface="Calibri" panose="020F0502020204030204" pitchFamily="34" charset="0"/>
+                <a:ea typeface="Calibri" panose="020F0502020204030204" pitchFamily="34" charset="-122"/>
+                <a:cs typeface="Calibri" panose="020F0502020204030204" pitchFamily="34" charset="-120"/>
               </a:rPr>
               <a:t>Rak 1: 4 × 3 = 12 box SMALL</a:t>
             </a:r>
@@ -6909,13 +7764,12 @@
             <a:avLst/>
           </a:prstGeom>
           <a:noFill/>
-          <a:ln/>
         </p:spPr>
         <p:txBody>
           <a:bodyPr wrap="square" lIns="0" tIns="0" rIns="0" bIns="0" rtlCol="0" anchor="ctr"/>
           <a:lstStyle/>
           <a:p>
-            <a:pPr algn="ctr" indent="0" marL="0">
+            <a:pPr marL="0" indent="0" algn="ctr">
               <a:buNone/>
             </a:pPr>
             <a:r>
@@ -6923,9 +7777,9 @@
                 <a:solidFill>
                   <a:srgbClr val="3B2A5C"/>
                 </a:solidFill>
-                <a:latin typeface="Calibri" pitchFamily="34" charset="0"/>
-                <a:ea typeface="Calibri" pitchFamily="34" charset="-122"/>
-                <a:cs typeface="Calibri" pitchFamily="34" charset="-120"/>
+                <a:latin typeface="Calibri" panose="020F0502020204030204" pitchFamily="34" charset="0"/>
+                <a:ea typeface="Calibri" panose="020F0502020204030204" pitchFamily="34" charset="-122"/>
+                <a:cs typeface="Calibri" panose="020F0502020204030204" pitchFamily="34" charset="-120"/>
               </a:rPr>
               <a:t>SMALL</a:t>
             </a:r>
@@ -6973,13 +7827,12 @@
             <a:avLst/>
           </a:prstGeom>
           <a:noFill/>
-          <a:ln/>
         </p:spPr>
         <p:txBody>
           <a:bodyPr wrap="square" lIns="0" tIns="0" rIns="0" bIns="0" rtlCol="0" anchor="ctr"/>
           <a:lstStyle/>
           <a:p>
-            <a:pPr algn="ctr" indent="0" marL="0">
+            <a:pPr marL="0" indent="0" algn="ctr">
               <a:buNone/>
             </a:pPr>
             <a:r>
@@ -6987,9 +7840,9 @@
                 <a:solidFill>
                   <a:srgbClr val="3B2A5C"/>
                 </a:solidFill>
-                <a:latin typeface="Calibri" pitchFamily="34" charset="0"/>
-                <a:ea typeface="Calibri" pitchFamily="34" charset="-122"/>
-                <a:cs typeface="Calibri" pitchFamily="34" charset="-120"/>
+                <a:latin typeface="Calibri" panose="020F0502020204030204" pitchFamily="34" charset="0"/>
+                <a:ea typeface="Calibri" panose="020F0502020204030204" pitchFamily="34" charset="-122"/>
+                <a:cs typeface="Calibri" panose="020F0502020204030204" pitchFamily="34" charset="-120"/>
               </a:rPr>
               <a:t>SMALL</a:t>
             </a:r>
@@ -7037,13 +7890,12 @@
             <a:avLst/>
           </a:prstGeom>
           <a:noFill/>
-          <a:ln/>
         </p:spPr>
         <p:txBody>
           <a:bodyPr wrap="square" lIns="0" tIns="0" rIns="0" bIns="0" rtlCol="0" anchor="ctr"/>
           <a:lstStyle/>
           <a:p>
-            <a:pPr algn="ctr" indent="0" marL="0">
+            <a:pPr marL="0" indent="0" algn="ctr">
               <a:buNone/>
             </a:pPr>
             <a:r>
@@ -7051,9 +7903,9 @@
                 <a:solidFill>
                   <a:srgbClr val="3B2A5C"/>
                 </a:solidFill>
-                <a:latin typeface="Calibri" pitchFamily="34" charset="0"/>
-                <a:ea typeface="Calibri" pitchFamily="34" charset="-122"/>
-                <a:cs typeface="Calibri" pitchFamily="34" charset="-120"/>
+                <a:latin typeface="Calibri" panose="020F0502020204030204" pitchFamily="34" charset="0"/>
+                <a:ea typeface="Calibri" panose="020F0502020204030204" pitchFamily="34" charset="-122"/>
+                <a:cs typeface="Calibri" panose="020F0502020204030204" pitchFamily="34" charset="-120"/>
               </a:rPr>
               <a:t>SMALL</a:t>
             </a:r>
@@ -7101,13 +7953,12 @@
             <a:avLst/>
           </a:prstGeom>
           <a:noFill/>
-          <a:ln/>
         </p:spPr>
         <p:txBody>
           <a:bodyPr wrap="square" lIns="0" tIns="0" rIns="0" bIns="0" rtlCol="0" anchor="ctr"/>
           <a:lstStyle/>
           <a:p>
-            <a:pPr algn="ctr" indent="0" marL="0">
+            <a:pPr marL="0" indent="0" algn="ctr">
               <a:buNone/>
             </a:pPr>
             <a:r>
@@ -7115,9 +7966,9 @@
                 <a:solidFill>
                   <a:srgbClr val="3B2A5C"/>
                 </a:solidFill>
-                <a:latin typeface="Calibri" pitchFamily="34" charset="0"/>
-                <a:ea typeface="Calibri" pitchFamily="34" charset="-122"/>
-                <a:cs typeface="Calibri" pitchFamily="34" charset="-120"/>
+                <a:latin typeface="Calibri" panose="020F0502020204030204" pitchFamily="34" charset="0"/>
+                <a:ea typeface="Calibri" panose="020F0502020204030204" pitchFamily="34" charset="-122"/>
+                <a:cs typeface="Calibri" panose="020F0502020204030204" pitchFamily="34" charset="-120"/>
               </a:rPr>
               <a:t>SMALL</a:t>
             </a:r>
@@ -7165,13 +8016,12 @@
             <a:avLst/>
           </a:prstGeom>
           <a:noFill/>
-          <a:ln/>
         </p:spPr>
         <p:txBody>
           <a:bodyPr wrap="square" lIns="0" tIns="0" rIns="0" bIns="0" rtlCol="0" anchor="ctr"/>
           <a:lstStyle/>
           <a:p>
-            <a:pPr algn="ctr" indent="0" marL="0">
+            <a:pPr marL="0" indent="0" algn="ctr">
               <a:buNone/>
             </a:pPr>
             <a:r>
@@ -7179,9 +8029,9 @@
                 <a:solidFill>
                   <a:srgbClr val="3B2A5C"/>
                 </a:solidFill>
-                <a:latin typeface="Calibri" pitchFamily="34" charset="0"/>
-                <a:ea typeface="Calibri" pitchFamily="34" charset="-122"/>
-                <a:cs typeface="Calibri" pitchFamily="34" charset="-120"/>
+                <a:latin typeface="Calibri" panose="020F0502020204030204" pitchFamily="34" charset="0"/>
+                <a:ea typeface="Calibri" panose="020F0502020204030204" pitchFamily="34" charset="-122"/>
+                <a:cs typeface="Calibri" panose="020F0502020204030204" pitchFamily="34" charset="-120"/>
               </a:rPr>
               <a:t>SMALL</a:t>
             </a:r>
@@ -7229,13 +8079,12 @@
             <a:avLst/>
           </a:prstGeom>
           <a:noFill/>
-          <a:ln/>
         </p:spPr>
         <p:txBody>
           <a:bodyPr wrap="square" lIns="0" tIns="0" rIns="0" bIns="0" rtlCol="0" anchor="ctr"/>
           <a:lstStyle/>
           <a:p>
-            <a:pPr algn="ctr" indent="0" marL="0">
+            <a:pPr marL="0" indent="0" algn="ctr">
               <a:buNone/>
             </a:pPr>
             <a:r>
@@ -7243,9 +8092,9 @@
                 <a:solidFill>
                   <a:srgbClr val="3B2A5C"/>
                 </a:solidFill>
-                <a:latin typeface="Calibri" pitchFamily="34" charset="0"/>
-                <a:ea typeface="Calibri" pitchFamily="34" charset="-122"/>
-                <a:cs typeface="Calibri" pitchFamily="34" charset="-120"/>
+                <a:latin typeface="Calibri" panose="020F0502020204030204" pitchFamily="34" charset="0"/>
+                <a:ea typeface="Calibri" panose="020F0502020204030204" pitchFamily="34" charset="-122"/>
+                <a:cs typeface="Calibri" panose="020F0502020204030204" pitchFamily="34" charset="-120"/>
               </a:rPr>
               <a:t>SMALL</a:t>
             </a:r>
@@ -7293,13 +8142,12 @@
             <a:avLst/>
           </a:prstGeom>
           <a:noFill/>
-          <a:ln/>
         </p:spPr>
         <p:txBody>
           <a:bodyPr wrap="square" lIns="0" tIns="0" rIns="0" bIns="0" rtlCol="0" anchor="ctr"/>
           <a:lstStyle/>
           <a:p>
-            <a:pPr algn="ctr" indent="0" marL="0">
+            <a:pPr marL="0" indent="0" algn="ctr">
               <a:buNone/>
             </a:pPr>
             <a:r>
@@ -7307,9 +8155,9 @@
                 <a:solidFill>
                   <a:srgbClr val="3B2A5C"/>
                 </a:solidFill>
-                <a:latin typeface="Calibri" pitchFamily="34" charset="0"/>
-                <a:ea typeface="Calibri" pitchFamily="34" charset="-122"/>
-                <a:cs typeface="Calibri" pitchFamily="34" charset="-120"/>
+                <a:latin typeface="Calibri" panose="020F0502020204030204" pitchFamily="34" charset="0"/>
+                <a:ea typeface="Calibri" panose="020F0502020204030204" pitchFamily="34" charset="-122"/>
+                <a:cs typeface="Calibri" panose="020F0502020204030204" pitchFamily="34" charset="-120"/>
               </a:rPr>
               <a:t>SMALL</a:t>
             </a:r>
@@ -7357,13 +8205,12 @@
             <a:avLst/>
           </a:prstGeom>
           <a:noFill/>
-          <a:ln/>
         </p:spPr>
         <p:txBody>
           <a:bodyPr wrap="square" lIns="0" tIns="0" rIns="0" bIns="0" rtlCol="0" anchor="ctr"/>
           <a:lstStyle/>
           <a:p>
-            <a:pPr algn="ctr" indent="0" marL="0">
+            <a:pPr marL="0" indent="0" algn="ctr">
               <a:buNone/>
             </a:pPr>
             <a:r>
@@ -7371,9 +8218,9 @@
                 <a:solidFill>
                   <a:srgbClr val="3B2A5C"/>
                 </a:solidFill>
-                <a:latin typeface="Calibri" pitchFamily="34" charset="0"/>
-                <a:ea typeface="Calibri" pitchFamily="34" charset="-122"/>
-                <a:cs typeface="Calibri" pitchFamily="34" charset="-120"/>
+                <a:latin typeface="Calibri" panose="020F0502020204030204" pitchFamily="34" charset="0"/>
+                <a:ea typeface="Calibri" panose="020F0502020204030204" pitchFamily="34" charset="-122"/>
+                <a:cs typeface="Calibri" panose="020F0502020204030204" pitchFamily="34" charset="-120"/>
               </a:rPr>
               <a:t>SMALL</a:t>
             </a:r>
@@ -7421,13 +8268,12 @@
             <a:avLst/>
           </a:prstGeom>
           <a:noFill/>
-          <a:ln/>
         </p:spPr>
         <p:txBody>
           <a:bodyPr wrap="square" lIns="0" tIns="0" rIns="0" bIns="0" rtlCol="0" anchor="ctr"/>
           <a:lstStyle/>
           <a:p>
-            <a:pPr algn="ctr" indent="0" marL="0">
+            <a:pPr marL="0" indent="0" algn="ctr">
               <a:buNone/>
             </a:pPr>
             <a:r>
@@ -7435,9 +8281,9 @@
                 <a:solidFill>
                   <a:srgbClr val="3B2A5C"/>
                 </a:solidFill>
-                <a:latin typeface="Calibri" pitchFamily="34" charset="0"/>
-                <a:ea typeface="Calibri" pitchFamily="34" charset="-122"/>
-                <a:cs typeface="Calibri" pitchFamily="34" charset="-120"/>
+                <a:latin typeface="Calibri" panose="020F0502020204030204" pitchFamily="34" charset="0"/>
+                <a:ea typeface="Calibri" panose="020F0502020204030204" pitchFamily="34" charset="-122"/>
+                <a:cs typeface="Calibri" panose="020F0502020204030204" pitchFamily="34" charset="-120"/>
               </a:rPr>
               <a:t>SMALL</a:t>
             </a:r>
@@ -7485,13 +8331,12 @@
             <a:avLst/>
           </a:prstGeom>
           <a:noFill/>
-          <a:ln/>
         </p:spPr>
         <p:txBody>
           <a:bodyPr wrap="square" lIns="0" tIns="0" rIns="0" bIns="0" rtlCol="0" anchor="ctr"/>
           <a:lstStyle/>
           <a:p>
-            <a:pPr algn="ctr" indent="0" marL="0">
+            <a:pPr marL="0" indent="0" algn="ctr">
               <a:buNone/>
             </a:pPr>
             <a:r>
@@ -7499,9 +8344,9 @@
                 <a:solidFill>
                   <a:srgbClr val="3B2A5C"/>
                 </a:solidFill>
-                <a:latin typeface="Calibri" pitchFamily="34" charset="0"/>
-                <a:ea typeface="Calibri" pitchFamily="34" charset="-122"/>
-                <a:cs typeface="Calibri" pitchFamily="34" charset="-120"/>
+                <a:latin typeface="Calibri" panose="020F0502020204030204" pitchFamily="34" charset="0"/>
+                <a:ea typeface="Calibri" panose="020F0502020204030204" pitchFamily="34" charset="-122"/>
+                <a:cs typeface="Calibri" panose="020F0502020204030204" pitchFamily="34" charset="-120"/>
               </a:rPr>
               <a:t>SMALL</a:t>
             </a:r>
@@ -7549,13 +8394,12 @@
             <a:avLst/>
           </a:prstGeom>
           <a:noFill/>
-          <a:ln/>
         </p:spPr>
         <p:txBody>
           <a:bodyPr wrap="square" lIns="0" tIns="0" rIns="0" bIns="0" rtlCol="0" anchor="ctr"/>
           <a:lstStyle/>
           <a:p>
-            <a:pPr algn="ctr" indent="0" marL="0">
+            <a:pPr marL="0" indent="0" algn="ctr">
               <a:buNone/>
             </a:pPr>
             <a:r>
@@ -7563,9 +8407,9 @@
                 <a:solidFill>
                   <a:srgbClr val="3B2A5C"/>
                 </a:solidFill>
-                <a:latin typeface="Calibri" pitchFamily="34" charset="0"/>
-                <a:ea typeface="Calibri" pitchFamily="34" charset="-122"/>
-                <a:cs typeface="Calibri" pitchFamily="34" charset="-120"/>
+                <a:latin typeface="Calibri" panose="020F0502020204030204" pitchFamily="34" charset="0"/>
+                <a:ea typeface="Calibri" panose="020F0502020204030204" pitchFamily="34" charset="-122"/>
+                <a:cs typeface="Calibri" panose="020F0502020204030204" pitchFamily="34" charset="-120"/>
               </a:rPr>
               <a:t>SMALL</a:t>
             </a:r>
@@ -7613,13 +8457,12 @@
             <a:avLst/>
           </a:prstGeom>
           <a:noFill/>
-          <a:ln/>
         </p:spPr>
         <p:txBody>
           <a:bodyPr wrap="square" lIns="0" tIns="0" rIns="0" bIns="0" rtlCol="0" anchor="ctr"/>
           <a:lstStyle/>
           <a:p>
-            <a:pPr algn="ctr" indent="0" marL="0">
+            <a:pPr marL="0" indent="0" algn="ctr">
               <a:buNone/>
             </a:pPr>
             <a:r>
@@ -7627,9 +8470,9 @@
                 <a:solidFill>
                   <a:srgbClr val="3B2A5C"/>
                 </a:solidFill>
-                <a:latin typeface="Calibri" pitchFamily="34" charset="0"/>
-                <a:ea typeface="Calibri" pitchFamily="34" charset="-122"/>
-                <a:cs typeface="Calibri" pitchFamily="34" charset="-120"/>
+                <a:latin typeface="Calibri" panose="020F0502020204030204" pitchFamily="34" charset="0"/>
+                <a:ea typeface="Calibri" panose="020F0502020204030204" pitchFamily="34" charset="-122"/>
+                <a:cs typeface="Calibri" panose="020F0502020204030204" pitchFamily="34" charset="-120"/>
               </a:rPr>
               <a:t>SMALL</a:t>
             </a:r>
@@ -7652,13 +8495,12 @@
             <a:avLst/>
           </a:prstGeom>
           <a:noFill/>
-          <a:ln/>
         </p:spPr>
         <p:txBody>
           <a:bodyPr wrap="square" lIns="0" tIns="0" rIns="0" bIns="0" rtlCol="0" anchor="ctr"/>
           <a:lstStyle/>
           <a:p>
-            <a:pPr indent="0" marL="0">
+            <a:pPr marL="0" indent="0">
               <a:buNone/>
             </a:pPr>
             <a:r>
@@ -7666,9 +8508,9 @@
                 <a:solidFill>
                   <a:srgbClr val="6B6580"/>
                 </a:solidFill>
-                <a:latin typeface="Calibri" pitchFamily="34" charset="0"/>
-                <a:ea typeface="Calibri" pitchFamily="34" charset="-122"/>
-                <a:cs typeface="Calibri" pitchFamily="34" charset="-120"/>
+                <a:latin typeface="Calibri" panose="020F0502020204030204" pitchFamily="34" charset="0"/>
+                <a:ea typeface="Calibri" panose="020F0502020204030204" pitchFamily="34" charset="-122"/>
+                <a:cs typeface="Calibri" panose="020F0502020204030204" pitchFamily="34" charset="-120"/>
               </a:rPr>
               <a:t>Rak 2: 4 × 2 = 8 box LARGE</a:t>
             </a:r>
@@ -7716,13 +8558,12 @@
             <a:avLst/>
           </a:prstGeom>
           <a:noFill/>
-          <a:ln/>
         </p:spPr>
         <p:txBody>
           <a:bodyPr wrap="square" lIns="0" tIns="0" rIns="0" bIns="0" rtlCol="0" anchor="ctr"/>
           <a:lstStyle/>
           <a:p>
-            <a:pPr algn="ctr" indent="0" marL="0">
+            <a:pPr marL="0" indent="0" algn="ctr">
               <a:buNone/>
             </a:pPr>
             <a:r>
@@ -7730,9 +8571,9 @@
                 <a:solidFill>
                   <a:srgbClr val="3B2A5C"/>
                 </a:solidFill>
-                <a:latin typeface="Calibri" pitchFamily="34" charset="0"/>
-                <a:ea typeface="Calibri" pitchFamily="34" charset="-122"/>
-                <a:cs typeface="Calibri" pitchFamily="34" charset="-120"/>
+                <a:latin typeface="Calibri" panose="020F0502020204030204" pitchFamily="34" charset="0"/>
+                <a:ea typeface="Calibri" panose="020F0502020204030204" pitchFamily="34" charset="-122"/>
+                <a:cs typeface="Calibri" panose="020F0502020204030204" pitchFamily="34" charset="-120"/>
               </a:rPr>
               <a:t>LARGE</a:t>
             </a:r>
@@ -7780,13 +8621,12 @@
             <a:avLst/>
           </a:prstGeom>
           <a:noFill/>
-          <a:ln/>
         </p:spPr>
         <p:txBody>
           <a:bodyPr wrap="square" lIns="0" tIns="0" rIns="0" bIns="0" rtlCol="0" anchor="ctr"/>
           <a:lstStyle/>
           <a:p>
-            <a:pPr algn="ctr" indent="0" marL="0">
+            <a:pPr marL="0" indent="0" algn="ctr">
               <a:buNone/>
             </a:pPr>
             <a:r>
@@ -7794,9 +8634,9 @@
                 <a:solidFill>
                   <a:srgbClr val="3B2A5C"/>
                 </a:solidFill>
-                <a:latin typeface="Calibri" pitchFamily="34" charset="0"/>
-                <a:ea typeface="Calibri" pitchFamily="34" charset="-122"/>
-                <a:cs typeface="Calibri" pitchFamily="34" charset="-120"/>
+                <a:latin typeface="Calibri" panose="020F0502020204030204" pitchFamily="34" charset="0"/>
+                <a:ea typeface="Calibri" panose="020F0502020204030204" pitchFamily="34" charset="-122"/>
+                <a:cs typeface="Calibri" panose="020F0502020204030204" pitchFamily="34" charset="-120"/>
               </a:rPr>
               <a:t>LARGE</a:t>
             </a:r>
@@ -7844,13 +8684,12 @@
             <a:avLst/>
           </a:prstGeom>
           <a:noFill/>
-          <a:ln/>
         </p:spPr>
         <p:txBody>
           <a:bodyPr wrap="square" lIns="0" tIns="0" rIns="0" bIns="0" rtlCol="0" anchor="ctr"/>
           <a:lstStyle/>
           <a:p>
-            <a:pPr algn="ctr" indent="0" marL="0">
+            <a:pPr marL="0" indent="0" algn="ctr">
               <a:buNone/>
             </a:pPr>
             <a:r>
@@ -7858,9 +8697,9 @@
                 <a:solidFill>
                   <a:srgbClr val="3B2A5C"/>
                 </a:solidFill>
-                <a:latin typeface="Calibri" pitchFamily="34" charset="0"/>
-                <a:ea typeface="Calibri" pitchFamily="34" charset="-122"/>
-                <a:cs typeface="Calibri" pitchFamily="34" charset="-120"/>
+                <a:latin typeface="Calibri" panose="020F0502020204030204" pitchFamily="34" charset="0"/>
+                <a:ea typeface="Calibri" panose="020F0502020204030204" pitchFamily="34" charset="-122"/>
+                <a:cs typeface="Calibri" panose="020F0502020204030204" pitchFamily="34" charset="-120"/>
               </a:rPr>
               <a:t>LARGE</a:t>
             </a:r>
@@ -7908,13 +8747,12 @@
             <a:avLst/>
           </a:prstGeom>
           <a:noFill/>
-          <a:ln/>
         </p:spPr>
         <p:txBody>
           <a:bodyPr wrap="square" lIns="0" tIns="0" rIns="0" bIns="0" rtlCol="0" anchor="ctr"/>
           <a:lstStyle/>
           <a:p>
-            <a:pPr algn="ctr" indent="0" marL="0">
+            <a:pPr marL="0" indent="0" algn="ctr">
               <a:buNone/>
             </a:pPr>
             <a:r>
@@ -7922,9 +8760,9 @@
                 <a:solidFill>
                   <a:srgbClr val="3B2A5C"/>
                 </a:solidFill>
-                <a:latin typeface="Calibri" pitchFamily="34" charset="0"/>
-                <a:ea typeface="Calibri" pitchFamily="34" charset="-122"/>
-                <a:cs typeface="Calibri" pitchFamily="34" charset="-120"/>
+                <a:latin typeface="Calibri" panose="020F0502020204030204" pitchFamily="34" charset="0"/>
+                <a:ea typeface="Calibri" panose="020F0502020204030204" pitchFamily="34" charset="-122"/>
+                <a:cs typeface="Calibri" panose="020F0502020204030204" pitchFamily="34" charset="-120"/>
               </a:rPr>
               <a:t>LARGE</a:t>
             </a:r>
@@ -7972,13 +8810,12 @@
             <a:avLst/>
           </a:prstGeom>
           <a:noFill/>
-          <a:ln/>
         </p:spPr>
         <p:txBody>
           <a:bodyPr wrap="square" lIns="0" tIns="0" rIns="0" bIns="0" rtlCol="0" anchor="ctr"/>
           <a:lstStyle/>
           <a:p>
-            <a:pPr algn="ctr" indent="0" marL="0">
+            <a:pPr marL="0" indent="0" algn="ctr">
               <a:buNone/>
             </a:pPr>
             <a:r>
@@ -7986,9 +8823,9 @@
                 <a:solidFill>
                   <a:srgbClr val="3B2A5C"/>
                 </a:solidFill>
-                <a:latin typeface="Calibri" pitchFamily="34" charset="0"/>
-                <a:ea typeface="Calibri" pitchFamily="34" charset="-122"/>
-                <a:cs typeface="Calibri" pitchFamily="34" charset="-120"/>
+                <a:latin typeface="Calibri" panose="020F0502020204030204" pitchFamily="34" charset="0"/>
+                <a:ea typeface="Calibri" panose="020F0502020204030204" pitchFamily="34" charset="-122"/>
+                <a:cs typeface="Calibri" panose="020F0502020204030204" pitchFamily="34" charset="-120"/>
               </a:rPr>
               <a:t>LARGE</a:t>
             </a:r>
@@ -8036,13 +8873,12 @@
             <a:avLst/>
           </a:prstGeom>
           <a:noFill/>
-          <a:ln/>
         </p:spPr>
         <p:txBody>
           <a:bodyPr wrap="square" lIns="0" tIns="0" rIns="0" bIns="0" rtlCol="0" anchor="ctr"/>
           <a:lstStyle/>
           <a:p>
-            <a:pPr algn="ctr" indent="0" marL="0">
+            <a:pPr marL="0" indent="0" algn="ctr">
               <a:buNone/>
             </a:pPr>
             <a:r>
@@ -8050,9 +8886,9 @@
                 <a:solidFill>
                   <a:srgbClr val="3B2A5C"/>
                 </a:solidFill>
-                <a:latin typeface="Calibri" pitchFamily="34" charset="0"/>
-                <a:ea typeface="Calibri" pitchFamily="34" charset="-122"/>
-                <a:cs typeface="Calibri" pitchFamily="34" charset="-120"/>
+                <a:latin typeface="Calibri" panose="020F0502020204030204" pitchFamily="34" charset="0"/>
+                <a:ea typeface="Calibri" panose="020F0502020204030204" pitchFamily="34" charset="-122"/>
+                <a:cs typeface="Calibri" panose="020F0502020204030204" pitchFamily="34" charset="-120"/>
               </a:rPr>
               <a:t>LARGE</a:t>
             </a:r>
@@ -8100,13 +8936,12 @@
             <a:avLst/>
           </a:prstGeom>
           <a:noFill/>
-          <a:ln/>
         </p:spPr>
         <p:txBody>
           <a:bodyPr wrap="square" lIns="0" tIns="0" rIns="0" bIns="0" rtlCol="0" anchor="ctr"/>
           <a:lstStyle/>
           <a:p>
-            <a:pPr algn="ctr" indent="0" marL="0">
+            <a:pPr marL="0" indent="0" algn="ctr">
               <a:buNone/>
             </a:pPr>
             <a:r>
@@ -8114,9 +8949,9 @@
                 <a:solidFill>
                   <a:srgbClr val="3B2A5C"/>
                 </a:solidFill>
-                <a:latin typeface="Calibri" pitchFamily="34" charset="0"/>
-                <a:ea typeface="Calibri" pitchFamily="34" charset="-122"/>
-                <a:cs typeface="Calibri" pitchFamily="34" charset="-120"/>
+                <a:latin typeface="Calibri" panose="020F0502020204030204" pitchFamily="34" charset="0"/>
+                <a:ea typeface="Calibri" panose="020F0502020204030204" pitchFamily="34" charset="-122"/>
+                <a:cs typeface="Calibri" panose="020F0502020204030204" pitchFamily="34" charset="-120"/>
               </a:rPr>
               <a:t>LARGE</a:t>
             </a:r>
@@ -8164,13 +8999,12 @@
             <a:avLst/>
           </a:prstGeom>
           <a:noFill/>
-          <a:ln/>
         </p:spPr>
         <p:txBody>
           <a:bodyPr wrap="square" lIns="0" tIns="0" rIns="0" bIns="0" rtlCol="0" anchor="ctr"/>
           <a:lstStyle/>
           <a:p>
-            <a:pPr algn="ctr" indent="0" marL="0">
+            <a:pPr marL="0" indent="0" algn="ctr">
               <a:buNone/>
             </a:pPr>
             <a:r>
@@ -8178,9 +9012,9 @@
                 <a:solidFill>
                   <a:srgbClr val="3B2A5C"/>
                 </a:solidFill>
-                <a:latin typeface="Calibri" pitchFamily="34" charset="0"/>
-                <a:ea typeface="Calibri" pitchFamily="34" charset="-122"/>
-                <a:cs typeface="Calibri" pitchFamily="34" charset="-120"/>
+                <a:latin typeface="Calibri" panose="020F0502020204030204" pitchFamily="34" charset="0"/>
+                <a:ea typeface="Calibri" panose="020F0502020204030204" pitchFamily="34" charset="-122"/>
+                <a:cs typeface="Calibri" panose="020F0502020204030204" pitchFamily="34" charset="-120"/>
               </a:rPr>
               <a:t>LARGE</a:t>
             </a:r>
@@ -8203,13 +9037,12 @@
             <a:avLst/>
           </a:prstGeom>
           <a:noFill/>
-          <a:ln/>
         </p:spPr>
         <p:txBody>
           <a:bodyPr wrap="square" lIns="0" tIns="0" rIns="0" bIns="0" rtlCol="0" anchor="ctr"/>
           <a:lstStyle/>
           <a:p>
-            <a:pPr indent="0" marL="0">
+            <a:pPr marL="0" indent="0">
               <a:buNone/>
             </a:pPr>
             <a:r>
@@ -8217,9 +9050,9 @@
                 <a:solidFill>
                   <a:srgbClr val="6B6580"/>
                 </a:solidFill>
-                <a:latin typeface="Calibri" pitchFamily="34" charset="0"/>
-                <a:ea typeface="Calibri" pitchFamily="34" charset="-122"/>
-                <a:cs typeface="Calibri" pitchFamily="34" charset="-120"/>
+                <a:latin typeface="Calibri" panose="020F0502020204030204" pitchFamily="34" charset="0"/>
+                <a:ea typeface="Calibri" panose="020F0502020204030204" pitchFamily="34" charset="-122"/>
+                <a:cs typeface="Calibri" panose="020F0502020204030204" pitchFamily="34" charset="-120"/>
               </a:rPr>
               <a:t>Rak 3: 2 SMALL + 2 LARGE × 2 deret</a:t>
             </a:r>
@@ -8267,13 +9100,12 @@
             <a:avLst/>
           </a:prstGeom>
           <a:noFill/>
-          <a:ln/>
         </p:spPr>
         <p:txBody>
           <a:bodyPr wrap="square" lIns="0" tIns="0" rIns="0" bIns="0" rtlCol="0" anchor="ctr"/>
           <a:lstStyle/>
           <a:p>
-            <a:pPr algn="ctr" indent="0" marL="0">
+            <a:pPr marL="0" indent="0" algn="ctr">
               <a:buNone/>
             </a:pPr>
             <a:r>
@@ -8281,9 +9113,9 @@
                 <a:solidFill>
                   <a:srgbClr val="3B2A5C"/>
                 </a:solidFill>
-                <a:latin typeface="Calibri" pitchFamily="34" charset="0"/>
-                <a:ea typeface="Calibri" pitchFamily="34" charset="-122"/>
-                <a:cs typeface="Calibri" pitchFamily="34" charset="-120"/>
+                <a:latin typeface="Calibri" panose="020F0502020204030204" pitchFamily="34" charset="0"/>
+                <a:ea typeface="Calibri" panose="020F0502020204030204" pitchFamily="34" charset="-122"/>
+                <a:cs typeface="Calibri" panose="020F0502020204030204" pitchFamily="34" charset="-120"/>
               </a:rPr>
               <a:t>SMALL</a:t>
             </a:r>
@@ -8331,13 +9163,12 @@
             <a:avLst/>
           </a:prstGeom>
           <a:noFill/>
-          <a:ln/>
         </p:spPr>
         <p:txBody>
           <a:bodyPr wrap="square" lIns="0" tIns="0" rIns="0" bIns="0" rtlCol="0" anchor="ctr"/>
           <a:lstStyle/>
           <a:p>
-            <a:pPr algn="ctr" indent="0" marL="0">
+            <a:pPr marL="0" indent="0" algn="ctr">
               <a:buNone/>
             </a:pPr>
             <a:r>
@@ -8345,9 +9176,9 @@
                 <a:solidFill>
                   <a:srgbClr val="3B2A5C"/>
                 </a:solidFill>
-                <a:latin typeface="Calibri" pitchFamily="34" charset="0"/>
-                <a:ea typeface="Calibri" pitchFamily="34" charset="-122"/>
-                <a:cs typeface="Calibri" pitchFamily="34" charset="-120"/>
+                <a:latin typeface="Calibri" panose="020F0502020204030204" pitchFamily="34" charset="0"/>
+                <a:ea typeface="Calibri" panose="020F0502020204030204" pitchFamily="34" charset="-122"/>
+                <a:cs typeface="Calibri" panose="020F0502020204030204" pitchFamily="34" charset="-120"/>
               </a:rPr>
               <a:t>SMALL</a:t>
             </a:r>
@@ -8395,13 +9226,12 @@
             <a:avLst/>
           </a:prstGeom>
           <a:noFill/>
-          <a:ln/>
         </p:spPr>
         <p:txBody>
           <a:bodyPr wrap="square" lIns="0" tIns="0" rIns="0" bIns="0" rtlCol="0" anchor="ctr"/>
           <a:lstStyle/>
           <a:p>
-            <a:pPr algn="ctr" indent="0" marL="0">
+            <a:pPr marL="0" indent="0" algn="ctr">
               <a:buNone/>
             </a:pPr>
             <a:r>
@@ -8409,9 +9239,9 @@
                 <a:solidFill>
                   <a:srgbClr val="3B2A5C"/>
                 </a:solidFill>
-                <a:latin typeface="Calibri" pitchFamily="34" charset="0"/>
-                <a:ea typeface="Calibri" pitchFamily="34" charset="-122"/>
-                <a:cs typeface="Calibri" pitchFamily="34" charset="-120"/>
+                <a:latin typeface="Calibri" panose="020F0502020204030204" pitchFamily="34" charset="0"/>
+                <a:ea typeface="Calibri" panose="020F0502020204030204" pitchFamily="34" charset="-122"/>
+                <a:cs typeface="Calibri" panose="020F0502020204030204" pitchFamily="34" charset="-120"/>
               </a:rPr>
               <a:t>LARGE</a:t>
             </a:r>
@@ -8459,13 +9289,12 @@
             <a:avLst/>
           </a:prstGeom>
           <a:noFill/>
-          <a:ln/>
         </p:spPr>
         <p:txBody>
           <a:bodyPr wrap="square" lIns="0" tIns="0" rIns="0" bIns="0" rtlCol="0" anchor="ctr"/>
           <a:lstStyle/>
           <a:p>
-            <a:pPr algn="ctr" indent="0" marL="0">
+            <a:pPr marL="0" indent="0" algn="ctr">
               <a:buNone/>
             </a:pPr>
             <a:r>
@@ -8473,9 +9302,9 @@
                 <a:solidFill>
                   <a:srgbClr val="3B2A5C"/>
                 </a:solidFill>
-                <a:latin typeface="Calibri" pitchFamily="34" charset="0"/>
-                <a:ea typeface="Calibri" pitchFamily="34" charset="-122"/>
-                <a:cs typeface="Calibri" pitchFamily="34" charset="-120"/>
+                <a:latin typeface="Calibri" panose="020F0502020204030204" pitchFamily="34" charset="0"/>
+                <a:ea typeface="Calibri" panose="020F0502020204030204" pitchFamily="34" charset="-122"/>
+                <a:cs typeface="Calibri" panose="020F0502020204030204" pitchFamily="34" charset="-120"/>
               </a:rPr>
               <a:t>LARGE</a:t>
             </a:r>
@@ -8523,13 +9352,12 @@
             <a:avLst/>
           </a:prstGeom>
           <a:noFill/>
-          <a:ln/>
         </p:spPr>
         <p:txBody>
           <a:bodyPr wrap="square" lIns="0" tIns="0" rIns="0" bIns="0" rtlCol="0" anchor="ctr"/>
           <a:lstStyle/>
           <a:p>
-            <a:pPr algn="ctr" indent="0" marL="0">
+            <a:pPr marL="0" indent="0" algn="ctr">
               <a:buNone/>
             </a:pPr>
             <a:r>
@@ -8537,9 +9365,9 @@
                 <a:solidFill>
                   <a:srgbClr val="3B2A5C"/>
                 </a:solidFill>
-                <a:latin typeface="Calibri" pitchFamily="34" charset="0"/>
-                <a:ea typeface="Calibri" pitchFamily="34" charset="-122"/>
-                <a:cs typeface="Calibri" pitchFamily="34" charset="-120"/>
+                <a:latin typeface="Calibri" panose="020F0502020204030204" pitchFamily="34" charset="0"/>
+                <a:ea typeface="Calibri" panose="020F0502020204030204" pitchFamily="34" charset="-122"/>
+                <a:cs typeface="Calibri" panose="020F0502020204030204" pitchFamily="34" charset="-120"/>
               </a:rPr>
               <a:t>SMALL</a:t>
             </a:r>
@@ -8587,13 +9415,12 @@
             <a:avLst/>
           </a:prstGeom>
           <a:noFill/>
-          <a:ln/>
         </p:spPr>
         <p:txBody>
           <a:bodyPr wrap="square" lIns="0" tIns="0" rIns="0" bIns="0" rtlCol="0" anchor="ctr"/>
           <a:lstStyle/>
           <a:p>
-            <a:pPr algn="ctr" indent="0" marL="0">
+            <a:pPr marL="0" indent="0" algn="ctr">
               <a:buNone/>
             </a:pPr>
             <a:r>
@@ -8601,9 +9428,9 @@
                 <a:solidFill>
                   <a:srgbClr val="3B2A5C"/>
                 </a:solidFill>
-                <a:latin typeface="Calibri" pitchFamily="34" charset="0"/>
-                <a:ea typeface="Calibri" pitchFamily="34" charset="-122"/>
-                <a:cs typeface="Calibri" pitchFamily="34" charset="-120"/>
+                <a:latin typeface="Calibri" panose="020F0502020204030204" pitchFamily="34" charset="0"/>
+                <a:ea typeface="Calibri" panose="020F0502020204030204" pitchFamily="34" charset="-122"/>
+                <a:cs typeface="Calibri" panose="020F0502020204030204" pitchFamily="34" charset="-120"/>
               </a:rPr>
               <a:t>SMALL</a:t>
             </a:r>
@@ -8651,13 +9478,12 @@
             <a:avLst/>
           </a:prstGeom>
           <a:noFill/>
-          <a:ln/>
         </p:spPr>
         <p:txBody>
           <a:bodyPr wrap="square" lIns="0" tIns="0" rIns="0" bIns="0" rtlCol="0" anchor="ctr"/>
           <a:lstStyle/>
           <a:p>
-            <a:pPr algn="ctr" indent="0" marL="0">
+            <a:pPr marL="0" indent="0" algn="ctr">
               <a:buNone/>
             </a:pPr>
             <a:r>
@@ -8665,9 +9491,9 @@
                 <a:solidFill>
                   <a:srgbClr val="3B2A5C"/>
                 </a:solidFill>
-                <a:latin typeface="Calibri" pitchFamily="34" charset="0"/>
-                <a:ea typeface="Calibri" pitchFamily="34" charset="-122"/>
-                <a:cs typeface="Calibri" pitchFamily="34" charset="-120"/>
+                <a:latin typeface="Calibri" panose="020F0502020204030204" pitchFamily="34" charset="0"/>
+                <a:ea typeface="Calibri" panose="020F0502020204030204" pitchFamily="34" charset="-122"/>
+                <a:cs typeface="Calibri" panose="020F0502020204030204" pitchFamily="34" charset="-120"/>
               </a:rPr>
               <a:t>LARGE</a:t>
             </a:r>
@@ -8715,13 +9541,12 @@
             <a:avLst/>
           </a:prstGeom>
           <a:noFill/>
-          <a:ln/>
         </p:spPr>
         <p:txBody>
           <a:bodyPr wrap="square" lIns="0" tIns="0" rIns="0" bIns="0" rtlCol="0" anchor="ctr"/>
           <a:lstStyle/>
           <a:p>
-            <a:pPr algn="ctr" indent="0" marL="0">
+            <a:pPr marL="0" indent="0" algn="ctr">
               <a:buNone/>
             </a:pPr>
             <a:r>
@@ -8729,9 +9554,9 @@
                 <a:solidFill>
                   <a:srgbClr val="3B2A5C"/>
                 </a:solidFill>
-                <a:latin typeface="Calibri" pitchFamily="34" charset="0"/>
-                <a:ea typeface="Calibri" pitchFamily="34" charset="-122"/>
-                <a:cs typeface="Calibri" pitchFamily="34" charset="-120"/>
+                <a:latin typeface="Calibri" panose="020F0502020204030204" pitchFamily="34" charset="0"/>
+                <a:ea typeface="Calibri" panose="020F0502020204030204" pitchFamily="34" charset="-122"/>
+                <a:cs typeface="Calibri" panose="020F0502020204030204" pitchFamily="34" charset="-120"/>
               </a:rPr>
               <a:t>LARGE</a:t>
             </a:r>
@@ -8754,13 +9579,12 @@
             <a:avLst/>
           </a:prstGeom>
           <a:noFill/>
-          <a:ln/>
         </p:spPr>
         <p:txBody>
           <a:bodyPr wrap="square" lIns="0" tIns="0" rIns="0" bIns="0" rtlCol="0" anchor="ctr"/>
           <a:lstStyle/>
           <a:p>
-            <a:pPr indent="0" marL="0">
+            <a:pPr marL="0" indent="0">
               <a:buNone/>
             </a:pPr>
             <a:r>
@@ -8768,9 +9592,9 @@
                 <a:solidFill>
                   <a:srgbClr val="6B6580"/>
                 </a:solidFill>
-                <a:latin typeface="Calibri" pitchFamily="34" charset="0"/>
-                <a:ea typeface="Calibri" pitchFamily="34" charset="-122"/>
-                <a:cs typeface="Calibri" pitchFamily="34" charset="-120"/>
+                <a:latin typeface="Calibri" panose="020F0502020204030204" pitchFamily="34" charset="0"/>
+                <a:ea typeface="Calibri" panose="020F0502020204030204" pitchFamily="34" charset="-122"/>
+                <a:cs typeface="Calibri" panose="020F0502020204030204" pitchFamily="34" charset="-120"/>
               </a:rPr>
               <a:t>SMALL = biru muda, LARGE = ungu muda. Tinggi rak tidak boleh diubah.</a:t>
             </a:r>
@@ -8788,12 +9612,13 @@
 
 <file path=ppt/slides/slide5.xml><?xml version="1.0" encoding="utf-8"?>
 <p:sld xmlns:a="http://schemas.openxmlformats.org/drawingml/2006/main" xmlns:r="http://schemas.openxmlformats.org/officeDocument/2006/relationships" xmlns:p="http://schemas.openxmlformats.org/presentationml/2006/main">
-  <p:cSld name="Slide 5">
+  <p:cSld>
     <p:bg>
       <p:bgPr>
         <a:solidFill>
           <a:srgbClr val="FFFFFF"/>
         </a:solidFill>
+        <a:effectLst/>
       </p:bgPr>
     </p:bg>
     <p:spTree>
@@ -8825,13 +9650,12 @@
             <a:avLst/>
           </a:prstGeom>
           <a:noFill/>
-          <a:ln/>
         </p:spPr>
         <p:txBody>
           <a:bodyPr wrap="square" lIns="0" tIns="0" rIns="0" bIns="0" rtlCol="0" anchor="ctr"/>
           <a:lstStyle/>
           <a:p>
-            <a:pPr indent="0" marL="0">
+            <a:pPr marL="0" indent="0">
               <a:buNone/>
             </a:pPr>
             <a:r>
@@ -8839,9 +9663,9 @@
                 <a:solidFill>
                   <a:srgbClr val="3B2A5C"/>
                 </a:solidFill>
-                <a:latin typeface="Cambria" pitchFamily="34" charset="0"/>
-                <a:ea typeface="Cambria" pitchFamily="34" charset="-122"/>
-                <a:cs typeface="Cambria" pitchFamily="34" charset="-120"/>
+                <a:latin typeface="Cambria" panose="02040503050406030204" pitchFamily="34" charset="0"/>
+                <a:ea typeface="Cambria" panose="02040503050406030204" pitchFamily="34" charset="-122"/>
+                <a:cs typeface="Cambria" panose="02040503050406030204" pitchFamily="34" charset="-120"/>
               </a:rPr>
               <a:t>Qty display dan alokasi per store</a:t>
             </a:r>
@@ -8864,13 +9688,12 @@
             <a:avLst/>
           </a:prstGeom>
           <a:noFill/>
-          <a:ln/>
         </p:spPr>
         <p:txBody>
           <a:bodyPr wrap="square" lIns="0" tIns="0" rIns="0" bIns="0" rtlCol="0" anchor="ctr"/>
           <a:lstStyle/>
           <a:p>
-            <a:pPr indent="0" marL="0">
+            <a:pPr marL="0" indent="0">
               <a:buNone/>
             </a:pPr>
             <a:r>
@@ -8878,9 +9701,9 @@
                 <a:solidFill>
                   <a:srgbClr val="6B6580"/>
                 </a:solidFill>
-                <a:latin typeface="Calibri" pitchFamily="34" charset="0"/>
-                <a:ea typeface="Calibri" pitchFamily="34" charset="-122"/>
-                <a:cs typeface="Calibri" pitchFamily="34" charset="-120"/>
+                <a:latin typeface="Calibri" panose="020F0502020204030204" pitchFamily="34" charset="0"/>
+                <a:ea typeface="Calibri" panose="020F0502020204030204" pitchFamily="34" charset="-122"/>
+                <a:cs typeface="Calibri" panose="020F0502020204030204" pitchFamily="34" charset="-120"/>
               </a:rPr>
               <a:t>Isi tiap box = 6 pcs. Qty belum termasuk buffer stock setiap store</a:t>
             </a:r>
@@ -8930,13 +9753,12 @@
             <a:avLst/>
           </a:prstGeom>
           <a:noFill/>
-          <a:ln/>
         </p:spPr>
         <p:txBody>
           <a:bodyPr wrap="square" lIns="0" tIns="0" rIns="0" bIns="0" rtlCol="0" anchor="ctr"/>
           <a:lstStyle/>
           <a:p>
-            <a:pPr algn="ctr" indent="0" marL="0">
+            <a:pPr marL="0" indent="0" algn="ctr">
               <a:buNone/>
             </a:pPr>
             <a:r>
@@ -8944,9 +9766,9 @@
                 <a:solidFill>
                   <a:srgbClr val="3B2A5C"/>
                 </a:solidFill>
-                <a:latin typeface="Cambria" pitchFamily="34" charset="0"/>
-                <a:ea typeface="Cambria" pitchFamily="34" charset="-122"/>
-                <a:cs typeface="Cambria" pitchFamily="34" charset="-120"/>
+                <a:latin typeface="Cambria" panose="02040503050406030204" pitchFamily="34" charset="0"/>
+                <a:ea typeface="Cambria" panose="02040503050406030204" pitchFamily="34" charset="-122"/>
+                <a:cs typeface="Cambria" panose="02040503050406030204" pitchFamily="34" charset="-120"/>
               </a:rPr>
               <a:t>96 pcs</a:t>
             </a:r>
@@ -8969,13 +9791,12 @@
             <a:avLst/>
           </a:prstGeom>
           <a:noFill/>
-          <a:ln/>
         </p:spPr>
         <p:txBody>
           <a:bodyPr wrap="square" lIns="0" tIns="0" rIns="0" bIns="0" rtlCol="0" anchor="ctr"/>
           <a:lstStyle/>
           <a:p>
-            <a:pPr algn="ctr" indent="0" marL="0">
+            <a:pPr marL="0" indent="0" algn="ctr">
               <a:buNone/>
             </a:pPr>
             <a:r>
@@ -8983,9 +9804,9 @@
                 <a:solidFill>
                   <a:srgbClr val="3B2A5C"/>
                 </a:solidFill>
-                <a:latin typeface="Calibri" pitchFamily="34" charset="0"/>
-                <a:ea typeface="Calibri" pitchFamily="34" charset="-122"/>
-                <a:cs typeface="Calibri" pitchFamily="34" charset="-120"/>
+                <a:latin typeface="Calibri" panose="020F0502020204030204" pitchFamily="34" charset="0"/>
+                <a:ea typeface="Calibri" panose="020F0502020204030204" pitchFamily="34" charset="-122"/>
+                <a:cs typeface="Calibri" panose="020F0502020204030204" pitchFamily="34" charset="-120"/>
               </a:rPr>
               <a:t>Area Dept – SMALL</a:t>
             </a:r>
@@ -9035,13 +9856,12 @@
             <a:avLst/>
           </a:prstGeom>
           <a:noFill/>
-          <a:ln/>
         </p:spPr>
         <p:txBody>
           <a:bodyPr wrap="square" lIns="0" tIns="0" rIns="0" bIns="0" rtlCol="0" anchor="ctr"/>
           <a:lstStyle/>
           <a:p>
-            <a:pPr algn="ctr" indent="0" marL="0">
+            <a:pPr marL="0" indent="0" algn="ctr">
               <a:buNone/>
             </a:pPr>
             <a:r>
@@ -9049,9 +9869,9 @@
                 <a:solidFill>
                   <a:srgbClr val="3B2A5C"/>
                 </a:solidFill>
-                <a:latin typeface="Cambria" pitchFamily="34" charset="0"/>
-                <a:ea typeface="Cambria" pitchFamily="34" charset="-122"/>
-                <a:cs typeface="Cambria" pitchFamily="34" charset="-120"/>
+                <a:latin typeface="Cambria" panose="02040503050406030204" pitchFamily="34" charset="0"/>
+                <a:ea typeface="Cambria" panose="02040503050406030204" pitchFamily="34" charset="-122"/>
+                <a:cs typeface="Cambria" panose="02040503050406030204" pitchFamily="34" charset="-120"/>
               </a:rPr>
               <a:t>72 pcs</a:t>
             </a:r>
@@ -9074,13 +9894,12 @@
             <a:avLst/>
           </a:prstGeom>
           <a:noFill/>
-          <a:ln/>
         </p:spPr>
         <p:txBody>
           <a:bodyPr wrap="square" lIns="0" tIns="0" rIns="0" bIns="0" rtlCol="0" anchor="ctr"/>
           <a:lstStyle/>
           <a:p>
-            <a:pPr algn="ctr" indent="0" marL="0">
+            <a:pPr marL="0" indent="0" algn="ctr">
               <a:buNone/>
             </a:pPr>
             <a:r>
@@ -9088,9 +9907,9 @@
                 <a:solidFill>
                   <a:srgbClr val="3B2A5C"/>
                 </a:solidFill>
-                <a:latin typeface="Calibri" pitchFamily="34" charset="0"/>
-                <a:ea typeface="Calibri" pitchFamily="34" charset="-122"/>
-                <a:cs typeface="Calibri" pitchFamily="34" charset="-120"/>
+                <a:latin typeface="Calibri" panose="020F0502020204030204" pitchFamily="34" charset="0"/>
+                <a:ea typeface="Calibri" panose="020F0502020204030204" pitchFamily="34" charset="-122"/>
+                <a:cs typeface="Calibri" panose="020F0502020204030204" pitchFamily="34" charset="-120"/>
               </a:rPr>
               <a:t>Area Dept – LARGE</a:t>
             </a:r>
@@ -9140,13 +9959,12 @@
             <a:avLst/>
           </a:prstGeom>
           <a:noFill/>
-          <a:ln/>
         </p:spPr>
         <p:txBody>
           <a:bodyPr wrap="square" lIns="0" tIns="0" rIns="0" bIns="0" rtlCol="0" anchor="ctr"/>
           <a:lstStyle/>
           <a:p>
-            <a:pPr algn="ctr" indent="0" marL="0">
+            <a:pPr marL="0" indent="0" algn="ctr">
               <a:buNone/>
             </a:pPr>
             <a:r>
@@ -9154,9 +9972,9 @@
                 <a:solidFill>
                   <a:srgbClr val="3B2A5C"/>
                 </a:solidFill>
-                <a:latin typeface="Cambria" pitchFamily="34" charset="0"/>
-                <a:ea typeface="Cambria" pitchFamily="34" charset="-122"/>
-                <a:cs typeface="Cambria" pitchFamily="34" charset="-120"/>
+                <a:latin typeface="Cambria" panose="02040503050406030204" pitchFamily="34" charset="0"/>
+                <a:ea typeface="Cambria" panose="02040503050406030204" pitchFamily="34" charset="-122"/>
+                <a:cs typeface="Cambria" panose="02040503050406030204" pitchFamily="34" charset="-120"/>
               </a:rPr>
               <a:t>24 pcs</a:t>
             </a:r>
@@ -9179,13 +9997,12 @@
             <a:avLst/>
           </a:prstGeom>
           <a:noFill/>
-          <a:ln/>
         </p:spPr>
         <p:txBody>
           <a:bodyPr wrap="square" lIns="0" tIns="0" rIns="0" bIns="0" rtlCol="0" anchor="ctr"/>
           <a:lstStyle/>
           <a:p>
-            <a:pPr algn="ctr" indent="0" marL="0">
+            <a:pPr marL="0" indent="0" algn="ctr">
               <a:buNone/>
             </a:pPr>
             <a:r>
@@ -9193,9 +10010,9 @@
                 <a:solidFill>
                   <a:srgbClr val="3B2A5C"/>
                 </a:solidFill>
-                <a:latin typeface="Calibri" pitchFamily="34" charset="0"/>
-                <a:ea typeface="Calibri" pitchFamily="34" charset="-122"/>
-                <a:cs typeface="Calibri" pitchFamily="34" charset="-120"/>
+                <a:latin typeface="Calibri" panose="020F0502020204030204" pitchFamily="34" charset="0"/>
+                <a:ea typeface="Calibri" panose="020F0502020204030204" pitchFamily="34" charset="-122"/>
+                <a:cs typeface="Calibri" panose="020F0502020204030204" pitchFamily="34" charset="-120"/>
               </a:rPr>
               <a:t>Area Kasir – SMALL</a:t>
             </a:r>
@@ -9245,13 +10062,12 @@
             <a:avLst/>
           </a:prstGeom>
           <a:noFill/>
-          <a:ln/>
         </p:spPr>
         <p:txBody>
           <a:bodyPr wrap="square" lIns="0" tIns="0" rIns="0" bIns="0" rtlCol="0" anchor="ctr"/>
           <a:lstStyle/>
           <a:p>
-            <a:pPr algn="ctr" indent="0" marL="0">
+            <a:pPr marL="0" indent="0" algn="ctr">
               <a:buNone/>
             </a:pPr>
             <a:r>
@@ -9259,9 +10075,9 @@
                 <a:solidFill>
                   <a:srgbClr val="3B2A5C"/>
                 </a:solidFill>
-                <a:latin typeface="Cambria" pitchFamily="34" charset="0"/>
-                <a:ea typeface="Cambria" pitchFamily="34" charset="-122"/>
-                <a:cs typeface="Cambria" pitchFamily="34" charset="-120"/>
+                <a:latin typeface="Cambria" panose="02040503050406030204" pitchFamily="34" charset="0"/>
+                <a:ea typeface="Cambria" panose="02040503050406030204" pitchFamily="34" charset="-122"/>
+                <a:cs typeface="Cambria" panose="02040503050406030204" pitchFamily="34" charset="-120"/>
               </a:rPr>
               <a:t>24 pcs</a:t>
             </a:r>
@@ -9284,13 +10100,12 @@
             <a:avLst/>
           </a:prstGeom>
           <a:noFill/>
-          <a:ln/>
         </p:spPr>
         <p:txBody>
           <a:bodyPr wrap="square" lIns="0" tIns="0" rIns="0" bIns="0" rtlCol="0" anchor="ctr"/>
           <a:lstStyle/>
           <a:p>
-            <a:pPr algn="ctr" indent="0" marL="0">
+            <a:pPr marL="0" indent="0" algn="ctr">
               <a:buNone/>
             </a:pPr>
             <a:r>
@@ -9298,9 +10113,9 @@
                 <a:solidFill>
                   <a:srgbClr val="3B2A5C"/>
                 </a:solidFill>
-                <a:latin typeface="Calibri" pitchFamily="34" charset="0"/>
-                <a:ea typeface="Calibri" pitchFamily="34" charset="-122"/>
-                <a:cs typeface="Calibri" pitchFamily="34" charset="-120"/>
+                <a:latin typeface="Calibri" panose="020F0502020204030204" pitchFamily="34" charset="0"/>
+                <a:ea typeface="Calibri" panose="020F0502020204030204" pitchFamily="34" charset="-122"/>
+                <a:cs typeface="Calibri" panose="020F0502020204030204" pitchFamily="34" charset="-120"/>
               </a:rPr>
               <a:t>Area Kasir – LARGE</a:t>
             </a:r>
@@ -9310,21 +10125,15 @@
       </p:sp>
       <p:graphicFrame>
         <p:nvGraphicFramePr>
-          <p:cNvPr id="6" name="Table 0"/>
+          <p:cNvPr id="16" name="Table 0"/>
           <p:cNvGraphicFramePr>
             <a:graphicFrameLocks noGrp="1"/>
           </p:cNvGraphicFramePr>
-          <p:nvPr>
-            <p:extLst>
-              <p:ext uri="{D42A27DB-BD31-4B8C-83A1-F6EECF244321}">
-                <p14:modId xmlns:p14="http://schemas.microsoft.com/office/powerpoint/2010/main" val="1579011935"/>
-              </p:ext>
-            </p:extLst>
-          </p:nvPr>
+          <p:nvPr/>
         </p:nvGraphicFramePr>
         <p:xfrm>
           <a:off x="6400800" y="1645920"/>
-          <a:ext cx="5212080" cy="914400"/>
+          <a:ext cx="5212080" cy="2103120"/>
         </p:xfrm>
         <a:graphic>
           <a:graphicData uri="http://schemas.openxmlformats.org/drawingml/2006/table">
@@ -9341,7 +10150,7 @@
                     <a:bodyPr/>
                     <a:lstStyle/>
                     <a:p>
-                      <a:pPr algn="ctr" indent="0" marL="0">
+                      <a:pPr marL="0" indent="0" algn="ctr">
                         <a:buNone/>
                       </a:pPr>
                       <a:r>
@@ -9355,7 +10164,7 @@
                       <a:endParaRPr lang="en-US" sz="1400" dirty="0"/>
                     </a:p>
                   </a:txBody>
-                  <a:tcPr marL="91440" marR="91440" marT="45720" marB="45720" anchor="ctr">
+                  <a:tcPr anchor="ctr">
                     <a:lnL w="12700" cap="flat" cmpd="sng" algn="ctr">
                       <a:solidFill>
                         <a:srgbClr val="D9D2E3"/>
@@ -9402,7 +10211,7 @@
                     <a:bodyPr/>
                     <a:lstStyle/>
                     <a:p>
-                      <a:pPr algn="ctr" indent="0" marL="0">
+                      <a:pPr marL="0" indent="0" algn="ctr">
                         <a:buNone/>
                       </a:pPr>
                       <a:r>
@@ -9416,7 +10225,7 @@
                       <a:endParaRPr lang="en-US" sz="1400" dirty="0"/>
                     </a:p>
                   </a:txBody>
-                  <a:tcPr marL="91440" marR="91440" marT="45720" marB="45720" anchor="ctr">
+                  <a:tcPr anchor="ctr">
                     <a:lnL w="12700" cap="flat" cmpd="sng" algn="ctr">
                       <a:solidFill>
                         <a:srgbClr val="D9D2E3"/>
@@ -9463,7 +10272,7 @@
                     <a:bodyPr/>
                     <a:lstStyle/>
                     <a:p>
-                      <a:pPr algn="ctr" indent="0" marL="0">
+                      <a:pPr marL="0" indent="0" algn="ctr">
                         <a:buNone/>
                       </a:pPr>
                       <a:r>
@@ -9477,7 +10286,7 @@
                       <a:endParaRPr lang="en-US" sz="1400" dirty="0"/>
                     </a:p>
                   </a:txBody>
-                  <a:tcPr marL="91440" marR="91440" marT="45720" marB="45720" anchor="ctr">
+                  <a:tcPr anchor="ctr">
                     <a:lnL w="12700" cap="flat" cmpd="sng" algn="ctr">
                       <a:solidFill>
                         <a:srgbClr val="D9D2E3"/>
@@ -9526,7 +10335,7 @@
                     <a:bodyPr/>
                     <a:lstStyle/>
                     <a:p>
-                      <a:pPr indent="0" marL="0">
+                      <a:pPr marL="0" indent="0">
                         <a:buNone/>
                       </a:pPr>
                       <a:r>
@@ -9540,7 +10349,7 @@
                       <a:endParaRPr lang="en-US" sz="1400" dirty="0"/>
                     </a:p>
                   </a:txBody>
-                  <a:tcPr marL="91440" marR="91440" marT="45720" marB="45720" anchor="ctr">
+                  <a:tcPr anchor="ctr">
                     <a:lnL w="12700" cap="flat" cmpd="sng" algn="ctr">
                       <a:solidFill>
                         <a:srgbClr val="D9D2E3"/>
@@ -9587,7 +10396,7 @@
                     <a:bodyPr/>
                     <a:lstStyle/>
                     <a:p>
-                      <a:pPr algn="ctr" indent="0" marL="0">
+                      <a:pPr marL="0" indent="0" algn="ctr">
                         <a:buNone/>
                       </a:pPr>
                       <a:r>
@@ -9601,7 +10410,7 @@
                       <a:endParaRPr lang="en-US" sz="1400" dirty="0"/>
                     </a:p>
                     <a:p>
-                      <a:pPr algn="ctr" indent="0" marL="0">
+                      <a:pPr marL="0" indent="0" algn="ctr">
                         <a:buNone/>
                       </a:pPr>
                       <a:r>
@@ -9615,7 +10424,7 @@
                       <a:endParaRPr lang="en-US" sz="1400" dirty="0"/>
                     </a:p>
                   </a:txBody>
-                  <a:tcPr marL="91440" marR="91440" marT="45720" marB="45720" anchor="ctr">
+                  <a:tcPr anchor="ctr">
                     <a:lnL w="12700" cap="flat" cmpd="sng" algn="ctr">
                       <a:solidFill>
                         <a:srgbClr val="D9D2E3"/>
@@ -9662,7 +10471,7 @@
                     <a:bodyPr/>
                     <a:lstStyle/>
                     <a:p>
-                      <a:pPr algn="ctr" indent="0" marL="0">
+                      <a:pPr marL="0" indent="0" algn="ctr">
                         <a:buNone/>
                       </a:pPr>
                       <a:r>
@@ -9676,7 +10485,7 @@
                       <a:endParaRPr lang="en-US" sz="1400" dirty="0"/>
                     </a:p>
                     <a:p>
-                      <a:pPr algn="ctr" indent="0" marL="0">
+                      <a:pPr marL="0" indent="0" algn="ctr">
                         <a:buNone/>
                       </a:pPr>
                       <a:r>
@@ -9690,7 +10499,7 @@
                       <a:endParaRPr lang="en-US" sz="1400" dirty="0"/>
                     </a:p>
                   </a:txBody>
-                  <a:tcPr marL="91440" marR="91440" marT="45720" marB="45720" anchor="ctr">
+                  <a:tcPr anchor="ctr">
                     <a:lnL w="12700" cap="flat" cmpd="sng" algn="ctr">
                       <a:solidFill>
                         <a:srgbClr val="D9D2E3"/>
@@ -9739,7 +10548,7 @@
                     <a:bodyPr/>
                     <a:lstStyle/>
                     <a:p>
-                      <a:pPr indent="0" marL="0">
+                      <a:pPr marL="0" indent="0">
                         <a:buNone/>
                       </a:pPr>
                       <a:r>
@@ -9753,7 +10562,7 @@
                       <a:endParaRPr lang="en-US" sz="1400" dirty="0"/>
                     </a:p>
                   </a:txBody>
-                  <a:tcPr marL="91440" marR="91440" marT="45720" marB="45720" anchor="ctr">
+                  <a:tcPr anchor="ctr">
                     <a:lnL w="12700" cap="flat" cmpd="sng" algn="ctr">
                       <a:solidFill>
                         <a:srgbClr val="D9D2E3"/>
@@ -9800,7 +10609,7 @@
                     <a:bodyPr/>
                     <a:lstStyle/>
                     <a:p>
-                      <a:pPr algn="ctr" indent="0" marL="0">
+                      <a:pPr marL="0" indent="0" algn="ctr">
                         <a:buNone/>
                       </a:pPr>
                       <a:r>
@@ -9814,7 +10623,7 @@
                       <a:endParaRPr lang="en-US" sz="1400" dirty="0"/>
                     </a:p>
                     <a:p>
-                      <a:pPr algn="ctr" indent="0" marL="0">
+                      <a:pPr marL="0" indent="0" algn="ctr">
                         <a:buNone/>
                       </a:pPr>
                       <a:r>
@@ -9828,7 +10637,7 @@
                       <a:endParaRPr lang="en-US" sz="1400" dirty="0"/>
                     </a:p>
                   </a:txBody>
-                  <a:tcPr marL="91440" marR="91440" marT="45720" marB="45720" anchor="ctr">
+                  <a:tcPr anchor="ctr">
                     <a:lnL w="12700" cap="flat" cmpd="sng" algn="ctr">
                       <a:solidFill>
                         <a:srgbClr val="D9D2E3"/>
@@ -9875,7 +10684,7 @@
                     <a:bodyPr/>
                     <a:lstStyle/>
                     <a:p>
-                      <a:pPr algn="ctr" indent="0" marL="0">
+                      <a:pPr marL="0" indent="0" algn="ctr">
                         <a:buNone/>
                       </a:pPr>
                       <a:r>
@@ -9889,7 +10698,7 @@
                       <a:endParaRPr lang="en-US" sz="1400" dirty="0"/>
                     </a:p>
                     <a:p>
-                      <a:pPr algn="ctr" indent="0" marL="0">
+                      <a:pPr marL="0" indent="0" algn="ctr">
                         <a:buNone/>
                       </a:pPr>
                       <a:r>
@@ -9903,7 +10712,7 @@
                       <a:endParaRPr lang="en-US" sz="1400" dirty="0"/>
                     </a:p>
                   </a:txBody>
-                  <a:tcPr marL="91440" marR="91440" marT="45720" marB="45720" anchor="ctr">
+                  <a:tcPr anchor="ctr">
                     <a:lnL w="12700" cap="flat" cmpd="sng" algn="ctr">
                       <a:solidFill>
                         <a:srgbClr val="D9D2E3"/>
@@ -9992,13 +10801,12 @@
             <a:avLst/>
           </a:prstGeom>
           <a:noFill/>
-          <a:ln/>
         </p:spPr>
         <p:txBody>
           <a:bodyPr wrap="square" lIns="0" tIns="0" rIns="0" bIns="0" rtlCol="0" anchor="t"/>
           <a:lstStyle/>
           <a:p>
-            <a:pPr indent="0" marL="0">
+            <a:pPr marL="0" indent="0">
               <a:buNone/>
             </a:pPr>
             <a:r>
@@ -10006,16 +10814,16 @@
                 <a:solidFill>
                   <a:srgbClr val="3B2A5C"/>
                 </a:solidFill>
-                <a:latin typeface="Calibri" pitchFamily="34" charset="0"/>
-                <a:ea typeface="Calibri" pitchFamily="34" charset="-122"/>
-                <a:cs typeface="Calibri" pitchFamily="34" charset="-120"/>
+                <a:latin typeface="Calibri" panose="020F0502020204030204" pitchFamily="34" charset="0"/>
+                <a:ea typeface="Calibri" panose="020F0502020204030204" pitchFamily="34" charset="-122"/>
+                <a:cs typeface="Calibri" panose="020F0502020204030204" pitchFamily="34" charset="-120"/>
               </a:rPr>
               <a:t>Catatan</a:t>
             </a:r>
             <a:endParaRPr lang="en-US" sz="1600" dirty="0"/>
           </a:p>
           <a:p>
-            <a:pPr indent="0" marL="0">
+            <a:pPr marL="0" indent="0">
               <a:buNone/>
             </a:pPr>
             <a:r>
@@ -10023,9 +10831,9 @@
                 <a:solidFill>
                   <a:srgbClr val="3B2A5C"/>
                 </a:solidFill>
-                <a:latin typeface="Calibri" pitchFamily="34" charset="0"/>
-                <a:ea typeface="Calibri" pitchFamily="34" charset="-122"/>
-                <a:cs typeface="Calibri" pitchFamily="34" charset="-120"/>
+                <a:latin typeface="Calibri" panose="020F0502020204030204" pitchFamily="34" charset="0"/>
+                <a:ea typeface="Calibri" panose="020F0502020204030204" pitchFamily="34" charset="-122"/>
+                <a:cs typeface="Calibri" panose="020F0502020204030204" pitchFamily="34" charset="-120"/>
               </a:rPr>
               <a:t>Qty di atas belum termasuk buffer stock setiap store. Area dept = isi endcap. Area kasir = tambahan 24 pcs SMALL dan 24 pcs LARGE.</a:t>
             </a:r>
@@ -10048,13 +10856,12 @@
             <a:avLst/>
           </a:prstGeom>
           <a:noFill/>
-          <a:ln/>
         </p:spPr>
         <p:txBody>
           <a:bodyPr wrap="square" lIns="0" tIns="0" rIns="0" bIns="0" rtlCol="0" anchor="ctr"/>
           <a:lstStyle/>
           <a:p>
-            <a:pPr indent="0" marL="0">
+            <a:pPr marL="0" indent="0">
               <a:buNone/>
             </a:pPr>
             <a:r>
@@ -10062,9 +10869,9 @@
                 <a:solidFill>
                   <a:srgbClr val="6B6580"/>
                 </a:solidFill>
-                <a:latin typeface="Calibri" pitchFamily="34" charset="0"/>
-                <a:ea typeface="Calibri" pitchFamily="34" charset="-122"/>
-                <a:cs typeface="Calibri" pitchFamily="34" charset="-120"/>
+                <a:latin typeface="Calibri" panose="020F0502020204030204" pitchFamily="34" charset="0"/>
+                <a:ea typeface="Calibri" panose="020F0502020204030204" pitchFamily="34" charset="-122"/>
+                <a:cs typeface="Calibri" panose="020F0502020204030204" pitchFamily="34" charset="-120"/>
               </a:rPr>
               <a:t>1 koli = 4 box = 24 pcs, untuk SMALL maupun LARGE.</a:t>
             </a:r>
@@ -10082,12 +10889,13 @@
 
 <file path=ppt/slides/slide6.xml><?xml version="1.0" encoding="utf-8"?>
 <p:sld xmlns:a="http://schemas.openxmlformats.org/drawingml/2006/main" xmlns:r="http://schemas.openxmlformats.org/officeDocument/2006/relationships" xmlns:p="http://schemas.openxmlformats.org/presentationml/2006/main">
-  <p:cSld name="Slide 6">
+  <p:cSld>
     <p:bg>
       <p:bgPr>
         <a:solidFill>
           <a:srgbClr val="FFFFFF"/>
         </a:solidFill>
+        <a:effectLst/>
       </p:bgPr>
     </p:bg>
     <p:spTree>
@@ -10119,13 +10927,12 @@
             <a:avLst/>
           </a:prstGeom>
           <a:noFill/>
-          <a:ln/>
         </p:spPr>
         <p:txBody>
           <a:bodyPr wrap="square" lIns="0" tIns="0" rIns="0" bIns="0" rtlCol="0" anchor="ctr"/>
           <a:lstStyle/>
           <a:p>
-            <a:pPr indent="0" marL="0">
+            <a:pPr marL="0" indent="0">
               <a:buNone/>
             </a:pPr>
             <a:r>
@@ -10133,9 +10940,9 @@
                 <a:solidFill>
                   <a:srgbClr val="3B2A5C"/>
                 </a:solidFill>
-                <a:latin typeface="Cambria" pitchFamily="34" charset="0"/>
-                <a:ea typeface="Cambria" pitchFamily="34" charset="-122"/>
-                <a:cs typeface="Cambria" pitchFamily="34" charset="-120"/>
+                <a:latin typeface="Cambria" panose="02040503050406030204" pitchFamily="34" charset="0"/>
+                <a:ea typeface="Cambria" panose="02040503050406030204" pitchFamily="34" charset="-122"/>
+                <a:cs typeface="Cambria" panose="02040503050406030204" pitchFamily="34" charset="-120"/>
               </a:rPr>
               <a:t>Store display Dept + Kasir (43 store)</a:t>
             </a:r>
@@ -10158,13 +10965,12 @@
             <a:avLst/>
           </a:prstGeom>
           <a:noFill/>
-          <a:ln/>
         </p:spPr>
         <p:txBody>
           <a:bodyPr wrap="square" lIns="0" tIns="0" rIns="0" bIns="0" rtlCol="0" anchor="ctr"/>
           <a:lstStyle/>
           <a:p>
-            <a:pPr indent="0" marL="0">
+            <a:pPr marL="0" indent="0">
               <a:buNone/>
             </a:pPr>
             <a:r>
@@ -10172,9 +10978,9 @@
                 <a:solidFill>
                   <a:srgbClr val="6B6580"/>
                 </a:solidFill>
-                <a:latin typeface="Calibri" pitchFamily="34" charset="0"/>
-                <a:ea typeface="Calibri" pitchFamily="34" charset="-122"/>
-                <a:cs typeface="Calibri" pitchFamily="34" charset="-120"/>
+                <a:latin typeface="Calibri" panose="020F0502020204030204" pitchFamily="34" charset="0"/>
+                <a:ea typeface="Calibri" panose="020F0502020204030204" pitchFamily="34" charset="-122"/>
+                <a:cs typeface="Calibri" panose="020F0502020204030204" pitchFamily="34" charset="-120"/>
               </a:rPr>
               <a:t>Alokasi per store: SMALL 120 pcs (20 box = 5 koli), LARGE 96 pcs (16 box = 4 koli). Belum termasuk buffer stock.</a:t>
             </a:r>
@@ -10188,17 +10994,11 @@
           <p:cNvGraphicFramePr>
             <a:graphicFrameLocks noGrp="1"/>
           </p:cNvGraphicFramePr>
-          <p:nvPr>
-            <p:extLst>
-              <p:ext uri="{D42A27DB-BD31-4B8C-83A1-F6EECF244321}">
-                <p14:modId xmlns:p14="http://schemas.microsoft.com/office/powerpoint/2010/main" val="1579011935"/>
-              </p:ext>
-            </p:extLst>
-          </p:nvPr>
+          <p:nvPr/>
         </p:nvGraphicFramePr>
         <p:xfrm>
           <a:off x="548640" y="1645920"/>
-          <a:ext cx="3566160" cy="914400"/>
+          <a:ext cx="3566160" cy="4389120"/>
         </p:xfrm>
         <a:graphic>
           <a:graphicData uri="http://schemas.openxmlformats.org/drawingml/2006/table">
@@ -10214,7 +11014,7 @@
                     <a:bodyPr/>
                     <a:lstStyle/>
                     <a:p>
-                      <a:pPr indent="0" marL="0">
+                      <a:pPr marL="0" indent="0">
                         <a:buNone/>
                       </a:pPr>
                       <a:r>
@@ -10275,7 +11075,7 @@
                     <a:bodyPr/>
                     <a:lstStyle/>
                     <a:p>
-                      <a:pPr indent="0" marL="0">
+                      <a:pPr marL="0" indent="0">
                         <a:buNone/>
                       </a:pPr>
                       <a:r>
@@ -10338,7 +11138,7 @@
                     <a:bodyPr/>
                     <a:lstStyle/>
                     <a:p>
-                      <a:pPr indent="0" marL="0">
+                      <a:pPr marL="0" indent="0">
                         <a:buNone/>
                       </a:pPr>
                       <a:r>
@@ -10399,7 +11199,7 @@
                     <a:bodyPr/>
                     <a:lstStyle/>
                     <a:p>
-                      <a:pPr indent="0" marL="0">
+                      <a:pPr marL="0" indent="0">
                         <a:buNone/>
                       </a:pPr>
                       <a:r>
@@ -10462,7 +11262,7 @@
                     <a:bodyPr/>
                     <a:lstStyle/>
                     <a:p>
-                      <a:pPr indent="0" marL="0">
+                      <a:pPr marL="0" indent="0">
                         <a:buNone/>
                       </a:pPr>
                       <a:r>
@@ -10523,7 +11323,7 @@
                     <a:bodyPr/>
                     <a:lstStyle/>
                     <a:p>
-                      <a:pPr indent="0" marL="0">
+                      <a:pPr marL="0" indent="0">
                         <a:buNone/>
                       </a:pPr>
                       <a:r>
@@ -10586,7 +11386,7 @@
                     <a:bodyPr/>
                     <a:lstStyle/>
                     <a:p>
-                      <a:pPr indent="0" marL="0">
+                      <a:pPr marL="0" indent="0">
                         <a:buNone/>
                       </a:pPr>
                       <a:r>
@@ -10647,7 +11447,7 @@
                     <a:bodyPr/>
                     <a:lstStyle/>
                     <a:p>
-                      <a:pPr indent="0" marL="0">
+                      <a:pPr marL="0" indent="0">
                         <a:buNone/>
                       </a:pPr>
                       <a:r>
@@ -10710,7 +11510,7 @@
                     <a:bodyPr/>
                     <a:lstStyle/>
                     <a:p>
-                      <a:pPr indent="0" marL="0">
+                      <a:pPr marL="0" indent="0">
                         <a:buNone/>
                       </a:pPr>
                       <a:r>
@@ -10771,7 +11571,7 @@
                     <a:bodyPr/>
                     <a:lstStyle/>
                     <a:p>
-                      <a:pPr indent="0" marL="0">
+                      <a:pPr marL="0" indent="0">
                         <a:buNone/>
                       </a:pPr>
                       <a:r>
@@ -10834,7 +11634,7 @@
                     <a:bodyPr/>
                     <a:lstStyle/>
                     <a:p>
-                      <a:pPr indent="0" marL="0">
+                      <a:pPr marL="0" indent="0">
                         <a:buNone/>
                       </a:pPr>
                       <a:r>
@@ -10895,7 +11695,7 @@
                     <a:bodyPr/>
                     <a:lstStyle/>
                     <a:p>
-                      <a:pPr indent="0" marL="0">
+                      <a:pPr marL="0" indent="0">
                         <a:buNone/>
                       </a:pPr>
                       <a:r>
@@ -10958,7 +11758,7 @@
                     <a:bodyPr/>
                     <a:lstStyle/>
                     <a:p>
-                      <a:pPr indent="0" marL="0">
+                      <a:pPr marL="0" indent="0">
                         <a:buNone/>
                       </a:pPr>
                       <a:r>
@@ -11019,7 +11819,7 @@
                     <a:bodyPr/>
                     <a:lstStyle/>
                     <a:p>
-                      <a:pPr indent="0" marL="0">
+                      <a:pPr marL="0" indent="0">
                         <a:buNone/>
                       </a:pPr>
                       <a:r>
@@ -11082,7 +11882,7 @@
                     <a:bodyPr/>
                     <a:lstStyle/>
                     <a:p>
-                      <a:pPr indent="0" marL="0">
+                      <a:pPr marL="0" indent="0">
                         <a:buNone/>
                       </a:pPr>
                       <a:r>
@@ -11143,7 +11943,7 @@
                     <a:bodyPr/>
                     <a:lstStyle/>
                     <a:p>
-                      <a:pPr indent="0" marL="0">
+                      <a:pPr marL="0" indent="0">
                         <a:buNone/>
                       </a:pPr>
                       <a:r>
@@ -11206,7 +12006,7 @@
                     <a:bodyPr/>
                     <a:lstStyle/>
                     <a:p>
-                      <a:pPr indent="0" marL="0">
+                      <a:pPr marL="0" indent="0">
                         <a:buNone/>
                       </a:pPr>
                       <a:r>
@@ -11267,7 +12067,7 @@
                     <a:bodyPr/>
                     <a:lstStyle/>
                     <a:p>
-                      <a:pPr indent="0" marL="0">
+                      <a:pPr marL="0" indent="0">
                         <a:buNone/>
                       </a:pPr>
                       <a:r>
@@ -11330,7 +12130,7 @@
                     <a:bodyPr/>
                     <a:lstStyle/>
                     <a:p>
-                      <a:pPr indent="0" marL="0">
+                      <a:pPr marL="0" indent="0">
                         <a:buNone/>
                       </a:pPr>
                       <a:r>
@@ -11391,7 +12191,7 @@
                     <a:bodyPr/>
                     <a:lstStyle/>
                     <a:p>
-                      <a:pPr indent="0" marL="0">
+                      <a:pPr marL="0" indent="0">
                         <a:buNone/>
                       </a:pPr>
                       <a:r>
@@ -11454,7 +12254,7 @@
                     <a:bodyPr/>
                     <a:lstStyle/>
                     <a:p>
-                      <a:pPr indent="0" marL="0">
+                      <a:pPr marL="0" indent="0">
                         <a:buNone/>
                       </a:pPr>
                       <a:r>
@@ -11515,7 +12315,7 @@
                     <a:bodyPr/>
                     <a:lstStyle/>
                     <a:p>
-                      <a:pPr indent="0" marL="0">
+                      <a:pPr marL="0" indent="0">
                         <a:buNone/>
                       </a:pPr>
                       <a:r>
@@ -11578,7 +12378,7 @@
                     <a:bodyPr/>
                     <a:lstStyle/>
                     <a:p>
-                      <a:pPr indent="0" marL="0">
+                      <a:pPr marL="0" indent="0">
                         <a:buNone/>
                       </a:pPr>
                       <a:r>
@@ -11639,7 +12439,7 @@
                     <a:bodyPr/>
                     <a:lstStyle/>
                     <a:p>
-                      <a:pPr indent="0" marL="0">
+                      <a:pPr marL="0" indent="0">
                         <a:buNone/>
                       </a:pPr>
                       <a:r>
@@ -11702,7 +12502,7 @@
                     <a:bodyPr/>
                     <a:lstStyle/>
                     <a:p>
-                      <a:pPr indent="0" marL="0">
+                      <a:pPr marL="0" indent="0">
                         <a:buNone/>
                       </a:pPr>
                       <a:r>
@@ -11763,7 +12563,7 @@
                     <a:bodyPr/>
                     <a:lstStyle/>
                     <a:p>
-                      <a:pPr indent="0" marL="0">
+                      <a:pPr marL="0" indent="0">
                         <a:buNone/>
                       </a:pPr>
                       <a:r>
@@ -11826,7 +12626,7 @@
                     <a:bodyPr/>
                     <a:lstStyle/>
                     <a:p>
-                      <a:pPr indent="0" marL="0">
+                      <a:pPr marL="0" indent="0">
                         <a:buNone/>
                       </a:pPr>
                       <a:r>
@@ -11887,7 +12687,7 @@
                     <a:bodyPr/>
                     <a:lstStyle/>
                     <a:p>
-                      <a:pPr indent="0" marL="0">
+                      <a:pPr marL="0" indent="0">
                         <a:buNone/>
                       </a:pPr>
                       <a:r>
@@ -11950,7 +12750,7 @@
                     <a:bodyPr/>
                     <a:lstStyle/>
                     <a:p>
-                      <a:pPr indent="0" marL="0">
+                      <a:pPr marL="0" indent="0">
                         <a:buNone/>
                       </a:pPr>
                       <a:r>
@@ -12011,7 +12811,7 @@
                     <a:bodyPr/>
                     <a:lstStyle/>
                     <a:p>
-                      <a:pPr indent="0" marL="0">
+                      <a:pPr marL="0" indent="0">
                         <a:buNone/>
                       </a:pPr>
                       <a:r>
@@ -12074,7 +12874,7 @@
                     <a:bodyPr/>
                     <a:lstStyle/>
                     <a:p>
-                      <a:pPr indent="0" marL="0">
+                      <a:pPr marL="0" indent="0">
                         <a:buNone/>
                       </a:pPr>
                       <a:r>
@@ -12135,7 +12935,7 @@
                     <a:bodyPr/>
                     <a:lstStyle/>
                     <a:p>
-                      <a:pPr indent="0" marL="0">
+                      <a:pPr marL="0" indent="0">
                         <a:buNone/>
                       </a:pPr>
                       <a:r>
@@ -12202,17 +13002,11 @@
           <p:cNvGraphicFramePr>
             <a:graphicFrameLocks noGrp="1"/>
           </p:cNvGraphicFramePr>
-          <p:nvPr>
-            <p:extLst>
-              <p:ext uri="{D42A27DB-BD31-4B8C-83A1-F6EECF244321}">
-                <p14:modId xmlns:p14="http://schemas.microsoft.com/office/powerpoint/2010/main" val="1579011935"/>
-              </p:ext>
-            </p:extLst>
-          </p:nvPr>
+          <p:nvPr/>
         </p:nvGraphicFramePr>
         <p:xfrm>
           <a:off x="4297680" y="1645920"/>
-          <a:ext cx="3566160" cy="914400"/>
+          <a:ext cx="3566160" cy="4389120"/>
         </p:xfrm>
         <a:graphic>
           <a:graphicData uri="http://schemas.openxmlformats.org/drawingml/2006/table">
@@ -12228,7 +13022,7 @@
                     <a:bodyPr/>
                     <a:lstStyle/>
                     <a:p>
-                      <a:pPr indent="0" marL="0">
+                      <a:pPr marL="0" indent="0">
                         <a:buNone/>
                       </a:pPr>
                       <a:r>
@@ -12289,7 +13083,7 @@
                     <a:bodyPr/>
                     <a:lstStyle/>
                     <a:p>
-                      <a:pPr indent="0" marL="0">
+                      <a:pPr marL="0" indent="0">
                         <a:buNone/>
                       </a:pPr>
                       <a:r>
@@ -12352,7 +13146,7 @@
                     <a:bodyPr/>
                     <a:lstStyle/>
                     <a:p>
-                      <a:pPr indent="0" marL="0">
+                      <a:pPr marL="0" indent="0">
                         <a:buNone/>
                       </a:pPr>
                       <a:r>
@@ -12413,7 +13207,7 @@
                     <a:bodyPr/>
                     <a:lstStyle/>
                     <a:p>
-                      <a:pPr indent="0" marL="0">
+                      <a:pPr marL="0" indent="0">
                         <a:buNone/>
                       </a:pPr>
                       <a:r>
@@ -12476,7 +13270,7 @@
                     <a:bodyPr/>
                     <a:lstStyle/>
                     <a:p>
-                      <a:pPr indent="0" marL="0">
+                      <a:pPr marL="0" indent="0">
                         <a:buNone/>
                       </a:pPr>
                       <a:r>
@@ -12537,7 +13331,7 @@
                     <a:bodyPr/>
                     <a:lstStyle/>
                     <a:p>
-                      <a:pPr indent="0" marL="0">
+                      <a:pPr marL="0" indent="0">
                         <a:buNone/>
                       </a:pPr>
                       <a:r>
@@ -12600,7 +13394,7 @@
                     <a:bodyPr/>
                     <a:lstStyle/>
                     <a:p>
-                      <a:pPr indent="0" marL="0">
+                      <a:pPr marL="0" indent="0">
                         <a:buNone/>
                       </a:pPr>
                       <a:r>
@@ -12661,7 +13455,7 @@
                     <a:bodyPr/>
                     <a:lstStyle/>
                     <a:p>
-                      <a:pPr indent="0" marL="0">
+                      <a:pPr marL="0" indent="0">
                         <a:buNone/>
                       </a:pPr>
                       <a:r>
@@ -12724,7 +13518,7 @@
                     <a:bodyPr/>
                     <a:lstStyle/>
                     <a:p>
-                      <a:pPr indent="0" marL="0">
+                      <a:pPr marL="0" indent="0">
                         <a:buNone/>
                       </a:pPr>
                       <a:r>
@@ -12785,7 +13579,7 @@
                     <a:bodyPr/>
                     <a:lstStyle/>
                     <a:p>
-                      <a:pPr indent="0" marL="0">
+                      <a:pPr marL="0" indent="0">
                         <a:buNone/>
                       </a:pPr>
                       <a:r>
@@ -12848,7 +13642,7 @@
                     <a:bodyPr/>
                     <a:lstStyle/>
                     <a:p>
-                      <a:pPr indent="0" marL="0">
+                      <a:pPr marL="0" indent="0">
                         <a:buNone/>
                       </a:pPr>
                       <a:r>
@@ -12909,7 +13703,7 @@
                     <a:bodyPr/>
                     <a:lstStyle/>
                     <a:p>
-                      <a:pPr indent="0" marL="0">
+                      <a:pPr marL="0" indent="0">
                         <a:buNone/>
                       </a:pPr>
                       <a:r>
@@ -12972,7 +13766,7 @@
                     <a:bodyPr/>
                     <a:lstStyle/>
                     <a:p>
-                      <a:pPr indent="0" marL="0">
+                      <a:pPr marL="0" indent="0">
                         <a:buNone/>
                       </a:pPr>
                       <a:r>
@@ -13033,7 +13827,7 @@
                     <a:bodyPr/>
                     <a:lstStyle/>
                     <a:p>
-                      <a:pPr indent="0" marL="0">
+                      <a:pPr marL="0" indent="0">
                         <a:buNone/>
                       </a:pPr>
                       <a:r>
@@ -13096,7 +13890,7 @@
                     <a:bodyPr/>
                     <a:lstStyle/>
                     <a:p>
-                      <a:pPr indent="0" marL="0">
+                      <a:pPr marL="0" indent="0">
                         <a:buNone/>
                       </a:pPr>
                       <a:r>
@@ -13157,7 +13951,7 @@
                     <a:bodyPr/>
                     <a:lstStyle/>
                     <a:p>
-                      <a:pPr indent="0" marL="0">
+                      <a:pPr marL="0" indent="0">
                         <a:buNone/>
                       </a:pPr>
                       <a:r>
@@ -13220,7 +14014,7 @@
                     <a:bodyPr/>
                     <a:lstStyle/>
                     <a:p>
-                      <a:pPr indent="0" marL="0">
+                      <a:pPr marL="0" indent="0">
                         <a:buNone/>
                       </a:pPr>
                       <a:r>
@@ -13281,7 +14075,7 @@
                     <a:bodyPr/>
                     <a:lstStyle/>
                     <a:p>
-                      <a:pPr indent="0" marL="0">
+                      <a:pPr marL="0" indent="0">
                         <a:buNone/>
                       </a:pPr>
                       <a:r>
@@ -13344,7 +14138,7 @@
                     <a:bodyPr/>
                     <a:lstStyle/>
                     <a:p>
-                      <a:pPr indent="0" marL="0">
+                      <a:pPr marL="0" indent="0">
                         <a:buNone/>
                       </a:pPr>
                       <a:r>
@@ -13405,7 +14199,7 @@
                     <a:bodyPr/>
                     <a:lstStyle/>
                     <a:p>
-                      <a:pPr indent="0" marL="0">
+                      <a:pPr marL="0" indent="0">
                         <a:buNone/>
                       </a:pPr>
                       <a:r>
@@ -13468,7 +14262,7 @@
                     <a:bodyPr/>
                     <a:lstStyle/>
                     <a:p>
-                      <a:pPr indent="0" marL="0">
+                      <a:pPr marL="0" indent="0">
                         <a:buNone/>
                       </a:pPr>
                       <a:r>
@@ -13529,7 +14323,7 @@
                     <a:bodyPr/>
                     <a:lstStyle/>
                     <a:p>
-                      <a:pPr indent="0" marL="0">
+                      <a:pPr marL="0" indent="0">
                         <a:buNone/>
                       </a:pPr>
                       <a:r>
@@ -13592,7 +14386,7 @@
                     <a:bodyPr/>
                     <a:lstStyle/>
                     <a:p>
-                      <a:pPr indent="0" marL="0">
+                      <a:pPr marL="0" indent="0">
                         <a:buNone/>
                       </a:pPr>
                       <a:r>
@@ -13653,7 +14447,7 @@
                     <a:bodyPr/>
                     <a:lstStyle/>
                     <a:p>
-                      <a:pPr indent="0" marL="0">
+                      <a:pPr marL="0" indent="0">
                         <a:buNone/>
                       </a:pPr>
                       <a:r>
@@ -13716,7 +14510,7 @@
                     <a:bodyPr/>
                     <a:lstStyle/>
                     <a:p>
-                      <a:pPr indent="0" marL="0">
+                      <a:pPr marL="0" indent="0">
                         <a:buNone/>
                       </a:pPr>
                       <a:r>
@@ -13777,7 +14571,7 @@
                     <a:bodyPr/>
                     <a:lstStyle/>
                     <a:p>
-                      <a:pPr indent="0" marL="0">
+                      <a:pPr marL="0" indent="0">
                         <a:buNone/>
                       </a:pPr>
                       <a:r>
@@ -13840,7 +14634,7 @@
                     <a:bodyPr/>
                     <a:lstStyle/>
                     <a:p>
-                      <a:pPr indent="0" marL="0">
+                      <a:pPr marL="0" indent="0">
                         <a:buNone/>
                       </a:pPr>
                       <a:r>
@@ -13901,7 +14695,7 @@
                     <a:bodyPr/>
                     <a:lstStyle/>
                     <a:p>
-                      <a:pPr indent="0" marL="0">
+                      <a:pPr marL="0" indent="0">
                         <a:buNone/>
                       </a:pPr>
                       <a:r>
@@ -13964,7 +14758,7 @@
                     <a:bodyPr/>
                     <a:lstStyle/>
                     <a:p>
-                      <a:pPr indent="0" marL="0">
+                      <a:pPr marL="0" indent="0">
                         <a:buNone/>
                       </a:pPr>
                       <a:r>
@@ -14025,7 +14819,7 @@
                     <a:bodyPr/>
                     <a:lstStyle/>
                     <a:p>
-                      <a:pPr indent="0" marL="0">
+                      <a:pPr marL="0" indent="0">
                         <a:buNone/>
                       </a:pPr>
                       <a:r>
@@ -14088,7 +14882,7 @@
                     <a:bodyPr/>
                     <a:lstStyle/>
                     <a:p>
-                      <a:pPr indent="0" marL="0">
+                      <a:pPr marL="0" indent="0">
                         <a:buNone/>
                       </a:pPr>
                       <a:r>
@@ -14149,7 +14943,7 @@
                     <a:bodyPr/>
                     <a:lstStyle/>
                     <a:p>
-                      <a:pPr indent="0" marL="0">
+                      <a:pPr marL="0" indent="0">
                         <a:buNone/>
                       </a:pPr>
                       <a:r>
@@ -14216,17 +15010,11 @@
           <p:cNvGraphicFramePr>
             <a:graphicFrameLocks noGrp="1"/>
           </p:cNvGraphicFramePr>
-          <p:nvPr>
-            <p:extLst>
-              <p:ext uri="{D42A27DB-BD31-4B8C-83A1-F6EECF244321}">
-                <p14:modId xmlns:p14="http://schemas.microsoft.com/office/powerpoint/2010/main" val="1579011935"/>
-              </p:ext>
-            </p:extLst>
-          </p:nvPr>
+          <p:nvPr/>
         </p:nvGraphicFramePr>
         <p:xfrm>
           <a:off x="8046720" y="1645920"/>
-          <a:ext cx="3566160" cy="914400"/>
+          <a:ext cx="3566160" cy="3840480"/>
         </p:xfrm>
         <a:graphic>
           <a:graphicData uri="http://schemas.openxmlformats.org/drawingml/2006/table">
@@ -14242,7 +15030,7 @@
                     <a:bodyPr/>
                     <a:lstStyle/>
                     <a:p>
-                      <a:pPr indent="0" marL="0">
+                      <a:pPr marL="0" indent="0">
                         <a:buNone/>
                       </a:pPr>
                       <a:r>
@@ -14303,7 +15091,7 @@
                     <a:bodyPr/>
                     <a:lstStyle/>
                     <a:p>
-                      <a:pPr indent="0" marL="0">
+                      <a:pPr marL="0" indent="0">
                         <a:buNone/>
                       </a:pPr>
                       <a:r>
@@ -14366,7 +15154,7 @@
                     <a:bodyPr/>
                     <a:lstStyle/>
                     <a:p>
-                      <a:pPr indent="0" marL="0">
+                      <a:pPr marL="0" indent="0">
                         <a:buNone/>
                       </a:pPr>
                       <a:r>
@@ -14427,7 +15215,7 @@
                     <a:bodyPr/>
                     <a:lstStyle/>
                     <a:p>
-                      <a:pPr indent="0" marL="0">
+                      <a:pPr marL="0" indent="0">
                         <a:buNone/>
                       </a:pPr>
                       <a:r>
@@ -14490,7 +15278,7 @@
                     <a:bodyPr/>
                     <a:lstStyle/>
                     <a:p>
-                      <a:pPr indent="0" marL="0">
+                      <a:pPr marL="0" indent="0">
                         <a:buNone/>
                       </a:pPr>
                       <a:r>
@@ -14551,7 +15339,7 @@
                     <a:bodyPr/>
                     <a:lstStyle/>
                     <a:p>
-                      <a:pPr indent="0" marL="0">
+                      <a:pPr marL="0" indent="0">
                         <a:buNone/>
                       </a:pPr>
                       <a:r>
@@ -14614,7 +15402,7 @@
                     <a:bodyPr/>
                     <a:lstStyle/>
                     <a:p>
-                      <a:pPr indent="0" marL="0">
+                      <a:pPr marL="0" indent="0">
                         <a:buNone/>
                       </a:pPr>
                       <a:r>
@@ -14675,7 +15463,7 @@
                     <a:bodyPr/>
                     <a:lstStyle/>
                     <a:p>
-                      <a:pPr indent="0" marL="0">
+                      <a:pPr marL="0" indent="0">
                         <a:buNone/>
                       </a:pPr>
                       <a:r>
@@ -14738,7 +15526,7 @@
                     <a:bodyPr/>
                     <a:lstStyle/>
                     <a:p>
-                      <a:pPr indent="0" marL="0">
+                      <a:pPr marL="0" indent="0">
                         <a:buNone/>
                       </a:pPr>
                       <a:r>
@@ -14799,7 +15587,7 @@
                     <a:bodyPr/>
                     <a:lstStyle/>
                     <a:p>
-                      <a:pPr indent="0" marL="0">
+                      <a:pPr marL="0" indent="0">
                         <a:buNone/>
                       </a:pPr>
                       <a:r>
@@ -14862,7 +15650,7 @@
                     <a:bodyPr/>
                     <a:lstStyle/>
                     <a:p>
-                      <a:pPr indent="0" marL="0">
+                      <a:pPr marL="0" indent="0">
                         <a:buNone/>
                       </a:pPr>
                       <a:r>
@@ -14923,7 +15711,7 @@
                     <a:bodyPr/>
                     <a:lstStyle/>
                     <a:p>
-                      <a:pPr indent="0" marL="0">
+                      <a:pPr marL="0" indent="0">
                         <a:buNone/>
                       </a:pPr>
                       <a:r>
@@ -14986,7 +15774,7 @@
                     <a:bodyPr/>
                     <a:lstStyle/>
                     <a:p>
-                      <a:pPr indent="0" marL="0">
+                      <a:pPr marL="0" indent="0">
                         <a:buNone/>
                       </a:pPr>
                       <a:r>
@@ -15047,7 +15835,7 @@
                     <a:bodyPr/>
                     <a:lstStyle/>
                     <a:p>
-                      <a:pPr indent="0" marL="0">
+                      <a:pPr marL="0" indent="0">
                         <a:buNone/>
                       </a:pPr>
                       <a:r>
@@ -15110,7 +15898,7 @@
                     <a:bodyPr/>
                     <a:lstStyle/>
                     <a:p>
-                      <a:pPr indent="0" marL="0">
+                      <a:pPr marL="0" indent="0">
                         <a:buNone/>
                       </a:pPr>
                       <a:r>
@@ -15171,7 +15959,7 @@
                     <a:bodyPr/>
                     <a:lstStyle/>
                     <a:p>
-                      <a:pPr indent="0" marL="0">
+                      <a:pPr marL="0" indent="0">
                         <a:buNone/>
                       </a:pPr>
                       <a:r>
@@ -15234,7 +16022,7 @@
                     <a:bodyPr/>
                     <a:lstStyle/>
                     <a:p>
-                      <a:pPr indent="0" marL="0">
+                      <a:pPr marL="0" indent="0">
                         <a:buNone/>
                       </a:pPr>
                       <a:r>
@@ -15295,7 +16083,7 @@
                     <a:bodyPr/>
                     <a:lstStyle/>
                     <a:p>
-                      <a:pPr indent="0" marL="0">
+                      <a:pPr marL="0" indent="0">
                         <a:buNone/>
                       </a:pPr>
                       <a:r>
@@ -15358,7 +16146,7 @@
                     <a:bodyPr/>
                     <a:lstStyle/>
                     <a:p>
-                      <a:pPr indent="0" marL="0">
+                      <a:pPr marL="0" indent="0">
                         <a:buNone/>
                       </a:pPr>
                       <a:r>
@@ -15419,7 +16207,7 @@
                     <a:bodyPr/>
                     <a:lstStyle/>
                     <a:p>
-                      <a:pPr indent="0" marL="0">
+                      <a:pPr marL="0" indent="0">
                         <a:buNone/>
                       </a:pPr>
                       <a:r>
@@ -15482,7 +16270,7 @@
                     <a:bodyPr/>
                     <a:lstStyle/>
                     <a:p>
-                      <a:pPr indent="0" marL="0">
+                      <a:pPr marL="0" indent="0">
                         <a:buNone/>
                       </a:pPr>
                       <a:r>
@@ -15543,7 +16331,7 @@
                     <a:bodyPr/>
                     <a:lstStyle/>
                     <a:p>
-                      <a:pPr indent="0" marL="0">
+                      <a:pPr marL="0" indent="0">
                         <a:buNone/>
                       </a:pPr>
                       <a:r>
@@ -15606,7 +16394,7 @@
                     <a:bodyPr/>
                     <a:lstStyle/>
                     <a:p>
-                      <a:pPr indent="0" marL="0">
+                      <a:pPr marL="0" indent="0">
                         <a:buNone/>
                       </a:pPr>
                       <a:r>
@@ -15667,7 +16455,7 @@
                     <a:bodyPr/>
                     <a:lstStyle/>
                     <a:p>
-                      <a:pPr indent="0" marL="0">
+                      <a:pPr marL="0" indent="0">
                         <a:buNone/>
                       </a:pPr>
                       <a:r>
@@ -15730,7 +16518,7 @@
                     <a:bodyPr/>
                     <a:lstStyle/>
                     <a:p>
-                      <a:pPr indent="0" marL="0">
+                      <a:pPr marL="0" indent="0">
                         <a:buNone/>
                       </a:pPr>
                       <a:r>
@@ -15791,7 +16579,7 @@
                     <a:bodyPr/>
                     <a:lstStyle/>
                     <a:p>
-                      <a:pPr indent="0" marL="0">
+                      <a:pPr marL="0" indent="0">
                         <a:buNone/>
                       </a:pPr>
                       <a:r>
@@ -15854,7 +16642,7 @@
                     <a:bodyPr/>
                     <a:lstStyle/>
                     <a:p>
-                      <a:pPr indent="0" marL="0">
+                      <a:pPr marL="0" indent="0">
                         <a:buNone/>
                       </a:pPr>
                       <a:r>
@@ -15915,7 +16703,7 @@
                     <a:bodyPr/>
                     <a:lstStyle/>
                     <a:p>
-                      <a:pPr indent="0" marL="0">
+                      <a:pPr marL="0" indent="0">
                         <a:buNone/>
                       </a:pPr>
                       <a:r>
@@ -15986,12 +16774,13 @@
 
 <file path=ppt/slides/slide7.xml><?xml version="1.0" encoding="utf-8"?>
 <p:sld xmlns:a="http://schemas.openxmlformats.org/drawingml/2006/main" xmlns:r="http://schemas.openxmlformats.org/officeDocument/2006/relationships" xmlns:p="http://schemas.openxmlformats.org/presentationml/2006/main">
-  <p:cSld name="Slide 7">
+  <p:cSld>
     <p:bg>
       <p:bgPr>
         <a:solidFill>
           <a:srgbClr val="FFFFFF"/>
         </a:solidFill>
+        <a:effectLst/>
       </p:bgPr>
     </p:bg>
     <p:spTree>
@@ -16023,13 +16812,12 @@
             <a:avLst/>
           </a:prstGeom>
           <a:noFill/>
-          <a:ln/>
         </p:spPr>
         <p:txBody>
           <a:bodyPr wrap="square" lIns="0" tIns="0" rIns="0" bIns="0" rtlCol="0" anchor="ctr"/>
           <a:lstStyle/>
           <a:p>
-            <a:pPr indent="0" marL="0">
+            <a:pPr marL="0" indent="0">
               <a:buNone/>
             </a:pPr>
             <a:r>
@@ -16037,9 +16825,9 @@
                 <a:solidFill>
                   <a:srgbClr val="3B2A5C"/>
                 </a:solidFill>
-                <a:latin typeface="Cambria" pitchFamily="34" charset="0"/>
-                <a:ea typeface="Cambria" pitchFamily="34" charset="-122"/>
-                <a:cs typeface="Cambria" pitchFamily="34" charset="-120"/>
+                <a:latin typeface="Cambria" panose="02040503050406030204" pitchFamily="34" charset="0"/>
+                <a:ea typeface="Cambria" panose="02040503050406030204" pitchFamily="34" charset="-122"/>
+                <a:cs typeface="Cambria" panose="02040503050406030204" pitchFamily="34" charset="-120"/>
               </a:rPr>
               <a:t>Store display Dept only (40 store)</a:t>
             </a:r>
@@ -16062,13 +16850,12 @@
             <a:avLst/>
           </a:prstGeom>
           <a:noFill/>
-          <a:ln/>
         </p:spPr>
         <p:txBody>
           <a:bodyPr wrap="square" lIns="0" tIns="0" rIns="0" bIns="0" rtlCol="0" anchor="ctr"/>
           <a:lstStyle/>
           <a:p>
-            <a:pPr indent="0" marL="0">
+            <a:pPr marL="0" indent="0">
               <a:buNone/>
             </a:pPr>
             <a:r>
@@ -16076,9 +16863,9 @@
                 <a:solidFill>
                   <a:srgbClr val="6B6580"/>
                 </a:solidFill>
-                <a:latin typeface="Calibri" pitchFamily="34" charset="0"/>
-                <a:ea typeface="Calibri" pitchFamily="34" charset="-122"/>
-                <a:cs typeface="Calibri" pitchFamily="34" charset="-120"/>
+                <a:latin typeface="Calibri" panose="020F0502020204030204" pitchFamily="34" charset="0"/>
+                <a:ea typeface="Calibri" panose="020F0502020204030204" pitchFamily="34" charset="-122"/>
+                <a:cs typeface="Calibri" panose="020F0502020204030204" pitchFamily="34" charset="-120"/>
               </a:rPr>
               <a:t>Alokasi per store: SMALL 96 pcs (16 box = 4 koli), LARGE 72 pcs (12 box = 3 koli). Belum termasuk buffer stock.</a:t>
             </a:r>
@@ -16092,17 +16879,11 @@
           <p:cNvGraphicFramePr>
             <a:graphicFrameLocks noGrp="1"/>
           </p:cNvGraphicFramePr>
-          <p:nvPr>
-            <p:extLst>
-              <p:ext uri="{D42A27DB-BD31-4B8C-83A1-F6EECF244321}">
-                <p14:modId xmlns:p14="http://schemas.microsoft.com/office/powerpoint/2010/main" val="1579011935"/>
-              </p:ext>
-            </p:extLst>
-          </p:nvPr>
+          <p:nvPr/>
         </p:nvGraphicFramePr>
         <p:xfrm>
           <a:off x="548640" y="1645920"/>
-          <a:ext cx="3566160" cy="914400"/>
+          <a:ext cx="3566160" cy="4114800"/>
         </p:xfrm>
         <a:graphic>
           <a:graphicData uri="http://schemas.openxmlformats.org/drawingml/2006/table">
@@ -16118,7 +16899,7 @@
                     <a:bodyPr/>
                     <a:lstStyle/>
                     <a:p>
-                      <a:pPr indent="0" marL="0">
+                      <a:pPr marL="0" indent="0">
                         <a:buNone/>
                       </a:pPr>
                       <a:r>
@@ -16179,7 +16960,7 @@
                     <a:bodyPr/>
                     <a:lstStyle/>
                     <a:p>
-                      <a:pPr indent="0" marL="0">
+                      <a:pPr marL="0" indent="0">
                         <a:buNone/>
                       </a:pPr>
                       <a:r>
@@ -16242,7 +17023,7 @@
                     <a:bodyPr/>
                     <a:lstStyle/>
                     <a:p>
-                      <a:pPr indent="0" marL="0">
+                      <a:pPr marL="0" indent="0">
                         <a:buNone/>
                       </a:pPr>
                       <a:r>
@@ -16303,7 +17084,7 @@
                     <a:bodyPr/>
                     <a:lstStyle/>
                     <a:p>
-                      <a:pPr indent="0" marL="0">
+                      <a:pPr marL="0" indent="0">
                         <a:buNone/>
                       </a:pPr>
                       <a:r>
@@ -16366,7 +17147,7 @@
                     <a:bodyPr/>
                     <a:lstStyle/>
                     <a:p>
-                      <a:pPr indent="0" marL="0">
+                      <a:pPr marL="0" indent="0">
                         <a:buNone/>
                       </a:pPr>
                       <a:r>
@@ -16427,7 +17208,7 @@
                     <a:bodyPr/>
                     <a:lstStyle/>
                     <a:p>
-                      <a:pPr indent="0" marL="0">
+                      <a:pPr marL="0" indent="0">
                         <a:buNone/>
                       </a:pPr>
                       <a:r>
@@ -16490,7 +17271,7 @@
                     <a:bodyPr/>
                     <a:lstStyle/>
                     <a:p>
-                      <a:pPr indent="0" marL="0">
+                      <a:pPr marL="0" indent="0">
                         <a:buNone/>
                       </a:pPr>
                       <a:r>
@@ -16551,7 +17332,7 @@
                     <a:bodyPr/>
                     <a:lstStyle/>
                     <a:p>
-                      <a:pPr indent="0" marL="0">
+                      <a:pPr marL="0" indent="0">
                         <a:buNone/>
                       </a:pPr>
                       <a:r>
@@ -16614,7 +17395,7 @@
                     <a:bodyPr/>
                     <a:lstStyle/>
                     <a:p>
-                      <a:pPr indent="0" marL="0">
+                      <a:pPr marL="0" indent="0">
                         <a:buNone/>
                       </a:pPr>
                       <a:r>
@@ -16675,7 +17456,7 @@
                     <a:bodyPr/>
                     <a:lstStyle/>
                     <a:p>
-                      <a:pPr indent="0" marL="0">
+                      <a:pPr marL="0" indent="0">
                         <a:buNone/>
                       </a:pPr>
                       <a:r>
@@ -16738,7 +17519,7 @@
                     <a:bodyPr/>
                     <a:lstStyle/>
                     <a:p>
-                      <a:pPr indent="0" marL="0">
+                      <a:pPr marL="0" indent="0">
                         <a:buNone/>
                       </a:pPr>
                       <a:r>
@@ -16799,7 +17580,7 @@
                     <a:bodyPr/>
                     <a:lstStyle/>
                     <a:p>
-                      <a:pPr indent="0" marL="0">
+                      <a:pPr marL="0" indent="0">
                         <a:buNone/>
                       </a:pPr>
                       <a:r>
@@ -16862,7 +17643,7 @@
                     <a:bodyPr/>
                     <a:lstStyle/>
                     <a:p>
-                      <a:pPr indent="0" marL="0">
+                      <a:pPr marL="0" indent="0">
                         <a:buNone/>
                       </a:pPr>
                       <a:r>
@@ -16923,7 +17704,7 @@
                     <a:bodyPr/>
                     <a:lstStyle/>
                     <a:p>
-                      <a:pPr indent="0" marL="0">
+                      <a:pPr marL="0" indent="0">
                         <a:buNone/>
                       </a:pPr>
                       <a:r>
@@ -16986,7 +17767,7 @@
                     <a:bodyPr/>
                     <a:lstStyle/>
                     <a:p>
-                      <a:pPr indent="0" marL="0">
+                      <a:pPr marL="0" indent="0">
                         <a:buNone/>
                       </a:pPr>
                       <a:r>
@@ -17047,7 +17828,7 @@
                     <a:bodyPr/>
                     <a:lstStyle/>
                     <a:p>
-                      <a:pPr indent="0" marL="0">
+                      <a:pPr marL="0" indent="0">
                         <a:buNone/>
                       </a:pPr>
                       <a:r>
@@ -17110,7 +17891,7 @@
                     <a:bodyPr/>
                     <a:lstStyle/>
                     <a:p>
-                      <a:pPr indent="0" marL="0">
+                      <a:pPr marL="0" indent="0">
                         <a:buNone/>
                       </a:pPr>
                       <a:r>
@@ -17171,7 +17952,7 @@
                     <a:bodyPr/>
                     <a:lstStyle/>
                     <a:p>
-                      <a:pPr indent="0" marL="0">
+                      <a:pPr marL="0" indent="0">
                         <a:buNone/>
                       </a:pPr>
                       <a:r>
@@ -17234,7 +18015,7 @@
                     <a:bodyPr/>
                     <a:lstStyle/>
                     <a:p>
-                      <a:pPr indent="0" marL="0">
+                      <a:pPr marL="0" indent="0">
                         <a:buNone/>
                       </a:pPr>
                       <a:r>
@@ -17295,7 +18076,7 @@
                     <a:bodyPr/>
                     <a:lstStyle/>
                     <a:p>
-                      <a:pPr indent="0" marL="0">
+                      <a:pPr marL="0" indent="0">
                         <a:buNone/>
                       </a:pPr>
                       <a:r>
@@ -17358,7 +18139,7 @@
                     <a:bodyPr/>
                     <a:lstStyle/>
                     <a:p>
-                      <a:pPr indent="0" marL="0">
+                      <a:pPr marL="0" indent="0">
                         <a:buNone/>
                       </a:pPr>
                       <a:r>
@@ -17419,7 +18200,7 @@
                     <a:bodyPr/>
                     <a:lstStyle/>
                     <a:p>
-                      <a:pPr indent="0" marL="0">
+                      <a:pPr marL="0" indent="0">
                         <a:buNone/>
                       </a:pPr>
                       <a:r>
@@ -17482,7 +18263,7 @@
                     <a:bodyPr/>
                     <a:lstStyle/>
                     <a:p>
-                      <a:pPr indent="0" marL="0">
+                      <a:pPr marL="0" indent="0">
                         <a:buNone/>
                       </a:pPr>
                       <a:r>
@@ -17543,7 +18324,7 @@
                     <a:bodyPr/>
                     <a:lstStyle/>
                     <a:p>
-                      <a:pPr indent="0" marL="0">
+                      <a:pPr marL="0" indent="0">
                         <a:buNone/>
                       </a:pPr>
                       <a:r>
@@ -17606,7 +18387,7 @@
                     <a:bodyPr/>
                     <a:lstStyle/>
                     <a:p>
-                      <a:pPr indent="0" marL="0">
+                      <a:pPr marL="0" indent="0">
                         <a:buNone/>
                       </a:pPr>
                       <a:r>
@@ -17667,7 +18448,7 @@
                     <a:bodyPr/>
                     <a:lstStyle/>
                     <a:p>
-                      <a:pPr indent="0" marL="0">
+                      <a:pPr marL="0" indent="0">
                         <a:buNone/>
                       </a:pPr>
                       <a:r>
@@ -17730,7 +18511,7 @@
                     <a:bodyPr/>
                     <a:lstStyle/>
                     <a:p>
-                      <a:pPr indent="0" marL="0">
+                      <a:pPr marL="0" indent="0">
                         <a:buNone/>
                       </a:pPr>
                       <a:r>
@@ -17791,7 +18572,7 @@
                     <a:bodyPr/>
                     <a:lstStyle/>
                     <a:p>
-                      <a:pPr indent="0" marL="0">
+                      <a:pPr marL="0" indent="0">
                         <a:buNone/>
                       </a:pPr>
                       <a:r>
@@ -17854,7 +18635,7 @@
                     <a:bodyPr/>
                     <a:lstStyle/>
                     <a:p>
-                      <a:pPr indent="0" marL="0">
+                      <a:pPr marL="0" indent="0">
                         <a:buNone/>
                       </a:pPr>
                       <a:r>
@@ -17915,7 +18696,7 @@
                     <a:bodyPr/>
                     <a:lstStyle/>
                     <a:p>
-                      <a:pPr indent="0" marL="0">
+                      <a:pPr marL="0" indent="0">
                         <a:buNone/>
                       </a:pPr>
                       <a:r>
@@ -17982,17 +18763,11 @@
           <p:cNvGraphicFramePr>
             <a:graphicFrameLocks noGrp="1"/>
           </p:cNvGraphicFramePr>
-          <p:nvPr>
-            <p:extLst>
-              <p:ext uri="{D42A27DB-BD31-4B8C-83A1-F6EECF244321}">
-                <p14:modId xmlns:p14="http://schemas.microsoft.com/office/powerpoint/2010/main" val="1579011935"/>
-              </p:ext>
-            </p:extLst>
-          </p:nvPr>
+          <p:nvPr/>
         </p:nvGraphicFramePr>
         <p:xfrm>
           <a:off x="4297680" y="1645920"/>
-          <a:ext cx="3566160" cy="914400"/>
+          <a:ext cx="3566160" cy="4114800"/>
         </p:xfrm>
         <a:graphic>
           <a:graphicData uri="http://schemas.openxmlformats.org/drawingml/2006/table">
@@ -18008,7 +18783,7 @@
                     <a:bodyPr/>
                     <a:lstStyle/>
                     <a:p>
-                      <a:pPr indent="0" marL="0">
+                      <a:pPr marL="0" indent="0">
                         <a:buNone/>
                       </a:pPr>
                       <a:r>
@@ -18069,7 +18844,7 @@
                     <a:bodyPr/>
                     <a:lstStyle/>
                     <a:p>
-                      <a:pPr indent="0" marL="0">
+                      <a:pPr marL="0" indent="0">
                         <a:buNone/>
                       </a:pPr>
                       <a:r>
@@ -18132,7 +18907,7 @@
                     <a:bodyPr/>
                     <a:lstStyle/>
                     <a:p>
-                      <a:pPr indent="0" marL="0">
+                      <a:pPr marL="0" indent="0">
                         <a:buNone/>
                       </a:pPr>
                       <a:r>
@@ -18193,7 +18968,7 @@
                     <a:bodyPr/>
                     <a:lstStyle/>
                     <a:p>
-                      <a:pPr indent="0" marL="0">
+                      <a:pPr marL="0" indent="0">
                         <a:buNone/>
                       </a:pPr>
                       <a:r>
@@ -18256,7 +19031,7 @@
                     <a:bodyPr/>
                     <a:lstStyle/>
                     <a:p>
-                      <a:pPr indent="0" marL="0">
+                      <a:pPr marL="0" indent="0">
                         <a:buNone/>
                       </a:pPr>
                       <a:r>
@@ -18317,7 +19092,7 @@
                     <a:bodyPr/>
                     <a:lstStyle/>
                     <a:p>
-                      <a:pPr indent="0" marL="0">
+                      <a:pPr marL="0" indent="0">
                         <a:buNone/>
                       </a:pPr>
                       <a:r>
@@ -18380,7 +19155,7 @@
                     <a:bodyPr/>
                     <a:lstStyle/>
                     <a:p>
-                      <a:pPr indent="0" marL="0">
+                      <a:pPr marL="0" indent="0">
                         <a:buNone/>
                       </a:pPr>
                       <a:r>
@@ -18441,7 +19216,7 @@
                     <a:bodyPr/>
                     <a:lstStyle/>
                     <a:p>
-                      <a:pPr indent="0" marL="0">
+                      <a:pPr marL="0" indent="0">
                         <a:buNone/>
                       </a:pPr>
                       <a:r>
@@ -18504,7 +19279,7 @@
                     <a:bodyPr/>
                     <a:lstStyle/>
                     <a:p>
-                      <a:pPr indent="0" marL="0">
+                      <a:pPr marL="0" indent="0">
                         <a:buNone/>
                       </a:pPr>
                       <a:r>
@@ -18565,7 +19340,7 @@
                     <a:bodyPr/>
                     <a:lstStyle/>
                     <a:p>
-                      <a:pPr indent="0" marL="0">
+                      <a:pPr marL="0" indent="0">
                         <a:buNone/>
                       </a:pPr>
                       <a:r>
@@ -18628,7 +19403,7 @@
                     <a:bodyPr/>
                     <a:lstStyle/>
                     <a:p>
-                      <a:pPr indent="0" marL="0">
+                      <a:pPr marL="0" indent="0">
                         <a:buNone/>
                       </a:pPr>
                       <a:r>
@@ -18689,7 +19464,7 @@
                     <a:bodyPr/>
                     <a:lstStyle/>
                     <a:p>
-                      <a:pPr indent="0" marL="0">
+                      <a:pPr marL="0" indent="0">
                         <a:buNone/>
                       </a:pPr>
                       <a:r>
@@ -18752,7 +19527,7 @@
                     <a:bodyPr/>
                     <a:lstStyle/>
                     <a:p>
-                      <a:pPr indent="0" marL="0">
+                      <a:pPr marL="0" indent="0">
                         <a:buNone/>
                       </a:pPr>
                       <a:r>
@@ -18813,7 +19588,7 @@
                     <a:bodyPr/>
                     <a:lstStyle/>
                     <a:p>
-                      <a:pPr indent="0" marL="0">
+                      <a:pPr marL="0" indent="0">
                         <a:buNone/>
                       </a:pPr>
                       <a:r>
@@ -18876,7 +19651,7 @@
                     <a:bodyPr/>
                     <a:lstStyle/>
                     <a:p>
-                      <a:pPr indent="0" marL="0">
+                      <a:pPr marL="0" indent="0">
                         <a:buNone/>
                       </a:pPr>
                       <a:r>
@@ -18937,7 +19712,7 @@
                     <a:bodyPr/>
                     <a:lstStyle/>
                     <a:p>
-                      <a:pPr indent="0" marL="0">
+                      <a:pPr marL="0" indent="0">
                         <a:buNone/>
                       </a:pPr>
                       <a:r>
@@ -19000,7 +19775,7 @@
                     <a:bodyPr/>
                     <a:lstStyle/>
                     <a:p>
-                      <a:pPr indent="0" marL="0">
+                      <a:pPr marL="0" indent="0">
                         <a:buNone/>
                       </a:pPr>
                       <a:r>
@@ -19061,7 +19836,7 @@
                     <a:bodyPr/>
                     <a:lstStyle/>
                     <a:p>
-                      <a:pPr indent="0" marL="0">
+                      <a:pPr marL="0" indent="0">
                         <a:buNone/>
                       </a:pPr>
                       <a:r>
@@ -19124,7 +19899,7 @@
                     <a:bodyPr/>
                     <a:lstStyle/>
                     <a:p>
-                      <a:pPr indent="0" marL="0">
+                      <a:pPr marL="0" indent="0">
                         <a:buNone/>
                       </a:pPr>
                       <a:r>
@@ -19185,7 +19960,7 @@
                     <a:bodyPr/>
                     <a:lstStyle/>
                     <a:p>
-                      <a:pPr indent="0" marL="0">
+                      <a:pPr marL="0" indent="0">
                         <a:buNone/>
                       </a:pPr>
                       <a:r>
@@ -19248,7 +20023,7 @@
                     <a:bodyPr/>
                     <a:lstStyle/>
                     <a:p>
-                      <a:pPr indent="0" marL="0">
+                      <a:pPr marL="0" indent="0">
                         <a:buNone/>
                       </a:pPr>
                       <a:r>
@@ -19309,7 +20084,7 @@
                     <a:bodyPr/>
                     <a:lstStyle/>
                     <a:p>
-                      <a:pPr indent="0" marL="0">
+                      <a:pPr marL="0" indent="0">
                         <a:buNone/>
                       </a:pPr>
                       <a:r>
@@ -19372,7 +20147,7 @@
                     <a:bodyPr/>
                     <a:lstStyle/>
                     <a:p>
-                      <a:pPr indent="0" marL="0">
+                      <a:pPr marL="0" indent="0">
                         <a:buNone/>
                       </a:pPr>
                       <a:r>
@@ -19433,7 +20208,7 @@
                     <a:bodyPr/>
                     <a:lstStyle/>
                     <a:p>
-                      <a:pPr indent="0" marL="0">
+                      <a:pPr marL="0" indent="0">
                         <a:buNone/>
                       </a:pPr>
                       <a:r>
@@ -19496,7 +20271,7 @@
                     <a:bodyPr/>
                     <a:lstStyle/>
                     <a:p>
-                      <a:pPr indent="0" marL="0">
+                      <a:pPr marL="0" indent="0">
                         <a:buNone/>
                       </a:pPr>
                       <a:r>
@@ -19557,7 +20332,7 @@
                     <a:bodyPr/>
                     <a:lstStyle/>
                     <a:p>
-                      <a:pPr indent="0" marL="0">
+                      <a:pPr marL="0" indent="0">
                         <a:buNone/>
                       </a:pPr>
                       <a:r>
@@ -19620,7 +20395,7 @@
                     <a:bodyPr/>
                     <a:lstStyle/>
                     <a:p>
-                      <a:pPr indent="0" marL="0">
+                      <a:pPr marL="0" indent="0">
                         <a:buNone/>
                       </a:pPr>
                       <a:r>
@@ -19681,7 +20456,7 @@
                     <a:bodyPr/>
                     <a:lstStyle/>
                     <a:p>
-                      <a:pPr indent="0" marL="0">
+                      <a:pPr marL="0" indent="0">
                         <a:buNone/>
                       </a:pPr>
                       <a:r>
@@ -19744,7 +20519,7 @@
                     <a:bodyPr/>
                     <a:lstStyle/>
                     <a:p>
-                      <a:pPr indent="0" marL="0">
+                      <a:pPr marL="0" indent="0">
                         <a:buNone/>
                       </a:pPr>
                       <a:r>
@@ -19805,7 +20580,7 @@
                     <a:bodyPr/>
                     <a:lstStyle/>
                     <a:p>
-                      <a:pPr indent="0" marL="0">
+                      <a:pPr marL="0" indent="0">
                         <a:buNone/>
                       </a:pPr>
                       <a:r>
@@ -19872,17 +20647,11 @@
           <p:cNvGraphicFramePr>
             <a:graphicFrameLocks noGrp="1"/>
           </p:cNvGraphicFramePr>
-          <p:nvPr>
-            <p:extLst>
-              <p:ext uri="{D42A27DB-BD31-4B8C-83A1-F6EECF244321}">
-                <p14:modId xmlns:p14="http://schemas.microsoft.com/office/powerpoint/2010/main" val="1579011935"/>
-              </p:ext>
-            </p:extLst>
-          </p:nvPr>
+          <p:nvPr/>
         </p:nvGraphicFramePr>
         <p:xfrm>
           <a:off x="8046720" y="1645920"/>
-          <a:ext cx="3566160" cy="914400"/>
+          <a:ext cx="3566160" cy="3566160"/>
         </p:xfrm>
         <a:graphic>
           <a:graphicData uri="http://schemas.openxmlformats.org/drawingml/2006/table">
@@ -19898,7 +20667,7 @@
                     <a:bodyPr/>
                     <a:lstStyle/>
                     <a:p>
-                      <a:pPr indent="0" marL="0">
+                      <a:pPr marL="0" indent="0">
                         <a:buNone/>
                       </a:pPr>
                       <a:r>
@@ -19959,7 +20728,7 @@
                     <a:bodyPr/>
                     <a:lstStyle/>
                     <a:p>
-                      <a:pPr indent="0" marL="0">
+                      <a:pPr marL="0" indent="0">
                         <a:buNone/>
                       </a:pPr>
                       <a:r>
@@ -20022,7 +20791,7 @@
                     <a:bodyPr/>
                     <a:lstStyle/>
                     <a:p>
-                      <a:pPr indent="0" marL="0">
+                      <a:pPr marL="0" indent="0">
                         <a:buNone/>
                       </a:pPr>
                       <a:r>
@@ -20083,7 +20852,7 @@
                     <a:bodyPr/>
                     <a:lstStyle/>
                     <a:p>
-                      <a:pPr indent="0" marL="0">
+                      <a:pPr marL="0" indent="0">
                         <a:buNone/>
                       </a:pPr>
                       <a:r>
@@ -20146,7 +20915,7 @@
                     <a:bodyPr/>
                     <a:lstStyle/>
                     <a:p>
-                      <a:pPr indent="0" marL="0">
+                      <a:pPr marL="0" indent="0">
                         <a:buNone/>
                       </a:pPr>
                       <a:r>
@@ -20207,7 +20976,7 @@
                     <a:bodyPr/>
                     <a:lstStyle/>
                     <a:p>
-                      <a:pPr indent="0" marL="0">
+                      <a:pPr marL="0" indent="0">
                         <a:buNone/>
                       </a:pPr>
                       <a:r>
@@ -20270,7 +21039,7 @@
                     <a:bodyPr/>
                     <a:lstStyle/>
                     <a:p>
-                      <a:pPr indent="0" marL="0">
+                      <a:pPr marL="0" indent="0">
                         <a:buNone/>
                       </a:pPr>
                       <a:r>
@@ -20331,7 +21100,7 @@
                     <a:bodyPr/>
                     <a:lstStyle/>
                     <a:p>
-                      <a:pPr indent="0" marL="0">
+                      <a:pPr marL="0" indent="0">
                         <a:buNone/>
                       </a:pPr>
                       <a:r>
@@ -20394,7 +21163,7 @@
                     <a:bodyPr/>
                     <a:lstStyle/>
                     <a:p>
-                      <a:pPr indent="0" marL="0">
+                      <a:pPr marL="0" indent="0">
                         <a:buNone/>
                       </a:pPr>
                       <a:r>
@@ -20455,7 +21224,7 @@
                     <a:bodyPr/>
                     <a:lstStyle/>
                     <a:p>
-                      <a:pPr indent="0" marL="0">
+                      <a:pPr marL="0" indent="0">
                         <a:buNone/>
                       </a:pPr>
                       <a:r>
@@ -20518,7 +21287,7 @@
                     <a:bodyPr/>
                     <a:lstStyle/>
                     <a:p>
-                      <a:pPr indent="0" marL="0">
+                      <a:pPr marL="0" indent="0">
                         <a:buNone/>
                       </a:pPr>
                       <a:r>
@@ -20579,7 +21348,7 @@
                     <a:bodyPr/>
                     <a:lstStyle/>
                     <a:p>
-                      <a:pPr indent="0" marL="0">
+                      <a:pPr marL="0" indent="0">
                         <a:buNone/>
                       </a:pPr>
                       <a:r>
@@ -20642,7 +21411,7 @@
                     <a:bodyPr/>
                     <a:lstStyle/>
                     <a:p>
-                      <a:pPr indent="0" marL="0">
+                      <a:pPr marL="0" indent="0">
                         <a:buNone/>
                       </a:pPr>
                       <a:r>
@@ -20703,7 +21472,7 @@
                     <a:bodyPr/>
                     <a:lstStyle/>
                     <a:p>
-                      <a:pPr indent="0" marL="0">
+                      <a:pPr marL="0" indent="0">
                         <a:buNone/>
                       </a:pPr>
                       <a:r>
@@ -20766,7 +21535,7 @@
                     <a:bodyPr/>
                     <a:lstStyle/>
                     <a:p>
-                      <a:pPr indent="0" marL="0">
+                      <a:pPr marL="0" indent="0">
                         <a:buNone/>
                       </a:pPr>
                       <a:r>
@@ -20827,7 +21596,7 @@
                     <a:bodyPr/>
                     <a:lstStyle/>
                     <a:p>
-                      <a:pPr indent="0" marL="0">
+                      <a:pPr marL="0" indent="0">
                         <a:buNone/>
                       </a:pPr>
                       <a:r>
@@ -20890,7 +21659,7 @@
                     <a:bodyPr/>
                     <a:lstStyle/>
                     <a:p>
-                      <a:pPr indent="0" marL="0">
+                      <a:pPr marL="0" indent="0">
                         <a:buNone/>
                       </a:pPr>
                       <a:r>
@@ -20951,7 +21720,7 @@
                     <a:bodyPr/>
                     <a:lstStyle/>
                     <a:p>
-                      <a:pPr indent="0" marL="0">
+                      <a:pPr marL="0" indent="0">
                         <a:buNone/>
                       </a:pPr>
                       <a:r>
@@ -21014,7 +21783,7 @@
                     <a:bodyPr/>
                     <a:lstStyle/>
                     <a:p>
-                      <a:pPr indent="0" marL="0">
+                      <a:pPr marL="0" indent="0">
                         <a:buNone/>
                       </a:pPr>
                       <a:r>
@@ -21075,7 +21844,7 @@
                     <a:bodyPr/>
                     <a:lstStyle/>
                     <a:p>
-                      <a:pPr indent="0" marL="0">
+                      <a:pPr marL="0" indent="0">
                         <a:buNone/>
                       </a:pPr>
                       <a:r>
@@ -21138,7 +21907,7 @@
                     <a:bodyPr/>
                     <a:lstStyle/>
                     <a:p>
-                      <a:pPr indent="0" marL="0">
+                      <a:pPr marL="0" indent="0">
                         <a:buNone/>
                       </a:pPr>
                       <a:r>
@@ -21199,7 +21968,7 @@
                     <a:bodyPr/>
                     <a:lstStyle/>
                     <a:p>
-                      <a:pPr indent="0" marL="0">
+                      <a:pPr marL="0" indent="0">
                         <a:buNone/>
                       </a:pPr>
                       <a:r>
@@ -21262,7 +22031,7 @@
                     <a:bodyPr/>
                     <a:lstStyle/>
                     <a:p>
-                      <a:pPr indent="0" marL="0">
+                      <a:pPr marL="0" indent="0">
                         <a:buNone/>
                       </a:pPr>
                       <a:r>
@@ -21323,7 +22092,7 @@
                     <a:bodyPr/>
                     <a:lstStyle/>
                     <a:p>
-                      <a:pPr indent="0" marL="0">
+                      <a:pPr marL="0" indent="0">
                         <a:buNone/>
                       </a:pPr>
                       <a:r>
@@ -21386,7 +22155,7 @@
                     <a:bodyPr/>
                     <a:lstStyle/>
                     <a:p>
-                      <a:pPr indent="0" marL="0">
+                      <a:pPr marL="0" indent="0">
                         <a:buNone/>
                       </a:pPr>
                       <a:r>
@@ -21447,7 +22216,7 @@
                     <a:bodyPr/>
                     <a:lstStyle/>
                     <a:p>
-                      <a:pPr indent="0" marL="0">
+                      <a:pPr marL="0" indent="0">
                         <a:buNone/>
                       </a:pPr>
                       <a:r>
@@ -21518,12 +22287,13 @@
 
 <file path=ppt/slides/slide8.xml><?xml version="1.0" encoding="utf-8"?>
 <p:sld xmlns:a="http://schemas.openxmlformats.org/drawingml/2006/main" xmlns:r="http://schemas.openxmlformats.org/officeDocument/2006/relationships" xmlns:p="http://schemas.openxmlformats.org/presentationml/2006/main">
-  <p:cSld name="Slide 8">
+  <p:cSld>
     <p:bg>
       <p:bgPr>
         <a:solidFill>
           <a:srgbClr val="FFFFFF"/>
         </a:solidFill>
+        <a:effectLst/>
       </p:bgPr>
     </p:bg>
     <p:spTree>
@@ -21555,13 +22325,12 @@
             <a:avLst/>
           </a:prstGeom>
           <a:noFill/>
-          <a:ln/>
         </p:spPr>
         <p:txBody>
           <a:bodyPr wrap="square" lIns="0" tIns="0" rIns="0" bIns="0" rtlCol="0" anchor="ctr"/>
           <a:lstStyle/>
           <a:p>
-            <a:pPr indent="0" marL="0">
+            <a:pPr marL="0" indent="0">
               <a:buNone/>
             </a:pPr>
             <a:r>
@@ -21569,9 +22338,9 @@
                 <a:solidFill>
                   <a:srgbClr val="3B2A5C"/>
                 </a:solidFill>
-                <a:latin typeface="Cambria" pitchFamily="34" charset="0"/>
-                <a:ea typeface="Cambria" pitchFamily="34" charset="-122"/>
-                <a:cs typeface="Cambria" pitchFamily="34" charset="-120"/>
+                <a:latin typeface="Cambria" panose="02040503050406030204" pitchFamily="34" charset="0"/>
+                <a:ea typeface="Cambria" panose="02040503050406030204" pitchFamily="34" charset="-122"/>
+                <a:cs typeface="Cambria" panose="02040503050406030204" pitchFamily="34" charset="-120"/>
               </a:rPr>
               <a:t>Cara membuka produk untuk display</a:t>
             </a:r>
@@ -21594,13 +22363,12 @@
             <a:avLst/>
           </a:prstGeom>
           <a:noFill/>
-          <a:ln/>
         </p:spPr>
         <p:txBody>
           <a:bodyPr wrap="square" lIns="0" tIns="0" rIns="0" bIns="0" rtlCol="0" anchor="ctr"/>
           <a:lstStyle/>
           <a:p>
-            <a:pPr indent="0" marL="0">
+            <a:pPr marL="0" indent="0">
               <a:buNone/>
             </a:pPr>
             <a:r>
@@ -21608,9 +22376,9 @@
                 <a:solidFill>
                   <a:srgbClr val="6B6580"/>
                 </a:solidFill>
-                <a:latin typeface="Calibri" pitchFamily="34" charset="0"/>
-                <a:ea typeface="Calibri" pitchFamily="34" charset="-122"/>
-                <a:cs typeface="Calibri" pitchFamily="34" charset="-120"/>
+                <a:latin typeface="Calibri" panose="020F0502020204030204" pitchFamily="34" charset="0"/>
+                <a:ea typeface="Calibri" panose="020F0502020204030204" pitchFamily="34" charset="-122"/>
+                <a:cs typeface="Calibri" panose="020F0502020204030204" pitchFamily="34" charset="-120"/>
               </a:rPr>
               <a:t>Berlaku untuk sampel display di endcap Thermal</a:t>
             </a:r>
@@ -21685,13 +22453,12 @@
             <a:avLst/>
           </a:prstGeom>
           <a:noFill/>
-          <a:ln/>
         </p:spPr>
         <p:txBody>
           <a:bodyPr wrap="square" lIns="0" tIns="0" rIns="0" bIns="0" rtlCol="0" anchor="ctr"/>
           <a:lstStyle/>
           <a:p>
-            <a:pPr algn="ctr" indent="0" marL="0">
+            <a:pPr marL="0" indent="0" algn="ctr">
               <a:buNone/>
             </a:pPr>
             <a:r>
@@ -21699,9 +22466,9 @@
                 <a:solidFill>
                   <a:srgbClr val="FFFFFF"/>
                 </a:solidFill>
-                <a:latin typeface="Calibri" pitchFamily="34" charset="0"/>
-                <a:ea typeface="Calibri" pitchFamily="34" charset="-122"/>
-                <a:cs typeface="Calibri" pitchFamily="34" charset="-120"/>
+                <a:latin typeface="Calibri" panose="020F0502020204030204" pitchFamily="34" charset="0"/>
+                <a:ea typeface="Calibri" panose="020F0502020204030204" pitchFamily="34" charset="-122"/>
+                <a:cs typeface="Calibri" panose="020F0502020204030204" pitchFamily="34" charset="-120"/>
               </a:rPr>
               <a:t>1</a:t>
             </a:r>
@@ -21724,13 +22491,12 @@
             <a:avLst/>
           </a:prstGeom>
           <a:noFill/>
-          <a:ln/>
         </p:spPr>
         <p:txBody>
           <a:bodyPr wrap="square" lIns="0" tIns="0" rIns="0" bIns="0" rtlCol="0" anchor="ctr"/>
           <a:lstStyle/>
           <a:p>
-            <a:pPr indent="0" marL="0">
+            <a:pPr marL="0" indent="0">
               <a:buNone/>
             </a:pPr>
             <a:r>
@@ -21738,9 +22504,9 @@
                 <a:solidFill>
                   <a:srgbClr val="3B2A5C"/>
                 </a:solidFill>
-                <a:latin typeface="Calibri" pitchFamily="34" charset="0"/>
-                <a:ea typeface="Calibri" pitchFamily="34" charset="-122"/>
-                <a:cs typeface="Calibri" pitchFamily="34" charset="-120"/>
+                <a:latin typeface="Calibri" panose="020F0502020204030204" pitchFamily="34" charset="0"/>
+                <a:ea typeface="Calibri" panose="020F0502020204030204" pitchFamily="34" charset="-122"/>
+                <a:cs typeface="Calibri" panose="020F0502020204030204" pitchFamily="34" charset="-120"/>
               </a:rPr>
               <a:t>Ambil PDQ</a:t>
             </a:r>
@@ -21763,13 +22529,12 @@
             <a:avLst/>
           </a:prstGeom>
           <a:noFill/>
-          <a:ln/>
         </p:spPr>
         <p:txBody>
           <a:bodyPr wrap="square" lIns="0" tIns="0" rIns="0" bIns="0" rtlCol="0" anchor="t"/>
           <a:lstStyle/>
           <a:p>
-            <a:pPr indent="0" marL="0">
+            <a:pPr marL="0" indent="0">
               <a:buNone/>
             </a:pPr>
             <a:r>
@@ -21777,9 +22542,9 @@
                 <a:solidFill>
                   <a:srgbClr val="3B2A5C"/>
                 </a:solidFill>
-                <a:latin typeface="Calibri" pitchFamily="34" charset="0"/>
-                <a:ea typeface="Calibri" pitchFamily="34" charset="-122"/>
-                <a:cs typeface="Calibri" pitchFamily="34" charset="-120"/>
+                <a:latin typeface="Calibri" panose="020F0502020204030204" pitchFamily="34" charset="0"/>
+                <a:ea typeface="Calibri" panose="020F0502020204030204" pitchFamily="34" charset="-122"/>
+                <a:cs typeface="Calibri" panose="020F0502020204030204" pitchFamily="34" charset="-120"/>
               </a:rPr>
               <a:t>Ambil 1 PDQ untuk SKU SMALL dan 1 PDQ untuk SKU LARGE.</a:t>
             </a:r>
@@ -21854,13 +22619,12 @@
             <a:avLst/>
           </a:prstGeom>
           <a:noFill/>
-          <a:ln/>
         </p:spPr>
         <p:txBody>
           <a:bodyPr wrap="square" lIns="0" tIns="0" rIns="0" bIns="0" rtlCol="0" anchor="ctr"/>
           <a:lstStyle/>
           <a:p>
-            <a:pPr algn="ctr" indent="0" marL="0">
+            <a:pPr marL="0" indent="0" algn="ctr">
               <a:buNone/>
             </a:pPr>
             <a:r>
@@ -21868,9 +22632,9 @@
                 <a:solidFill>
                   <a:srgbClr val="FFFFFF"/>
                 </a:solidFill>
-                <a:latin typeface="Calibri" pitchFamily="34" charset="0"/>
-                <a:ea typeface="Calibri" pitchFamily="34" charset="-122"/>
-                <a:cs typeface="Calibri" pitchFamily="34" charset="-120"/>
+                <a:latin typeface="Calibri" panose="020F0502020204030204" pitchFamily="34" charset="0"/>
+                <a:ea typeface="Calibri" panose="020F0502020204030204" pitchFamily="34" charset="-122"/>
+                <a:cs typeface="Calibri" panose="020F0502020204030204" pitchFamily="34" charset="-120"/>
               </a:rPr>
               <a:t>2</a:t>
             </a:r>
@@ -21893,13 +22657,12 @@
             <a:avLst/>
           </a:prstGeom>
           <a:noFill/>
-          <a:ln/>
         </p:spPr>
         <p:txBody>
           <a:bodyPr wrap="square" lIns="0" tIns="0" rIns="0" bIns="0" rtlCol="0" anchor="ctr"/>
           <a:lstStyle/>
           <a:p>
-            <a:pPr indent="0" marL="0">
+            <a:pPr marL="0" indent="0">
               <a:buNone/>
             </a:pPr>
             <a:r>
@@ -21907,9 +22670,9 @@
                 <a:solidFill>
                   <a:srgbClr val="3B2A5C"/>
                 </a:solidFill>
-                <a:latin typeface="Calibri" pitchFamily="34" charset="0"/>
-                <a:ea typeface="Calibri" pitchFamily="34" charset="-122"/>
-                <a:cs typeface="Calibri" pitchFamily="34" charset="-120"/>
+                <a:latin typeface="Calibri" panose="020F0502020204030204" pitchFamily="34" charset="0"/>
+                <a:ea typeface="Calibri" panose="020F0502020204030204" pitchFamily="34" charset="-122"/>
+                <a:cs typeface="Calibri" panose="020F0502020204030204" pitchFamily="34" charset="-120"/>
               </a:rPr>
               <a:t>Buka pelan-pelan</a:t>
             </a:r>
@@ -21932,13 +22695,12 @@
             <a:avLst/>
           </a:prstGeom>
           <a:noFill/>
-          <a:ln/>
         </p:spPr>
         <p:txBody>
           <a:bodyPr wrap="square" lIns="0" tIns="0" rIns="0" bIns="0" rtlCol="0" anchor="t"/>
           <a:lstStyle/>
           <a:p>
-            <a:pPr indent="0" marL="0">
+            <a:pPr marL="0" indent="0">
               <a:buNone/>
             </a:pPr>
             <a:r>
@@ -21946,9 +22708,9 @@
                 <a:solidFill>
                   <a:srgbClr val="3B2A5C"/>
                 </a:solidFill>
-                <a:latin typeface="Calibri" pitchFamily="34" charset="0"/>
-                <a:ea typeface="Calibri" pitchFamily="34" charset="-122"/>
-                <a:cs typeface="Calibri" pitchFamily="34" charset="-120"/>
+                <a:latin typeface="Calibri" panose="020F0502020204030204" pitchFamily="34" charset="0"/>
+                <a:ea typeface="Calibri" panose="020F0502020204030204" pitchFamily="34" charset="-122"/>
+                <a:cs typeface="Calibri" panose="020F0502020204030204" pitchFamily="34" charset="-120"/>
               </a:rPr>
               <a:t>Buka kardus display dengan hati-hati agar struktur kardus tidak rusak.</a:t>
             </a:r>
@@ -22023,13 +22785,12 @@
             <a:avLst/>
           </a:prstGeom>
           <a:noFill/>
-          <a:ln/>
         </p:spPr>
         <p:txBody>
           <a:bodyPr wrap="square" lIns="0" tIns="0" rIns="0" bIns="0" rtlCol="0" anchor="ctr"/>
           <a:lstStyle/>
           <a:p>
-            <a:pPr algn="ctr" indent="0" marL="0">
+            <a:pPr marL="0" indent="0" algn="ctr">
               <a:buNone/>
             </a:pPr>
             <a:r>
@@ -22037,9 +22798,9 @@
                 <a:solidFill>
                   <a:srgbClr val="FFFFFF"/>
                 </a:solidFill>
-                <a:latin typeface="Calibri" pitchFamily="34" charset="0"/>
-                <a:ea typeface="Calibri" pitchFamily="34" charset="-122"/>
-                <a:cs typeface="Calibri" pitchFamily="34" charset="-120"/>
+                <a:latin typeface="Calibri" panose="020F0502020204030204" pitchFamily="34" charset="0"/>
+                <a:ea typeface="Calibri" panose="020F0502020204030204" pitchFamily="34" charset="-122"/>
+                <a:cs typeface="Calibri" panose="020F0502020204030204" pitchFamily="34" charset="-120"/>
               </a:rPr>
               <a:t>3</a:t>
             </a:r>
@@ -22062,13 +22823,12 @@
             <a:avLst/>
           </a:prstGeom>
           <a:noFill/>
-          <a:ln/>
         </p:spPr>
         <p:txBody>
           <a:bodyPr wrap="square" lIns="0" tIns="0" rIns="0" bIns="0" rtlCol="0" anchor="ctr"/>
           <a:lstStyle/>
           <a:p>
-            <a:pPr indent="0" marL="0">
+            <a:pPr marL="0" indent="0">
               <a:buNone/>
             </a:pPr>
             <a:r>
@@ -22076,9 +22836,9 @@
                 <a:solidFill>
                   <a:srgbClr val="3B2A5C"/>
                 </a:solidFill>
-                <a:latin typeface="Calibri" pitchFamily="34" charset="0"/>
-                <a:ea typeface="Calibri" pitchFamily="34" charset="-122"/>
-                <a:cs typeface="Calibri" pitchFamily="34" charset="-120"/>
+                <a:latin typeface="Calibri" panose="020F0502020204030204" pitchFamily="34" charset="0"/>
+                <a:ea typeface="Calibri" panose="020F0502020204030204" pitchFamily="34" charset="-122"/>
+                <a:cs typeface="Calibri" panose="020F0502020204030204" pitchFamily="34" charset="-120"/>
               </a:rPr>
               <a:t>Cek warna</a:t>
             </a:r>
@@ -22101,13 +22861,12 @@
             <a:avLst/>
           </a:prstGeom>
           <a:noFill/>
-          <a:ln/>
         </p:spPr>
         <p:txBody>
           <a:bodyPr wrap="square" lIns="0" tIns="0" rIns="0" bIns="0" rtlCol="0" anchor="t"/>
           <a:lstStyle/>
           <a:p>
-            <a:pPr indent="0" marL="0">
+            <a:pPr marL="0" indent="0">
               <a:buNone/>
             </a:pPr>
             <a:r>
@@ -22115,9 +22874,9 @@
                 <a:solidFill>
                   <a:srgbClr val="3B2A5C"/>
                 </a:solidFill>
-                <a:latin typeface="Calibri" pitchFamily="34" charset="0"/>
-                <a:ea typeface="Calibri" pitchFamily="34" charset="-122"/>
-                <a:cs typeface="Calibri" pitchFamily="34" charset="-120"/>
+                <a:latin typeface="Calibri" panose="020F0502020204030204" pitchFamily="34" charset="0"/>
+                <a:ea typeface="Calibri" panose="020F0502020204030204" pitchFamily="34" charset="-122"/>
+                <a:cs typeface="Calibri" panose="020F0502020204030204" pitchFamily="34" charset="-120"/>
               </a:rPr>
               <a:t>Dalam 1 PDQ warna pasti berbeda, tetapi ada kemungkinan dapat Secret.</a:t>
             </a:r>
@@ -22192,13 +22951,12 @@
             <a:avLst/>
           </a:prstGeom>
           <a:noFill/>
-          <a:ln/>
         </p:spPr>
         <p:txBody>
           <a:bodyPr wrap="square" lIns="0" tIns="0" rIns="0" bIns="0" rtlCol="0" anchor="ctr"/>
           <a:lstStyle/>
           <a:p>
-            <a:pPr algn="ctr" indent="0" marL="0">
+            <a:pPr marL="0" indent="0" algn="ctr">
               <a:buNone/>
             </a:pPr>
             <a:r>
@@ -22206,9 +22964,9 @@
                 <a:solidFill>
                   <a:srgbClr val="FFFFFF"/>
                 </a:solidFill>
-                <a:latin typeface="Calibri" pitchFamily="34" charset="0"/>
-                <a:ea typeface="Calibri" pitchFamily="34" charset="-122"/>
-                <a:cs typeface="Calibri" pitchFamily="34" charset="-120"/>
+                <a:latin typeface="Calibri" panose="020F0502020204030204" pitchFamily="34" charset="0"/>
+                <a:ea typeface="Calibri" panose="020F0502020204030204" pitchFamily="34" charset="-122"/>
+                <a:cs typeface="Calibri" panose="020F0502020204030204" pitchFamily="34" charset="-120"/>
               </a:rPr>
               <a:t>4</a:t>
             </a:r>
@@ -22231,13 +22989,12 @@
             <a:avLst/>
           </a:prstGeom>
           <a:noFill/>
-          <a:ln/>
         </p:spPr>
         <p:txBody>
           <a:bodyPr wrap="square" lIns="0" tIns="0" rIns="0" bIns="0" rtlCol="0" anchor="ctr"/>
           <a:lstStyle/>
           <a:p>
-            <a:pPr indent="0" marL="0">
+            <a:pPr marL="0" indent="0">
               <a:buNone/>
             </a:pPr>
             <a:r>
@@ -22245,9 +23002,9 @@
                 <a:solidFill>
                   <a:srgbClr val="3B2A5C"/>
                 </a:solidFill>
-                <a:latin typeface="Calibri" pitchFamily="34" charset="0"/>
-                <a:ea typeface="Calibri" pitchFamily="34" charset="-122"/>
-                <a:cs typeface="Calibri" pitchFamily="34" charset="-120"/>
+                <a:latin typeface="Calibri" panose="020F0502020204030204" pitchFamily="34" charset="0"/>
+                <a:ea typeface="Calibri" panose="020F0502020204030204" pitchFamily="34" charset="-122"/>
+                <a:cs typeface="Calibri" panose="020F0502020204030204" pitchFamily="34" charset="-120"/>
               </a:rPr>
               <a:t>Display</a:t>
             </a:r>
@@ -22270,13 +23027,12 @@
             <a:avLst/>
           </a:prstGeom>
           <a:noFill/>
-          <a:ln/>
         </p:spPr>
         <p:txBody>
           <a:bodyPr wrap="square" lIns="0" tIns="0" rIns="0" bIns="0" rtlCol="0" anchor="t"/>
           <a:lstStyle/>
           <a:p>
-            <a:pPr indent="0" marL="0">
+            <a:pPr marL="0" indent="0">
               <a:buNone/>
             </a:pPr>
             <a:r>
@@ -22284,9 +23040,9 @@
                 <a:solidFill>
                   <a:srgbClr val="3B2A5C"/>
                 </a:solidFill>
-                <a:latin typeface="Calibri" pitchFamily="34" charset="0"/>
-                <a:ea typeface="Calibri" pitchFamily="34" charset="-122"/>
-                <a:cs typeface="Calibri" pitchFamily="34" charset="-120"/>
+                <a:latin typeface="Calibri" panose="020F0502020204030204" pitchFamily="34" charset="0"/>
+                <a:ea typeface="Calibri" panose="020F0502020204030204" pitchFamily="34" charset="-122"/>
+                <a:cs typeface="Calibri" panose="020F0502020204030204" pitchFamily="34" charset="-120"/>
               </a:rPr>
               <a:t>Display 6 warna. Jika dapat Secret, amankan dulu dan display 5 warna.</a:t>
             </a:r>
@@ -22386,13 +23142,12 @@
             <a:avLst/>
           </a:prstGeom>
           <a:noFill/>
-          <a:ln/>
         </p:spPr>
         <p:txBody>
           <a:bodyPr wrap="square" lIns="0" tIns="0" rIns="0" bIns="0" rtlCol="0" anchor="ctr"/>
           <a:lstStyle/>
           <a:p>
-            <a:pPr indent="0" marL="0">
+            <a:pPr marL="0" indent="0">
               <a:buNone/>
             </a:pPr>
             <a:r>
@@ -22400,16 +23155,16 @@
                 <a:solidFill>
                   <a:srgbClr val="FFFFFF"/>
                 </a:solidFill>
-                <a:latin typeface="Calibri" pitchFamily="34" charset="0"/>
-                <a:ea typeface="Calibri" pitchFamily="34" charset="-122"/>
-                <a:cs typeface="Calibri" pitchFamily="34" charset="-120"/>
+                <a:latin typeface="Calibri" panose="020F0502020204030204" pitchFamily="34" charset="0"/>
+                <a:ea typeface="Calibri" panose="020F0502020204030204" pitchFamily="34" charset="-122"/>
+                <a:cs typeface="Calibri" panose="020F0502020204030204" pitchFamily="34" charset="-120"/>
               </a:rPr>
               <a:t>Ikuti video tutorial membuka produk dari MD</a:t>
             </a:r>
             <a:endParaRPr lang="en-US" sz="2000" dirty="0"/>
           </a:p>
           <a:p>
-            <a:pPr indent="0" marL="0">
+            <a:pPr marL="0" indent="0">
               <a:buNone/>
             </a:pPr>
             <a:r>
@@ -22417,9 +23172,9 @@
                 <a:solidFill>
                   <a:srgbClr val="F8C6DE"/>
                 </a:solidFill>
-                <a:latin typeface="Calibri" pitchFamily="34" charset="0"/>
-                <a:ea typeface="Calibri" pitchFamily="34" charset="-122"/>
-                <a:cs typeface="Calibri" pitchFamily="34" charset="-120"/>
+                <a:latin typeface="Calibri" panose="020F0502020204030204" pitchFamily="34" charset="0"/>
+                <a:ea typeface="Calibri" panose="020F0502020204030204" pitchFamily="34" charset="-122"/>
+                <a:cs typeface="Calibri" panose="020F0502020204030204" pitchFamily="34" charset="-120"/>
               </a:rPr>
               <a:t>Video tutorial dikirim oleh tim MD. Ikuti urutan dan cara bukanya.</a:t>
             </a:r>
@@ -22437,12 +23192,13 @@
 
 <file path=ppt/slides/slide9.xml><?xml version="1.0" encoding="utf-8"?>
 <p:sld xmlns:a="http://schemas.openxmlformats.org/drawingml/2006/main" xmlns:r="http://schemas.openxmlformats.org/officeDocument/2006/relationships" xmlns:p="http://schemas.openxmlformats.org/presentationml/2006/main">
-  <p:cSld name="Slide 9">
+  <p:cSld>
     <p:bg>
       <p:bgPr>
         <a:solidFill>
           <a:srgbClr val="FFFFFF"/>
         </a:solidFill>
+        <a:effectLst/>
       </p:bgPr>
     </p:bg>
     <p:spTree>
@@ -22474,13 +23230,12 @@
             <a:avLst/>
           </a:prstGeom>
           <a:noFill/>
-          <a:ln/>
         </p:spPr>
         <p:txBody>
           <a:bodyPr wrap="square" lIns="0" tIns="0" rIns="0" bIns="0" rtlCol="0" anchor="ctr"/>
           <a:lstStyle/>
           <a:p>
-            <a:pPr indent="0" marL="0">
+            <a:pPr marL="0" indent="0">
               <a:buNone/>
             </a:pPr>
             <a:r>
@@ -22488,9 +23243,9 @@
                 <a:solidFill>
                   <a:srgbClr val="3B2A5C"/>
                 </a:solidFill>
-                <a:latin typeface="Cambria" pitchFamily="34" charset="0"/>
-                <a:ea typeface="Cambria" pitchFamily="34" charset="-122"/>
-                <a:cs typeface="Cambria" pitchFamily="34" charset="-120"/>
+                <a:latin typeface="Cambria" panose="02040503050406030204" pitchFamily="34" charset="0"/>
+                <a:ea typeface="Cambria" panose="02040503050406030204" pitchFamily="34" charset="-122"/>
+                <a:cs typeface="Cambria" panose="02040503050406030204" pitchFamily="34" charset="-120"/>
               </a:rPr>
               <a:t>Buka 6 warna, header, dan POP</a:t>
             </a:r>
@@ -22513,13 +23268,12 @@
             <a:avLst/>
           </a:prstGeom>
           <a:noFill/>
-          <a:ln/>
         </p:spPr>
         <p:txBody>
           <a:bodyPr wrap="square" lIns="0" tIns="0" rIns="0" bIns="0" rtlCol="0" anchor="ctr"/>
           <a:lstStyle/>
           <a:p>
-            <a:pPr indent="0" marL="0">
+            <a:pPr marL="0" indent="0">
               <a:buNone/>
             </a:pPr>
             <a:r>
@@ -22527,9 +23281,9 @@
                 <a:solidFill>
                   <a:srgbClr val="3B2A5C"/>
                 </a:solidFill>
-                <a:latin typeface="Calibri" pitchFamily="34" charset="0"/>
-                <a:ea typeface="Calibri" pitchFamily="34" charset="-122"/>
-                <a:cs typeface="Calibri" pitchFamily="34" charset="-120"/>
+                <a:latin typeface="Calibri" panose="020F0502020204030204" pitchFamily="34" charset="0"/>
+                <a:ea typeface="Calibri" panose="020F0502020204030204" pitchFamily="34" charset="-122"/>
+                <a:cs typeface="Calibri" panose="020F0502020204030204" pitchFamily="34" charset="-120"/>
               </a:rPr>
               <a:t>Warna yang dibuka di display</a:t>
             </a:r>
@@ -22579,13 +23333,12 @@
             <a:avLst/>
           </a:prstGeom>
           <a:noFill/>
-          <a:ln/>
         </p:spPr>
         <p:txBody>
           <a:bodyPr wrap="square" lIns="0" tIns="0" rIns="0" bIns="0" rtlCol="0" anchor="ctr"/>
           <a:lstStyle/>
           <a:p>
-            <a:pPr algn="ctr" indent="0" marL="0">
+            <a:pPr marL="0" indent="0" algn="ctr">
               <a:buNone/>
             </a:pPr>
             <a:r>
@@ -22593,9 +23346,9 @@
                 <a:solidFill>
                   <a:srgbClr val="3B2A5C"/>
                 </a:solidFill>
-                <a:latin typeface="Calibri" pitchFamily="34" charset="0"/>
-                <a:ea typeface="Calibri" pitchFamily="34" charset="-122"/>
-                <a:cs typeface="Calibri" pitchFamily="34" charset="-120"/>
+                <a:latin typeface="Calibri" panose="020F0502020204030204" pitchFamily="34" charset="0"/>
+                <a:ea typeface="Calibri" panose="020F0502020204030204" pitchFamily="34" charset="-122"/>
+                <a:cs typeface="Calibri" panose="020F0502020204030204" pitchFamily="34" charset="-120"/>
               </a:rPr>
               <a:t>Warna 1</a:t>
             </a:r>
@@ -22645,13 +23398,12 @@
             <a:avLst/>
           </a:prstGeom>
           <a:noFill/>
-          <a:ln/>
         </p:spPr>
         <p:txBody>
           <a:bodyPr wrap="square" lIns="0" tIns="0" rIns="0" bIns="0" rtlCol="0" anchor="ctr"/>
           <a:lstStyle/>
           <a:p>
-            <a:pPr algn="ctr" indent="0" marL="0">
+            <a:pPr marL="0" indent="0" algn="ctr">
               <a:buNone/>
             </a:pPr>
             <a:r>
@@ -22659,9 +23411,9 @@
                 <a:solidFill>
                   <a:srgbClr val="3B2A5C"/>
                 </a:solidFill>
-                <a:latin typeface="Calibri" pitchFamily="34" charset="0"/>
-                <a:ea typeface="Calibri" pitchFamily="34" charset="-122"/>
-                <a:cs typeface="Calibri" pitchFamily="34" charset="-120"/>
+                <a:latin typeface="Calibri" panose="020F0502020204030204" pitchFamily="34" charset="0"/>
+                <a:ea typeface="Calibri" panose="020F0502020204030204" pitchFamily="34" charset="-122"/>
+                <a:cs typeface="Calibri" panose="020F0502020204030204" pitchFamily="34" charset="-120"/>
               </a:rPr>
               <a:t>Warna 2</a:t>
             </a:r>
@@ -22711,13 +23463,12 @@
             <a:avLst/>
           </a:prstGeom>
           <a:noFill/>
-          <a:ln/>
         </p:spPr>
         <p:txBody>
           <a:bodyPr wrap="square" lIns="0" tIns="0" rIns="0" bIns="0" rtlCol="0" anchor="ctr"/>
           <a:lstStyle/>
           <a:p>
-            <a:pPr algn="ctr" indent="0" marL="0">
+            <a:pPr marL="0" indent="0" algn="ctr">
               <a:buNone/>
             </a:pPr>
             <a:r>
@@ -22725,9 +23476,9 @@
                 <a:solidFill>
                   <a:srgbClr val="3B2A5C"/>
                 </a:solidFill>
-                <a:latin typeface="Calibri" pitchFamily="34" charset="0"/>
-                <a:ea typeface="Calibri" pitchFamily="34" charset="-122"/>
-                <a:cs typeface="Calibri" pitchFamily="34" charset="-120"/>
+                <a:latin typeface="Calibri" panose="020F0502020204030204" pitchFamily="34" charset="0"/>
+                <a:ea typeface="Calibri" panose="020F0502020204030204" pitchFamily="34" charset="-122"/>
+                <a:cs typeface="Calibri" panose="020F0502020204030204" pitchFamily="34" charset="-120"/>
               </a:rPr>
               <a:t>Warna 3</a:t>
             </a:r>
@@ -22777,13 +23528,12 @@
             <a:avLst/>
           </a:prstGeom>
           <a:noFill/>
-          <a:ln/>
         </p:spPr>
         <p:txBody>
           <a:bodyPr wrap="square" lIns="0" tIns="0" rIns="0" bIns="0" rtlCol="0" anchor="ctr"/>
           <a:lstStyle/>
           <a:p>
-            <a:pPr algn="ctr" indent="0" marL="0">
+            <a:pPr marL="0" indent="0" algn="ctr">
               <a:buNone/>
             </a:pPr>
             <a:r>
@@ -22791,9 +23541,9 @@
                 <a:solidFill>
                   <a:srgbClr val="3B2A5C"/>
                 </a:solidFill>
-                <a:latin typeface="Calibri" pitchFamily="34" charset="0"/>
-                <a:ea typeface="Calibri" pitchFamily="34" charset="-122"/>
-                <a:cs typeface="Calibri" pitchFamily="34" charset="-120"/>
+                <a:latin typeface="Calibri" panose="020F0502020204030204" pitchFamily="34" charset="0"/>
+                <a:ea typeface="Calibri" panose="020F0502020204030204" pitchFamily="34" charset="-122"/>
+                <a:cs typeface="Calibri" panose="020F0502020204030204" pitchFamily="34" charset="-120"/>
               </a:rPr>
               <a:t>Warna 4</a:t>
             </a:r>
@@ -22843,13 +23593,12 @@
             <a:avLst/>
           </a:prstGeom>
           <a:noFill/>
-          <a:ln/>
         </p:spPr>
         <p:txBody>
           <a:bodyPr wrap="square" lIns="0" tIns="0" rIns="0" bIns="0" rtlCol="0" anchor="ctr"/>
           <a:lstStyle/>
           <a:p>
-            <a:pPr algn="ctr" indent="0" marL="0">
+            <a:pPr marL="0" indent="0" algn="ctr">
               <a:buNone/>
             </a:pPr>
             <a:r>
@@ -22857,9 +23606,9 @@
                 <a:solidFill>
                   <a:srgbClr val="3B2A5C"/>
                 </a:solidFill>
-                <a:latin typeface="Calibri" pitchFamily="34" charset="0"/>
-                <a:ea typeface="Calibri" pitchFamily="34" charset="-122"/>
-                <a:cs typeface="Calibri" pitchFamily="34" charset="-120"/>
+                <a:latin typeface="Calibri" panose="020F0502020204030204" pitchFamily="34" charset="0"/>
+                <a:ea typeface="Calibri" panose="020F0502020204030204" pitchFamily="34" charset="-122"/>
+                <a:cs typeface="Calibri" panose="020F0502020204030204" pitchFamily="34" charset="-120"/>
               </a:rPr>
               <a:t>Warna 5</a:t>
             </a:r>
@@ -22909,13 +23658,12 @@
             <a:avLst/>
           </a:prstGeom>
           <a:noFill/>
-          <a:ln/>
         </p:spPr>
         <p:txBody>
           <a:bodyPr wrap="square" lIns="0" tIns="0" rIns="0" bIns="0" rtlCol="0" anchor="ctr"/>
           <a:lstStyle/>
           <a:p>
-            <a:pPr algn="ctr" indent="0" marL="0">
+            <a:pPr marL="0" indent="0" algn="ctr">
               <a:buNone/>
             </a:pPr>
             <a:r>
@@ -22923,9 +23671,9 @@
                 <a:solidFill>
                   <a:srgbClr val="3B2A5C"/>
                 </a:solidFill>
-                <a:latin typeface="Calibri" pitchFamily="34" charset="0"/>
-                <a:ea typeface="Calibri" pitchFamily="34" charset="-122"/>
-                <a:cs typeface="Calibri" pitchFamily="34" charset="-120"/>
+                <a:latin typeface="Calibri" panose="020F0502020204030204" pitchFamily="34" charset="0"/>
+                <a:ea typeface="Calibri" panose="020F0502020204030204" pitchFamily="34" charset="-122"/>
+                <a:cs typeface="Calibri" panose="020F0502020204030204" pitchFamily="34" charset="-120"/>
               </a:rPr>
               <a:t>Warna 6</a:t>
             </a:r>
@@ -22975,13 +23723,12 @@
             <a:avLst/>
           </a:prstGeom>
           <a:noFill/>
-          <a:ln/>
         </p:spPr>
         <p:txBody>
           <a:bodyPr wrap="square" lIns="0" tIns="0" rIns="0" bIns="0" rtlCol="0" anchor="ctr"/>
           <a:lstStyle/>
           <a:p>
-            <a:pPr indent="0" marL="0">
+            <a:pPr marL="0" indent="0">
               <a:buNone/>
             </a:pPr>
             <a:r>
@@ -22989,9 +23736,9 @@
                 <a:solidFill>
                   <a:srgbClr val="3B2A5C"/>
                 </a:solidFill>
-                <a:latin typeface="Calibri" pitchFamily="34" charset="0"/>
-                <a:ea typeface="Calibri" pitchFamily="34" charset="-122"/>
-                <a:cs typeface="Calibri" pitchFamily="34" charset="-120"/>
+                <a:latin typeface="Calibri" panose="020F0502020204030204" pitchFamily="34" charset="0"/>
+                <a:ea typeface="Calibri" panose="020F0502020204030204" pitchFamily="34" charset="-122"/>
+                <a:cs typeface="Calibri" panose="020F0502020204030204" pitchFamily="34" charset="-120"/>
               </a:rPr>
               <a:t>Dapat Secret di dalam PDQ? Amankan dulu, lalu display 5 warna.</a:t>
             </a:r>
@@ -23014,13 +23761,12 @@
             <a:avLst/>
           </a:prstGeom>
           <a:noFill/>
-          <a:ln/>
         </p:spPr>
         <p:txBody>
           <a:bodyPr wrap="square" lIns="0" tIns="0" rIns="0" bIns="0" rtlCol="0" anchor="ctr"/>
           <a:lstStyle/>
           <a:p>
-            <a:pPr indent="0" marL="0">
+            <a:pPr marL="0" indent="0">
               <a:buNone/>
             </a:pPr>
             <a:r>
@@ -23028,9 +23774,9 @@
                 <a:solidFill>
                   <a:srgbClr val="3B2A5C"/>
                 </a:solidFill>
-                <a:latin typeface="Calibri" pitchFamily="34" charset="0"/>
-                <a:ea typeface="Calibri" pitchFamily="34" charset="-122"/>
-                <a:cs typeface="Calibri" pitchFamily="34" charset="-120"/>
+                <a:latin typeface="Calibri" panose="020F0502020204030204" pitchFamily="34" charset="0"/>
+                <a:ea typeface="Calibri" panose="020F0502020204030204" pitchFamily="34" charset="-122"/>
+                <a:cs typeface="Calibri" panose="020F0502020204030204" pitchFamily="34" charset="-120"/>
               </a:rPr>
               <a:t>Header dan POP sementara</a:t>
             </a:r>
@@ -23080,13 +23826,12 @@
             <a:avLst/>
           </a:prstGeom>
           <a:noFill/>
-          <a:ln/>
         </p:spPr>
         <p:txBody>
           <a:bodyPr wrap="square" lIns="0" tIns="0" rIns="0" bIns="0" rtlCol="0" anchor="ctr"/>
           <a:lstStyle/>
           <a:p>
-            <a:pPr algn="ctr" indent="0" marL="0">
+            <a:pPr marL="0" indent="0" algn="ctr">
               <a:buNone/>
             </a:pPr>
             <a:r>
@@ -23094,9 +23839,9 @@
                 <a:solidFill>
                   <a:srgbClr val="6B6580"/>
                 </a:solidFill>
-                <a:latin typeface="Calibri" pitchFamily="34" charset="0"/>
-                <a:ea typeface="Calibri" pitchFamily="34" charset="-122"/>
-                <a:cs typeface="Calibri" pitchFamily="34" charset="-120"/>
+                <a:latin typeface="Calibri" panose="020F0502020204030204" pitchFamily="34" charset="0"/>
+                <a:ea typeface="Calibri" panose="020F0502020204030204" pitchFamily="34" charset="-122"/>
+                <a:cs typeface="Calibri" panose="020F0502020204030204" pitchFamily="34" charset="-120"/>
               </a:rPr>
               <a:t>Lampirkan file POP A4</a:t>
             </a:r>
@@ -23119,7 +23864,6 @@
             <a:avLst/>
           </a:prstGeom>
           <a:noFill/>
-          <a:ln/>
         </p:spPr>
         <p:txBody>
           <a:bodyPr wrap="square" lIns="0" tIns="0" rIns="0" bIns="0" rtlCol="0" anchor="t"/>
@@ -23137,9 +23881,9 @@
                 <a:solidFill>
                   <a:srgbClr val="3B2A5C"/>
                 </a:solidFill>
-                <a:latin typeface="Calibri" pitchFamily="34" charset="0"/>
-                <a:ea typeface="Calibri" pitchFamily="34" charset="-122"/>
-                <a:cs typeface="Calibri" pitchFamily="34" charset="-120"/>
+                <a:latin typeface="Calibri" panose="020F0502020204030204" pitchFamily="34" charset="0"/>
+                <a:ea typeface="Calibri" panose="020F0502020204030204" pitchFamily="34" charset="-122"/>
+                <a:cs typeface="Calibri" panose="020F0502020204030204" pitchFamily="34" charset="-120"/>
               </a:rPr>
               <a:t>Header dikirim tim VM dari Jakarta, pasang saat tiba</a:t>
             </a:r>
@@ -23158,9 +23902,9 @@
                 <a:solidFill>
                   <a:srgbClr val="3B2A5C"/>
                 </a:solidFill>
-                <a:latin typeface="Calibri" pitchFamily="34" charset="0"/>
-                <a:ea typeface="Calibri" pitchFamily="34" charset="-122"/>
-                <a:cs typeface="Calibri" pitchFamily="34" charset="-120"/>
+                <a:latin typeface="Calibri" panose="020F0502020204030204" pitchFamily="34" charset="0"/>
+                <a:ea typeface="Calibri" panose="020F0502020204030204" pitchFamily="34" charset="-122"/>
+                <a:cs typeface="Calibri" panose="020F0502020204030204" pitchFamily="34" charset="-120"/>
               </a:rPr>
               <a:t>Display tiba lebih dulu dari materi komunikasi: cetak POP A4 sementara dari Head Office</a:t>
             </a:r>
@@ -23179,9 +23923,9 @@
                 <a:solidFill>
                   <a:srgbClr val="3B2A5C"/>
                 </a:solidFill>
-                <a:latin typeface="Calibri" pitchFamily="34" charset="0"/>
-                <a:ea typeface="Calibri" pitchFamily="34" charset="-122"/>
-                <a:cs typeface="Calibri" pitchFamily="34" charset="-120"/>
+                <a:latin typeface="Calibri" panose="020F0502020204030204" pitchFamily="34" charset="0"/>
+                <a:ea typeface="Calibri" panose="020F0502020204030204" pitchFamily="34" charset="-122"/>
+                <a:cs typeface="Calibri" panose="020F0502020204030204" pitchFamily="34" charset="-120"/>
               </a:rPr>
               <a:t>Cetak wajib di percetakan</a:t>
             </a:r>
@@ -23200,9 +23944,9 @@
                 <a:solidFill>
                   <a:srgbClr val="3B2A5C"/>
                 </a:solidFill>
-                <a:latin typeface="Calibri" pitchFamily="34" charset="0"/>
-                <a:ea typeface="Calibri" pitchFamily="34" charset="-122"/>
-                <a:cs typeface="Calibri" pitchFamily="34" charset="-120"/>
+                <a:latin typeface="Calibri" panose="020F0502020204030204" pitchFamily="34" charset="0"/>
+                <a:ea typeface="Calibri" panose="020F0502020204030204" pitchFamily="34" charset="-122"/>
+                <a:cs typeface="Calibri" panose="020F0502020204030204" pitchFamily="34" charset="-120"/>
               </a:rPr>
               <a:t>Dipakai sampai Media Produk Info dari VM terpasang</a:t>
             </a:r>
@@ -23261,7 +24005,7 @@
     </a:clrScheme>
     <a:fontScheme name="Office">
       <a:majorFont>
-        <a:latin typeface="Calibri Light" panose="020F0302020204030204"/>
+        <a:latin typeface="Calibri Light"/>
         <a:ea typeface=""/>
         <a:cs typeface=""/>
         <a:font script="Jpan" typeface="游ゴシック Light"/>
@@ -23294,26 +24038,9 @@
         <a:font script="Viet" typeface="Times New Roman"/>
         <a:font script="Uigh" typeface="Microsoft Uighur"/>
         <a:font script="Geor" typeface="Sylfaen"/>
-        <a:font script="Armn" typeface="Arial"/>
-        <a:font script="Bugi" typeface="Leelawadee UI"/>
-        <a:font script="Bopo" typeface="Microsoft JhengHei"/>
-        <a:font script="Java" typeface="Javanese Text"/>
-        <a:font script="Lisu" typeface="Segoe UI"/>
-        <a:font script="Mymr" typeface="Myanmar Text"/>
-        <a:font script="Nkoo" typeface="Ebrima"/>
-        <a:font script="Olck" typeface="Nirmala UI"/>
-        <a:font script="Osma" typeface="Ebrima"/>
-        <a:font script="Phag" typeface="Phagspa"/>
-        <a:font script="Syrn" typeface="Estrangelo Edessa"/>
-        <a:font script="Syrj" typeface="Estrangelo Edessa"/>
-        <a:font script="Syre" typeface="Estrangelo Edessa"/>
-        <a:font script="Sora" typeface="Nirmala UI"/>
-        <a:font script="Tale" typeface="Microsoft Tai Le"/>
-        <a:font script="Talu" typeface="Microsoft New Tai Lue"/>
-        <a:font script="Tfng" typeface="Ebrima"/>
       </a:majorFont>
       <a:minorFont>
-        <a:latin typeface="Calibri" panose="020F0502020204030204"/>
+        <a:latin typeface="Calibri"/>
         <a:ea typeface=""/>
         <a:cs typeface=""/>
         <a:font script="Jpan" typeface="游ゴシック"/>
@@ -23346,23 +24073,6 @@
         <a:font script="Viet" typeface="Arial"/>
         <a:font script="Uigh" typeface="Microsoft Uighur"/>
         <a:font script="Geor" typeface="Sylfaen"/>
-        <a:font script="Armn" typeface="Arial"/>
-        <a:font script="Bugi" typeface="Leelawadee UI"/>
-        <a:font script="Bopo" typeface="Microsoft JhengHei"/>
-        <a:font script="Java" typeface="Javanese Text"/>
-        <a:font script="Lisu" typeface="Segoe UI"/>
-        <a:font script="Mymr" typeface="Myanmar Text"/>
-        <a:font script="Nkoo" typeface="Ebrima"/>
-        <a:font script="Olck" typeface="Nirmala UI"/>
-        <a:font script="Osma" typeface="Ebrima"/>
-        <a:font script="Phag" typeface="Phagspa"/>
-        <a:font script="Syrn" typeface="Estrangelo Edessa"/>
-        <a:font script="Syrj" typeface="Estrangelo Edessa"/>
-        <a:font script="Syre" typeface="Estrangelo Edessa"/>
-        <a:font script="Sora" typeface="Nirmala UI"/>
-        <a:font script="Tale" typeface="Microsoft Tai Le"/>
-        <a:font script="Talu" typeface="Microsoft New Tai Lue"/>
-        <a:font script="Tfng" typeface="Ebrima"/>
       </a:minorFont>
     </a:fontScheme>
     <a:fmtScheme name="Office">
@@ -23503,8 +24213,265 @@
       </a:bgFillStyleLst>
     </a:fmtScheme>
   </a:themeElements>
-  <a:objectDefaults/>
-  <a:extraClrSchemeLst/>
+  <a:extLst>
+    <a:ext uri="{05A4C25C-085E-4340-85A3-A5531E510DB2}">
+      <thm15:themeFamily xmlns:thm15="http://schemas.microsoft.com/office/thememl/2012/main" name="Office Theme" id="{62F939B6-93AF-4DB8-9C6B-D6C7DFDC589F}" vid="{4A3C46E8-61CC-4603-A589-7422A47A8E4A}"/>
+    </a:ext>
+  </a:extLst>
+</a:theme>
+</file>
+
+<file path=ppt/theme/theme2.xml><?xml version="1.0" encoding="utf-8"?>
+<a:theme xmlns:a="http://schemas.openxmlformats.org/drawingml/2006/main" name="Office Theme">
+  <a:themeElements>
+    <a:clrScheme name="Office">
+      <a:dk1>
+        <a:sysClr val="windowText" lastClr="000000"/>
+      </a:dk1>
+      <a:lt1>
+        <a:sysClr val="window" lastClr="FFFFFF"/>
+      </a:lt1>
+      <a:dk2>
+        <a:srgbClr val="44546A"/>
+      </a:dk2>
+      <a:lt2>
+        <a:srgbClr val="E7E6E6"/>
+      </a:lt2>
+      <a:accent1>
+        <a:srgbClr val="4472C4"/>
+      </a:accent1>
+      <a:accent2>
+        <a:srgbClr val="ED7D31"/>
+      </a:accent2>
+      <a:accent3>
+        <a:srgbClr val="A5A5A5"/>
+      </a:accent3>
+      <a:accent4>
+        <a:srgbClr val="FFC000"/>
+      </a:accent4>
+      <a:accent5>
+        <a:srgbClr val="5B9BD5"/>
+      </a:accent5>
+      <a:accent6>
+        <a:srgbClr val="70AD47"/>
+      </a:accent6>
+      <a:hlink>
+        <a:srgbClr val="0563C1"/>
+      </a:hlink>
+      <a:folHlink>
+        <a:srgbClr val="954F72"/>
+      </a:folHlink>
+    </a:clrScheme>
+    <a:fontScheme name="Office">
+      <a:majorFont>
+        <a:latin typeface="Calibri Light"/>
+        <a:ea typeface=""/>
+        <a:cs typeface=""/>
+        <a:font script="Jpan" typeface="游ゴシック Light"/>
+        <a:font script="Hang" typeface="맑은 고딕"/>
+        <a:font script="Hans" typeface="等线 Light"/>
+        <a:font script="Hant" typeface="新細明體"/>
+        <a:font script="Arab" typeface="Times New Roman"/>
+        <a:font script="Hebr" typeface="Times New Roman"/>
+        <a:font script="Thai" typeface="Angsana New"/>
+        <a:font script="Ethi" typeface="Nyala"/>
+        <a:font script="Beng" typeface="Vrinda"/>
+        <a:font script="Gujr" typeface="Shruti"/>
+        <a:font script="Khmr" typeface="MoolBoran"/>
+        <a:font script="Knda" typeface="Tunga"/>
+        <a:font script="Guru" typeface="Raavi"/>
+        <a:font script="Cans" typeface="Euphemia"/>
+        <a:font script="Cher" typeface="Plantagenet Cherokee"/>
+        <a:font script="Yiii" typeface="Microsoft Yi Baiti"/>
+        <a:font script="Tibt" typeface="Microsoft Himalaya"/>
+        <a:font script="Thaa" typeface="MV Boli"/>
+        <a:font script="Deva" typeface="Mangal"/>
+        <a:font script="Telu" typeface="Gautami"/>
+        <a:font script="Taml" typeface="Latha"/>
+        <a:font script="Syrc" typeface="Estrangelo Edessa"/>
+        <a:font script="Orya" typeface="Kalinga"/>
+        <a:font script="Mlym" typeface="Kartika"/>
+        <a:font script="Laoo" typeface="DokChampa"/>
+        <a:font script="Sinh" typeface="Iskoola Pota"/>
+        <a:font script="Mong" typeface="Mongolian Baiti"/>
+        <a:font script="Viet" typeface="Times New Roman"/>
+        <a:font script="Uigh" typeface="Microsoft Uighur"/>
+        <a:font script="Geor" typeface="Sylfaen"/>
+      </a:majorFont>
+      <a:minorFont>
+        <a:latin typeface="Calibri"/>
+        <a:ea typeface=""/>
+        <a:cs typeface=""/>
+        <a:font script="Jpan" typeface="游ゴシック"/>
+        <a:font script="Hang" typeface="맑은 고딕"/>
+        <a:font script="Hans" typeface="等线"/>
+        <a:font script="Hant" typeface="新細明體"/>
+        <a:font script="Arab" typeface="Arial"/>
+        <a:font script="Hebr" typeface="Arial"/>
+        <a:font script="Thai" typeface="Cordia New"/>
+        <a:font script="Ethi" typeface="Nyala"/>
+        <a:font script="Beng" typeface="Vrinda"/>
+        <a:font script="Gujr" typeface="Shruti"/>
+        <a:font script="Khmr" typeface="DaunPenh"/>
+        <a:font script="Knda" typeface="Tunga"/>
+        <a:font script="Guru" typeface="Raavi"/>
+        <a:font script="Cans" typeface="Euphemia"/>
+        <a:font script="Cher" typeface="Plantagenet Cherokee"/>
+        <a:font script="Yiii" typeface="Microsoft Yi Baiti"/>
+        <a:font script="Tibt" typeface="Microsoft Himalaya"/>
+        <a:font script="Thaa" typeface="MV Boli"/>
+        <a:font script="Deva" typeface="Mangal"/>
+        <a:font script="Telu" typeface="Gautami"/>
+        <a:font script="Taml" typeface="Latha"/>
+        <a:font script="Syrc" typeface="Estrangelo Edessa"/>
+        <a:font script="Orya" typeface="Kalinga"/>
+        <a:font script="Mlym" typeface="Kartika"/>
+        <a:font script="Laoo" typeface="DokChampa"/>
+        <a:font script="Sinh" typeface="Iskoola Pota"/>
+        <a:font script="Mong" typeface="Mongolian Baiti"/>
+        <a:font script="Viet" typeface="Arial"/>
+        <a:font script="Uigh" typeface="Microsoft Uighur"/>
+        <a:font script="Geor" typeface="Sylfaen"/>
+      </a:minorFont>
+    </a:fontScheme>
+    <a:fmtScheme name="Office">
+      <a:fillStyleLst>
+        <a:solidFill>
+          <a:schemeClr val="phClr"/>
+        </a:solidFill>
+        <a:gradFill rotWithShape="1">
+          <a:gsLst>
+            <a:gs pos="0">
+              <a:schemeClr val="phClr">
+                <a:lumMod val="110000"/>
+                <a:satMod val="105000"/>
+                <a:tint val="67000"/>
+              </a:schemeClr>
+            </a:gs>
+            <a:gs pos="50000">
+              <a:schemeClr val="phClr">
+                <a:lumMod val="105000"/>
+                <a:satMod val="103000"/>
+                <a:tint val="73000"/>
+              </a:schemeClr>
+            </a:gs>
+            <a:gs pos="100000">
+              <a:schemeClr val="phClr">
+                <a:lumMod val="105000"/>
+                <a:satMod val="109000"/>
+                <a:tint val="81000"/>
+              </a:schemeClr>
+            </a:gs>
+          </a:gsLst>
+          <a:lin ang="5400000" scaled="0"/>
+        </a:gradFill>
+        <a:gradFill rotWithShape="1">
+          <a:gsLst>
+            <a:gs pos="0">
+              <a:schemeClr val="phClr">
+                <a:satMod val="103000"/>
+                <a:lumMod val="102000"/>
+                <a:tint val="94000"/>
+              </a:schemeClr>
+            </a:gs>
+            <a:gs pos="50000">
+              <a:schemeClr val="phClr">
+                <a:satMod val="110000"/>
+                <a:lumMod val="100000"/>
+                <a:shade val="100000"/>
+              </a:schemeClr>
+            </a:gs>
+            <a:gs pos="100000">
+              <a:schemeClr val="phClr">
+                <a:lumMod val="99000"/>
+                <a:satMod val="120000"/>
+                <a:shade val="78000"/>
+              </a:schemeClr>
+            </a:gs>
+          </a:gsLst>
+          <a:lin ang="5400000" scaled="0"/>
+        </a:gradFill>
+      </a:fillStyleLst>
+      <a:lnStyleLst>
+        <a:ln w="6350" cap="flat" cmpd="sng" algn="ctr">
+          <a:solidFill>
+            <a:schemeClr val="phClr"/>
+          </a:solidFill>
+          <a:prstDash val="solid"/>
+          <a:miter lim="800000"/>
+        </a:ln>
+        <a:ln w="12700" cap="flat" cmpd="sng" algn="ctr">
+          <a:solidFill>
+            <a:schemeClr val="phClr"/>
+          </a:solidFill>
+          <a:prstDash val="solid"/>
+          <a:miter lim="800000"/>
+        </a:ln>
+        <a:ln w="19050" cap="flat" cmpd="sng" algn="ctr">
+          <a:solidFill>
+            <a:schemeClr val="phClr"/>
+          </a:solidFill>
+          <a:prstDash val="solid"/>
+          <a:miter lim="800000"/>
+        </a:ln>
+      </a:lnStyleLst>
+      <a:effectStyleLst>
+        <a:effectStyle>
+          <a:effectLst/>
+        </a:effectStyle>
+        <a:effectStyle>
+          <a:effectLst/>
+        </a:effectStyle>
+        <a:effectStyle>
+          <a:effectLst>
+            <a:outerShdw blurRad="57150" dist="19050" dir="5400000" algn="ctr" rotWithShape="0">
+              <a:srgbClr val="000000">
+                <a:alpha val="63000"/>
+              </a:srgbClr>
+            </a:outerShdw>
+          </a:effectLst>
+        </a:effectStyle>
+      </a:effectStyleLst>
+      <a:bgFillStyleLst>
+        <a:solidFill>
+          <a:schemeClr val="phClr"/>
+        </a:solidFill>
+        <a:solidFill>
+          <a:schemeClr val="phClr">
+            <a:tint val="95000"/>
+            <a:satMod val="170000"/>
+          </a:schemeClr>
+        </a:solidFill>
+        <a:gradFill rotWithShape="1">
+          <a:gsLst>
+            <a:gs pos="0">
+              <a:schemeClr val="phClr">
+                <a:tint val="93000"/>
+                <a:satMod val="150000"/>
+                <a:shade val="98000"/>
+                <a:lumMod val="102000"/>
+              </a:schemeClr>
+            </a:gs>
+            <a:gs pos="50000">
+              <a:schemeClr val="phClr">
+                <a:tint val="98000"/>
+                <a:satMod val="130000"/>
+                <a:shade val="90000"/>
+                <a:lumMod val="103000"/>
+              </a:schemeClr>
+            </a:gs>
+            <a:gs pos="100000">
+              <a:schemeClr val="phClr">
+                <a:shade val="63000"/>
+                <a:satMod val="120000"/>
+              </a:schemeClr>
+            </a:gs>
+          </a:gsLst>
+          <a:lin ang="5400000" scaled="0"/>
+        </a:gradFill>
+      </a:bgFillStyleLst>
+    </a:fmtScheme>
+  </a:themeElements>
   <a:extLst>
     <a:ext uri="{05A4C25C-085E-4340-85A3-A5531E510DB2}">
       <thm15:themeFamily xmlns:thm15="http://schemas.microsoft.com/office/thememl/2012/main" name="Office Theme" id="{62F939B6-93AF-4DB8-9C6B-D6C7DFDC589F}" vid="{4A3C46E8-61CC-4603-A589-7422A47A8E4A}"/>
